--- a/Papers/output/presentation/开题答辩PPT-在线策略蒸馏-20260927.pptx
+++ b/Papers/output/presentation/开题答辩PPT-在线策略蒸馏-20260927.pptx
@@ -2,23 +2,23 @@
 <file path=ppt/presentation.xml><?xml version="1.0" encoding="utf-8"?>
 <p:presentation xmlns:p="http://schemas.openxmlformats.org/presentationml/2006/main">
   <p:sldMasterIdLst>
-    <p:sldMasterId xmlns:r="http://schemas.openxmlformats.org/officeDocument/2006/relationships" id="2147483648" r:id="R27fe7150dae74dd2"/>
+    <p:sldMasterId xmlns:r="http://schemas.openxmlformats.org/officeDocument/2006/relationships" id="2147483648" r:id="R8336a8f9d7b44dff"/>
   </p:sldMasterIdLst>
   <p:notesMasterIdLst>
-    <p:notesMasterId xmlns:r="http://schemas.openxmlformats.org/officeDocument/2006/relationships" r:id="R3cc74a53ab864b97"/>
+    <p:notesMasterId xmlns:r="http://schemas.openxmlformats.org/officeDocument/2006/relationships" r:id="R0211fd4c97344019"/>
   </p:notesMasterIdLst>
   <p:sldIdLst>
-    <p:sldId xmlns:r="http://schemas.openxmlformats.org/officeDocument/2006/relationships" id="256" r:id="Ra5fc608d09814e7e"/>
-    <p:sldId xmlns:r="http://schemas.openxmlformats.org/officeDocument/2006/relationships" id="257" r:id="Rcc1247aae7564516"/>
-    <p:sldId xmlns:r="http://schemas.openxmlformats.org/officeDocument/2006/relationships" id="258" r:id="R7e0481dff0514688"/>
-    <p:sldId xmlns:r="http://schemas.openxmlformats.org/officeDocument/2006/relationships" id="259" r:id="Rc4aceb8c5922434b"/>
-    <p:sldId xmlns:r="http://schemas.openxmlformats.org/officeDocument/2006/relationships" id="260" r:id="Rf527df7fdf514bfe"/>
-    <p:sldId xmlns:r="http://schemas.openxmlformats.org/officeDocument/2006/relationships" id="261" r:id="R63585063acca43f7"/>
-    <p:sldId xmlns:r="http://schemas.openxmlformats.org/officeDocument/2006/relationships" id="262" r:id="Rfabc743850fa493e"/>
-    <p:sldId xmlns:r="http://schemas.openxmlformats.org/officeDocument/2006/relationships" id="263" r:id="R60a6942b54f84132"/>
-    <p:sldId xmlns:r="http://schemas.openxmlformats.org/officeDocument/2006/relationships" id="264" r:id="R6e3b0647c49a4f3d"/>
-    <p:sldId xmlns:r="http://schemas.openxmlformats.org/officeDocument/2006/relationships" id="265" r:id="R0973d15c11c747cd"/>
-    <p:sldId xmlns:r="http://schemas.openxmlformats.org/officeDocument/2006/relationships" id="266" r:id="R3cafc48510fe416d"/>
+    <p:sldId xmlns:r="http://schemas.openxmlformats.org/officeDocument/2006/relationships" id="256" r:id="R32e20fea64de4a7e"/>
+    <p:sldId xmlns:r="http://schemas.openxmlformats.org/officeDocument/2006/relationships" id="257" r:id="R9726240327c1478f"/>
+    <p:sldId xmlns:r="http://schemas.openxmlformats.org/officeDocument/2006/relationships" id="258" r:id="Rd075925e58b24a3b"/>
+    <p:sldId xmlns:r="http://schemas.openxmlformats.org/officeDocument/2006/relationships" id="259" r:id="Rc852e9a630a44264"/>
+    <p:sldId xmlns:r="http://schemas.openxmlformats.org/officeDocument/2006/relationships" id="260" r:id="Ra687567af3934a31"/>
+    <p:sldId xmlns:r="http://schemas.openxmlformats.org/officeDocument/2006/relationships" id="261" r:id="R91c763a8b1144625"/>
+    <p:sldId xmlns:r="http://schemas.openxmlformats.org/officeDocument/2006/relationships" id="262" r:id="Re32e4616100f43b3"/>
+    <p:sldId xmlns:r="http://schemas.openxmlformats.org/officeDocument/2006/relationships" id="263" r:id="Rf5af1ee8bd1f44fd"/>
+    <p:sldId xmlns:r="http://schemas.openxmlformats.org/officeDocument/2006/relationships" id="264" r:id="Rf5a7c4cdcb3b4030"/>
+    <p:sldId xmlns:r="http://schemas.openxmlformats.org/officeDocument/2006/relationships" id="265" r:id="Re5fb90e6d7234b69"/>
+    <p:sldId xmlns:r="http://schemas.openxmlformats.org/officeDocument/2006/relationships" id="266" r:id="Rd7029300e35144dd"/>
   </p:sldIdLst>
   <p:sldSz cx="12192000" cy="6858000"/>
   <p:notesSz cx="6858000" cy="9144000"/>
@@ -1365,193 +1365,6 @@
       <p:grpSpPr>
         <a:xfrm xmlns:a="http://schemas.openxmlformats.org/drawingml/2006/main"/>
       </p:grpSpPr>
-      <p:sp>
-        <p:nvSpPr>
-          <p:cNvPr id="2" name="标题 1">
-            <a:extLst xmlns:a="http://schemas.openxmlformats.org/drawingml/2006/main">
-              <a:ext uri="{FF2B5EF4-FFF2-40B4-BE49-F238E27FC236}">
-                <a16:creationId xmlns:a16="http://schemas.microsoft.com/office/drawing/2014/main" id="{CD7AB68D-B848-4BB9-9846-84B304B733C8}"/>
-              </a:ext>
-            </a:extLst>
-          </p:cNvPr>
-          <p:cNvSpPr>
-            <a:spLocks xmlns:a="http://schemas.openxmlformats.org/drawingml/2006/main" noGrp="1"/>
-          </p:cNvSpPr>
-          <p:nvPr>
-            <p:ph type="ctrTitle" idx="0"/>
-          </p:nvPr>
-        </p:nvSpPr>
-        <p:spPr>
-          <a:xfrm xmlns:a="http://schemas.openxmlformats.org/drawingml/2006/main">
-            <a:off x="1524000" y="1122363"/>
-            <a:ext cx="9144000" cy="2387600"/>
-          </a:xfrm>
-        </p:spPr>
-        <p:txBody>
-          <a:bodyPr xmlns:a="http://schemas.openxmlformats.org/drawingml/2006/main" anchor="b"/>
-          <a:lstStyle xmlns:a="http://schemas.openxmlformats.org/drawingml/2006/main">
-            <a:lvl1pPr algn="ctr">
-              <a:buNone/>
-              <a:defRPr sz="6000"/>
-            </a:lvl1pPr>
-          </a:lstStyle>
-          <a:p xmlns:a="http://schemas.openxmlformats.org/drawingml/2006/main">
-            <a:r>
-              <a:t>单击此处编辑母版标题样式</a:t>
-            </a:r>
-          </a:p>
-        </p:txBody>
-      </p:sp>
-      <p:sp>
-        <p:nvSpPr>
-          <p:cNvPr id="3" name="副标题 2">
-            <a:extLst xmlns:a="http://schemas.openxmlformats.org/drawingml/2006/main">
-              <a:ext uri="{FF2B5EF4-FFF2-40B4-BE49-F238E27FC236}">
-                <a16:creationId xmlns:a16="http://schemas.microsoft.com/office/drawing/2014/main" id="{A73EF9B3-5E40-4705-9896-E4765F2ACD28}"/>
-              </a:ext>
-            </a:extLst>
-          </p:cNvPr>
-          <p:cNvSpPr>
-            <a:spLocks xmlns:a="http://schemas.openxmlformats.org/drawingml/2006/main" noGrp="1"/>
-          </p:cNvSpPr>
-          <p:nvPr>
-            <p:ph type="subTitle" idx="1" hasCustomPrompt="1"/>
-          </p:nvPr>
-        </p:nvSpPr>
-        <p:spPr>
-          <a:xfrm xmlns:a="http://schemas.openxmlformats.org/drawingml/2006/main">
-            <a:off x="1524000" y="3602038"/>
-            <a:ext cx="9144000" cy="1655762"/>
-          </a:xfrm>
-        </p:spPr>
-        <p:txBody>
-          <a:bodyPr xmlns:a="http://schemas.openxmlformats.org/drawingml/2006/main"/>
-          <a:lstStyle xmlns:a="http://schemas.openxmlformats.org/drawingml/2006/main">
-            <a:lvl1pPr marL="0" indent="0" algn="ctr">
-              <a:buNone/>
-              <a:defRPr sz="2400"/>
-            </a:lvl1pPr>
-            <a:lvl2pPr marL="457200" indent="0" algn="ctr">
-              <a:buNone/>
-              <a:defRPr sz="2000"/>
-            </a:lvl2pPr>
-            <a:lvl3pPr marL="914400" indent="0" algn="ctr">
-              <a:buNone/>
-              <a:defRPr sz="1800"/>
-            </a:lvl3pPr>
-            <a:lvl4pPr marL="1371600" indent="0" algn="ctr">
-              <a:buNone/>
-              <a:defRPr sz="1600"/>
-            </a:lvl4pPr>
-            <a:lvl5pPr marL="1828800" indent="0" algn="ctr">
-              <a:buNone/>
-              <a:defRPr sz="1600"/>
-            </a:lvl5pPr>
-            <a:lvl6pPr marL="2286000" indent="0" algn="ctr">
-              <a:buNone/>
-              <a:defRPr sz="1600"/>
-            </a:lvl6pPr>
-            <a:lvl7pPr marL="2743200" indent="0" algn="ctr">
-              <a:buNone/>
-              <a:defRPr sz="1600"/>
-            </a:lvl7pPr>
-            <a:lvl8pPr marL="3200400" indent="0" algn="ctr">
-              <a:buNone/>
-              <a:defRPr sz="1600"/>
-            </a:lvl8pPr>
-            <a:lvl9pPr marL="3657600" indent="0" algn="ctr">
-              <a:buNone/>
-              <a:defRPr sz="1600"/>
-            </a:lvl9pPr>
-          </a:lstStyle>
-          <a:p xmlns:a="http://schemas.openxmlformats.org/drawingml/2006/main">
-            <a:r>
-              <a:t>单击以编辑母版副标题样式</a:t>
-            </a:r>
-          </a:p>
-        </p:txBody>
-      </p:sp>
-      <p:sp>
-        <p:nvSpPr>
-          <p:cNvPr id="4" name="日期占位符 3">
-            <a:extLst xmlns:a="http://schemas.openxmlformats.org/drawingml/2006/main">
-              <a:ext uri="{FF2B5EF4-FFF2-40B4-BE49-F238E27FC236}">
-                <a16:creationId xmlns:a16="http://schemas.microsoft.com/office/drawing/2014/main" id="{168D629B-F1A4-4D55-9E94-135C84C16852}"/>
-              </a:ext>
-            </a:extLst>
-          </p:cNvPr>
-          <p:cNvSpPr>
-            <a:spLocks xmlns:a="http://schemas.openxmlformats.org/drawingml/2006/main" noGrp="1"/>
-          </p:cNvSpPr>
-          <p:nvPr>
-            <p:ph type="dt" idx="10"/>
-          </p:nvPr>
-        </p:nvSpPr>
-        <p:spPr/>
-        <p:txBody>
-          <a:bodyPr xmlns:a="http://schemas.openxmlformats.org/drawingml/2006/main"/>
-          <a:lstStyle xmlns:a="http://schemas.openxmlformats.org/drawingml/2006/main"/>
-          <a:p xmlns:a="http://schemas.openxmlformats.org/drawingml/2006/main">
-            <a:fld id="{0818D650-3A15-443A-B878-38CFEB8982A3}" type="datetimeFigureOut">
-              <a:t>2025/4/18</a:t>
-            </a:fld>
-            <a:endParaRPr/>
-          </a:p>
-        </p:txBody>
-      </p:sp>
-      <p:sp>
-        <p:nvSpPr>
-          <p:cNvPr id="5" name="页脚占位符 4">
-            <a:extLst xmlns:a="http://schemas.openxmlformats.org/drawingml/2006/main">
-              <a:ext uri="{FF2B5EF4-FFF2-40B4-BE49-F238E27FC236}">
-                <a16:creationId xmlns:a16="http://schemas.microsoft.com/office/drawing/2014/main" id="{7AF16AE7-63E8-4E00-A273-7F99725685F4}"/>
-              </a:ext>
-            </a:extLst>
-          </p:cNvPr>
-          <p:cNvSpPr>
-            <a:spLocks xmlns:a="http://schemas.openxmlformats.org/drawingml/2006/main" noGrp="1"/>
-          </p:cNvSpPr>
-          <p:nvPr>
-            <p:ph type="ftr" idx="11"/>
-          </p:nvPr>
-        </p:nvSpPr>
-        <p:spPr/>
-        <p:txBody>
-          <a:bodyPr xmlns:a="http://schemas.openxmlformats.org/drawingml/2006/main"/>
-          <a:lstStyle xmlns:a="http://schemas.openxmlformats.org/drawingml/2006/main"/>
-          <a:p xmlns:a="http://schemas.openxmlformats.org/drawingml/2006/main">
-            <a:endParaRPr/>
-          </a:p>
-        </p:txBody>
-      </p:sp>
-      <p:sp>
-        <p:nvSpPr>
-          <p:cNvPr id="6" name="灯片编号占位符 5">
-            <a:extLst xmlns:a="http://schemas.openxmlformats.org/drawingml/2006/main">
-              <a:ext uri="{FF2B5EF4-FFF2-40B4-BE49-F238E27FC236}">
-                <a16:creationId xmlns:a16="http://schemas.microsoft.com/office/drawing/2014/main" id="{91678359-1CD1-4BC1-BEB2-E69AE5877E7A}"/>
-              </a:ext>
-            </a:extLst>
-          </p:cNvPr>
-          <p:cNvSpPr>
-            <a:spLocks xmlns:a="http://schemas.openxmlformats.org/drawingml/2006/main" noGrp="1"/>
-          </p:cNvSpPr>
-          <p:nvPr>
-            <p:ph type="sldNum" idx="12"/>
-          </p:nvPr>
-        </p:nvSpPr>
-        <p:spPr/>
-        <p:txBody>
-          <a:bodyPr xmlns:a="http://schemas.openxmlformats.org/drawingml/2006/main"/>
-          <a:lstStyle xmlns:a="http://schemas.openxmlformats.org/drawingml/2006/main"/>
-          <a:p xmlns:a="http://schemas.openxmlformats.org/drawingml/2006/main">
-            <a:fld id="{CCEF223B-53FA-448A-B05D-AD632DCD3405}" type="slidenum">
-              <a:t>‹#›</a:t>
-            </a:fld>
-            <a:endParaRPr/>
-          </a:p>
-        </p:txBody>
-      </p:sp>
     </p:spTree>
   </p:cSld>
 </p:sldLayout>
@@ -1569,176 +1382,6 @@
       <p:grpSpPr>
         <a:xfrm xmlns:a="http://schemas.openxmlformats.org/drawingml/2006/main"/>
       </p:grpSpPr>
-      <p:sp>
-        <p:nvSpPr>
-          <p:cNvPr id="2" name="标题 1">
-            <a:extLst xmlns:a="http://schemas.openxmlformats.org/drawingml/2006/main">
-              <a:ext uri="{FF2B5EF4-FFF2-40B4-BE49-F238E27FC236}">
-                <a16:creationId xmlns:a16="http://schemas.microsoft.com/office/drawing/2014/main" id="{EA47D27B-824A-4C56-91A7-CA04942DAEC1}"/>
-              </a:ext>
-            </a:extLst>
-          </p:cNvPr>
-          <p:cNvSpPr>
-            <a:spLocks xmlns:a="http://schemas.openxmlformats.org/drawingml/2006/main" noGrp="1"/>
-          </p:cNvSpPr>
-          <p:nvPr>
-            <p:ph type="title" idx="0"/>
-          </p:nvPr>
-        </p:nvSpPr>
-        <p:spPr/>
-        <p:txBody>
-          <a:bodyPr xmlns:a="http://schemas.openxmlformats.org/drawingml/2006/main"/>
-          <a:lstStyle xmlns:a="http://schemas.openxmlformats.org/drawingml/2006/main"/>
-          <a:p xmlns:a="http://schemas.openxmlformats.org/drawingml/2006/main">
-            <a:r>
-              <a:t>单击此处编辑母版标题样式</a:t>
-            </a:r>
-          </a:p>
-        </p:txBody>
-      </p:sp>
-      <p:sp>
-        <p:nvSpPr>
-          <p:cNvPr id="3" name="竖排文字占位符 2">
-            <a:extLst xmlns:a="http://schemas.openxmlformats.org/drawingml/2006/main">
-              <a:ext uri="{FF2B5EF4-FFF2-40B4-BE49-F238E27FC236}">
-                <a16:creationId xmlns:a16="http://schemas.microsoft.com/office/drawing/2014/main" id="{AF7036C1-3E81-4C45-8EAE-185BEFC8566F}"/>
-              </a:ext>
-            </a:extLst>
-          </p:cNvPr>
-          <p:cNvSpPr>
-            <a:spLocks xmlns:a="http://schemas.openxmlformats.org/drawingml/2006/main" noGrp="1"/>
-          </p:cNvSpPr>
-          <p:nvPr>
-            <p:ph type="body" idx="1" hasCustomPrompt="1"/>
-          </p:nvPr>
-        </p:nvSpPr>
-        <p:spPr/>
-        <p:txBody>
-          <a:bodyPr xmlns:a="http://schemas.openxmlformats.org/drawingml/2006/main" vert="eaVert"/>
-          <a:lstStyle xmlns:a="http://schemas.openxmlformats.org/drawingml/2006/main"/>
-          <a:p xmlns:a="http://schemas.openxmlformats.org/drawingml/2006/main">
-            <a:pPr lvl="0">
-              <a:buNone/>
-            </a:pPr>
-            <a:r>
-              <a:t>编辑母版文本样式</a:t>
-            </a:r>
-          </a:p>
-          <a:p xmlns:a="http://schemas.openxmlformats.org/drawingml/2006/main">
-            <a:pPr lvl="1">
-              <a:buNone/>
-            </a:pPr>
-            <a:r>
-              <a:t>第二级</a:t>
-            </a:r>
-          </a:p>
-          <a:p xmlns:a="http://schemas.openxmlformats.org/drawingml/2006/main">
-            <a:pPr lvl="2">
-              <a:buNone/>
-            </a:pPr>
-            <a:r>
-              <a:t>第三级</a:t>
-            </a:r>
-          </a:p>
-          <a:p xmlns:a="http://schemas.openxmlformats.org/drawingml/2006/main">
-            <a:pPr lvl="3">
-              <a:buNone/>
-            </a:pPr>
-            <a:r>
-              <a:t>第四级</a:t>
-            </a:r>
-          </a:p>
-          <a:p xmlns:a="http://schemas.openxmlformats.org/drawingml/2006/main">
-            <a:pPr lvl="4">
-              <a:buNone/>
-            </a:pPr>
-            <a:r>
-              <a:t>第五级</a:t>
-            </a:r>
-          </a:p>
-        </p:txBody>
-      </p:sp>
-      <p:sp>
-        <p:nvSpPr>
-          <p:cNvPr id="4" name="日期占位符 3">
-            <a:extLst xmlns:a="http://schemas.openxmlformats.org/drawingml/2006/main">
-              <a:ext uri="{FF2B5EF4-FFF2-40B4-BE49-F238E27FC236}">
-                <a16:creationId xmlns:a16="http://schemas.microsoft.com/office/drawing/2014/main" id="{3E6263C7-AD21-499C-B8EC-581F3AC4C662}"/>
-              </a:ext>
-            </a:extLst>
-          </p:cNvPr>
-          <p:cNvSpPr>
-            <a:spLocks xmlns:a="http://schemas.openxmlformats.org/drawingml/2006/main" noGrp="1"/>
-          </p:cNvSpPr>
-          <p:nvPr>
-            <p:ph type="dt" idx="10"/>
-          </p:nvPr>
-        </p:nvSpPr>
-        <p:spPr/>
-        <p:txBody>
-          <a:bodyPr xmlns:a="http://schemas.openxmlformats.org/drawingml/2006/main"/>
-          <a:lstStyle xmlns:a="http://schemas.openxmlformats.org/drawingml/2006/main"/>
-          <a:p xmlns:a="http://schemas.openxmlformats.org/drawingml/2006/main">
-            <a:fld id="{0818D650-3A15-443A-B878-38CFEB8982A3}" type="datetimeFigureOut">
-              <a:t>2025/4/18</a:t>
-            </a:fld>
-            <a:endParaRPr/>
-          </a:p>
-        </p:txBody>
-      </p:sp>
-      <p:sp>
-        <p:nvSpPr>
-          <p:cNvPr id="5" name="页脚占位符 4">
-            <a:extLst xmlns:a="http://schemas.openxmlformats.org/drawingml/2006/main">
-              <a:ext uri="{FF2B5EF4-FFF2-40B4-BE49-F238E27FC236}">
-                <a16:creationId xmlns:a16="http://schemas.microsoft.com/office/drawing/2014/main" id="{7E4DEAD9-FFBA-4055-9E4E-E31F713EEFD6}"/>
-              </a:ext>
-            </a:extLst>
-          </p:cNvPr>
-          <p:cNvSpPr>
-            <a:spLocks xmlns:a="http://schemas.openxmlformats.org/drawingml/2006/main" noGrp="1"/>
-          </p:cNvSpPr>
-          <p:nvPr>
-            <p:ph type="ftr" idx="11"/>
-          </p:nvPr>
-        </p:nvSpPr>
-        <p:spPr/>
-        <p:txBody>
-          <a:bodyPr xmlns:a="http://schemas.openxmlformats.org/drawingml/2006/main"/>
-          <a:lstStyle xmlns:a="http://schemas.openxmlformats.org/drawingml/2006/main"/>
-          <a:p xmlns:a="http://schemas.openxmlformats.org/drawingml/2006/main">
-            <a:endParaRPr/>
-          </a:p>
-        </p:txBody>
-      </p:sp>
-      <p:sp>
-        <p:nvSpPr>
-          <p:cNvPr id="6" name="灯片编号占位符 5">
-            <a:extLst xmlns:a="http://schemas.openxmlformats.org/drawingml/2006/main">
-              <a:ext uri="{FF2B5EF4-FFF2-40B4-BE49-F238E27FC236}">
-                <a16:creationId xmlns:a16="http://schemas.microsoft.com/office/drawing/2014/main" id="{45D72BF8-C93E-4805-A22B-C96F17C6F1C5}"/>
-              </a:ext>
-            </a:extLst>
-          </p:cNvPr>
-          <p:cNvSpPr>
-            <a:spLocks xmlns:a="http://schemas.openxmlformats.org/drawingml/2006/main" noGrp="1"/>
-          </p:cNvSpPr>
-          <p:nvPr>
-            <p:ph type="sldNum" idx="12"/>
-          </p:nvPr>
-        </p:nvSpPr>
-        <p:spPr/>
-        <p:txBody>
-          <a:bodyPr xmlns:a="http://schemas.openxmlformats.org/drawingml/2006/main"/>
-          <a:lstStyle xmlns:a="http://schemas.openxmlformats.org/drawingml/2006/main"/>
-          <a:p xmlns:a="http://schemas.openxmlformats.org/drawingml/2006/main">
-            <a:fld id="{CCEF223B-53FA-448A-B05D-AD632DCD3405}" type="slidenum">
-              <a:t>‹#›</a:t>
-            </a:fld>
-            <a:endParaRPr/>
-          </a:p>
-        </p:txBody>
-      </p:sp>
     </p:spTree>
   </p:cSld>
 </p:sldLayout>
@@ -1756,186 +1399,6 @@
       <p:grpSpPr>
         <a:xfrm xmlns:a="http://schemas.openxmlformats.org/drawingml/2006/main"/>
       </p:grpSpPr>
-      <p:sp>
-        <p:nvSpPr>
-          <p:cNvPr id="2" name="竖排标题 1">
-            <a:extLst xmlns:a="http://schemas.openxmlformats.org/drawingml/2006/main">
-              <a:ext uri="{FF2B5EF4-FFF2-40B4-BE49-F238E27FC236}">
-                <a16:creationId xmlns:a16="http://schemas.microsoft.com/office/drawing/2014/main" id="{C3CA6A47-727C-4275-B0EE-8339BA7500DE}"/>
-              </a:ext>
-            </a:extLst>
-          </p:cNvPr>
-          <p:cNvSpPr>
-            <a:spLocks xmlns:a="http://schemas.openxmlformats.org/drawingml/2006/main" noGrp="1"/>
-          </p:cNvSpPr>
-          <p:nvPr>
-            <p:ph type="title" idx="0"/>
-          </p:nvPr>
-        </p:nvSpPr>
-        <p:spPr>
-          <a:xfrm xmlns:a="http://schemas.openxmlformats.org/drawingml/2006/main">
-            <a:off x="8724900" y="365125"/>
-            <a:ext cx="2628900" cy="5811838"/>
-          </a:xfrm>
-        </p:spPr>
-        <p:txBody>
-          <a:bodyPr xmlns:a="http://schemas.openxmlformats.org/drawingml/2006/main" vert="eaVert"/>
-          <a:lstStyle xmlns:a="http://schemas.openxmlformats.org/drawingml/2006/main"/>
-          <a:p xmlns:a="http://schemas.openxmlformats.org/drawingml/2006/main">
-            <a:r>
-              <a:t>单击此处编辑母版标题样式</a:t>
-            </a:r>
-          </a:p>
-        </p:txBody>
-      </p:sp>
-      <p:sp>
-        <p:nvSpPr>
-          <p:cNvPr id="3" name="竖排文字占位符 2">
-            <a:extLst xmlns:a="http://schemas.openxmlformats.org/drawingml/2006/main">
-              <a:ext uri="{FF2B5EF4-FFF2-40B4-BE49-F238E27FC236}">
-                <a16:creationId xmlns:a16="http://schemas.microsoft.com/office/drawing/2014/main" id="{A6FCE618-A2AC-4E31-8564-30A1568FA9E0}"/>
-              </a:ext>
-            </a:extLst>
-          </p:cNvPr>
-          <p:cNvSpPr>
-            <a:spLocks xmlns:a="http://schemas.openxmlformats.org/drawingml/2006/main" noGrp="1"/>
-          </p:cNvSpPr>
-          <p:nvPr>
-            <p:ph type="body" idx="1" hasCustomPrompt="1"/>
-          </p:nvPr>
-        </p:nvSpPr>
-        <p:spPr>
-          <a:xfrm xmlns:a="http://schemas.openxmlformats.org/drawingml/2006/main">
-            <a:off x="838200" y="365125"/>
-            <a:ext cx="7734300" cy="5811838"/>
-          </a:xfrm>
-        </p:spPr>
-        <p:txBody>
-          <a:bodyPr xmlns:a="http://schemas.openxmlformats.org/drawingml/2006/main" vert="eaVert"/>
-          <a:lstStyle xmlns:a="http://schemas.openxmlformats.org/drawingml/2006/main"/>
-          <a:p xmlns:a="http://schemas.openxmlformats.org/drawingml/2006/main">
-            <a:pPr lvl="0">
-              <a:buNone/>
-            </a:pPr>
-            <a:r>
-              <a:t>编辑母版文本样式</a:t>
-            </a:r>
-          </a:p>
-          <a:p xmlns:a="http://schemas.openxmlformats.org/drawingml/2006/main">
-            <a:pPr lvl="1">
-              <a:buNone/>
-            </a:pPr>
-            <a:r>
-              <a:t>第二级</a:t>
-            </a:r>
-          </a:p>
-          <a:p xmlns:a="http://schemas.openxmlformats.org/drawingml/2006/main">
-            <a:pPr lvl="2">
-              <a:buNone/>
-            </a:pPr>
-            <a:r>
-              <a:t>第三级</a:t>
-            </a:r>
-          </a:p>
-          <a:p xmlns:a="http://schemas.openxmlformats.org/drawingml/2006/main">
-            <a:pPr lvl="3">
-              <a:buNone/>
-            </a:pPr>
-            <a:r>
-              <a:t>第四级</a:t>
-            </a:r>
-          </a:p>
-          <a:p xmlns:a="http://schemas.openxmlformats.org/drawingml/2006/main">
-            <a:pPr lvl="4">
-              <a:buNone/>
-            </a:pPr>
-            <a:r>
-              <a:t>第五级</a:t>
-            </a:r>
-          </a:p>
-        </p:txBody>
-      </p:sp>
-      <p:sp>
-        <p:nvSpPr>
-          <p:cNvPr id="4" name="日期占位符 3">
-            <a:extLst xmlns:a="http://schemas.openxmlformats.org/drawingml/2006/main">
-              <a:ext uri="{FF2B5EF4-FFF2-40B4-BE49-F238E27FC236}">
-                <a16:creationId xmlns:a16="http://schemas.microsoft.com/office/drawing/2014/main" id="{C1769B4A-BBCE-46F3-8093-ACFB016CA8B1}"/>
-              </a:ext>
-            </a:extLst>
-          </p:cNvPr>
-          <p:cNvSpPr>
-            <a:spLocks xmlns:a="http://schemas.openxmlformats.org/drawingml/2006/main" noGrp="1"/>
-          </p:cNvSpPr>
-          <p:nvPr>
-            <p:ph type="dt" idx="10"/>
-          </p:nvPr>
-        </p:nvSpPr>
-        <p:spPr/>
-        <p:txBody>
-          <a:bodyPr xmlns:a="http://schemas.openxmlformats.org/drawingml/2006/main"/>
-          <a:lstStyle xmlns:a="http://schemas.openxmlformats.org/drawingml/2006/main"/>
-          <a:p xmlns:a="http://schemas.openxmlformats.org/drawingml/2006/main">
-            <a:fld id="{0818D650-3A15-443A-B878-38CFEB8982A3}" type="datetimeFigureOut">
-              <a:t>2025/4/18</a:t>
-            </a:fld>
-            <a:endParaRPr/>
-          </a:p>
-        </p:txBody>
-      </p:sp>
-      <p:sp>
-        <p:nvSpPr>
-          <p:cNvPr id="5" name="页脚占位符 4">
-            <a:extLst xmlns:a="http://schemas.openxmlformats.org/drawingml/2006/main">
-              <a:ext uri="{FF2B5EF4-FFF2-40B4-BE49-F238E27FC236}">
-                <a16:creationId xmlns:a16="http://schemas.microsoft.com/office/drawing/2014/main" id="{0C768126-57DE-4160-8071-C271E677BA71}"/>
-              </a:ext>
-            </a:extLst>
-          </p:cNvPr>
-          <p:cNvSpPr>
-            <a:spLocks xmlns:a="http://schemas.openxmlformats.org/drawingml/2006/main" noGrp="1"/>
-          </p:cNvSpPr>
-          <p:nvPr>
-            <p:ph type="ftr" idx="11"/>
-          </p:nvPr>
-        </p:nvSpPr>
-        <p:spPr/>
-        <p:txBody>
-          <a:bodyPr xmlns:a="http://schemas.openxmlformats.org/drawingml/2006/main"/>
-          <a:lstStyle xmlns:a="http://schemas.openxmlformats.org/drawingml/2006/main"/>
-          <a:p xmlns:a="http://schemas.openxmlformats.org/drawingml/2006/main">
-            <a:endParaRPr/>
-          </a:p>
-        </p:txBody>
-      </p:sp>
-      <p:sp>
-        <p:nvSpPr>
-          <p:cNvPr id="6" name="灯片编号占位符 5">
-            <a:extLst xmlns:a="http://schemas.openxmlformats.org/drawingml/2006/main">
-              <a:ext uri="{FF2B5EF4-FFF2-40B4-BE49-F238E27FC236}">
-                <a16:creationId xmlns:a16="http://schemas.microsoft.com/office/drawing/2014/main" id="{051BACB0-76BA-4049-BA55-185E4413E9C8}"/>
-              </a:ext>
-            </a:extLst>
-          </p:cNvPr>
-          <p:cNvSpPr>
-            <a:spLocks xmlns:a="http://schemas.openxmlformats.org/drawingml/2006/main" noGrp="1"/>
-          </p:cNvSpPr>
-          <p:nvPr>
-            <p:ph type="sldNum" idx="12"/>
-          </p:nvPr>
-        </p:nvSpPr>
-        <p:spPr/>
-        <p:txBody>
-          <a:bodyPr xmlns:a="http://schemas.openxmlformats.org/drawingml/2006/main"/>
-          <a:lstStyle xmlns:a="http://schemas.openxmlformats.org/drawingml/2006/main"/>
-          <a:p xmlns:a="http://schemas.openxmlformats.org/drawingml/2006/main">
-            <a:fld id="{CCEF223B-53FA-448A-B05D-AD632DCD3405}" type="slidenum">
-              <a:t>‹#›</a:t>
-            </a:fld>
-            <a:endParaRPr/>
-          </a:p>
-        </p:txBody>
-      </p:sp>
     </p:spTree>
   </p:cSld>
 </p:sldLayout>
@@ -1953,176 +1416,6 @@
       <p:grpSpPr>
         <a:xfrm xmlns:a="http://schemas.openxmlformats.org/drawingml/2006/main"/>
       </p:grpSpPr>
-      <p:sp>
-        <p:nvSpPr>
-          <p:cNvPr id="2" name="标题 1">
-            <a:extLst xmlns:a="http://schemas.openxmlformats.org/drawingml/2006/main">
-              <a:ext uri="{FF2B5EF4-FFF2-40B4-BE49-F238E27FC236}">
-                <a16:creationId xmlns:a16="http://schemas.microsoft.com/office/drawing/2014/main" id="{3D34B3D7-32EA-4852-831B-6F00A51DD941}"/>
-              </a:ext>
-            </a:extLst>
-          </p:cNvPr>
-          <p:cNvSpPr>
-            <a:spLocks xmlns:a="http://schemas.openxmlformats.org/drawingml/2006/main" noGrp="1"/>
-          </p:cNvSpPr>
-          <p:nvPr>
-            <p:ph type="title" idx="0"/>
-          </p:nvPr>
-        </p:nvSpPr>
-        <p:spPr/>
-        <p:txBody>
-          <a:bodyPr xmlns:a="http://schemas.openxmlformats.org/drawingml/2006/main"/>
-          <a:lstStyle xmlns:a="http://schemas.openxmlformats.org/drawingml/2006/main"/>
-          <a:p xmlns:a="http://schemas.openxmlformats.org/drawingml/2006/main">
-            <a:r>
-              <a:t>单击此处编辑母版标题样式</a:t>
-            </a:r>
-          </a:p>
-        </p:txBody>
-      </p:sp>
-      <p:sp>
-        <p:nvSpPr>
-          <p:cNvPr id="3" name="内容占位符 2">
-            <a:extLst xmlns:a="http://schemas.openxmlformats.org/drawingml/2006/main">
-              <a:ext uri="{FF2B5EF4-FFF2-40B4-BE49-F238E27FC236}">
-                <a16:creationId xmlns:a16="http://schemas.microsoft.com/office/drawing/2014/main" id="{5D0FBE05-9A65-4CA5-A0F4-981633590A72}"/>
-              </a:ext>
-            </a:extLst>
-          </p:cNvPr>
-          <p:cNvSpPr>
-            <a:spLocks xmlns:a="http://schemas.openxmlformats.org/drawingml/2006/main" noGrp="1"/>
-          </p:cNvSpPr>
-          <p:nvPr>
-            <p:ph idx="1" hasCustomPrompt="1"/>
-          </p:nvPr>
-        </p:nvSpPr>
-        <p:spPr/>
-        <p:txBody>
-          <a:bodyPr xmlns:a="http://schemas.openxmlformats.org/drawingml/2006/main"/>
-          <a:lstStyle xmlns:a="http://schemas.openxmlformats.org/drawingml/2006/main"/>
-          <a:p xmlns:a="http://schemas.openxmlformats.org/drawingml/2006/main">
-            <a:pPr lvl="0">
-              <a:buNone/>
-            </a:pPr>
-            <a:r>
-              <a:t>编辑母版文本样式</a:t>
-            </a:r>
-          </a:p>
-          <a:p xmlns:a="http://schemas.openxmlformats.org/drawingml/2006/main">
-            <a:pPr lvl="1">
-              <a:buNone/>
-            </a:pPr>
-            <a:r>
-              <a:t>第二级</a:t>
-            </a:r>
-          </a:p>
-          <a:p xmlns:a="http://schemas.openxmlformats.org/drawingml/2006/main">
-            <a:pPr lvl="2">
-              <a:buNone/>
-            </a:pPr>
-            <a:r>
-              <a:t>第三级</a:t>
-            </a:r>
-          </a:p>
-          <a:p xmlns:a="http://schemas.openxmlformats.org/drawingml/2006/main">
-            <a:pPr lvl="3">
-              <a:buNone/>
-            </a:pPr>
-            <a:r>
-              <a:t>第四级</a:t>
-            </a:r>
-          </a:p>
-          <a:p xmlns:a="http://schemas.openxmlformats.org/drawingml/2006/main">
-            <a:pPr lvl="4">
-              <a:buNone/>
-            </a:pPr>
-            <a:r>
-              <a:t>第五级</a:t>
-            </a:r>
-          </a:p>
-        </p:txBody>
-      </p:sp>
-      <p:sp>
-        <p:nvSpPr>
-          <p:cNvPr id="4" name="日期占位符 3">
-            <a:extLst xmlns:a="http://schemas.openxmlformats.org/drawingml/2006/main">
-              <a:ext uri="{FF2B5EF4-FFF2-40B4-BE49-F238E27FC236}">
-                <a16:creationId xmlns:a16="http://schemas.microsoft.com/office/drawing/2014/main" id="{0F2F2C1D-5B51-493F-ABF6-247E269131AF}"/>
-              </a:ext>
-            </a:extLst>
-          </p:cNvPr>
-          <p:cNvSpPr>
-            <a:spLocks xmlns:a="http://schemas.openxmlformats.org/drawingml/2006/main" noGrp="1"/>
-          </p:cNvSpPr>
-          <p:nvPr>
-            <p:ph type="dt" idx="10"/>
-          </p:nvPr>
-        </p:nvSpPr>
-        <p:spPr/>
-        <p:txBody>
-          <a:bodyPr xmlns:a="http://schemas.openxmlformats.org/drawingml/2006/main"/>
-          <a:lstStyle xmlns:a="http://schemas.openxmlformats.org/drawingml/2006/main"/>
-          <a:p xmlns:a="http://schemas.openxmlformats.org/drawingml/2006/main">
-            <a:fld id="{0818D650-3A15-443A-B878-38CFEB8982A3}" type="datetimeFigureOut">
-              <a:t>2025/4/18</a:t>
-            </a:fld>
-            <a:endParaRPr/>
-          </a:p>
-        </p:txBody>
-      </p:sp>
-      <p:sp>
-        <p:nvSpPr>
-          <p:cNvPr id="5" name="页脚占位符 4">
-            <a:extLst xmlns:a="http://schemas.openxmlformats.org/drawingml/2006/main">
-              <a:ext uri="{FF2B5EF4-FFF2-40B4-BE49-F238E27FC236}">
-                <a16:creationId xmlns:a16="http://schemas.microsoft.com/office/drawing/2014/main" id="{543E2975-6D0A-4CD2-88EB-C0C3D5A5ED1A}"/>
-              </a:ext>
-            </a:extLst>
-          </p:cNvPr>
-          <p:cNvSpPr>
-            <a:spLocks xmlns:a="http://schemas.openxmlformats.org/drawingml/2006/main" noGrp="1"/>
-          </p:cNvSpPr>
-          <p:nvPr>
-            <p:ph type="ftr" idx="11"/>
-          </p:nvPr>
-        </p:nvSpPr>
-        <p:spPr/>
-        <p:txBody>
-          <a:bodyPr xmlns:a="http://schemas.openxmlformats.org/drawingml/2006/main"/>
-          <a:lstStyle xmlns:a="http://schemas.openxmlformats.org/drawingml/2006/main"/>
-          <a:p xmlns:a="http://schemas.openxmlformats.org/drawingml/2006/main">
-            <a:endParaRPr/>
-          </a:p>
-        </p:txBody>
-      </p:sp>
-      <p:sp>
-        <p:nvSpPr>
-          <p:cNvPr id="6" name="灯片编号占位符 5">
-            <a:extLst xmlns:a="http://schemas.openxmlformats.org/drawingml/2006/main">
-              <a:ext uri="{FF2B5EF4-FFF2-40B4-BE49-F238E27FC236}">
-                <a16:creationId xmlns:a16="http://schemas.microsoft.com/office/drawing/2014/main" id="{264DF679-33AB-4012-9F77-8A6BA0C20BEF}"/>
-              </a:ext>
-            </a:extLst>
-          </p:cNvPr>
-          <p:cNvSpPr>
-            <a:spLocks xmlns:a="http://schemas.openxmlformats.org/drawingml/2006/main" noGrp="1"/>
-          </p:cNvSpPr>
-          <p:nvPr>
-            <p:ph type="sldNum" idx="12"/>
-          </p:nvPr>
-        </p:nvSpPr>
-        <p:spPr/>
-        <p:txBody>
-          <a:bodyPr xmlns:a="http://schemas.openxmlformats.org/drawingml/2006/main"/>
-          <a:lstStyle xmlns:a="http://schemas.openxmlformats.org/drawingml/2006/main"/>
-          <a:p xmlns:a="http://schemas.openxmlformats.org/drawingml/2006/main">
-            <a:fld id="{CCEF223B-53FA-448A-B05D-AD632DCD3405}" type="slidenum">
-              <a:t>‹#›</a:t>
-            </a:fld>
-            <a:endParaRPr/>
-          </a:p>
-        </p:txBody>
-      </p:sp>
     </p:spTree>
   </p:cSld>
 </p:sldLayout>
@@ -2140,250 +1433,6 @@
       <p:grpSpPr>
         <a:xfrm xmlns:a="http://schemas.openxmlformats.org/drawingml/2006/main"/>
       </p:grpSpPr>
-      <p:sp>
-        <p:nvSpPr>
-          <p:cNvPr id="2" name="标题 1">
-            <a:extLst xmlns:a="http://schemas.openxmlformats.org/drawingml/2006/main">
-              <a:ext uri="{FF2B5EF4-FFF2-40B4-BE49-F238E27FC236}">
-                <a16:creationId xmlns:a16="http://schemas.microsoft.com/office/drawing/2014/main" id="{B8A6B588-D6A7-4083-B5E9-F41A09809520}"/>
-              </a:ext>
-            </a:extLst>
-          </p:cNvPr>
-          <p:cNvSpPr>
-            <a:spLocks xmlns:a="http://schemas.openxmlformats.org/drawingml/2006/main" noGrp="1"/>
-          </p:cNvSpPr>
-          <p:nvPr>
-            <p:ph type="title" idx="0"/>
-          </p:nvPr>
-        </p:nvSpPr>
-        <p:spPr>
-          <a:xfrm xmlns:a="http://schemas.openxmlformats.org/drawingml/2006/main">
-            <a:off x="831850" y="1709738"/>
-            <a:ext cx="10515600" cy="2852737"/>
-          </a:xfrm>
-        </p:spPr>
-        <p:txBody>
-          <a:bodyPr xmlns:a="http://schemas.openxmlformats.org/drawingml/2006/main" anchor="b"/>
-          <a:lstStyle xmlns:a="http://schemas.openxmlformats.org/drawingml/2006/main">
-            <a:lvl1pPr>
-              <a:buNone/>
-              <a:defRPr sz="6000"/>
-            </a:lvl1pPr>
-          </a:lstStyle>
-          <a:p xmlns:a="http://schemas.openxmlformats.org/drawingml/2006/main">
-            <a:r>
-              <a:t>单击此处编辑母版标题样式</a:t>
-            </a:r>
-          </a:p>
-        </p:txBody>
-      </p:sp>
-      <p:sp>
-        <p:nvSpPr>
-          <p:cNvPr id="3" name="文本占位符 2">
-            <a:extLst xmlns:a="http://schemas.openxmlformats.org/drawingml/2006/main">
-              <a:ext uri="{FF2B5EF4-FFF2-40B4-BE49-F238E27FC236}">
-                <a16:creationId xmlns:a16="http://schemas.microsoft.com/office/drawing/2014/main" id="{789D2B0B-D813-4238-92A4-44CF226BADDC}"/>
-              </a:ext>
-            </a:extLst>
-          </p:cNvPr>
-          <p:cNvSpPr>
-            <a:spLocks xmlns:a="http://schemas.openxmlformats.org/drawingml/2006/main" noGrp="1"/>
-          </p:cNvSpPr>
-          <p:nvPr>
-            <p:ph type="body" idx="1" hasCustomPrompt="1"/>
-          </p:nvPr>
-        </p:nvSpPr>
-        <p:spPr>
-          <a:xfrm xmlns:a="http://schemas.openxmlformats.org/drawingml/2006/main">
-            <a:off x="831850" y="4589463"/>
-            <a:ext cx="10515600" cy="1500187"/>
-          </a:xfrm>
-        </p:spPr>
-        <p:txBody>
-          <a:bodyPr xmlns:a="http://schemas.openxmlformats.org/drawingml/2006/main"/>
-          <a:lstStyle xmlns:a="http://schemas.openxmlformats.org/drawingml/2006/main">
-            <a:lvl1pPr marL="0" indent="0">
-              <a:buNone/>
-              <a:defRPr sz="2400">
-                <a:solidFill>
-                  <a:schemeClr val="tx1">
-                    <a:tint val="75000"/>
-                  </a:schemeClr>
-                </a:solidFill>
-              </a:defRPr>
-            </a:lvl1pPr>
-            <a:lvl2pPr marL="457200" indent="0">
-              <a:buNone/>
-              <a:defRPr sz="2000">
-                <a:solidFill>
-                  <a:schemeClr val="tx1">
-                    <a:tint val="75000"/>
-                  </a:schemeClr>
-                </a:solidFill>
-              </a:defRPr>
-            </a:lvl2pPr>
-            <a:lvl3pPr marL="914400" indent="0">
-              <a:buNone/>
-              <a:defRPr sz="1800">
-                <a:solidFill>
-                  <a:schemeClr val="tx1">
-                    <a:tint val="75000"/>
-                  </a:schemeClr>
-                </a:solidFill>
-              </a:defRPr>
-            </a:lvl3pPr>
-            <a:lvl4pPr marL="1371600" indent="0">
-              <a:buNone/>
-              <a:defRPr sz="1600">
-                <a:solidFill>
-                  <a:schemeClr val="tx1">
-                    <a:tint val="75000"/>
-                  </a:schemeClr>
-                </a:solidFill>
-              </a:defRPr>
-            </a:lvl4pPr>
-            <a:lvl5pPr marL="1828800" indent="0">
-              <a:buNone/>
-              <a:defRPr sz="1600">
-                <a:solidFill>
-                  <a:schemeClr val="tx1">
-                    <a:tint val="75000"/>
-                  </a:schemeClr>
-                </a:solidFill>
-              </a:defRPr>
-            </a:lvl5pPr>
-            <a:lvl6pPr marL="2286000" indent="0">
-              <a:buNone/>
-              <a:defRPr sz="1600">
-                <a:solidFill>
-                  <a:schemeClr val="tx1">
-                    <a:tint val="75000"/>
-                  </a:schemeClr>
-                </a:solidFill>
-              </a:defRPr>
-            </a:lvl6pPr>
-            <a:lvl7pPr marL="2743200" indent="0">
-              <a:buNone/>
-              <a:defRPr sz="1600">
-                <a:solidFill>
-                  <a:schemeClr val="tx1">
-                    <a:tint val="75000"/>
-                  </a:schemeClr>
-                </a:solidFill>
-              </a:defRPr>
-            </a:lvl7pPr>
-            <a:lvl8pPr marL="3200400" indent="0">
-              <a:buNone/>
-              <a:defRPr sz="1600">
-                <a:solidFill>
-                  <a:schemeClr val="tx1">
-                    <a:tint val="75000"/>
-                  </a:schemeClr>
-                </a:solidFill>
-              </a:defRPr>
-            </a:lvl8pPr>
-            <a:lvl9pPr marL="3657600" indent="0">
-              <a:buNone/>
-              <a:defRPr sz="1600">
-                <a:solidFill>
-                  <a:schemeClr val="tx1">
-                    <a:tint val="75000"/>
-                  </a:schemeClr>
-                </a:solidFill>
-              </a:defRPr>
-            </a:lvl9pPr>
-          </a:lstStyle>
-          <a:p xmlns:a="http://schemas.openxmlformats.org/drawingml/2006/main">
-            <a:pPr lvl="0">
-              <a:buNone/>
-            </a:pPr>
-            <a:r>
-              <a:t>编辑母版文本样式</a:t>
-            </a:r>
-          </a:p>
-        </p:txBody>
-      </p:sp>
-      <p:sp>
-        <p:nvSpPr>
-          <p:cNvPr id="4" name="日期占位符 3">
-            <a:extLst xmlns:a="http://schemas.openxmlformats.org/drawingml/2006/main">
-              <a:ext uri="{FF2B5EF4-FFF2-40B4-BE49-F238E27FC236}">
-                <a16:creationId xmlns:a16="http://schemas.microsoft.com/office/drawing/2014/main" id="{7EFB33E6-A9F3-4189-B992-215C66507D4A}"/>
-              </a:ext>
-            </a:extLst>
-          </p:cNvPr>
-          <p:cNvSpPr>
-            <a:spLocks xmlns:a="http://schemas.openxmlformats.org/drawingml/2006/main" noGrp="1"/>
-          </p:cNvSpPr>
-          <p:nvPr>
-            <p:ph type="dt" idx="10"/>
-          </p:nvPr>
-        </p:nvSpPr>
-        <p:spPr/>
-        <p:txBody>
-          <a:bodyPr xmlns:a="http://schemas.openxmlformats.org/drawingml/2006/main"/>
-          <a:lstStyle xmlns:a="http://schemas.openxmlformats.org/drawingml/2006/main"/>
-          <a:p xmlns:a="http://schemas.openxmlformats.org/drawingml/2006/main">
-            <a:fld id="{0818D650-3A15-443A-B878-38CFEB8982A3}" type="datetimeFigureOut">
-              <a:t>2025/4/18</a:t>
-            </a:fld>
-            <a:endParaRPr/>
-          </a:p>
-        </p:txBody>
-      </p:sp>
-      <p:sp>
-        <p:nvSpPr>
-          <p:cNvPr id="5" name="页脚占位符 4">
-            <a:extLst xmlns:a="http://schemas.openxmlformats.org/drawingml/2006/main">
-              <a:ext uri="{FF2B5EF4-FFF2-40B4-BE49-F238E27FC236}">
-                <a16:creationId xmlns:a16="http://schemas.microsoft.com/office/drawing/2014/main" id="{E9204F2A-0721-4BD2-8201-8FACD5B569B3}"/>
-              </a:ext>
-            </a:extLst>
-          </p:cNvPr>
-          <p:cNvSpPr>
-            <a:spLocks xmlns:a="http://schemas.openxmlformats.org/drawingml/2006/main" noGrp="1"/>
-          </p:cNvSpPr>
-          <p:nvPr>
-            <p:ph type="ftr" idx="11"/>
-          </p:nvPr>
-        </p:nvSpPr>
-        <p:spPr/>
-        <p:txBody>
-          <a:bodyPr xmlns:a="http://schemas.openxmlformats.org/drawingml/2006/main"/>
-          <a:lstStyle xmlns:a="http://schemas.openxmlformats.org/drawingml/2006/main"/>
-          <a:p xmlns:a="http://schemas.openxmlformats.org/drawingml/2006/main">
-            <a:endParaRPr/>
-          </a:p>
-        </p:txBody>
-      </p:sp>
-      <p:sp>
-        <p:nvSpPr>
-          <p:cNvPr id="6" name="灯片编号占位符 5">
-            <a:extLst xmlns:a="http://schemas.openxmlformats.org/drawingml/2006/main">
-              <a:ext uri="{FF2B5EF4-FFF2-40B4-BE49-F238E27FC236}">
-                <a16:creationId xmlns:a16="http://schemas.microsoft.com/office/drawing/2014/main" id="{D3040094-50F3-405F-9398-E4832A507A75}"/>
-              </a:ext>
-            </a:extLst>
-          </p:cNvPr>
-          <p:cNvSpPr>
-            <a:spLocks xmlns:a="http://schemas.openxmlformats.org/drawingml/2006/main" noGrp="1"/>
-          </p:cNvSpPr>
-          <p:nvPr>
-            <p:ph type="sldNum" idx="12"/>
-          </p:nvPr>
-        </p:nvSpPr>
-        <p:spPr/>
-        <p:txBody>
-          <a:bodyPr xmlns:a="http://schemas.openxmlformats.org/drawingml/2006/main"/>
-          <a:lstStyle xmlns:a="http://schemas.openxmlformats.org/drawingml/2006/main"/>
-          <a:p xmlns:a="http://schemas.openxmlformats.org/drawingml/2006/main">
-            <a:fld id="{CCEF223B-53FA-448A-B05D-AD632DCD3405}" type="slidenum">
-              <a:t>‹#›</a:t>
-            </a:fld>
-            <a:endParaRPr/>
-          </a:p>
-        </p:txBody>
-      </p:sp>
     </p:spTree>
   </p:cSld>
 </p:sldLayout>
@@ -2401,248 +1450,6 @@
       <p:grpSpPr>
         <a:xfrm xmlns:a="http://schemas.openxmlformats.org/drawingml/2006/main"/>
       </p:grpSpPr>
-      <p:sp>
-        <p:nvSpPr>
-          <p:cNvPr id="2" name="标题 1">
-            <a:extLst xmlns:a="http://schemas.openxmlformats.org/drawingml/2006/main">
-              <a:ext uri="{FF2B5EF4-FFF2-40B4-BE49-F238E27FC236}">
-                <a16:creationId xmlns:a16="http://schemas.microsoft.com/office/drawing/2014/main" id="{FB775C65-FCCA-4EDD-9592-BBCC1996BC7F}"/>
-              </a:ext>
-            </a:extLst>
-          </p:cNvPr>
-          <p:cNvSpPr>
-            <a:spLocks xmlns:a="http://schemas.openxmlformats.org/drawingml/2006/main" noGrp="1"/>
-          </p:cNvSpPr>
-          <p:nvPr>
-            <p:ph type="title" idx="0"/>
-          </p:nvPr>
-        </p:nvSpPr>
-        <p:spPr/>
-        <p:txBody>
-          <a:bodyPr xmlns:a="http://schemas.openxmlformats.org/drawingml/2006/main"/>
-          <a:lstStyle xmlns:a="http://schemas.openxmlformats.org/drawingml/2006/main"/>
-          <a:p xmlns:a="http://schemas.openxmlformats.org/drawingml/2006/main">
-            <a:r>
-              <a:t>单击此处编辑母版标题样式</a:t>
-            </a:r>
-          </a:p>
-        </p:txBody>
-      </p:sp>
-      <p:sp>
-        <p:nvSpPr>
-          <p:cNvPr id="3" name="内容占位符 2">
-            <a:extLst xmlns:a="http://schemas.openxmlformats.org/drawingml/2006/main">
-              <a:ext uri="{FF2B5EF4-FFF2-40B4-BE49-F238E27FC236}">
-                <a16:creationId xmlns:a16="http://schemas.microsoft.com/office/drawing/2014/main" id="{1BA1A565-F3F7-4BBC-97CC-77632FAB6043}"/>
-              </a:ext>
-            </a:extLst>
-          </p:cNvPr>
-          <p:cNvSpPr>
-            <a:spLocks xmlns:a="http://schemas.openxmlformats.org/drawingml/2006/main" noGrp="1"/>
-          </p:cNvSpPr>
-          <p:nvPr>
-            <p:ph idx="1" hasCustomPrompt="1"/>
-          </p:nvPr>
-        </p:nvSpPr>
-        <p:spPr>
-          <a:xfrm xmlns:a="http://schemas.openxmlformats.org/drawingml/2006/main">
-            <a:off x="838200" y="1825625"/>
-            <a:ext cx="5181600" cy="4351338"/>
-          </a:xfrm>
-        </p:spPr>
-        <p:txBody>
-          <a:bodyPr xmlns:a="http://schemas.openxmlformats.org/drawingml/2006/main"/>
-          <a:lstStyle xmlns:a="http://schemas.openxmlformats.org/drawingml/2006/main"/>
-          <a:p xmlns:a="http://schemas.openxmlformats.org/drawingml/2006/main">
-            <a:pPr lvl="0">
-              <a:buNone/>
-            </a:pPr>
-            <a:r>
-              <a:t>编辑母版文本样式</a:t>
-            </a:r>
-          </a:p>
-          <a:p xmlns:a="http://schemas.openxmlformats.org/drawingml/2006/main">
-            <a:pPr lvl="1">
-              <a:buNone/>
-            </a:pPr>
-            <a:r>
-              <a:t>第二级</a:t>
-            </a:r>
-          </a:p>
-          <a:p xmlns:a="http://schemas.openxmlformats.org/drawingml/2006/main">
-            <a:pPr lvl="2">
-              <a:buNone/>
-            </a:pPr>
-            <a:r>
-              <a:t>第三级</a:t>
-            </a:r>
-          </a:p>
-          <a:p xmlns:a="http://schemas.openxmlformats.org/drawingml/2006/main">
-            <a:pPr lvl="3">
-              <a:buNone/>
-            </a:pPr>
-            <a:r>
-              <a:t>第四级</a:t>
-            </a:r>
-          </a:p>
-          <a:p xmlns:a="http://schemas.openxmlformats.org/drawingml/2006/main">
-            <a:pPr lvl="4">
-              <a:buNone/>
-            </a:pPr>
-            <a:r>
-              <a:t>第五级</a:t>
-            </a:r>
-          </a:p>
-        </p:txBody>
-      </p:sp>
-      <p:sp>
-        <p:nvSpPr>
-          <p:cNvPr id="4" name="内容占位符 3">
-            <a:extLst xmlns:a="http://schemas.openxmlformats.org/drawingml/2006/main">
-              <a:ext uri="{FF2B5EF4-FFF2-40B4-BE49-F238E27FC236}">
-                <a16:creationId xmlns:a16="http://schemas.microsoft.com/office/drawing/2014/main" id="{F71A9DAD-6895-4DEB-830E-B2C001F1F417}"/>
-              </a:ext>
-            </a:extLst>
-          </p:cNvPr>
-          <p:cNvSpPr>
-            <a:spLocks xmlns:a="http://schemas.openxmlformats.org/drawingml/2006/main" noGrp="1"/>
-          </p:cNvSpPr>
-          <p:nvPr>
-            <p:ph idx="2" hasCustomPrompt="1"/>
-          </p:nvPr>
-        </p:nvSpPr>
-        <p:spPr>
-          <a:xfrm xmlns:a="http://schemas.openxmlformats.org/drawingml/2006/main">
-            <a:off x="6172200" y="1825625"/>
-            <a:ext cx="5181600" cy="4351338"/>
-          </a:xfrm>
-        </p:spPr>
-        <p:txBody>
-          <a:bodyPr xmlns:a="http://schemas.openxmlformats.org/drawingml/2006/main"/>
-          <a:lstStyle xmlns:a="http://schemas.openxmlformats.org/drawingml/2006/main"/>
-          <a:p xmlns:a="http://schemas.openxmlformats.org/drawingml/2006/main">
-            <a:pPr lvl="0">
-              <a:buNone/>
-            </a:pPr>
-            <a:r>
-              <a:t>编辑母版文本样式</a:t>
-            </a:r>
-          </a:p>
-          <a:p xmlns:a="http://schemas.openxmlformats.org/drawingml/2006/main">
-            <a:pPr lvl="1">
-              <a:buNone/>
-            </a:pPr>
-            <a:r>
-              <a:t>第二级</a:t>
-            </a:r>
-          </a:p>
-          <a:p xmlns:a="http://schemas.openxmlformats.org/drawingml/2006/main">
-            <a:pPr lvl="2">
-              <a:buNone/>
-            </a:pPr>
-            <a:r>
-              <a:t>第三级</a:t>
-            </a:r>
-          </a:p>
-          <a:p xmlns:a="http://schemas.openxmlformats.org/drawingml/2006/main">
-            <a:pPr lvl="3">
-              <a:buNone/>
-            </a:pPr>
-            <a:r>
-              <a:t>第四级</a:t>
-            </a:r>
-          </a:p>
-          <a:p xmlns:a="http://schemas.openxmlformats.org/drawingml/2006/main">
-            <a:pPr lvl="4">
-              <a:buNone/>
-            </a:pPr>
-            <a:r>
-              <a:t>第五级</a:t>
-            </a:r>
-          </a:p>
-        </p:txBody>
-      </p:sp>
-      <p:sp>
-        <p:nvSpPr>
-          <p:cNvPr id="5" name="日期占位符 4">
-            <a:extLst xmlns:a="http://schemas.openxmlformats.org/drawingml/2006/main">
-              <a:ext uri="{FF2B5EF4-FFF2-40B4-BE49-F238E27FC236}">
-                <a16:creationId xmlns:a16="http://schemas.microsoft.com/office/drawing/2014/main" id="{11F9EADF-E0B7-4182-A5C4-97519F08642A}"/>
-              </a:ext>
-            </a:extLst>
-          </p:cNvPr>
-          <p:cNvSpPr>
-            <a:spLocks xmlns:a="http://schemas.openxmlformats.org/drawingml/2006/main" noGrp="1"/>
-          </p:cNvSpPr>
-          <p:nvPr>
-            <p:ph type="dt" idx="10"/>
-          </p:nvPr>
-        </p:nvSpPr>
-        <p:spPr/>
-        <p:txBody>
-          <a:bodyPr xmlns:a="http://schemas.openxmlformats.org/drawingml/2006/main"/>
-          <a:lstStyle xmlns:a="http://schemas.openxmlformats.org/drawingml/2006/main"/>
-          <a:p xmlns:a="http://schemas.openxmlformats.org/drawingml/2006/main">
-            <a:fld id="{0818D650-3A15-443A-B878-38CFEB8982A3}" type="datetimeFigureOut">
-              <a:t>2025/4/18</a:t>
-            </a:fld>
-            <a:endParaRPr/>
-          </a:p>
-        </p:txBody>
-      </p:sp>
-      <p:sp>
-        <p:nvSpPr>
-          <p:cNvPr id="6" name="页脚占位符 5">
-            <a:extLst xmlns:a="http://schemas.openxmlformats.org/drawingml/2006/main">
-              <a:ext uri="{FF2B5EF4-FFF2-40B4-BE49-F238E27FC236}">
-                <a16:creationId xmlns:a16="http://schemas.microsoft.com/office/drawing/2014/main" id="{00D3F1C8-4739-4656-89D1-B91CD4CB6717}"/>
-              </a:ext>
-            </a:extLst>
-          </p:cNvPr>
-          <p:cNvSpPr>
-            <a:spLocks xmlns:a="http://schemas.openxmlformats.org/drawingml/2006/main" noGrp="1"/>
-          </p:cNvSpPr>
-          <p:nvPr>
-            <p:ph type="ftr" idx="11"/>
-          </p:nvPr>
-        </p:nvSpPr>
-        <p:spPr/>
-        <p:txBody>
-          <a:bodyPr xmlns:a="http://schemas.openxmlformats.org/drawingml/2006/main"/>
-          <a:lstStyle xmlns:a="http://schemas.openxmlformats.org/drawingml/2006/main"/>
-          <a:p xmlns:a="http://schemas.openxmlformats.org/drawingml/2006/main">
-            <a:endParaRPr/>
-          </a:p>
-        </p:txBody>
-      </p:sp>
-      <p:sp>
-        <p:nvSpPr>
-          <p:cNvPr id="7" name="灯片编号占位符 6">
-            <a:extLst xmlns:a="http://schemas.openxmlformats.org/drawingml/2006/main">
-              <a:ext uri="{FF2B5EF4-FFF2-40B4-BE49-F238E27FC236}">
-                <a16:creationId xmlns:a16="http://schemas.microsoft.com/office/drawing/2014/main" id="{570496DB-409E-46B8-9BD6-2E1DA0B10942}"/>
-              </a:ext>
-            </a:extLst>
-          </p:cNvPr>
-          <p:cNvSpPr>
-            <a:spLocks xmlns:a="http://schemas.openxmlformats.org/drawingml/2006/main" noGrp="1"/>
-          </p:cNvSpPr>
-          <p:nvPr>
-            <p:ph type="sldNum" idx="12"/>
-          </p:nvPr>
-        </p:nvSpPr>
-        <p:spPr/>
-        <p:txBody>
-          <a:bodyPr xmlns:a="http://schemas.openxmlformats.org/drawingml/2006/main"/>
-          <a:lstStyle xmlns:a="http://schemas.openxmlformats.org/drawingml/2006/main"/>
-          <a:p xmlns:a="http://schemas.openxmlformats.org/drawingml/2006/main">
-            <a:fld id="{CCEF223B-53FA-448A-B05D-AD632DCD3405}" type="slidenum">
-              <a:t>‹#›</a:t>
-            </a:fld>
-            <a:endParaRPr/>
-          </a:p>
-        </p:txBody>
-      </p:sp>
     </p:spTree>
   </p:cSld>
 </p:sldLayout>
@@ -2660,397 +1467,6 @@
       <p:grpSpPr>
         <a:xfrm xmlns:a="http://schemas.openxmlformats.org/drawingml/2006/main"/>
       </p:grpSpPr>
-      <p:sp>
-        <p:nvSpPr>
-          <p:cNvPr id="2" name="标题 1">
-            <a:extLst xmlns:a="http://schemas.openxmlformats.org/drawingml/2006/main">
-              <a:ext uri="{FF2B5EF4-FFF2-40B4-BE49-F238E27FC236}">
-                <a16:creationId xmlns:a16="http://schemas.microsoft.com/office/drawing/2014/main" id="{3B683EE0-5961-4A6B-B577-698D439C4F37}"/>
-              </a:ext>
-            </a:extLst>
-          </p:cNvPr>
-          <p:cNvSpPr>
-            <a:spLocks xmlns:a="http://schemas.openxmlformats.org/drawingml/2006/main" noGrp="1"/>
-          </p:cNvSpPr>
-          <p:nvPr>
-            <p:ph type="title" idx="0"/>
-          </p:nvPr>
-        </p:nvSpPr>
-        <p:spPr>
-          <a:xfrm xmlns:a="http://schemas.openxmlformats.org/drawingml/2006/main">
-            <a:off x="839788" y="365125"/>
-            <a:ext cx="10515600" cy="1325563"/>
-          </a:xfrm>
-        </p:spPr>
-        <p:txBody>
-          <a:bodyPr xmlns:a="http://schemas.openxmlformats.org/drawingml/2006/main"/>
-          <a:lstStyle xmlns:a="http://schemas.openxmlformats.org/drawingml/2006/main"/>
-          <a:p xmlns:a="http://schemas.openxmlformats.org/drawingml/2006/main">
-            <a:r>
-              <a:t>单击此处编辑母版标题样式</a:t>
-            </a:r>
-          </a:p>
-        </p:txBody>
-      </p:sp>
-      <p:sp>
-        <p:nvSpPr>
-          <p:cNvPr id="3" name="文本占位符 2">
-            <a:extLst xmlns:a="http://schemas.openxmlformats.org/drawingml/2006/main">
-              <a:ext uri="{FF2B5EF4-FFF2-40B4-BE49-F238E27FC236}">
-                <a16:creationId xmlns:a16="http://schemas.microsoft.com/office/drawing/2014/main" id="{6D742A13-969B-4CC0-8C22-D592C540C1EA}"/>
-              </a:ext>
-            </a:extLst>
-          </p:cNvPr>
-          <p:cNvSpPr>
-            <a:spLocks xmlns:a="http://schemas.openxmlformats.org/drawingml/2006/main" noGrp="1"/>
-          </p:cNvSpPr>
-          <p:nvPr>
-            <p:ph type="body" idx="1" hasCustomPrompt="1"/>
-          </p:nvPr>
-        </p:nvSpPr>
-        <p:spPr>
-          <a:xfrm xmlns:a="http://schemas.openxmlformats.org/drawingml/2006/main">
-            <a:off x="839788" y="1681163"/>
-            <a:ext cx="5157787" cy="823912"/>
-          </a:xfrm>
-        </p:spPr>
-        <p:txBody>
-          <a:bodyPr xmlns:a="http://schemas.openxmlformats.org/drawingml/2006/main" anchor="b"/>
-          <a:lstStyle xmlns:a="http://schemas.openxmlformats.org/drawingml/2006/main">
-            <a:lvl1pPr marL="0" indent="0">
-              <a:buNone/>
-              <a:defRPr sz="2400" b="1"/>
-            </a:lvl1pPr>
-            <a:lvl2pPr marL="457200" indent="0">
-              <a:buNone/>
-              <a:defRPr sz="2000" b="1"/>
-            </a:lvl2pPr>
-            <a:lvl3pPr marL="914400" indent="0">
-              <a:buNone/>
-              <a:defRPr sz="1800" b="1"/>
-            </a:lvl3pPr>
-            <a:lvl4pPr marL="1371600" indent="0">
-              <a:buNone/>
-              <a:defRPr sz="1600" b="1"/>
-            </a:lvl4pPr>
-            <a:lvl5pPr marL="1828800" indent="0">
-              <a:buNone/>
-              <a:defRPr sz="1600" b="1"/>
-            </a:lvl5pPr>
-            <a:lvl6pPr marL="2286000" indent="0">
-              <a:buNone/>
-              <a:defRPr sz="1600" b="1"/>
-            </a:lvl6pPr>
-            <a:lvl7pPr marL="2743200" indent="0">
-              <a:buNone/>
-              <a:defRPr sz="1600" b="1"/>
-            </a:lvl7pPr>
-            <a:lvl8pPr marL="3200400" indent="0">
-              <a:buNone/>
-              <a:defRPr sz="1600" b="1"/>
-            </a:lvl8pPr>
-            <a:lvl9pPr marL="3657600" indent="0">
-              <a:buNone/>
-              <a:defRPr sz="1600" b="1"/>
-            </a:lvl9pPr>
-          </a:lstStyle>
-          <a:p xmlns:a="http://schemas.openxmlformats.org/drawingml/2006/main">
-            <a:pPr lvl="0">
-              <a:buNone/>
-            </a:pPr>
-            <a:r>
-              <a:t>编辑母版文本样式</a:t>
-            </a:r>
-          </a:p>
-        </p:txBody>
-      </p:sp>
-      <p:sp>
-        <p:nvSpPr>
-          <p:cNvPr id="4" name="内容占位符 3">
-            <a:extLst xmlns:a="http://schemas.openxmlformats.org/drawingml/2006/main">
-              <a:ext uri="{FF2B5EF4-FFF2-40B4-BE49-F238E27FC236}">
-                <a16:creationId xmlns:a16="http://schemas.microsoft.com/office/drawing/2014/main" id="{22C43B88-BEBF-4B2A-B914-A3F8361F92CA}"/>
-              </a:ext>
-            </a:extLst>
-          </p:cNvPr>
-          <p:cNvSpPr>
-            <a:spLocks xmlns:a="http://schemas.openxmlformats.org/drawingml/2006/main" noGrp="1"/>
-          </p:cNvSpPr>
-          <p:nvPr>
-            <p:ph idx="2" hasCustomPrompt="1"/>
-          </p:nvPr>
-        </p:nvSpPr>
-        <p:spPr>
-          <a:xfrm xmlns:a="http://schemas.openxmlformats.org/drawingml/2006/main">
-            <a:off x="839788" y="2505075"/>
-            <a:ext cx="5157787" cy="3684588"/>
-          </a:xfrm>
-        </p:spPr>
-        <p:txBody>
-          <a:bodyPr xmlns:a="http://schemas.openxmlformats.org/drawingml/2006/main"/>
-          <a:lstStyle xmlns:a="http://schemas.openxmlformats.org/drawingml/2006/main"/>
-          <a:p xmlns:a="http://schemas.openxmlformats.org/drawingml/2006/main">
-            <a:pPr lvl="0">
-              <a:buNone/>
-            </a:pPr>
-            <a:r>
-              <a:t>编辑母版文本样式</a:t>
-            </a:r>
-          </a:p>
-          <a:p xmlns:a="http://schemas.openxmlformats.org/drawingml/2006/main">
-            <a:pPr lvl="1">
-              <a:buNone/>
-            </a:pPr>
-            <a:r>
-              <a:t>第二级</a:t>
-            </a:r>
-          </a:p>
-          <a:p xmlns:a="http://schemas.openxmlformats.org/drawingml/2006/main">
-            <a:pPr lvl="2">
-              <a:buNone/>
-            </a:pPr>
-            <a:r>
-              <a:t>第三级</a:t>
-            </a:r>
-          </a:p>
-          <a:p xmlns:a="http://schemas.openxmlformats.org/drawingml/2006/main">
-            <a:pPr lvl="3">
-              <a:buNone/>
-            </a:pPr>
-            <a:r>
-              <a:t>第四级</a:t>
-            </a:r>
-          </a:p>
-          <a:p xmlns:a="http://schemas.openxmlformats.org/drawingml/2006/main">
-            <a:pPr lvl="4">
-              <a:buNone/>
-            </a:pPr>
-            <a:r>
-              <a:t>第五级</a:t>
-            </a:r>
-          </a:p>
-        </p:txBody>
-      </p:sp>
-      <p:sp>
-        <p:nvSpPr>
-          <p:cNvPr id="5" name="文本占位符 4">
-            <a:extLst xmlns:a="http://schemas.openxmlformats.org/drawingml/2006/main">
-              <a:ext uri="{FF2B5EF4-FFF2-40B4-BE49-F238E27FC236}">
-                <a16:creationId xmlns:a16="http://schemas.microsoft.com/office/drawing/2014/main" id="{7B33E805-A655-495F-B1C4-D21043D84FE1}"/>
-              </a:ext>
-            </a:extLst>
-          </p:cNvPr>
-          <p:cNvSpPr>
-            <a:spLocks xmlns:a="http://schemas.openxmlformats.org/drawingml/2006/main" noGrp="1"/>
-          </p:cNvSpPr>
-          <p:nvPr>
-            <p:ph type="body" idx="3" hasCustomPrompt="1"/>
-          </p:nvPr>
-        </p:nvSpPr>
-        <p:spPr>
-          <a:xfrm xmlns:a="http://schemas.openxmlformats.org/drawingml/2006/main">
-            <a:off x="6172200" y="1681163"/>
-            <a:ext cx="5183188" cy="823912"/>
-          </a:xfrm>
-        </p:spPr>
-        <p:txBody>
-          <a:bodyPr xmlns:a="http://schemas.openxmlformats.org/drawingml/2006/main" anchor="b"/>
-          <a:lstStyle xmlns:a="http://schemas.openxmlformats.org/drawingml/2006/main">
-            <a:lvl1pPr marL="0" indent="0">
-              <a:buNone/>
-              <a:defRPr sz="2400" b="1"/>
-            </a:lvl1pPr>
-            <a:lvl2pPr marL="457200" indent="0">
-              <a:buNone/>
-              <a:defRPr sz="2000" b="1"/>
-            </a:lvl2pPr>
-            <a:lvl3pPr marL="914400" indent="0">
-              <a:buNone/>
-              <a:defRPr sz="1800" b="1"/>
-            </a:lvl3pPr>
-            <a:lvl4pPr marL="1371600" indent="0">
-              <a:buNone/>
-              <a:defRPr sz="1600" b="1"/>
-            </a:lvl4pPr>
-            <a:lvl5pPr marL="1828800" indent="0">
-              <a:buNone/>
-              <a:defRPr sz="1600" b="1"/>
-            </a:lvl5pPr>
-            <a:lvl6pPr marL="2286000" indent="0">
-              <a:buNone/>
-              <a:defRPr sz="1600" b="1"/>
-            </a:lvl6pPr>
-            <a:lvl7pPr marL="2743200" indent="0">
-              <a:buNone/>
-              <a:defRPr sz="1600" b="1"/>
-            </a:lvl7pPr>
-            <a:lvl8pPr marL="3200400" indent="0">
-              <a:buNone/>
-              <a:defRPr sz="1600" b="1"/>
-            </a:lvl8pPr>
-            <a:lvl9pPr marL="3657600" indent="0">
-              <a:buNone/>
-              <a:defRPr sz="1600" b="1"/>
-            </a:lvl9pPr>
-          </a:lstStyle>
-          <a:p xmlns:a="http://schemas.openxmlformats.org/drawingml/2006/main">
-            <a:pPr lvl="0">
-              <a:buNone/>
-            </a:pPr>
-            <a:r>
-              <a:t>编辑母版文本样式</a:t>
-            </a:r>
-          </a:p>
-        </p:txBody>
-      </p:sp>
-      <p:sp>
-        <p:nvSpPr>
-          <p:cNvPr id="6" name="内容占位符 5">
-            <a:extLst xmlns:a="http://schemas.openxmlformats.org/drawingml/2006/main">
-              <a:ext uri="{FF2B5EF4-FFF2-40B4-BE49-F238E27FC236}">
-                <a16:creationId xmlns:a16="http://schemas.microsoft.com/office/drawing/2014/main" id="{10683865-25EE-4D41-9AEB-6AA88CCDBF34}"/>
-              </a:ext>
-            </a:extLst>
-          </p:cNvPr>
-          <p:cNvSpPr>
-            <a:spLocks xmlns:a="http://schemas.openxmlformats.org/drawingml/2006/main" noGrp="1"/>
-          </p:cNvSpPr>
-          <p:nvPr>
-            <p:ph idx="4" hasCustomPrompt="1"/>
-          </p:nvPr>
-        </p:nvSpPr>
-        <p:spPr>
-          <a:xfrm xmlns:a="http://schemas.openxmlformats.org/drawingml/2006/main">
-            <a:off x="6172200" y="2505075"/>
-            <a:ext cx="5183188" cy="3684588"/>
-          </a:xfrm>
-        </p:spPr>
-        <p:txBody>
-          <a:bodyPr xmlns:a="http://schemas.openxmlformats.org/drawingml/2006/main"/>
-          <a:lstStyle xmlns:a="http://schemas.openxmlformats.org/drawingml/2006/main"/>
-          <a:p xmlns:a="http://schemas.openxmlformats.org/drawingml/2006/main">
-            <a:pPr lvl="0">
-              <a:buNone/>
-            </a:pPr>
-            <a:r>
-              <a:t>编辑母版文本样式</a:t>
-            </a:r>
-          </a:p>
-          <a:p xmlns:a="http://schemas.openxmlformats.org/drawingml/2006/main">
-            <a:pPr lvl="1">
-              <a:buNone/>
-            </a:pPr>
-            <a:r>
-              <a:t>第二级</a:t>
-            </a:r>
-          </a:p>
-          <a:p xmlns:a="http://schemas.openxmlformats.org/drawingml/2006/main">
-            <a:pPr lvl="2">
-              <a:buNone/>
-            </a:pPr>
-            <a:r>
-              <a:t>第三级</a:t>
-            </a:r>
-          </a:p>
-          <a:p xmlns:a="http://schemas.openxmlformats.org/drawingml/2006/main">
-            <a:pPr lvl="3">
-              <a:buNone/>
-            </a:pPr>
-            <a:r>
-              <a:t>第四级</a:t>
-            </a:r>
-          </a:p>
-          <a:p xmlns:a="http://schemas.openxmlformats.org/drawingml/2006/main">
-            <a:pPr lvl="4">
-              <a:buNone/>
-            </a:pPr>
-            <a:r>
-              <a:t>第五级</a:t>
-            </a:r>
-          </a:p>
-        </p:txBody>
-      </p:sp>
-      <p:sp>
-        <p:nvSpPr>
-          <p:cNvPr id="7" name="日期占位符 6">
-            <a:extLst xmlns:a="http://schemas.openxmlformats.org/drawingml/2006/main">
-              <a:ext uri="{FF2B5EF4-FFF2-40B4-BE49-F238E27FC236}">
-                <a16:creationId xmlns:a16="http://schemas.microsoft.com/office/drawing/2014/main" id="{391955BC-1B4C-4629-94C6-1F8F46CEF058}"/>
-              </a:ext>
-            </a:extLst>
-          </p:cNvPr>
-          <p:cNvSpPr>
-            <a:spLocks xmlns:a="http://schemas.openxmlformats.org/drawingml/2006/main" noGrp="1"/>
-          </p:cNvSpPr>
-          <p:nvPr>
-            <p:ph type="dt" idx="10"/>
-          </p:nvPr>
-        </p:nvSpPr>
-        <p:spPr/>
-        <p:txBody>
-          <a:bodyPr xmlns:a="http://schemas.openxmlformats.org/drawingml/2006/main"/>
-          <a:lstStyle xmlns:a="http://schemas.openxmlformats.org/drawingml/2006/main"/>
-          <a:p xmlns:a="http://schemas.openxmlformats.org/drawingml/2006/main">
-            <a:fld id="{0818D650-3A15-443A-B878-38CFEB8982A3}" type="datetimeFigureOut">
-              <a:t>2025/4/18</a:t>
-            </a:fld>
-            <a:endParaRPr/>
-          </a:p>
-        </p:txBody>
-      </p:sp>
-      <p:sp>
-        <p:nvSpPr>
-          <p:cNvPr id="8" name="页脚占位符 7">
-            <a:extLst xmlns:a="http://schemas.openxmlformats.org/drawingml/2006/main">
-              <a:ext uri="{FF2B5EF4-FFF2-40B4-BE49-F238E27FC236}">
-                <a16:creationId xmlns:a16="http://schemas.microsoft.com/office/drawing/2014/main" id="{5CAA611D-150F-418A-AFC4-9A513BAB5D86}"/>
-              </a:ext>
-            </a:extLst>
-          </p:cNvPr>
-          <p:cNvSpPr>
-            <a:spLocks xmlns:a="http://schemas.openxmlformats.org/drawingml/2006/main" noGrp="1"/>
-          </p:cNvSpPr>
-          <p:nvPr>
-            <p:ph type="ftr" idx="11"/>
-          </p:nvPr>
-        </p:nvSpPr>
-        <p:spPr/>
-        <p:txBody>
-          <a:bodyPr xmlns:a="http://schemas.openxmlformats.org/drawingml/2006/main"/>
-          <a:lstStyle xmlns:a="http://schemas.openxmlformats.org/drawingml/2006/main"/>
-          <a:p xmlns:a="http://schemas.openxmlformats.org/drawingml/2006/main">
-            <a:endParaRPr/>
-          </a:p>
-        </p:txBody>
-      </p:sp>
-      <p:sp>
-        <p:nvSpPr>
-          <p:cNvPr id="9" name="灯片编号占位符 8">
-            <a:extLst xmlns:a="http://schemas.openxmlformats.org/drawingml/2006/main">
-              <a:ext uri="{FF2B5EF4-FFF2-40B4-BE49-F238E27FC236}">
-                <a16:creationId xmlns:a16="http://schemas.microsoft.com/office/drawing/2014/main" id="{B97E81B4-E2CF-496C-AEBF-2224869933EC}"/>
-              </a:ext>
-            </a:extLst>
-          </p:cNvPr>
-          <p:cNvSpPr>
-            <a:spLocks xmlns:a="http://schemas.openxmlformats.org/drawingml/2006/main" noGrp="1"/>
-          </p:cNvSpPr>
-          <p:nvPr>
-            <p:ph type="sldNum" idx="12"/>
-          </p:nvPr>
-        </p:nvSpPr>
-        <p:spPr/>
-        <p:txBody>
-          <a:bodyPr xmlns:a="http://schemas.openxmlformats.org/drawingml/2006/main"/>
-          <a:lstStyle xmlns:a="http://schemas.openxmlformats.org/drawingml/2006/main"/>
-          <a:p xmlns:a="http://schemas.openxmlformats.org/drawingml/2006/main">
-            <a:fld id="{CCEF223B-53FA-448A-B05D-AD632DCD3405}" type="slidenum">
-              <a:t>‹#›</a:t>
-            </a:fld>
-            <a:endParaRPr/>
-          </a:p>
-        </p:txBody>
-      </p:sp>
     </p:spTree>
   </p:cSld>
 </p:sldLayout>
@@ -3068,114 +1484,6 @@
       <p:grpSpPr>
         <a:xfrm xmlns:a="http://schemas.openxmlformats.org/drawingml/2006/main"/>
       </p:grpSpPr>
-      <p:sp>
-        <p:nvSpPr>
-          <p:cNvPr id="2" name="标题 1">
-            <a:extLst xmlns:a="http://schemas.openxmlformats.org/drawingml/2006/main">
-              <a:ext uri="{FF2B5EF4-FFF2-40B4-BE49-F238E27FC236}">
-                <a16:creationId xmlns:a16="http://schemas.microsoft.com/office/drawing/2014/main" id="{C45FFD08-69DD-458A-9E18-07B270E30CF8}"/>
-              </a:ext>
-            </a:extLst>
-          </p:cNvPr>
-          <p:cNvSpPr>
-            <a:spLocks xmlns:a="http://schemas.openxmlformats.org/drawingml/2006/main" noGrp="1"/>
-          </p:cNvSpPr>
-          <p:nvPr>
-            <p:ph type="title" idx="0"/>
-          </p:nvPr>
-        </p:nvSpPr>
-        <p:spPr/>
-        <p:txBody>
-          <a:bodyPr xmlns:a="http://schemas.openxmlformats.org/drawingml/2006/main"/>
-          <a:lstStyle xmlns:a="http://schemas.openxmlformats.org/drawingml/2006/main"/>
-          <a:p xmlns:a="http://schemas.openxmlformats.org/drawingml/2006/main">
-            <a:r>
-              <a:t>单击此处编辑母版标题样式</a:t>
-            </a:r>
-          </a:p>
-        </p:txBody>
-      </p:sp>
-      <p:sp>
-        <p:nvSpPr>
-          <p:cNvPr id="3" name="日期占位符 2">
-            <a:extLst xmlns:a="http://schemas.openxmlformats.org/drawingml/2006/main">
-              <a:ext uri="{FF2B5EF4-FFF2-40B4-BE49-F238E27FC236}">
-                <a16:creationId xmlns:a16="http://schemas.microsoft.com/office/drawing/2014/main" id="{58446E4F-FB7C-4CD6-B2FC-0AEFDD939D57}"/>
-              </a:ext>
-            </a:extLst>
-          </p:cNvPr>
-          <p:cNvSpPr>
-            <a:spLocks xmlns:a="http://schemas.openxmlformats.org/drawingml/2006/main" noGrp="1"/>
-          </p:cNvSpPr>
-          <p:nvPr>
-            <p:ph type="dt" idx="10"/>
-          </p:nvPr>
-        </p:nvSpPr>
-        <p:spPr/>
-        <p:txBody>
-          <a:bodyPr xmlns:a="http://schemas.openxmlformats.org/drawingml/2006/main"/>
-          <a:lstStyle xmlns:a="http://schemas.openxmlformats.org/drawingml/2006/main"/>
-          <a:p xmlns:a="http://schemas.openxmlformats.org/drawingml/2006/main">
-            <a:fld id="{0818D650-3A15-443A-B878-38CFEB8982A3}" type="datetimeFigureOut">
-              <a:t>2025/4/18</a:t>
-            </a:fld>
-            <a:endParaRPr/>
-          </a:p>
-        </p:txBody>
-      </p:sp>
-      <p:sp>
-        <p:nvSpPr>
-          <p:cNvPr id="4" name="页脚占位符 3">
-            <a:extLst xmlns:a="http://schemas.openxmlformats.org/drawingml/2006/main">
-              <a:ext uri="{FF2B5EF4-FFF2-40B4-BE49-F238E27FC236}">
-                <a16:creationId xmlns:a16="http://schemas.microsoft.com/office/drawing/2014/main" id="{B799C97D-711B-4198-9179-409CCED12B2F}"/>
-              </a:ext>
-            </a:extLst>
-          </p:cNvPr>
-          <p:cNvSpPr>
-            <a:spLocks xmlns:a="http://schemas.openxmlformats.org/drawingml/2006/main" noGrp="1"/>
-          </p:cNvSpPr>
-          <p:nvPr>
-            <p:ph type="ftr" idx="11"/>
-          </p:nvPr>
-        </p:nvSpPr>
-        <p:spPr/>
-        <p:txBody>
-          <a:bodyPr xmlns:a="http://schemas.openxmlformats.org/drawingml/2006/main"/>
-          <a:lstStyle xmlns:a="http://schemas.openxmlformats.org/drawingml/2006/main"/>
-          <a:p xmlns:a="http://schemas.openxmlformats.org/drawingml/2006/main">
-            <a:endParaRPr/>
-          </a:p>
-        </p:txBody>
-      </p:sp>
-      <p:sp>
-        <p:nvSpPr>
-          <p:cNvPr id="5" name="灯片编号占位符 4">
-            <a:extLst xmlns:a="http://schemas.openxmlformats.org/drawingml/2006/main">
-              <a:ext uri="{FF2B5EF4-FFF2-40B4-BE49-F238E27FC236}">
-                <a16:creationId xmlns:a16="http://schemas.microsoft.com/office/drawing/2014/main" id="{AC5F7628-CB41-405E-8D12-9FA9E5B84515}"/>
-              </a:ext>
-            </a:extLst>
-          </p:cNvPr>
-          <p:cNvSpPr>
-            <a:spLocks xmlns:a="http://schemas.openxmlformats.org/drawingml/2006/main" noGrp="1"/>
-          </p:cNvSpPr>
-          <p:nvPr>
-            <p:ph type="sldNum" idx="12"/>
-          </p:nvPr>
-        </p:nvSpPr>
-        <p:spPr/>
-        <p:txBody>
-          <a:bodyPr xmlns:a="http://schemas.openxmlformats.org/drawingml/2006/main"/>
-          <a:lstStyle xmlns:a="http://schemas.openxmlformats.org/drawingml/2006/main"/>
-          <a:p xmlns:a="http://schemas.openxmlformats.org/drawingml/2006/main">
-            <a:fld id="{CCEF223B-53FA-448A-B05D-AD632DCD3405}" type="slidenum">
-              <a:t>‹#›</a:t>
-            </a:fld>
-            <a:endParaRPr/>
-          </a:p>
-        </p:txBody>
-      </p:sp>
     </p:spTree>
   </p:cSld>
 </p:sldLayout>
@@ -3193,87 +1501,6 @@
       <p:grpSpPr>
         <a:xfrm xmlns:a="http://schemas.openxmlformats.org/drawingml/2006/main"/>
       </p:grpSpPr>
-      <p:sp>
-        <p:nvSpPr>
-          <p:cNvPr id="2" name="日期占位符 1">
-            <a:extLst xmlns:a="http://schemas.openxmlformats.org/drawingml/2006/main">
-              <a:ext uri="{FF2B5EF4-FFF2-40B4-BE49-F238E27FC236}">
-                <a16:creationId xmlns:a16="http://schemas.microsoft.com/office/drawing/2014/main" id="{F6D14D47-DEA4-40E8-8820-C263D76F62A5}"/>
-              </a:ext>
-            </a:extLst>
-          </p:cNvPr>
-          <p:cNvSpPr>
-            <a:spLocks xmlns:a="http://schemas.openxmlformats.org/drawingml/2006/main" noGrp="1"/>
-          </p:cNvSpPr>
-          <p:nvPr>
-            <p:ph type="dt" idx="10"/>
-          </p:nvPr>
-        </p:nvSpPr>
-        <p:spPr/>
-        <p:txBody>
-          <a:bodyPr xmlns:a="http://schemas.openxmlformats.org/drawingml/2006/main"/>
-          <a:lstStyle xmlns:a="http://schemas.openxmlformats.org/drawingml/2006/main"/>
-          <a:p xmlns:a="http://schemas.openxmlformats.org/drawingml/2006/main">
-            <a:fld id="{0818D650-3A15-443A-B878-38CFEB8982A3}" type="datetimeFigureOut">
-              <a:t>2025/4/18</a:t>
-            </a:fld>
-            <a:endParaRPr/>
-          </a:p>
-        </p:txBody>
-      </p:sp>
-      <p:sp>
-        <p:nvSpPr>
-          <p:cNvPr id="3" name="页脚占位符 2">
-            <a:extLst xmlns:a="http://schemas.openxmlformats.org/drawingml/2006/main">
-              <a:ext uri="{FF2B5EF4-FFF2-40B4-BE49-F238E27FC236}">
-                <a16:creationId xmlns:a16="http://schemas.microsoft.com/office/drawing/2014/main" id="{FADB70CA-4453-4DF5-BB9B-55F426AA9E91}"/>
-              </a:ext>
-            </a:extLst>
-          </p:cNvPr>
-          <p:cNvSpPr>
-            <a:spLocks xmlns:a="http://schemas.openxmlformats.org/drawingml/2006/main" noGrp="1"/>
-          </p:cNvSpPr>
-          <p:nvPr>
-            <p:ph type="ftr" idx="11"/>
-          </p:nvPr>
-        </p:nvSpPr>
-        <p:spPr/>
-        <p:txBody>
-          <a:bodyPr xmlns:a="http://schemas.openxmlformats.org/drawingml/2006/main"/>
-          <a:lstStyle xmlns:a="http://schemas.openxmlformats.org/drawingml/2006/main"/>
-          <a:p xmlns:a="http://schemas.openxmlformats.org/drawingml/2006/main">
-            <a:endParaRPr/>
-          </a:p>
-        </p:txBody>
-      </p:sp>
-      <p:sp>
-        <p:nvSpPr>
-          <p:cNvPr id="4" name="灯片编号占位符 3">
-            <a:extLst xmlns:a="http://schemas.openxmlformats.org/drawingml/2006/main">
-              <a:ext uri="{FF2B5EF4-FFF2-40B4-BE49-F238E27FC236}">
-                <a16:creationId xmlns:a16="http://schemas.microsoft.com/office/drawing/2014/main" id="{D8C00595-305F-4E23-B962-E7EA164C48EF}"/>
-              </a:ext>
-            </a:extLst>
-          </p:cNvPr>
-          <p:cNvSpPr>
-            <a:spLocks xmlns:a="http://schemas.openxmlformats.org/drawingml/2006/main" noGrp="1"/>
-          </p:cNvSpPr>
-          <p:nvPr>
-            <p:ph type="sldNum" idx="12"/>
-          </p:nvPr>
-        </p:nvSpPr>
-        <p:spPr/>
-        <p:txBody>
-          <a:bodyPr xmlns:a="http://schemas.openxmlformats.org/drawingml/2006/main"/>
-          <a:lstStyle xmlns:a="http://schemas.openxmlformats.org/drawingml/2006/main"/>
-          <a:p xmlns:a="http://schemas.openxmlformats.org/drawingml/2006/main">
-            <a:fld id="{CCEF223B-53FA-448A-B05D-AD632DCD3405}" type="slidenum">
-              <a:t>‹#›</a:t>
-            </a:fld>
-            <a:endParaRPr/>
-          </a:p>
-        </p:txBody>
-      </p:sp>
     </p:spTree>
   </p:cSld>
 </p:sldLayout>
@@ -3291,300 +1518,6 @@
       <p:grpSpPr>
         <a:xfrm xmlns:a="http://schemas.openxmlformats.org/drawingml/2006/main"/>
       </p:grpSpPr>
-      <p:sp>
-        <p:nvSpPr>
-          <p:cNvPr id="2" name="标题 1">
-            <a:extLst xmlns:a="http://schemas.openxmlformats.org/drawingml/2006/main">
-              <a:ext uri="{FF2B5EF4-FFF2-40B4-BE49-F238E27FC236}">
-                <a16:creationId xmlns:a16="http://schemas.microsoft.com/office/drawing/2014/main" id="{A0D1DD82-A45F-4435-989E-3A8CA9938FA2}"/>
-              </a:ext>
-            </a:extLst>
-          </p:cNvPr>
-          <p:cNvSpPr>
-            <a:spLocks xmlns:a="http://schemas.openxmlformats.org/drawingml/2006/main" noGrp="1"/>
-          </p:cNvSpPr>
-          <p:nvPr>
-            <p:ph type="title" idx="0"/>
-          </p:nvPr>
-        </p:nvSpPr>
-        <p:spPr>
-          <a:xfrm xmlns:a="http://schemas.openxmlformats.org/drawingml/2006/main">
-            <a:off x="839788" y="457200"/>
-            <a:ext cx="3932237" cy="1600200"/>
-          </a:xfrm>
-        </p:spPr>
-        <p:txBody>
-          <a:bodyPr xmlns:a="http://schemas.openxmlformats.org/drawingml/2006/main" anchor="b"/>
-          <a:lstStyle xmlns:a="http://schemas.openxmlformats.org/drawingml/2006/main">
-            <a:lvl1pPr>
-              <a:buNone/>
-              <a:defRPr sz="3200"/>
-            </a:lvl1pPr>
-          </a:lstStyle>
-          <a:p xmlns:a="http://schemas.openxmlformats.org/drawingml/2006/main">
-            <a:r>
-              <a:t>单击此处编辑母版标题样式</a:t>
-            </a:r>
-          </a:p>
-        </p:txBody>
-      </p:sp>
-      <p:sp>
-        <p:nvSpPr>
-          <p:cNvPr id="3" name="内容占位符 2">
-            <a:extLst xmlns:a="http://schemas.openxmlformats.org/drawingml/2006/main">
-              <a:ext uri="{FF2B5EF4-FFF2-40B4-BE49-F238E27FC236}">
-                <a16:creationId xmlns:a16="http://schemas.microsoft.com/office/drawing/2014/main" id="{990BA29C-1D9F-43B1-AD7E-D513A927BD11}"/>
-              </a:ext>
-            </a:extLst>
-          </p:cNvPr>
-          <p:cNvSpPr>
-            <a:spLocks xmlns:a="http://schemas.openxmlformats.org/drawingml/2006/main" noGrp="1"/>
-          </p:cNvSpPr>
-          <p:nvPr>
-            <p:ph idx="1" hasCustomPrompt="1"/>
-          </p:nvPr>
-        </p:nvSpPr>
-        <p:spPr>
-          <a:xfrm xmlns:a="http://schemas.openxmlformats.org/drawingml/2006/main">
-            <a:off x="5183188" y="987425"/>
-            <a:ext cx="6172200" cy="4873625"/>
-          </a:xfrm>
-        </p:spPr>
-        <p:txBody>
-          <a:bodyPr xmlns:a="http://schemas.openxmlformats.org/drawingml/2006/main"/>
-          <a:lstStyle xmlns:a="http://schemas.openxmlformats.org/drawingml/2006/main">
-            <a:lvl1pPr>
-              <a:buNone/>
-              <a:defRPr sz="3200"/>
-            </a:lvl1pPr>
-            <a:lvl2pPr>
-              <a:buNone/>
-              <a:defRPr sz="2800"/>
-            </a:lvl2pPr>
-            <a:lvl3pPr>
-              <a:buNone/>
-              <a:defRPr sz="2400"/>
-            </a:lvl3pPr>
-            <a:lvl4pPr>
-              <a:buNone/>
-              <a:defRPr sz="2000"/>
-            </a:lvl4pPr>
-            <a:lvl5pPr>
-              <a:buNone/>
-              <a:defRPr sz="2000"/>
-            </a:lvl5pPr>
-            <a:lvl6pPr>
-              <a:buNone/>
-              <a:defRPr sz="2000"/>
-            </a:lvl6pPr>
-            <a:lvl7pPr>
-              <a:buNone/>
-              <a:defRPr sz="2000"/>
-            </a:lvl7pPr>
-            <a:lvl8pPr>
-              <a:buNone/>
-              <a:defRPr sz="2000"/>
-            </a:lvl8pPr>
-            <a:lvl9pPr>
-              <a:buNone/>
-              <a:defRPr sz="2000"/>
-            </a:lvl9pPr>
-          </a:lstStyle>
-          <a:p xmlns:a="http://schemas.openxmlformats.org/drawingml/2006/main">
-            <a:pPr lvl="0">
-              <a:buNone/>
-            </a:pPr>
-            <a:r>
-              <a:t>编辑母版文本样式</a:t>
-            </a:r>
-          </a:p>
-          <a:p xmlns:a="http://schemas.openxmlformats.org/drawingml/2006/main">
-            <a:pPr lvl="1">
-              <a:buNone/>
-            </a:pPr>
-            <a:r>
-              <a:t>第二级</a:t>
-            </a:r>
-          </a:p>
-          <a:p xmlns:a="http://schemas.openxmlformats.org/drawingml/2006/main">
-            <a:pPr lvl="2">
-              <a:buNone/>
-            </a:pPr>
-            <a:r>
-              <a:t>第三级</a:t>
-            </a:r>
-          </a:p>
-          <a:p xmlns:a="http://schemas.openxmlformats.org/drawingml/2006/main">
-            <a:pPr lvl="3">
-              <a:buNone/>
-            </a:pPr>
-            <a:r>
-              <a:t>第四级</a:t>
-            </a:r>
-          </a:p>
-          <a:p xmlns:a="http://schemas.openxmlformats.org/drawingml/2006/main">
-            <a:pPr lvl="4">
-              <a:buNone/>
-            </a:pPr>
-            <a:r>
-              <a:t>第五级</a:t>
-            </a:r>
-          </a:p>
-        </p:txBody>
-      </p:sp>
-      <p:sp>
-        <p:nvSpPr>
-          <p:cNvPr id="4" name="文本占位符 3">
-            <a:extLst xmlns:a="http://schemas.openxmlformats.org/drawingml/2006/main">
-              <a:ext uri="{FF2B5EF4-FFF2-40B4-BE49-F238E27FC236}">
-                <a16:creationId xmlns:a16="http://schemas.microsoft.com/office/drawing/2014/main" id="{D2F5B860-2E25-40C9-AE58-72D27D0B2C2B}"/>
-              </a:ext>
-            </a:extLst>
-          </p:cNvPr>
-          <p:cNvSpPr>
-            <a:spLocks xmlns:a="http://schemas.openxmlformats.org/drawingml/2006/main" noGrp="1"/>
-          </p:cNvSpPr>
-          <p:nvPr>
-            <p:ph type="body" idx="2" hasCustomPrompt="1"/>
-          </p:nvPr>
-        </p:nvSpPr>
-        <p:spPr>
-          <a:xfrm xmlns:a="http://schemas.openxmlformats.org/drawingml/2006/main">
-            <a:off x="839788" y="2057400"/>
-            <a:ext cx="3932237" cy="3811588"/>
-          </a:xfrm>
-        </p:spPr>
-        <p:txBody>
-          <a:bodyPr xmlns:a="http://schemas.openxmlformats.org/drawingml/2006/main"/>
-          <a:lstStyle xmlns:a="http://schemas.openxmlformats.org/drawingml/2006/main">
-            <a:lvl1pPr marL="0" indent="0">
-              <a:buNone/>
-              <a:defRPr sz="1600"/>
-            </a:lvl1pPr>
-            <a:lvl2pPr marL="457200" indent="0">
-              <a:buNone/>
-              <a:defRPr sz="1400"/>
-            </a:lvl2pPr>
-            <a:lvl3pPr marL="914400" indent="0">
-              <a:buNone/>
-              <a:defRPr sz="1200"/>
-            </a:lvl3pPr>
-            <a:lvl4pPr marL="1371600" indent="0">
-              <a:buNone/>
-              <a:defRPr sz="1000"/>
-            </a:lvl4pPr>
-            <a:lvl5pPr marL="1828800" indent="0">
-              <a:buNone/>
-              <a:defRPr sz="1000"/>
-            </a:lvl5pPr>
-            <a:lvl6pPr marL="2286000" indent="0">
-              <a:buNone/>
-              <a:defRPr sz="1000"/>
-            </a:lvl6pPr>
-            <a:lvl7pPr marL="2743200" indent="0">
-              <a:buNone/>
-              <a:defRPr sz="1000"/>
-            </a:lvl7pPr>
-            <a:lvl8pPr marL="3200400" indent="0">
-              <a:buNone/>
-              <a:defRPr sz="1000"/>
-            </a:lvl8pPr>
-            <a:lvl9pPr marL="3657600" indent="0">
-              <a:buNone/>
-              <a:defRPr sz="1000"/>
-            </a:lvl9pPr>
-          </a:lstStyle>
-          <a:p xmlns:a="http://schemas.openxmlformats.org/drawingml/2006/main">
-            <a:pPr lvl="0">
-              <a:buNone/>
-            </a:pPr>
-            <a:r>
-              <a:t>编辑母版文本样式</a:t>
-            </a:r>
-          </a:p>
-        </p:txBody>
-      </p:sp>
-      <p:sp>
-        <p:nvSpPr>
-          <p:cNvPr id="5" name="日期占位符 4">
-            <a:extLst xmlns:a="http://schemas.openxmlformats.org/drawingml/2006/main">
-              <a:ext uri="{FF2B5EF4-FFF2-40B4-BE49-F238E27FC236}">
-                <a16:creationId xmlns:a16="http://schemas.microsoft.com/office/drawing/2014/main" id="{C3322638-30A9-44DA-86DF-36CBFEC7217A}"/>
-              </a:ext>
-            </a:extLst>
-          </p:cNvPr>
-          <p:cNvSpPr>
-            <a:spLocks xmlns:a="http://schemas.openxmlformats.org/drawingml/2006/main" noGrp="1"/>
-          </p:cNvSpPr>
-          <p:nvPr>
-            <p:ph type="dt" idx="10"/>
-          </p:nvPr>
-        </p:nvSpPr>
-        <p:spPr/>
-        <p:txBody>
-          <a:bodyPr xmlns:a="http://schemas.openxmlformats.org/drawingml/2006/main"/>
-          <a:lstStyle xmlns:a="http://schemas.openxmlformats.org/drawingml/2006/main"/>
-          <a:p xmlns:a="http://schemas.openxmlformats.org/drawingml/2006/main">
-            <a:fld id="{0818D650-3A15-443A-B878-38CFEB8982A3}" type="datetimeFigureOut">
-              <a:t>2025/4/18</a:t>
-            </a:fld>
-            <a:endParaRPr/>
-          </a:p>
-        </p:txBody>
-      </p:sp>
-      <p:sp>
-        <p:nvSpPr>
-          <p:cNvPr id="6" name="页脚占位符 5">
-            <a:extLst xmlns:a="http://schemas.openxmlformats.org/drawingml/2006/main">
-              <a:ext uri="{FF2B5EF4-FFF2-40B4-BE49-F238E27FC236}">
-                <a16:creationId xmlns:a16="http://schemas.microsoft.com/office/drawing/2014/main" id="{A6E3E77D-8F6E-4DDA-ABFC-F4D0D9817ADB}"/>
-              </a:ext>
-            </a:extLst>
-          </p:cNvPr>
-          <p:cNvSpPr>
-            <a:spLocks xmlns:a="http://schemas.openxmlformats.org/drawingml/2006/main" noGrp="1"/>
-          </p:cNvSpPr>
-          <p:nvPr>
-            <p:ph type="ftr" idx="11"/>
-          </p:nvPr>
-        </p:nvSpPr>
-        <p:spPr/>
-        <p:txBody>
-          <a:bodyPr xmlns:a="http://schemas.openxmlformats.org/drawingml/2006/main"/>
-          <a:lstStyle xmlns:a="http://schemas.openxmlformats.org/drawingml/2006/main"/>
-          <a:p xmlns:a="http://schemas.openxmlformats.org/drawingml/2006/main">
-            <a:endParaRPr/>
-          </a:p>
-        </p:txBody>
-      </p:sp>
-      <p:sp>
-        <p:nvSpPr>
-          <p:cNvPr id="7" name="灯片编号占位符 6">
-            <a:extLst xmlns:a="http://schemas.openxmlformats.org/drawingml/2006/main">
-              <a:ext uri="{FF2B5EF4-FFF2-40B4-BE49-F238E27FC236}">
-                <a16:creationId xmlns:a16="http://schemas.microsoft.com/office/drawing/2014/main" id="{EAD18D43-A2DF-475F-9B45-C4CE3EA8DBC8}"/>
-              </a:ext>
-            </a:extLst>
-          </p:cNvPr>
-          <p:cNvSpPr>
-            <a:spLocks xmlns:a="http://schemas.openxmlformats.org/drawingml/2006/main" noGrp="1"/>
-          </p:cNvSpPr>
-          <p:nvPr>
-            <p:ph type="sldNum" idx="12"/>
-          </p:nvPr>
-        </p:nvSpPr>
-        <p:spPr/>
-        <p:txBody>
-          <a:bodyPr xmlns:a="http://schemas.openxmlformats.org/drawingml/2006/main"/>
-          <a:lstStyle xmlns:a="http://schemas.openxmlformats.org/drawingml/2006/main"/>
-          <a:p xmlns:a="http://schemas.openxmlformats.org/drawingml/2006/main">
-            <a:fld id="{CCEF223B-53FA-448A-B05D-AD632DCD3405}" type="slidenum">
-              <a:t>‹#›</a:t>
-            </a:fld>
-            <a:endParaRPr/>
-          </a:p>
-        </p:txBody>
-      </p:sp>
     </p:spTree>
   </p:cSld>
 </p:sldLayout>
@@ -3602,263 +1535,6 @@
       <p:grpSpPr>
         <a:xfrm xmlns:a="http://schemas.openxmlformats.org/drawingml/2006/main"/>
       </p:grpSpPr>
-      <p:sp>
-        <p:nvSpPr>
-          <p:cNvPr id="2" name="标题 1">
-            <a:extLst xmlns:a="http://schemas.openxmlformats.org/drawingml/2006/main">
-              <a:ext uri="{FF2B5EF4-FFF2-40B4-BE49-F238E27FC236}">
-                <a16:creationId xmlns:a16="http://schemas.microsoft.com/office/drawing/2014/main" id="{0C536DA0-4302-4164-986C-7B1B931B8FE5}"/>
-              </a:ext>
-            </a:extLst>
-          </p:cNvPr>
-          <p:cNvSpPr>
-            <a:spLocks xmlns:a="http://schemas.openxmlformats.org/drawingml/2006/main" noGrp="1"/>
-          </p:cNvSpPr>
-          <p:nvPr>
-            <p:ph type="title" idx="0"/>
-          </p:nvPr>
-        </p:nvSpPr>
-        <p:spPr>
-          <a:xfrm xmlns:a="http://schemas.openxmlformats.org/drawingml/2006/main">
-            <a:off x="839788" y="457200"/>
-            <a:ext cx="3932237" cy="1600200"/>
-          </a:xfrm>
-        </p:spPr>
-        <p:txBody>
-          <a:bodyPr xmlns:a="http://schemas.openxmlformats.org/drawingml/2006/main" anchor="b"/>
-          <a:lstStyle xmlns:a="http://schemas.openxmlformats.org/drawingml/2006/main">
-            <a:lvl1pPr>
-              <a:buNone/>
-              <a:defRPr sz="3200"/>
-            </a:lvl1pPr>
-          </a:lstStyle>
-          <a:p xmlns:a="http://schemas.openxmlformats.org/drawingml/2006/main">
-            <a:r>
-              <a:t>单击此处编辑母版标题样式</a:t>
-            </a:r>
-          </a:p>
-        </p:txBody>
-      </p:sp>
-      <p:sp>
-        <p:nvSpPr>
-          <p:cNvPr id="3" name="图片占位符 2">
-            <a:extLst xmlns:a="http://schemas.openxmlformats.org/drawingml/2006/main">
-              <a:ext uri="{FF2B5EF4-FFF2-40B4-BE49-F238E27FC236}">
-                <a16:creationId xmlns:a16="http://schemas.microsoft.com/office/drawing/2014/main" id="{19CCE176-9420-4EEC-9DAE-4FCE8DAA87FC}"/>
-              </a:ext>
-            </a:extLst>
-          </p:cNvPr>
-          <p:cNvSpPr>
-            <a:spLocks xmlns:a="http://schemas.openxmlformats.org/drawingml/2006/main" noGrp="1"/>
-          </p:cNvSpPr>
-          <p:nvPr>
-            <p:ph type="pic" idx="1"/>
-          </p:nvPr>
-        </p:nvSpPr>
-        <p:spPr>
-          <a:xfrm xmlns:a="http://schemas.openxmlformats.org/drawingml/2006/main">
-            <a:off x="5183188" y="987425"/>
-            <a:ext cx="6172200" cy="4873625"/>
-          </a:xfrm>
-        </p:spPr>
-        <p:txBody>
-          <a:bodyPr xmlns:a="http://schemas.openxmlformats.org/drawingml/2006/main"/>
-          <a:lstStyle xmlns:a="http://schemas.openxmlformats.org/drawingml/2006/main">
-            <a:lvl1pPr marL="0" indent="0">
-              <a:buNone/>
-              <a:defRPr sz="3200"/>
-            </a:lvl1pPr>
-            <a:lvl2pPr marL="457200" indent="0">
-              <a:buNone/>
-              <a:defRPr sz="2800"/>
-            </a:lvl2pPr>
-            <a:lvl3pPr marL="914400" indent="0">
-              <a:buNone/>
-              <a:defRPr sz="2400"/>
-            </a:lvl3pPr>
-            <a:lvl4pPr marL="1371600" indent="0">
-              <a:buNone/>
-              <a:defRPr sz="2000"/>
-            </a:lvl4pPr>
-            <a:lvl5pPr marL="1828800" indent="0">
-              <a:buNone/>
-              <a:defRPr sz="2000"/>
-            </a:lvl5pPr>
-            <a:lvl6pPr marL="2286000" indent="0">
-              <a:buNone/>
-              <a:defRPr sz="2000"/>
-            </a:lvl6pPr>
-            <a:lvl7pPr marL="2743200" indent="0">
-              <a:buNone/>
-              <a:defRPr sz="2000"/>
-            </a:lvl7pPr>
-            <a:lvl8pPr marL="3200400" indent="0">
-              <a:buNone/>
-              <a:defRPr sz="2000"/>
-            </a:lvl8pPr>
-            <a:lvl9pPr marL="3657600" indent="0">
-              <a:buNone/>
-              <a:defRPr sz="2000"/>
-            </a:lvl9pPr>
-          </a:lstStyle>
-          <a:p xmlns:a="http://schemas.openxmlformats.org/drawingml/2006/main">
-            <a:endParaRPr/>
-          </a:p>
-        </p:txBody>
-      </p:sp>
-      <p:sp>
-        <p:nvSpPr>
-          <p:cNvPr id="4" name="文本占位符 3">
-            <a:extLst xmlns:a="http://schemas.openxmlformats.org/drawingml/2006/main">
-              <a:ext uri="{FF2B5EF4-FFF2-40B4-BE49-F238E27FC236}">
-                <a16:creationId xmlns:a16="http://schemas.microsoft.com/office/drawing/2014/main" id="{D97B0038-2E18-4EE6-A735-30CEE2E28C53}"/>
-              </a:ext>
-            </a:extLst>
-          </p:cNvPr>
-          <p:cNvSpPr>
-            <a:spLocks xmlns:a="http://schemas.openxmlformats.org/drawingml/2006/main" noGrp="1"/>
-          </p:cNvSpPr>
-          <p:nvPr>
-            <p:ph type="body" idx="2" hasCustomPrompt="1"/>
-          </p:nvPr>
-        </p:nvSpPr>
-        <p:spPr>
-          <a:xfrm xmlns:a="http://schemas.openxmlformats.org/drawingml/2006/main">
-            <a:off x="839788" y="2057400"/>
-            <a:ext cx="3932237" cy="3811588"/>
-          </a:xfrm>
-        </p:spPr>
-        <p:txBody>
-          <a:bodyPr xmlns:a="http://schemas.openxmlformats.org/drawingml/2006/main"/>
-          <a:lstStyle xmlns:a="http://schemas.openxmlformats.org/drawingml/2006/main">
-            <a:lvl1pPr marL="0" indent="0">
-              <a:buNone/>
-              <a:defRPr sz="1600"/>
-            </a:lvl1pPr>
-            <a:lvl2pPr marL="457200" indent="0">
-              <a:buNone/>
-              <a:defRPr sz="1400"/>
-            </a:lvl2pPr>
-            <a:lvl3pPr marL="914400" indent="0">
-              <a:buNone/>
-              <a:defRPr sz="1200"/>
-            </a:lvl3pPr>
-            <a:lvl4pPr marL="1371600" indent="0">
-              <a:buNone/>
-              <a:defRPr sz="1000"/>
-            </a:lvl4pPr>
-            <a:lvl5pPr marL="1828800" indent="0">
-              <a:buNone/>
-              <a:defRPr sz="1000"/>
-            </a:lvl5pPr>
-            <a:lvl6pPr marL="2286000" indent="0">
-              <a:buNone/>
-              <a:defRPr sz="1000"/>
-            </a:lvl6pPr>
-            <a:lvl7pPr marL="2743200" indent="0">
-              <a:buNone/>
-              <a:defRPr sz="1000"/>
-            </a:lvl7pPr>
-            <a:lvl8pPr marL="3200400" indent="0">
-              <a:buNone/>
-              <a:defRPr sz="1000"/>
-            </a:lvl8pPr>
-            <a:lvl9pPr marL="3657600" indent="0">
-              <a:buNone/>
-              <a:defRPr sz="1000"/>
-            </a:lvl9pPr>
-          </a:lstStyle>
-          <a:p xmlns:a="http://schemas.openxmlformats.org/drawingml/2006/main">
-            <a:pPr lvl="0">
-              <a:buNone/>
-            </a:pPr>
-            <a:r>
-              <a:t>编辑母版文本样式</a:t>
-            </a:r>
-          </a:p>
-        </p:txBody>
-      </p:sp>
-      <p:sp>
-        <p:nvSpPr>
-          <p:cNvPr id="5" name="日期占位符 4">
-            <a:extLst xmlns:a="http://schemas.openxmlformats.org/drawingml/2006/main">
-              <a:ext uri="{FF2B5EF4-FFF2-40B4-BE49-F238E27FC236}">
-                <a16:creationId xmlns:a16="http://schemas.microsoft.com/office/drawing/2014/main" id="{3EE18F8E-18E6-4443-8ABB-454BC93E2DB4}"/>
-              </a:ext>
-            </a:extLst>
-          </p:cNvPr>
-          <p:cNvSpPr>
-            <a:spLocks xmlns:a="http://schemas.openxmlformats.org/drawingml/2006/main" noGrp="1"/>
-          </p:cNvSpPr>
-          <p:nvPr>
-            <p:ph type="dt" idx="10"/>
-          </p:nvPr>
-        </p:nvSpPr>
-        <p:spPr/>
-        <p:txBody>
-          <a:bodyPr xmlns:a="http://schemas.openxmlformats.org/drawingml/2006/main"/>
-          <a:lstStyle xmlns:a="http://schemas.openxmlformats.org/drawingml/2006/main"/>
-          <a:p xmlns:a="http://schemas.openxmlformats.org/drawingml/2006/main">
-            <a:fld id="{0818D650-3A15-443A-B878-38CFEB8982A3}" type="datetimeFigureOut">
-              <a:t>2025/4/18</a:t>
-            </a:fld>
-            <a:endParaRPr/>
-          </a:p>
-        </p:txBody>
-      </p:sp>
-      <p:sp>
-        <p:nvSpPr>
-          <p:cNvPr id="6" name="页脚占位符 5">
-            <a:extLst xmlns:a="http://schemas.openxmlformats.org/drawingml/2006/main">
-              <a:ext uri="{FF2B5EF4-FFF2-40B4-BE49-F238E27FC236}">
-                <a16:creationId xmlns:a16="http://schemas.microsoft.com/office/drawing/2014/main" id="{9111F353-B305-447B-B616-9F03FB97DCFC}"/>
-              </a:ext>
-            </a:extLst>
-          </p:cNvPr>
-          <p:cNvSpPr>
-            <a:spLocks xmlns:a="http://schemas.openxmlformats.org/drawingml/2006/main" noGrp="1"/>
-          </p:cNvSpPr>
-          <p:nvPr>
-            <p:ph type="ftr" idx="11"/>
-          </p:nvPr>
-        </p:nvSpPr>
-        <p:spPr/>
-        <p:txBody>
-          <a:bodyPr xmlns:a="http://schemas.openxmlformats.org/drawingml/2006/main"/>
-          <a:lstStyle xmlns:a="http://schemas.openxmlformats.org/drawingml/2006/main"/>
-          <a:p xmlns:a="http://schemas.openxmlformats.org/drawingml/2006/main">
-            <a:endParaRPr/>
-          </a:p>
-        </p:txBody>
-      </p:sp>
-      <p:sp>
-        <p:nvSpPr>
-          <p:cNvPr id="7" name="灯片编号占位符 6">
-            <a:extLst xmlns:a="http://schemas.openxmlformats.org/drawingml/2006/main">
-              <a:ext uri="{FF2B5EF4-FFF2-40B4-BE49-F238E27FC236}">
-                <a16:creationId xmlns:a16="http://schemas.microsoft.com/office/drawing/2014/main" id="{16E8B3B4-A7B6-4FAF-A927-E7C5C235A49D}"/>
-              </a:ext>
-            </a:extLst>
-          </p:cNvPr>
-          <p:cNvSpPr>
-            <a:spLocks xmlns:a="http://schemas.openxmlformats.org/drawingml/2006/main" noGrp="1"/>
-          </p:cNvSpPr>
-          <p:nvPr>
-            <p:ph type="sldNum" idx="12"/>
-          </p:nvPr>
-        </p:nvSpPr>
-        <p:spPr/>
-        <p:txBody>
-          <a:bodyPr xmlns:a="http://schemas.openxmlformats.org/drawingml/2006/main"/>
-          <a:lstStyle xmlns:a="http://schemas.openxmlformats.org/drawingml/2006/main"/>
-          <a:p xmlns:a="http://schemas.openxmlformats.org/drawingml/2006/main">
-            <a:fld id="{CCEF223B-53FA-448A-B05D-AD632DCD3405}" type="slidenum">
-              <a:t>‹#›</a:t>
-            </a:fld>
-            <a:endParaRPr/>
-          </a:p>
-        </p:txBody>
-      </p:sp>
     </p:spTree>
   </p:cSld>
 </p:sldLayout>
@@ -3870,7 +1546,7 @@
     <p:bg>
       <p:bgPr>
         <a:blipFill xmlns:a="http://schemas.openxmlformats.org/drawingml/2006/main" rotWithShape="1">
-          <a:blip xmlns:r="http://schemas.openxmlformats.org/officeDocument/2006/relationships" r:embed="R2543b6be98224c81">
+          <a:blip xmlns:r="http://schemas.openxmlformats.org/officeDocument/2006/relationships" r:embed="R0bb068443b2f4dea">
             <a:lum/>
           </a:blip>
           <a:srcRect l="0" t="0" r="0" b="0"/>
@@ -3889,268 +1565,21 @@
       <p:grpSpPr>
         <a:xfrm xmlns:a="http://schemas.openxmlformats.org/drawingml/2006/main"/>
       </p:grpSpPr>
-      <p:sp>
-        <p:nvSpPr>
-          <p:cNvPr id="2" name="标题占位符 1">
-            <a:extLst xmlns:a="http://schemas.openxmlformats.org/drawingml/2006/main">
-              <a:ext uri="{FF2B5EF4-FFF2-40B4-BE49-F238E27FC236}">
-                <a16:creationId xmlns:a16="http://schemas.microsoft.com/office/drawing/2014/main" id="{0AE60E77-A0C0-4778-840D-6AC16B259811}"/>
-              </a:ext>
-            </a:extLst>
-          </p:cNvPr>
-          <p:cNvSpPr>
-            <a:spLocks xmlns:a="http://schemas.openxmlformats.org/drawingml/2006/main" noGrp="1"/>
-          </p:cNvSpPr>
-          <p:nvPr>
-            <p:ph type="title" idx="0"/>
-          </p:nvPr>
-        </p:nvSpPr>
-        <p:spPr>
-          <a:xfrm xmlns:a="http://schemas.openxmlformats.org/drawingml/2006/main">
-            <a:off x="838200" y="365125"/>
-            <a:ext cx="10515600" cy="1325563"/>
-          </a:xfrm>
-          <a:prstGeom xmlns:a="http://schemas.openxmlformats.org/drawingml/2006/main" prst="rect">
-            <a:avLst/>
-          </a:prstGeom>
-        </p:spPr>
-        <p:txBody>
-          <a:bodyPr xmlns:a="http://schemas.openxmlformats.org/drawingml/2006/main" vert="horz" lIns="91440" tIns="45720" rIns="91440" bIns="45720" anchor="ctr">
-            <a:normAutofit/>
-          </a:bodyPr>
-          <a:lstStyle xmlns:a="http://schemas.openxmlformats.org/drawingml/2006/main"/>
-          <a:p xmlns:a="http://schemas.openxmlformats.org/drawingml/2006/main">
-            <a:r>
-              <a:t>单击此处编辑母版标题样式</a:t>
-            </a:r>
-          </a:p>
-        </p:txBody>
-      </p:sp>
-      <p:sp>
-        <p:nvSpPr>
-          <p:cNvPr id="3" name="文本占位符 2">
-            <a:extLst xmlns:a="http://schemas.openxmlformats.org/drawingml/2006/main">
-              <a:ext uri="{FF2B5EF4-FFF2-40B4-BE49-F238E27FC236}">
-                <a16:creationId xmlns:a16="http://schemas.microsoft.com/office/drawing/2014/main" id="{AD5A8646-0A02-4AB9-B7CD-D46273CE9331}"/>
-              </a:ext>
-            </a:extLst>
-          </p:cNvPr>
-          <p:cNvSpPr>
-            <a:spLocks xmlns:a="http://schemas.openxmlformats.org/drawingml/2006/main" noGrp="1"/>
-          </p:cNvSpPr>
-          <p:nvPr>
-            <p:ph type="body" idx="1"/>
-          </p:nvPr>
-        </p:nvSpPr>
-        <p:spPr>
-          <a:xfrm xmlns:a="http://schemas.openxmlformats.org/drawingml/2006/main">
-            <a:off x="838200" y="1825625"/>
-            <a:ext cx="10515600" cy="4351338"/>
-          </a:xfrm>
-          <a:prstGeom xmlns:a="http://schemas.openxmlformats.org/drawingml/2006/main" prst="rect">
-            <a:avLst/>
-          </a:prstGeom>
-        </p:spPr>
-        <p:txBody>
-          <a:bodyPr xmlns:a="http://schemas.openxmlformats.org/drawingml/2006/main" vert="horz" lIns="91440" tIns="45720" rIns="91440" bIns="45720">
-            <a:normAutofit/>
-          </a:bodyPr>
-          <a:lstStyle xmlns:a="http://schemas.openxmlformats.org/drawingml/2006/main"/>
-          <a:p xmlns:a="http://schemas.openxmlformats.org/drawingml/2006/main">
-            <a:pPr lvl="0">
-              <a:buNone/>
-            </a:pPr>
-            <a:r>
-              <a:t>编辑母版文本样式</a:t>
-            </a:r>
-          </a:p>
-          <a:p xmlns:a="http://schemas.openxmlformats.org/drawingml/2006/main">
-            <a:pPr lvl="1">
-              <a:buNone/>
-            </a:pPr>
-            <a:r>
-              <a:t>第二级</a:t>
-            </a:r>
-          </a:p>
-          <a:p xmlns:a="http://schemas.openxmlformats.org/drawingml/2006/main">
-            <a:pPr lvl="2">
-              <a:buNone/>
-            </a:pPr>
-            <a:r>
-              <a:t>第三级</a:t>
-            </a:r>
-          </a:p>
-          <a:p xmlns:a="http://schemas.openxmlformats.org/drawingml/2006/main">
-            <a:pPr lvl="3">
-              <a:buNone/>
-            </a:pPr>
-            <a:r>
-              <a:t>第四级</a:t>
-            </a:r>
-          </a:p>
-          <a:p xmlns:a="http://schemas.openxmlformats.org/drawingml/2006/main">
-            <a:pPr lvl="4">
-              <a:buNone/>
-            </a:pPr>
-            <a:r>
-              <a:t>第五级</a:t>
-            </a:r>
-          </a:p>
-        </p:txBody>
-      </p:sp>
-      <p:sp>
-        <p:nvSpPr>
-          <p:cNvPr id="4" name="日期占位符 3">
-            <a:extLst xmlns:a="http://schemas.openxmlformats.org/drawingml/2006/main">
-              <a:ext uri="{FF2B5EF4-FFF2-40B4-BE49-F238E27FC236}">
-                <a16:creationId xmlns:a16="http://schemas.microsoft.com/office/drawing/2014/main" id="{721900C3-CB18-4BB0-9016-B76D33693039}"/>
-              </a:ext>
-            </a:extLst>
-          </p:cNvPr>
-          <p:cNvSpPr>
-            <a:spLocks xmlns:a="http://schemas.openxmlformats.org/drawingml/2006/main" noGrp="1"/>
-          </p:cNvSpPr>
-          <p:nvPr>
-            <p:ph type="dt" idx="2"/>
-          </p:nvPr>
-        </p:nvSpPr>
-        <p:spPr>
-          <a:xfrm xmlns:a="http://schemas.openxmlformats.org/drawingml/2006/main">
-            <a:off x="838200" y="6356350"/>
-            <a:ext cx="2743200" cy="365125"/>
-          </a:xfrm>
-          <a:prstGeom xmlns:a="http://schemas.openxmlformats.org/drawingml/2006/main" prst="rect">
-            <a:avLst/>
-          </a:prstGeom>
-        </p:spPr>
-        <p:txBody>
-          <a:bodyPr xmlns:a="http://schemas.openxmlformats.org/drawingml/2006/main" vert="horz" lIns="91440" tIns="45720" rIns="91440" bIns="45720" anchor="ctr"/>
-          <a:lstStyle xmlns:a="http://schemas.openxmlformats.org/drawingml/2006/main">
-            <a:lvl1pPr algn="l">
-              <a:buNone/>
-              <a:defRPr sz="1200">
-                <a:solidFill>
-                  <a:schemeClr val="tx1">
-                    <a:tint val="75000"/>
-                  </a:schemeClr>
-                </a:solidFill>
-              </a:defRPr>
-            </a:lvl1pPr>
-          </a:lstStyle>
-          <a:p xmlns:a="http://schemas.openxmlformats.org/drawingml/2006/main">
-            <a:fld id="{0818D650-3A15-443A-B878-38CFEB8982A3}" type="datetimeFigureOut">
-              <a:t>2025/4/18</a:t>
-            </a:fld>
-            <a:endParaRPr/>
-          </a:p>
-        </p:txBody>
-      </p:sp>
-      <p:sp>
-        <p:nvSpPr>
-          <p:cNvPr id="5" name="页脚占位符 4">
-            <a:extLst xmlns:a="http://schemas.openxmlformats.org/drawingml/2006/main">
-              <a:ext uri="{FF2B5EF4-FFF2-40B4-BE49-F238E27FC236}">
-                <a16:creationId xmlns:a16="http://schemas.microsoft.com/office/drawing/2014/main" id="{D457F5CB-90C7-4E82-B7E6-46627B864218}"/>
-              </a:ext>
-            </a:extLst>
-          </p:cNvPr>
-          <p:cNvSpPr>
-            <a:spLocks xmlns:a="http://schemas.openxmlformats.org/drawingml/2006/main" noGrp="1"/>
-          </p:cNvSpPr>
-          <p:nvPr>
-            <p:ph type="ftr" idx="3"/>
-          </p:nvPr>
-        </p:nvSpPr>
-        <p:spPr>
-          <a:xfrm xmlns:a="http://schemas.openxmlformats.org/drawingml/2006/main">
-            <a:off x="4038600" y="6356350"/>
-            <a:ext cx="4114800" cy="365125"/>
-          </a:xfrm>
-          <a:prstGeom xmlns:a="http://schemas.openxmlformats.org/drawingml/2006/main" prst="rect">
-            <a:avLst/>
-          </a:prstGeom>
-        </p:spPr>
-        <p:txBody>
-          <a:bodyPr xmlns:a="http://schemas.openxmlformats.org/drawingml/2006/main" vert="horz" lIns="91440" tIns="45720" rIns="91440" bIns="45720" anchor="ctr"/>
-          <a:lstStyle xmlns:a="http://schemas.openxmlformats.org/drawingml/2006/main">
-            <a:lvl1pPr algn="ctr">
-              <a:buNone/>
-              <a:defRPr sz="1200">
-                <a:solidFill>
-                  <a:schemeClr val="tx1">
-                    <a:tint val="75000"/>
-                  </a:schemeClr>
-                </a:solidFill>
-              </a:defRPr>
-            </a:lvl1pPr>
-          </a:lstStyle>
-          <a:p xmlns:a="http://schemas.openxmlformats.org/drawingml/2006/main">
-            <a:endParaRPr/>
-          </a:p>
-        </p:txBody>
-      </p:sp>
-      <p:sp>
-        <p:nvSpPr>
-          <p:cNvPr id="6" name="灯片编号占位符 5">
-            <a:extLst xmlns:a="http://schemas.openxmlformats.org/drawingml/2006/main">
-              <a:ext uri="{FF2B5EF4-FFF2-40B4-BE49-F238E27FC236}">
-                <a16:creationId xmlns:a16="http://schemas.microsoft.com/office/drawing/2014/main" id="{C688E9F9-83C0-48F7-A6E6-0DA2B6873442}"/>
-              </a:ext>
-            </a:extLst>
-          </p:cNvPr>
-          <p:cNvSpPr>
-            <a:spLocks xmlns:a="http://schemas.openxmlformats.org/drawingml/2006/main" noGrp="1"/>
-          </p:cNvSpPr>
-          <p:nvPr>
-            <p:ph type="sldNum" idx="4"/>
-          </p:nvPr>
-        </p:nvSpPr>
-        <p:spPr>
-          <a:xfrm xmlns:a="http://schemas.openxmlformats.org/drawingml/2006/main">
-            <a:off x="8610600" y="6356350"/>
-            <a:ext cx="2743200" cy="365125"/>
-          </a:xfrm>
-          <a:prstGeom xmlns:a="http://schemas.openxmlformats.org/drawingml/2006/main" prst="rect">
-            <a:avLst/>
-          </a:prstGeom>
-        </p:spPr>
-        <p:txBody>
-          <a:bodyPr xmlns:a="http://schemas.openxmlformats.org/drawingml/2006/main" vert="horz" lIns="91440" tIns="45720" rIns="91440" bIns="45720" anchor="ctr"/>
-          <a:lstStyle xmlns:a="http://schemas.openxmlformats.org/drawingml/2006/main">
-            <a:lvl1pPr algn="r">
-              <a:buNone/>
-              <a:defRPr sz="1200">
-                <a:solidFill>
-                  <a:schemeClr val="tx1">
-                    <a:tint val="75000"/>
-                  </a:schemeClr>
-                </a:solidFill>
-              </a:defRPr>
-            </a:lvl1pPr>
-          </a:lstStyle>
-          <a:p xmlns:a="http://schemas.openxmlformats.org/drawingml/2006/main">
-            <a:fld id="{CCEF223B-53FA-448A-B05D-AD632DCD3405}" type="slidenum">
-              <a:t>‹#›</a:t>
-            </a:fld>
-            <a:endParaRPr/>
-          </a:p>
-        </p:txBody>
-      </p:sp>
     </p:spTree>
   </p:cSld>
   <p:clrMap bg1="lt1" tx1="dk1" bg2="lt2" tx2="dk2" accent1="accent1" accent2="accent2" accent3="accent3" accent4="accent4" accent5="accent5" accent6="accent6" hlink="hlink" folHlink="folHlink"/>
   <p:sldLayoutIdLst>
-    <p:sldLayoutId xmlns:r="http://schemas.openxmlformats.org/officeDocument/2006/relationships" id="2147483649" r:id="Rc4b6e63d918e475f"/>
-    <p:sldLayoutId xmlns:r="http://schemas.openxmlformats.org/officeDocument/2006/relationships" id="2147483650" r:id="R352dcbd7c6d54dbf"/>
-    <p:sldLayoutId xmlns:r="http://schemas.openxmlformats.org/officeDocument/2006/relationships" id="2147483651" r:id="Rc25fabf0f2d84415"/>
-    <p:sldLayoutId xmlns:r="http://schemas.openxmlformats.org/officeDocument/2006/relationships" id="2147483652" r:id="R12795d9689504444"/>
-    <p:sldLayoutId xmlns:r="http://schemas.openxmlformats.org/officeDocument/2006/relationships" id="2147483653" r:id="R64eb8f8325ed48c7"/>
-    <p:sldLayoutId xmlns:r="http://schemas.openxmlformats.org/officeDocument/2006/relationships" id="2147483654" r:id="Rfac3cc8ff0144370"/>
-    <p:sldLayoutId xmlns:r="http://schemas.openxmlformats.org/officeDocument/2006/relationships" id="2147483655" r:id="R7dbfd936f4ff4cb6"/>
-    <p:sldLayoutId xmlns:r="http://schemas.openxmlformats.org/officeDocument/2006/relationships" id="2147483656" r:id="R8281886815464b1f"/>
-    <p:sldLayoutId xmlns:r="http://schemas.openxmlformats.org/officeDocument/2006/relationships" id="2147483657" r:id="R5894fe45f136484f"/>
-    <p:sldLayoutId xmlns:r="http://schemas.openxmlformats.org/officeDocument/2006/relationships" id="2147483658" r:id="R418f6bbb062c4da3"/>
-    <p:sldLayoutId xmlns:r="http://schemas.openxmlformats.org/officeDocument/2006/relationships" id="2147483659" r:id="R9440a03cd2cd4465"/>
+    <p:sldLayoutId xmlns:r="http://schemas.openxmlformats.org/officeDocument/2006/relationships" id="2147483649" r:id="R0321059b9ce6463a"/>
+    <p:sldLayoutId xmlns:r="http://schemas.openxmlformats.org/officeDocument/2006/relationships" id="2147483650" r:id="R99c9e6c9a9c14406"/>
+    <p:sldLayoutId xmlns:r="http://schemas.openxmlformats.org/officeDocument/2006/relationships" id="2147483651" r:id="R73616b4e18b74648"/>
+    <p:sldLayoutId xmlns:r="http://schemas.openxmlformats.org/officeDocument/2006/relationships" id="2147483652" r:id="Rd7c91a08d3934c52"/>
+    <p:sldLayoutId xmlns:r="http://schemas.openxmlformats.org/officeDocument/2006/relationships" id="2147483653" r:id="R4fad9b93d0404bae"/>
+    <p:sldLayoutId xmlns:r="http://schemas.openxmlformats.org/officeDocument/2006/relationships" id="2147483654" r:id="R708058d529e5434a"/>
+    <p:sldLayoutId xmlns:r="http://schemas.openxmlformats.org/officeDocument/2006/relationships" id="2147483655" r:id="Rb0de06ea413c4bee"/>
+    <p:sldLayoutId xmlns:r="http://schemas.openxmlformats.org/officeDocument/2006/relationships" id="2147483656" r:id="Ra59bac696c15466a"/>
+    <p:sldLayoutId xmlns:r="http://schemas.openxmlformats.org/officeDocument/2006/relationships" id="2147483657" r:id="R03f75c1508064bbd"/>
+    <p:sldLayoutId xmlns:r="http://schemas.openxmlformats.org/officeDocument/2006/relationships" id="2147483658" r:id="R5eba4deca36d4bfd"/>
+    <p:sldLayoutId xmlns:r="http://schemas.openxmlformats.org/officeDocument/2006/relationships" id="2147483659" r:id="Rf8e019fbe8204006"/>
   </p:sldLayoutIdLst>
   <p:txStyles>
     <p:titleStyle>
@@ -4713,14 +2142,14 @@
       </p:grpSpPr>
       <p:pic>
         <p:nvPicPr>
-          <p:cNvPr id="16" name="图片 12"/>
+          <p:cNvPr id="18" name="图片 12"/>
           <p:cNvPicPr>
             <a:picLocks xmlns:a="http://schemas.openxmlformats.org/drawingml/2006/main" noChangeAspect="1"/>
           </p:cNvPicPr>
           <p:nvPr/>
         </p:nvPicPr>
         <p:blipFill>
-          <a:blip xmlns:r="http://schemas.openxmlformats.org/officeDocument/2006/relationships" xmlns:a="http://schemas.openxmlformats.org/drawingml/2006/main" r:embed="Rff6b1bf0c32148eb"/>
+          <a:blip xmlns:r="http://schemas.openxmlformats.org/officeDocument/2006/relationships" xmlns:a="http://schemas.openxmlformats.org/drawingml/2006/main" r:embed="Ra8568058e6d04e5c"/>
           <a:stretch xmlns:a="http://schemas.openxmlformats.org/drawingml/2006/main">
             <a:fillRect l="0" t="0" r="0" b="0"/>
           </a:stretch>
@@ -4740,7 +2169,7 @@
           <p:cNvPr id="4" name="矩形 3">
             <a:extLst xmlns:a="http://schemas.openxmlformats.org/drawingml/2006/main">
               <a:ext uri="{FF2B5EF4-FFF2-40B4-BE49-F238E27FC236}">
-                <a16:creationId xmlns:a16="http://schemas.microsoft.com/office/drawing/2014/main" id="{0A701EDC-A070-4019-9358-52534FD848C0}"/>
+                <a16:creationId xmlns:a16="http://schemas.microsoft.com/office/drawing/2014/main" id="{E0DD24A5-5F45-405A-8C58-06DD33D7F103}"/>
               </a:ext>
             </a:extLst>
           </p:cNvPr>
@@ -4798,7 +2227,7 @@
           <p:cNvPr id="5" name="矩形 4">
             <a:extLst xmlns:a="http://schemas.openxmlformats.org/drawingml/2006/main">
               <a:ext uri="{FF2B5EF4-FFF2-40B4-BE49-F238E27FC236}">
-                <a16:creationId xmlns:a16="http://schemas.microsoft.com/office/drawing/2014/main" id="{5B02A26E-7EA4-4588-AF8B-2F7C5D46A02A}"/>
+                <a16:creationId xmlns:a16="http://schemas.microsoft.com/office/drawing/2014/main" id="{DAF2D0DF-9F10-4956-91A3-560F026A35E8}"/>
               </a:ext>
             </a:extLst>
           </p:cNvPr>
@@ -4860,7 +2289,7 @@
           <p:cNvPr id="6" name="直接连接符 5">
             <a:extLst xmlns:a="http://schemas.openxmlformats.org/drawingml/2006/main">
               <a:ext uri="{FF2B5EF4-FFF2-40B4-BE49-F238E27FC236}">
-                <a16:creationId xmlns:a16="http://schemas.microsoft.com/office/drawing/2014/main" id="{1F6A310B-D5AD-40F2-8A3F-B55F889A798E}"/>
+                <a16:creationId xmlns:a16="http://schemas.microsoft.com/office/drawing/2014/main" id="{A240280B-CD50-48F7-B2F8-06F1498BF278}"/>
               </a:ext>
             </a:extLst>
           </p:cNvPr>
@@ -4900,141 +2329,10 @@
       </p:sp>
       <p:sp>
         <p:nvSpPr>
-          <p:cNvPr id="7" name="标题 1">
-            <a:extLst xmlns:a="http://schemas.openxmlformats.org/drawingml/2006/main">
-              <a:ext uri="{FF2B5EF4-FFF2-40B4-BE49-F238E27FC236}">
-                <a16:creationId xmlns:a16="http://schemas.microsoft.com/office/drawing/2014/main" id="{0D177E34-646E-4CFB-B997-6B8D8BE1DBA6}"/>
-              </a:ext>
-            </a:extLst>
-          </p:cNvPr>
-          <p:cNvSpPr>
-            <a:spLocks xmlns:a="http://schemas.openxmlformats.org/drawingml/2006/main" noGrp="1"/>
-          </p:cNvSpPr>
-          <p:nvPr>
-            <p:ph type="ctrTitle" idx="0"/>
-          </p:nvPr>
-        </p:nvSpPr>
-        <p:spPr>
-          <a:xfrm xmlns:a="http://schemas.openxmlformats.org/drawingml/2006/main">
-            <a:off x="501650" y="1382185"/>
-            <a:ext cx="11201400" cy="2069647"/>
-          </a:xfrm>
-        </p:spPr>
-        <p:txBody>
-          <a:bodyPr xmlns:a="http://schemas.openxmlformats.org/drawingml/2006/main" lIns="91440" tIns="45720" rIns="91440" bIns="180000"/>
-          <a:lstStyle xmlns:a="http://schemas.openxmlformats.org/drawingml/2006/main"/>
-          <a:p xmlns:a="http://schemas.openxmlformats.org/drawingml/2006/main">
-            <a:pPr>
-              <a:lnSpc>
-                <a:spcPct val="130000"/>
-              </a:lnSpc>
-              <a:buNone/>
-              <a:defRPr sz="3900" b="1">
-                <a:solidFill>
-                  <a:srgbClr val="FFFFFF"/>
-                </a:solidFill>
-                <a:latin typeface="微软雅黑"/>
-                <a:ea typeface="微软雅黑"/>
-                <a:cs typeface="微软雅黑"/>
-              </a:defRPr>
-            </a:pPr>
-            <a:r>
-              <a:rPr sz="3900" b="1">
-                <a:solidFill>
-                  <a:srgbClr val="FFFFFF"/>
-                </a:solidFill>
-                <a:latin typeface="微软雅黑"/>
-                <a:ea typeface="微软雅黑"/>
-                <a:cs typeface="微软雅黑"/>
-              </a:rPr>
-              <a:t>基于在线策略蒸馏的</a:t>
-            </a:r>
-          </a:p>
-          <a:p xmlns:a="http://schemas.openxmlformats.org/drawingml/2006/main">
-            <a:pPr>
-              <a:lnSpc>
-                <a:spcPct val="130000"/>
-              </a:lnSpc>
-              <a:buNone/>
-              <a:defRPr sz="3900" b="1">
-                <a:solidFill>
-                  <a:srgbClr val="FFFFFF"/>
-                </a:solidFill>
-                <a:latin typeface="微软雅黑"/>
-                <a:ea typeface="微软雅黑"/>
-                <a:cs typeface="微软雅黑"/>
-              </a:defRPr>
-            </a:pPr>
-            <a:r>
-              <a:rPr sz="3900" b="1">
-                <a:solidFill>
-                  <a:srgbClr val="FFFFFF"/>
-                </a:solidFill>
-                <a:latin typeface="微软雅黑"/>
-                <a:ea typeface="微软雅黑"/>
-                <a:cs typeface="微软雅黑"/>
-              </a:rPr>
-              <a:t>大语言模型后训练方法研究</a:t>
-            </a:r>
-          </a:p>
-        </p:txBody>
-      </p:sp>
-      <p:sp>
-        <p:nvSpPr>
-          <p:cNvPr id="8" name="副标题 2">
-            <a:extLst xmlns:a="http://schemas.openxmlformats.org/drawingml/2006/main">
-              <a:ext uri="{FF2B5EF4-FFF2-40B4-BE49-F238E27FC236}">
-                <a16:creationId xmlns:a16="http://schemas.microsoft.com/office/drawing/2014/main" id="{6042319A-F3EF-46B9-A40E-BC57DCA4B886}"/>
-              </a:ext>
-            </a:extLst>
-          </p:cNvPr>
-          <p:cNvSpPr>
-            <a:spLocks xmlns:a="http://schemas.openxmlformats.org/drawingml/2006/main" noGrp="1"/>
-          </p:cNvSpPr>
-          <p:nvPr>
-            <p:ph type="subTitle" idx="1"/>
-          </p:nvPr>
-        </p:nvSpPr>
-        <p:spPr>
-          <a:xfrm xmlns:a="http://schemas.openxmlformats.org/drawingml/2006/main">
-            <a:off x="488950" y="4728150"/>
-            <a:ext cx="11214100" cy="680402"/>
-          </a:xfrm>
-        </p:spPr>
-        <p:txBody>
-          <a:bodyPr xmlns:a="http://schemas.openxmlformats.org/drawingml/2006/main"/>
-          <a:lstStyle xmlns:a="http://schemas.openxmlformats.org/drawingml/2006/main"/>
-          <a:p xmlns:a="http://schemas.openxmlformats.org/drawingml/2006/main">
-            <a:pPr>
-              <a:defRPr sz="2100">
-                <a:solidFill>
-                  <a:srgbClr val="075C79"/>
-                </a:solidFill>
-                <a:latin typeface="微软雅黑"/>
-                <a:ea typeface="微软雅黑"/>
-                <a:cs typeface="微软雅黑"/>
-              </a:defRPr>
-            </a:pPr>
-            <a:r>
-              <a:rPr sz="2100" b="1">
-                <a:solidFill>
-                  <a:srgbClr val="075C79"/>
-                </a:solidFill>
-                <a:latin typeface="微软雅黑"/>
-                <a:ea typeface="微软雅黑"/>
-                <a:cs typeface="微软雅黑"/>
-              </a:rPr>
-              <a:t>汇报人：张子琦</a:t>
-            </a:r>
-          </a:p>
-        </p:txBody>
-      </p:sp>
-      <p:sp>
-        <p:nvSpPr>
           <p:cNvPr id="9" name="副标题 2">
             <a:extLst xmlns:a="http://schemas.openxmlformats.org/drawingml/2006/main">
               <a:ext uri="{FF2B5EF4-FFF2-40B4-BE49-F238E27FC236}">
-                <a16:creationId xmlns:a16="http://schemas.microsoft.com/office/drawing/2014/main" id="{BDC584DD-BC81-431F-93A6-EC7BDFB51EBB}"/>
+                <a16:creationId xmlns:a16="http://schemas.microsoft.com/office/drawing/2014/main" id="{67551A8D-D277-4D63-A5D1-CEF790E268F4}"/>
               </a:ext>
             </a:extLst>
           </p:cNvPr>
@@ -5248,7 +2546,7 @@
           <p:cNvPr id="10" name="文本框 9">
             <a:extLst xmlns:a="http://schemas.openxmlformats.org/drawingml/2006/main">
               <a:ext uri="{FF2B5EF4-FFF2-40B4-BE49-F238E27FC236}">
-                <a16:creationId xmlns:a16="http://schemas.microsoft.com/office/drawing/2014/main" id="{0536107B-D934-4F07-9811-3D898D02F06C}"/>
+                <a16:creationId xmlns:a16="http://schemas.microsoft.com/office/drawing/2014/main" id="{CE3320CC-C53D-4C90-B3C4-D0742C770D1D}"/>
               </a:ext>
             </a:extLst>
           </p:cNvPr>
@@ -5304,7 +2602,7 @@
           <p:nvPr/>
         </p:nvPicPr>
         <p:blipFill>
-          <a:blip xmlns:r="http://schemas.openxmlformats.org/officeDocument/2006/relationships" xmlns:a="http://schemas.openxmlformats.org/drawingml/2006/main" r:embed="R1512ed654e3544e0"/>
+          <a:blip xmlns:r="http://schemas.openxmlformats.org/officeDocument/2006/relationships" xmlns:a="http://schemas.openxmlformats.org/drawingml/2006/main" r:embed="Rce8edbc8f67f4ebe"/>
           <a:stretch xmlns:a="http://schemas.openxmlformats.org/drawingml/2006/main">
             <a:fillRect l="0" t="0" r="0" b="0"/>
           </a:stretch>
@@ -5328,7 +2626,7 @@
           <p:nvPr/>
         </p:nvPicPr>
         <p:blipFill>
-          <a:blip xmlns:r="http://schemas.openxmlformats.org/officeDocument/2006/relationships" xmlns:a="http://schemas.openxmlformats.org/drawingml/2006/main" r:embed="Rd2918d5b8b4d4fac"/>
+          <a:blip xmlns:r="http://schemas.openxmlformats.org/officeDocument/2006/relationships" xmlns:a="http://schemas.openxmlformats.org/drawingml/2006/main" r:embed="R23fb481530134a58"/>
           <a:stretch xmlns:a="http://schemas.openxmlformats.org/drawingml/2006/main">
             <a:fillRect l="0" t="0" r="0" b="0"/>
           </a:stretch>
@@ -5565,10 +2863,145 @@
           </a:p>
         </p:txBody>
       </p:sp>
+      <p:sp>
+        <p:nvSpPr>
+          <p:cNvPr id="16" name="">
+            <a:extLst xmlns:a="http://schemas.openxmlformats.org/drawingml/2006/main">
+              <a:ext uri="{FF2B5EF4-FFF2-40B4-BE49-F238E27FC236}">
+                <a16:creationId xmlns:a16="http://schemas.microsoft.com/office/drawing/2014/main" id="{12E92CDB-4CFC-491E-A84F-0EEB991921D0}"/>
+              </a:ext>
+            </a:extLst>
+          </p:cNvPr>
+          <p:cNvSpPr>
+            <a:spLocks xmlns:a="http://schemas.openxmlformats.org/drawingml/2006/main" noGrp="1"/>
+          </p:cNvSpPr>
+          <p:nvPr/>
+        </p:nvSpPr>
+        <p:spPr>
+          <a:xfrm xmlns:a="http://schemas.openxmlformats.org/drawingml/2006/main">
+            <a:off x="501682" y="1382173"/>
+            <a:ext cx="11201400" cy="2069687"/>
+          </a:xfrm>
+          <a:prstGeom xmlns:a="http://schemas.openxmlformats.org/drawingml/2006/main" prst="rect">
+            <a:avLst/>
+          </a:prstGeom>
+          <a:noFill xmlns:a="http://schemas.openxmlformats.org/drawingml/2006/main"/>
+          <a:ln xmlns:a="http://schemas.openxmlformats.org/drawingml/2006/main" w="0">
+            <a:noFill/>
+            <a:prstDash val="solid"/>
+          </a:ln>
+        </p:spPr>
+        <p:txBody>
+          <a:bodyPr xmlns:a="http://schemas.openxmlformats.org/drawingml/2006/main" anchor="ctr"/>
+          <a:lstStyle xmlns:a="http://schemas.openxmlformats.org/drawingml/2006/main"/>
+          <a:p xmlns:a="http://schemas.openxmlformats.org/drawingml/2006/main">
+            <a:pPr algn="ctr">
+              <a:defRPr sz="3900" b="1">
+                <a:solidFill>
+                  <a:srgbClr val="FFFFFF"/>
+                </a:solidFill>
+                <a:latin typeface="微软雅黑"/>
+                <a:ea typeface="微软雅黑"/>
+                <a:cs typeface="微软雅黑"/>
+              </a:defRPr>
+            </a:pPr>
+            <a:r>
+              <a:rPr sz="3900" b="1">
+                <a:solidFill>
+                  <a:srgbClr val="FFFFFF"/>
+                </a:solidFill>
+                <a:latin typeface="微软雅黑"/>
+                <a:ea typeface="微软雅黑"/>
+                <a:cs typeface="微软雅黑"/>
+              </a:rPr>
+              <a:t>基于在线策略蒸馏的</a:t>
+            </a:r>
+          </a:p>
+          <a:p xmlns:a="http://schemas.openxmlformats.org/drawingml/2006/main">
+            <a:pPr algn="ctr">
+              <a:defRPr sz="3900" b="1">
+                <a:solidFill>
+                  <a:srgbClr val="FFFFFF"/>
+                </a:solidFill>
+                <a:latin typeface="微软雅黑"/>
+                <a:ea typeface="微软雅黑"/>
+                <a:cs typeface="微软雅黑"/>
+              </a:defRPr>
+            </a:pPr>
+            <a:r>
+              <a:rPr sz="3900" b="1">
+                <a:solidFill>
+                  <a:srgbClr val="FFFFFF"/>
+                </a:solidFill>
+                <a:latin typeface="微软雅黑"/>
+                <a:ea typeface="微软雅黑"/>
+                <a:cs typeface="微软雅黑"/>
+              </a:rPr>
+              <a:t>大语言模型后训练方法研究</a:t>
+            </a:r>
+          </a:p>
+        </p:txBody>
+      </p:sp>
+      <p:sp>
+        <p:nvSpPr>
+          <p:cNvPr id="17" name="">
+            <a:extLst xmlns:a="http://schemas.openxmlformats.org/drawingml/2006/main">
+              <a:ext uri="{FF2B5EF4-FFF2-40B4-BE49-F238E27FC236}">
+                <a16:creationId xmlns:a16="http://schemas.microsoft.com/office/drawing/2014/main" id="{53BE2CC9-9487-4E79-8427-9DF8C5790C51}"/>
+              </a:ext>
+            </a:extLst>
+          </p:cNvPr>
+          <p:cNvSpPr>
+            <a:spLocks xmlns:a="http://schemas.openxmlformats.org/drawingml/2006/main" noGrp="1"/>
+          </p:cNvSpPr>
+          <p:nvPr/>
+        </p:nvSpPr>
+        <p:spPr>
+          <a:xfrm xmlns:a="http://schemas.openxmlformats.org/drawingml/2006/main">
+            <a:off x="488918" y="4728115"/>
+            <a:ext cx="11214068" cy="680371"/>
+          </a:xfrm>
+          <a:prstGeom xmlns:a="http://schemas.openxmlformats.org/drawingml/2006/main" prst="rect">
+            <a:avLst/>
+          </a:prstGeom>
+          <a:noFill xmlns:a="http://schemas.openxmlformats.org/drawingml/2006/main"/>
+          <a:ln xmlns:a="http://schemas.openxmlformats.org/drawingml/2006/main" w="0">
+            <a:noFill/>
+            <a:prstDash val="solid"/>
+          </a:ln>
+        </p:spPr>
+        <p:txBody>
+          <a:bodyPr xmlns:a="http://schemas.openxmlformats.org/drawingml/2006/main" anchor="ctr"/>
+          <a:lstStyle xmlns:a="http://schemas.openxmlformats.org/drawingml/2006/main"/>
+          <a:p xmlns:a="http://schemas.openxmlformats.org/drawingml/2006/main">
+            <a:pPr algn="ctr">
+              <a:defRPr sz="2100">
+                <a:solidFill>
+                  <a:srgbClr val="075C79"/>
+                </a:solidFill>
+                <a:latin typeface="微软雅黑"/>
+                <a:ea typeface="微软雅黑"/>
+                <a:cs typeface="微软雅黑"/>
+              </a:defRPr>
+            </a:pPr>
+            <a:r>
+              <a:rPr sz="2100">
+                <a:solidFill>
+                  <a:srgbClr val="075C79"/>
+                </a:solidFill>
+                <a:latin typeface="微软雅黑"/>
+                <a:ea typeface="微软雅黑"/>
+                <a:cs typeface="微软雅黑"/>
+              </a:rPr>
+              <a:t>汇报人：张子琦</a:t>
+            </a:r>
+          </a:p>
+        </p:txBody>
+      </p:sp>
     </p:spTree>
     <p:extLst>
       <p:ext uri="{BB962C8B-B14F-4D97-AF65-F5344CB8AC3E}">
-        <p14:creationId xmlns:p14="http://schemas.microsoft.com/office/powerpoint/2010/main" val="212564508"/>
+        <p14:creationId xmlns:p14="http://schemas.microsoft.com/office/powerpoint/2010/main" val="967900549"/>
       </p:ext>
     </p:extLst>
   </p:cSld>
@@ -5581,7 +3014,7 @@
     <p:bg>
       <p:bgPr>
         <a:blipFill xmlns:a="http://schemas.openxmlformats.org/drawingml/2006/main" rotWithShape="1">
-          <a:blip xmlns:r="http://schemas.openxmlformats.org/officeDocument/2006/relationships" r:embed="R9439dbc77941416f">
+          <a:blip xmlns:r="http://schemas.openxmlformats.org/officeDocument/2006/relationships" r:embed="Re5a4b3609bae4463">
             <a:lum/>
           </a:blip>
           <a:srcRect l="0" t="0" r="0" b="0"/>
@@ -5609,7 +3042,7 @@
           <p:nvPr/>
         </p:nvPicPr>
         <p:blipFill>
-          <a:blip xmlns:r="http://schemas.openxmlformats.org/officeDocument/2006/relationships" xmlns:a="http://schemas.openxmlformats.org/drawingml/2006/main" r:embed="R7f1e349d850f4e00"/>
+          <a:blip xmlns:r="http://schemas.openxmlformats.org/officeDocument/2006/relationships" xmlns:a="http://schemas.openxmlformats.org/drawingml/2006/main" r:embed="R3aa8fe91c04f45b0"/>
           <a:stretch xmlns:a="http://schemas.openxmlformats.org/drawingml/2006/main">
             <a:fillRect l="0" t="0" r="0" b="0"/>
           </a:stretch>
@@ -5629,7 +3062,7 @@
           <p:cNvPr id="2" name="矩形 1">
             <a:extLst xmlns:a="http://schemas.openxmlformats.org/drawingml/2006/main">
               <a:ext uri="{FF2B5EF4-FFF2-40B4-BE49-F238E27FC236}">
-                <a16:creationId xmlns:a16="http://schemas.microsoft.com/office/drawing/2014/main" id="{996557EE-2E3A-4C5D-BE92-8EFE4C2B41C8}"/>
+                <a16:creationId xmlns:a16="http://schemas.microsoft.com/office/drawing/2014/main" id="{281F14AA-0664-4310-9BE3-735E9EC8FE33}"/>
               </a:ext>
             </a:extLst>
           </p:cNvPr>
@@ -5685,7 +3118,7 @@
           <p:cNvPr id="3" name="矩形 2">
             <a:extLst xmlns:a="http://schemas.openxmlformats.org/drawingml/2006/main">
               <a:ext uri="{FF2B5EF4-FFF2-40B4-BE49-F238E27FC236}">
-                <a16:creationId xmlns:a16="http://schemas.microsoft.com/office/drawing/2014/main" id="{8835FDCE-B588-4B69-8B25-544D19A63CDF}"/>
+                <a16:creationId xmlns:a16="http://schemas.microsoft.com/office/drawing/2014/main" id="{561AFED2-BD2C-412E-9178-9F0EA77A6517}"/>
               </a:ext>
             </a:extLst>
           </p:cNvPr>
@@ -5745,7 +3178,7 @@
           <p:cNvPr id="4" name="直接连接符 3">
             <a:extLst xmlns:a="http://schemas.openxmlformats.org/drawingml/2006/main">
               <a:ext uri="{FF2B5EF4-FFF2-40B4-BE49-F238E27FC236}">
-                <a16:creationId xmlns:a16="http://schemas.microsoft.com/office/drawing/2014/main" id="{6E0ACAF4-158C-48CE-B988-45A79382A66D}"/>
+                <a16:creationId xmlns:a16="http://schemas.microsoft.com/office/drawing/2014/main" id="{E667425E-0DF7-4608-B119-42BE64DBCE5D}"/>
               </a:ext>
             </a:extLst>
           </p:cNvPr>
@@ -5788,7 +3221,7 @@
           <p:cNvPr id="5" name="标题 1">
             <a:extLst xmlns:a="http://schemas.openxmlformats.org/drawingml/2006/main">
               <a:ext uri="{FF2B5EF4-FFF2-40B4-BE49-F238E27FC236}">
-                <a16:creationId xmlns:a16="http://schemas.microsoft.com/office/drawing/2014/main" id="{507266C3-00D8-4E75-ACEE-EB41A0A6D737}"/>
+                <a16:creationId xmlns:a16="http://schemas.microsoft.com/office/drawing/2014/main" id="{FAA59BB3-0E2D-4DFE-AD1D-C850077D83CA}"/>
               </a:ext>
             </a:extLst>
           </p:cNvPr>
@@ -5874,7 +3307,7 @@
           <p:cNvPr id="8" name="直接连接符 7">
             <a:extLst xmlns:a="http://schemas.openxmlformats.org/drawingml/2006/main">
               <a:ext uri="{FF2B5EF4-FFF2-40B4-BE49-F238E27FC236}">
-                <a16:creationId xmlns:a16="http://schemas.microsoft.com/office/drawing/2014/main" id="{66258522-D3B9-446E-B472-AF61D804CC8F}"/>
+                <a16:creationId xmlns:a16="http://schemas.microsoft.com/office/drawing/2014/main" id="{3B88E8C6-B8F2-4E15-A56F-79338DC16CF0}"/>
               </a:ext>
             </a:extLst>
           </p:cNvPr>
@@ -5921,7 +3354,7 @@
           <p:nvPr/>
         </p:nvPicPr>
         <p:blipFill>
-          <a:blip xmlns:r="http://schemas.openxmlformats.org/officeDocument/2006/relationships" xmlns:a="http://schemas.openxmlformats.org/drawingml/2006/main" r:embed="Re211f9ec532946b4"/>
+          <a:blip xmlns:r="http://schemas.openxmlformats.org/officeDocument/2006/relationships" xmlns:a="http://schemas.openxmlformats.org/drawingml/2006/main" r:embed="R99ee718d7f5c495b"/>
           <a:stretch xmlns:a="http://schemas.openxmlformats.org/drawingml/2006/main">
             <a:fillRect l="0" t="0" r="0" b="0"/>
           </a:stretch>
@@ -5938,66 +3371,10 @@
       </p:pic>
       <p:sp>
         <p:nvSpPr>
-          <p:cNvPr id="9" name="副标题 2">
-            <a:extLst xmlns:a="http://schemas.openxmlformats.org/drawingml/2006/main">
-              <a:ext uri="{FF2B5EF4-FFF2-40B4-BE49-F238E27FC236}">
-                <a16:creationId xmlns:a16="http://schemas.microsoft.com/office/drawing/2014/main" id="{E8115814-C505-4275-A772-980D4A1C044A}"/>
-              </a:ext>
-            </a:extLst>
-          </p:cNvPr>
-          <p:cNvSpPr>
-            <a:spLocks xmlns:a="http://schemas.openxmlformats.org/drawingml/2006/main" noGrp="1"/>
-          </p:cNvSpPr>
-          <p:nvPr>
-            <p:ph type="subTitle" idx="1"/>
-          </p:nvPr>
-        </p:nvSpPr>
-        <p:spPr>
-          <a:xfrm xmlns:a="http://schemas.openxmlformats.org/drawingml/2006/main">
-            <a:off x="0" y="4758488"/>
-            <a:ext cx="12192000" cy="680085"/>
-          </a:xfrm>
-        </p:spPr>
-        <p:txBody>
-          <a:bodyPr xmlns:a="http://schemas.openxmlformats.org/drawingml/2006/main">
-            <a:normAutofit/>
-          </a:bodyPr>
-          <a:lstStyle xmlns:a="http://schemas.openxmlformats.org/drawingml/2006/main"/>
-          <a:p xmlns:a="http://schemas.openxmlformats.org/drawingml/2006/main">
-            <a:pPr marL="0" indent="0" algn="ctr">
-              <a:buNone/>
-            </a:pPr>
-            <a:r>
-              <a:rPr sz="2400" b="1">
-                <a:solidFill>
-                  <a:srgbClr val="005376"/>
-                </a:solidFill>
-                <a:latin typeface="微软雅黑"/>
-                <a:ea typeface="微软雅黑"/>
-                <a:cs typeface="微软雅黑"/>
-              </a:rPr>
-              <a:t>汇报人：</a:t>
-            </a:r>
-            <a:r>
-              <a:rPr sz="2400" b="1">
-                <a:solidFill>
-                  <a:srgbClr val="005376"/>
-                </a:solidFill>
-                <a:latin typeface="微软雅黑"/>
-                <a:ea typeface="微软雅黑"/>
-                <a:cs typeface="微软雅黑"/>
-              </a:rPr>
-              <a:t>xxx</a:t>
-            </a:r>
-          </a:p>
-        </p:txBody>
-      </p:sp>
-      <p:sp>
-        <p:nvSpPr>
           <p:cNvPr id="12" name="副标题 2">
             <a:extLst xmlns:a="http://schemas.openxmlformats.org/drawingml/2006/main">
               <a:ext uri="{FF2B5EF4-FFF2-40B4-BE49-F238E27FC236}">
-                <a16:creationId xmlns:a16="http://schemas.microsoft.com/office/drawing/2014/main" id="{2DE40953-D626-4B26-8E63-E49B1A28F7F1}"/>
+                <a16:creationId xmlns:a16="http://schemas.microsoft.com/office/drawing/2014/main" id="{2800F83A-61B1-47DD-808F-264D672FA511}"/>
               </a:ext>
             </a:extLst>
           </p:cNvPr>
@@ -6255,14 +3632,14 @@
       </p:sp>
       <p:pic>
         <p:nvPicPr>
-          <p:cNvPr id="43" name="图片 5"/>
+          <p:cNvPr id="42" name="图片 5"/>
           <p:cNvPicPr>
             <a:picLocks xmlns:a="http://schemas.openxmlformats.org/drawingml/2006/main" noChangeAspect="1"/>
           </p:cNvPicPr>
           <p:nvPr/>
         </p:nvPicPr>
         <p:blipFill>
-          <a:blip xmlns:r="http://schemas.openxmlformats.org/officeDocument/2006/relationships" xmlns:a="http://schemas.openxmlformats.org/drawingml/2006/main" r:embed="R44a1bc25614d4bef"/>
+          <a:blip xmlns:r="http://schemas.openxmlformats.org/officeDocument/2006/relationships" xmlns:a="http://schemas.openxmlformats.org/drawingml/2006/main" r:embed="R9a39c09e89cd4347"/>
           <a:stretch xmlns:a="http://schemas.openxmlformats.org/drawingml/2006/main">
             <a:fillRect l="0" t="0" r="0" b="0"/>
           </a:stretch>
@@ -6529,7 +3906,7 @@
           <p:cNvPr id="20" name="">
             <a:extLst xmlns:a="http://schemas.openxmlformats.org/drawingml/2006/main">
               <a:ext uri="{FF2B5EF4-FFF2-40B4-BE49-F238E27FC236}">
-                <a16:creationId xmlns:a16="http://schemas.microsoft.com/office/drawing/2014/main" id="{22E1C76B-DB6D-4F37-926D-B1F266E3A992}"/>
+                <a16:creationId xmlns:a16="http://schemas.microsoft.com/office/drawing/2014/main" id="{346E35BD-7131-4049-93B7-634F31A64D1C}"/>
               </a:ext>
             </a:extLst>
           </p:cNvPr>
@@ -6562,7 +3939,7 @@
           <p:cNvPr id="21" name="">
             <a:extLst xmlns:a="http://schemas.openxmlformats.org/drawingml/2006/main">
               <a:ext uri="{FF2B5EF4-FFF2-40B4-BE49-F238E27FC236}">
-                <a16:creationId xmlns:a16="http://schemas.microsoft.com/office/drawing/2014/main" id="{1B939888-9A09-4EED-97DC-D6B72690AE93}"/>
+                <a16:creationId xmlns:a16="http://schemas.microsoft.com/office/drawing/2014/main" id="{DBCA4565-3503-4559-90A8-4286AEB61B4F}"/>
               </a:ext>
             </a:extLst>
           </p:cNvPr>
@@ -6618,7 +3995,7 @@
           <p:cNvPr id="22" name="">
             <a:extLst xmlns:a="http://schemas.openxmlformats.org/drawingml/2006/main">
               <a:ext uri="{FF2B5EF4-FFF2-40B4-BE49-F238E27FC236}">
-                <a16:creationId xmlns:a16="http://schemas.microsoft.com/office/drawing/2014/main" id="{26C2BC9B-CAAB-4465-8115-6B753464AD25}"/>
+                <a16:creationId xmlns:a16="http://schemas.microsoft.com/office/drawing/2014/main" id="{03EE884D-22BA-4D92-BE85-3D7F02579680}"/>
               </a:ext>
             </a:extLst>
           </p:cNvPr>
@@ -6651,7 +4028,7 @@
           <p:cNvPr id="23" name="">
             <a:extLst xmlns:a="http://schemas.openxmlformats.org/drawingml/2006/main">
               <a:ext uri="{FF2B5EF4-FFF2-40B4-BE49-F238E27FC236}">
-                <a16:creationId xmlns:a16="http://schemas.microsoft.com/office/drawing/2014/main" id="{B2549C4A-A15D-4432-8ED4-77E87E8E47A7}"/>
+                <a16:creationId xmlns:a16="http://schemas.microsoft.com/office/drawing/2014/main" id="{D469F24A-CB0A-470A-A400-195368DAA40C}"/>
               </a:ext>
             </a:extLst>
           </p:cNvPr>
@@ -6686,7 +4063,7 @@
           <p:cNvPr id="24" name="">
             <a:extLst xmlns:a="http://schemas.openxmlformats.org/drawingml/2006/main">
               <a:ext uri="{FF2B5EF4-FFF2-40B4-BE49-F238E27FC236}">
-                <a16:creationId xmlns:a16="http://schemas.microsoft.com/office/drawing/2014/main" id="{DF1159EE-95D6-44FF-A6D6-C732C276309D}"/>
+                <a16:creationId xmlns:a16="http://schemas.microsoft.com/office/drawing/2014/main" id="{AF57AB83-B952-41A7-AE58-0046C77D4528}"/>
               </a:ext>
             </a:extLst>
           </p:cNvPr>
@@ -6719,7 +4096,7 @@
           <a:bodyPr xmlns:a="http://schemas.openxmlformats.org/drawingml/2006/main"/>
           <a:lstStyle xmlns:a="http://schemas.openxmlformats.org/drawingml/2006/main"/>
           <a:p xmlns:a="http://schemas.openxmlformats.org/drawingml/2006/main">
-            <a:pPr>
+            <a:pPr algn="ctr">
               <a:defRPr sz="1350" b="1">
                 <a:solidFill>
                   <a:srgbClr val="FFFFFF"/>
@@ -6748,7 +4125,7 @@
           <p:cNvPr id="25" name="">
             <a:extLst xmlns:a="http://schemas.openxmlformats.org/drawingml/2006/main">
               <a:ext uri="{FF2B5EF4-FFF2-40B4-BE49-F238E27FC236}">
-                <a16:creationId xmlns:a16="http://schemas.microsoft.com/office/drawing/2014/main" id="{0452D61A-1DCC-49E4-A238-F7C732CE6E9E}"/>
+                <a16:creationId xmlns:a16="http://schemas.microsoft.com/office/drawing/2014/main" id="{1A87D366-963B-45C5-B7F9-D2D77E0030B0}"/>
               </a:ext>
             </a:extLst>
           </p:cNvPr>
@@ -6901,7 +4278,7 @@
           <p:cNvPr id="26" name="">
             <a:extLst xmlns:a="http://schemas.openxmlformats.org/drawingml/2006/main">
               <a:ext uri="{FF2B5EF4-FFF2-40B4-BE49-F238E27FC236}">
-                <a16:creationId xmlns:a16="http://schemas.microsoft.com/office/drawing/2014/main" id="{1B2CACC8-24C1-4512-BA0A-A6D4C0899E5D}"/>
+                <a16:creationId xmlns:a16="http://schemas.microsoft.com/office/drawing/2014/main" id="{A5B68979-EFC4-43EE-90C5-F3AD6B027A23}"/>
               </a:ext>
             </a:extLst>
           </p:cNvPr>
@@ -6936,7 +4313,7 @@
           <p:cNvPr id="27" name="">
             <a:extLst xmlns:a="http://schemas.openxmlformats.org/drawingml/2006/main">
               <a:ext uri="{FF2B5EF4-FFF2-40B4-BE49-F238E27FC236}">
-                <a16:creationId xmlns:a16="http://schemas.microsoft.com/office/drawing/2014/main" id="{744CD4C1-DD25-4086-A680-5A4785A351A2}"/>
+                <a16:creationId xmlns:a16="http://schemas.microsoft.com/office/drawing/2014/main" id="{A5B58AFA-920E-487D-A17F-A990F3C66C63}"/>
               </a:ext>
             </a:extLst>
           </p:cNvPr>
@@ -6969,7 +4346,7 @@
           <a:bodyPr xmlns:a="http://schemas.openxmlformats.org/drawingml/2006/main"/>
           <a:lstStyle xmlns:a="http://schemas.openxmlformats.org/drawingml/2006/main"/>
           <a:p xmlns:a="http://schemas.openxmlformats.org/drawingml/2006/main">
-            <a:pPr>
+            <a:pPr algn="ctr">
               <a:defRPr sz="1350" b="1">
                 <a:solidFill>
                   <a:srgbClr val="FFFFFF"/>
@@ -6998,7 +4375,7 @@
           <p:cNvPr id="28" name="">
             <a:extLst xmlns:a="http://schemas.openxmlformats.org/drawingml/2006/main">
               <a:ext uri="{FF2B5EF4-FFF2-40B4-BE49-F238E27FC236}">
-                <a16:creationId xmlns:a16="http://schemas.microsoft.com/office/drawing/2014/main" id="{C852F534-8FC1-4F5D-AD59-2BBFD66059F0}"/>
+                <a16:creationId xmlns:a16="http://schemas.microsoft.com/office/drawing/2014/main" id="{54D40A98-B935-4B88-AB56-3E1F534BEC9E}"/>
               </a:ext>
             </a:extLst>
           </p:cNvPr>
@@ -7151,7 +4528,7 @@
           <p:cNvPr id="29" name="">
             <a:extLst xmlns:a="http://schemas.openxmlformats.org/drawingml/2006/main">
               <a:ext uri="{FF2B5EF4-FFF2-40B4-BE49-F238E27FC236}">
-                <a16:creationId xmlns:a16="http://schemas.microsoft.com/office/drawing/2014/main" id="{23E28C99-F166-4507-9B3D-16B458264283}"/>
+                <a16:creationId xmlns:a16="http://schemas.microsoft.com/office/drawing/2014/main" id="{814FE092-B5EB-44B2-91CD-4566C35BED3E}"/>
               </a:ext>
             </a:extLst>
           </p:cNvPr>
@@ -7186,7 +4563,7 @@
           <p:cNvPr id="30" name="">
             <a:extLst xmlns:a="http://schemas.openxmlformats.org/drawingml/2006/main">
               <a:ext uri="{FF2B5EF4-FFF2-40B4-BE49-F238E27FC236}">
-                <a16:creationId xmlns:a16="http://schemas.microsoft.com/office/drawing/2014/main" id="{BF80E3D2-99CE-4CD2-AF20-1AAF9BC3C765}"/>
+                <a16:creationId xmlns:a16="http://schemas.microsoft.com/office/drawing/2014/main" id="{671F5885-1A1A-4D55-96E4-F9729ACA5649}"/>
               </a:ext>
             </a:extLst>
           </p:cNvPr>
@@ -7219,7 +4596,7 @@
           <a:bodyPr xmlns:a="http://schemas.openxmlformats.org/drawingml/2006/main"/>
           <a:lstStyle xmlns:a="http://schemas.openxmlformats.org/drawingml/2006/main"/>
           <a:p xmlns:a="http://schemas.openxmlformats.org/drawingml/2006/main">
-            <a:pPr>
+            <a:pPr algn="ctr">
               <a:defRPr sz="1350" b="1">
                 <a:solidFill>
                   <a:srgbClr val="FFFFFF"/>
@@ -7248,7 +4625,7 @@
           <p:cNvPr id="31" name="">
             <a:extLst xmlns:a="http://schemas.openxmlformats.org/drawingml/2006/main">
               <a:ext uri="{FF2B5EF4-FFF2-40B4-BE49-F238E27FC236}">
-                <a16:creationId xmlns:a16="http://schemas.microsoft.com/office/drawing/2014/main" id="{3C718F82-25EE-4BF8-946D-816474980FBE}"/>
+                <a16:creationId xmlns:a16="http://schemas.microsoft.com/office/drawing/2014/main" id="{C11DB12C-6F0B-4F6E-AF4C-E5AC362F70C4}"/>
               </a:ext>
             </a:extLst>
           </p:cNvPr>
@@ -7401,7 +4778,7 @@
           <p:cNvPr id="32" name="">
             <a:extLst xmlns:a="http://schemas.openxmlformats.org/drawingml/2006/main">
               <a:ext uri="{FF2B5EF4-FFF2-40B4-BE49-F238E27FC236}">
-                <a16:creationId xmlns:a16="http://schemas.microsoft.com/office/drawing/2014/main" id="{05736710-E8DA-4BDC-829D-EA0E1FE963A1}"/>
+                <a16:creationId xmlns:a16="http://schemas.microsoft.com/office/drawing/2014/main" id="{CA37B866-FBD0-4166-A653-6DD36BD8ABEF}"/>
               </a:ext>
             </a:extLst>
           </p:cNvPr>
@@ -7436,7 +4813,7 @@
           <p:cNvPr id="33" name="">
             <a:extLst xmlns:a="http://schemas.openxmlformats.org/drawingml/2006/main">
               <a:ext uri="{FF2B5EF4-FFF2-40B4-BE49-F238E27FC236}">
-                <a16:creationId xmlns:a16="http://schemas.microsoft.com/office/drawing/2014/main" id="{B256A3DC-C2DD-4629-B6F2-82E9B9E4F9CE}"/>
+                <a16:creationId xmlns:a16="http://schemas.microsoft.com/office/drawing/2014/main" id="{A665F5AF-C503-4FDB-9014-D11F82DAAA70}"/>
               </a:ext>
             </a:extLst>
           </p:cNvPr>
@@ -7463,7 +4840,7 @@
           <a:bodyPr xmlns:a="http://schemas.openxmlformats.org/drawingml/2006/main"/>
           <a:lstStyle xmlns:a="http://schemas.openxmlformats.org/drawingml/2006/main"/>
           <a:p xmlns:a="http://schemas.openxmlformats.org/drawingml/2006/main">
-            <a:pPr>
+            <a:pPr algn="ctr">
               <a:defRPr sz="1350" b="1">
                 <a:solidFill>
                   <a:srgbClr val="075C79"/>
@@ -7490,7 +4867,7 @@
     </p:spTree>
     <p:extLst>
       <p:ext uri="{BB962C8B-B14F-4D97-AF65-F5344CB8AC3E}">
-        <p14:creationId xmlns:p14="http://schemas.microsoft.com/office/powerpoint/2010/main" val="1215593738"/>
+        <p14:creationId xmlns:p14="http://schemas.microsoft.com/office/powerpoint/2010/main" val="1973566765"/>
       </p:ext>
     </p:extLst>
   </p:cSld>
@@ -7514,7 +4891,7 @@
           <p:cNvPr id="18" name="直角三角形 17">
             <a:extLst xmlns:a="http://schemas.openxmlformats.org/drawingml/2006/main">
               <a:ext uri="{FF2B5EF4-FFF2-40B4-BE49-F238E27FC236}">
-                <a16:creationId xmlns:a16="http://schemas.microsoft.com/office/drawing/2014/main" id="{577CB455-2695-46D6-A474-03F032677799}"/>
+                <a16:creationId xmlns:a16="http://schemas.microsoft.com/office/drawing/2014/main" id="{C1644077-3F33-4567-95EE-B69B85A9E358}"/>
               </a:ext>
             </a:extLst>
           </p:cNvPr>
@@ -7572,7 +4949,7 @@
           <p:cNvPr id="19" name="直角三角形 18">
             <a:extLst xmlns:a="http://schemas.openxmlformats.org/drawingml/2006/main">
               <a:ext uri="{FF2B5EF4-FFF2-40B4-BE49-F238E27FC236}">
-                <a16:creationId xmlns:a16="http://schemas.microsoft.com/office/drawing/2014/main" id="{15CC32B7-1F35-4C8F-B8C5-60B8A54F07B5}"/>
+                <a16:creationId xmlns:a16="http://schemas.microsoft.com/office/drawing/2014/main" id="{D11670B4-5E22-472C-A4B9-C36CF21148A8}"/>
               </a:ext>
             </a:extLst>
           </p:cNvPr>
@@ -7630,7 +5007,7 @@
           <p:cNvPr id="20" name="圆角矩形 2">
             <a:extLst xmlns:a="http://schemas.openxmlformats.org/drawingml/2006/main">
               <a:ext uri="{FF2B5EF4-FFF2-40B4-BE49-F238E27FC236}">
-                <a16:creationId xmlns:a16="http://schemas.microsoft.com/office/drawing/2014/main" id="{C1D0E857-9954-44C5-ADD2-D1818D3B7222}"/>
+                <a16:creationId xmlns:a16="http://schemas.microsoft.com/office/drawing/2014/main" id="{7149E51A-56C0-44DE-95AA-F3CD30CD99FD}"/>
               </a:ext>
             </a:extLst>
           </p:cNvPr>
@@ -7690,7 +5067,7 @@
           <p:cNvPr id="21" name="对角圆角矩形 80">
             <a:extLst xmlns:a="http://schemas.openxmlformats.org/drawingml/2006/main">
               <a:ext uri="{FF2B5EF4-FFF2-40B4-BE49-F238E27FC236}">
-                <a16:creationId xmlns:a16="http://schemas.microsoft.com/office/drawing/2014/main" id="{B0EA11AD-3B83-46B6-8E8A-4EEEACEAA6F0}"/>
+                <a16:creationId xmlns:a16="http://schemas.microsoft.com/office/drawing/2014/main" id="{76C0EAF4-7916-45F9-B297-9E6ACC847D21}"/>
               </a:ext>
             </a:extLst>
           </p:cNvPr>
@@ -7764,7 +5141,7 @@
           <p:cNvPr id="22" name="圆角矩形 2">
             <a:extLst xmlns:a="http://schemas.openxmlformats.org/drawingml/2006/main">
               <a:ext uri="{FF2B5EF4-FFF2-40B4-BE49-F238E27FC236}">
-                <a16:creationId xmlns:a16="http://schemas.microsoft.com/office/drawing/2014/main" id="{3B6F4E8A-E84E-460C-A559-6705DC7F0B2A}"/>
+                <a16:creationId xmlns:a16="http://schemas.microsoft.com/office/drawing/2014/main" id="{8E958127-01EF-4CD6-A0D5-48DC7BD85458}"/>
               </a:ext>
             </a:extLst>
           </p:cNvPr>
@@ -7824,7 +5201,7 @@
           <p:cNvPr id="23" name="对角圆角矩形 80">
             <a:extLst xmlns:a="http://schemas.openxmlformats.org/drawingml/2006/main">
               <a:ext uri="{FF2B5EF4-FFF2-40B4-BE49-F238E27FC236}">
-                <a16:creationId xmlns:a16="http://schemas.microsoft.com/office/drawing/2014/main" id="{BF730531-8C91-4A99-B851-B6A02665B6E2}"/>
+                <a16:creationId xmlns:a16="http://schemas.microsoft.com/office/drawing/2014/main" id="{DA184691-E7F4-435B-9979-BC8A9DC34DDE}"/>
               </a:ext>
             </a:extLst>
           </p:cNvPr>
@@ -7898,7 +5275,7 @@
           <p:cNvPr id="24" name="直角三角形 23">
             <a:extLst xmlns:a="http://schemas.openxmlformats.org/drawingml/2006/main">
               <a:ext uri="{FF2B5EF4-FFF2-40B4-BE49-F238E27FC236}">
-                <a16:creationId xmlns:a16="http://schemas.microsoft.com/office/drawing/2014/main" id="{E57BD96B-59A7-4A57-8C60-7CE13A16F531}"/>
+                <a16:creationId xmlns:a16="http://schemas.microsoft.com/office/drawing/2014/main" id="{0348DDAC-F469-406E-908C-242F4B0042F5}"/>
               </a:ext>
             </a:extLst>
           </p:cNvPr>
@@ -7956,7 +5333,7 @@
           <p:cNvPr id="25" name="圆角矩形 2">
             <a:extLst xmlns:a="http://schemas.openxmlformats.org/drawingml/2006/main">
               <a:ext uri="{FF2B5EF4-FFF2-40B4-BE49-F238E27FC236}">
-                <a16:creationId xmlns:a16="http://schemas.microsoft.com/office/drawing/2014/main" id="{94FF7B1A-B7E0-4D6E-BC6C-FCA8BCF8016B}"/>
+                <a16:creationId xmlns:a16="http://schemas.microsoft.com/office/drawing/2014/main" id="{4154454D-19A9-48C2-9C73-BC20753A40EB}"/>
               </a:ext>
             </a:extLst>
           </p:cNvPr>
@@ -8016,7 +5393,7 @@
           <p:cNvPr id="26" name="对角圆角矩形 80">
             <a:extLst xmlns:a="http://schemas.openxmlformats.org/drawingml/2006/main">
               <a:ext uri="{FF2B5EF4-FFF2-40B4-BE49-F238E27FC236}">
-                <a16:creationId xmlns:a16="http://schemas.microsoft.com/office/drawing/2014/main" id="{D0774957-4E83-4F3D-B816-536F922C0DAF}"/>
+                <a16:creationId xmlns:a16="http://schemas.microsoft.com/office/drawing/2014/main" id="{BB13481D-C289-45E9-B8EE-387537CA7916}"/>
               </a:ext>
             </a:extLst>
           </p:cNvPr>
@@ -8087,82 +5464,10 @@
       </p:sp>
       <p:sp>
         <p:nvSpPr>
-          <p:cNvPr id="27" name="灯片编号占位符 13">
-            <a:extLst xmlns:a="http://schemas.openxmlformats.org/drawingml/2006/main">
-              <a:ext uri="{FF2B5EF4-FFF2-40B4-BE49-F238E27FC236}">
-                <a16:creationId xmlns:a16="http://schemas.microsoft.com/office/drawing/2014/main" id="{200D2263-4B45-4C9C-8822-374F14D33B2E}"/>
-              </a:ext>
-            </a:extLst>
-          </p:cNvPr>
-          <p:cNvSpPr>
-            <a:spLocks xmlns:a="http://schemas.openxmlformats.org/drawingml/2006/main" noGrp="1"/>
-          </p:cNvSpPr>
-          <p:nvPr>
-            <p:ph type="sldNum" idx="12"/>
-          </p:nvPr>
-        </p:nvSpPr>
-        <p:spPr>
-          <a:xfrm xmlns:a="http://schemas.openxmlformats.org/drawingml/2006/main">
-            <a:off x="9375147" y="6578600"/>
-            <a:ext cx="2743200" cy="279400"/>
-          </a:xfrm>
-        </p:spPr>
-        <p:txBody>
-          <a:bodyPr xmlns:a="http://schemas.openxmlformats.org/drawingml/2006/main"/>
-          <a:lstStyle xmlns:a="http://schemas.openxmlformats.org/drawingml/2006/main"/>
-          <a:p xmlns:a="http://schemas.openxmlformats.org/drawingml/2006/main">
-            <a:fld id="{30394428-F1DC-E5F6-DB0C-7DE31F3D8A23}" type="slidenum">
-              <a:t>11</a:t>
-            </a:fld>
-            <a:endParaRPr/>
-          </a:p>
-        </p:txBody>
-      </p:sp>
-      <p:sp>
-        <p:nvSpPr>
-          <p:cNvPr id="2" name="标题 1">
-            <a:extLst xmlns:a="http://schemas.openxmlformats.org/drawingml/2006/main">
-              <a:ext uri="{FF2B5EF4-FFF2-40B4-BE49-F238E27FC236}">
-                <a16:creationId xmlns:a16="http://schemas.microsoft.com/office/drawing/2014/main" id="{4510B6F7-EE4D-4CDD-92F2-BD2560AD0552}"/>
-              </a:ext>
-            </a:extLst>
-          </p:cNvPr>
-          <p:cNvSpPr>
-            <a:spLocks xmlns:a="http://schemas.openxmlformats.org/drawingml/2006/main" noGrp="1"/>
-          </p:cNvSpPr>
-          <p:nvPr>
-            <p:ph type="title" idx="0"/>
-          </p:nvPr>
-        </p:nvSpPr>
-        <p:spPr>
-          <a:xfrm xmlns:a="http://schemas.openxmlformats.org/drawingml/2006/main">
-            <a:off x="482600" y="136525"/>
-            <a:ext cx="11214100" cy="615159"/>
-          </a:xfrm>
-        </p:spPr>
-        <p:txBody>
-          <a:bodyPr xmlns:a="http://schemas.openxmlformats.org/drawingml/2006/main">
-            <a:noAutofit/>
-          </a:bodyPr>
-          <a:lstStyle xmlns:a="http://schemas.openxmlformats.org/drawingml/2006/main"/>
-          <a:p xmlns:a="http://schemas.openxmlformats.org/drawingml/2006/main">
-            <a:r>
-              <a:rPr sz="2800" b="1">
-                <a:latin typeface="微软雅黑"/>
-                <a:ea typeface="微软雅黑"/>
-                <a:cs typeface="微软雅黑"/>
-              </a:rPr>
-              <a:t/>
-            </a:r>
-          </a:p>
-        </p:txBody>
-      </p:sp>
-      <p:sp>
-        <p:nvSpPr>
           <p:cNvPr id="28" name="">
             <a:extLst xmlns:a="http://schemas.openxmlformats.org/drawingml/2006/main">
               <a:ext uri="{FF2B5EF4-FFF2-40B4-BE49-F238E27FC236}">
-                <a16:creationId xmlns:a16="http://schemas.microsoft.com/office/drawing/2014/main" id="{94CD4947-155E-4D02-9C6F-C4F87BCC09C6}"/>
+                <a16:creationId xmlns:a16="http://schemas.microsoft.com/office/drawing/2014/main" id="{DE277C09-985B-4E32-9E2C-FF2F9B86D1CD}"/>
               </a:ext>
             </a:extLst>
           </p:cNvPr>
@@ -8195,7 +5500,7 @@
           <p:cNvPr id="29" name="">
             <a:extLst xmlns:a="http://schemas.openxmlformats.org/drawingml/2006/main">
               <a:ext uri="{FF2B5EF4-FFF2-40B4-BE49-F238E27FC236}">
-                <a16:creationId xmlns:a16="http://schemas.microsoft.com/office/drawing/2014/main" id="{79865A89-A406-4D5C-AC83-A2878B698EFC}"/>
+                <a16:creationId xmlns:a16="http://schemas.microsoft.com/office/drawing/2014/main" id="{E947A102-4607-4F29-948F-58692B5D9C9B}"/>
               </a:ext>
             </a:extLst>
           </p:cNvPr>
@@ -8251,7 +5556,7 @@
           <p:cNvPr id="30" name="">
             <a:extLst xmlns:a="http://schemas.openxmlformats.org/drawingml/2006/main">
               <a:ext uri="{FF2B5EF4-FFF2-40B4-BE49-F238E27FC236}">
-                <a16:creationId xmlns:a16="http://schemas.microsoft.com/office/drawing/2014/main" id="{99621379-0718-4573-B8C5-EA105C60F5E6}"/>
+                <a16:creationId xmlns:a16="http://schemas.microsoft.com/office/drawing/2014/main" id="{1C78B78E-E761-412D-AFB6-6308117EE382}"/>
               </a:ext>
             </a:extLst>
           </p:cNvPr>
@@ -8284,7 +5589,7 @@
           <p:cNvPr id="31" name="">
             <a:extLst xmlns:a="http://schemas.openxmlformats.org/drawingml/2006/main">
               <a:ext uri="{FF2B5EF4-FFF2-40B4-BE49-F238E27FC236}">
-                <a16:creationId xmlns:a16="http://schemas.microsoft.com/office/drawing/2014/main" id="{B1C59350-D677-460B-82B0-66EDADB5139C}"/>
+                <a16:creationId xmlns:a16="http://schemas.microsoft.com/office/drawing/2014/main" id="{E260AE56-7EA8-4438-8B55-54B41A177EFD}"/>
               </a:ext>
             </a:extLst>
           </p:cNvPr>
@@ -8340,7 +5645,7 @@
           <p:cNvPr id="32" name="">
             <a:extLst xmlns:a="http://schemas.openxmlformats.org/drawingml/2006/main">
               <a:ext uri="{FF2B5EF4-FFF2-40B4-BE49-F238E27FC236}">
-                <a16:creationId xmlns:a16="http://schemas.microsoft.com/office/drawing/2014/main" id="{FA54D2AA-9F46-4E72-BF68-BF3AFDA61D6B}"/>
+                <a16:creationId xmlns:a16="http://schemas.microsoft.com/office/drawing/2014/main" id="{6AA30660-3F66-4F7C-9ED2-22C049F338E1}"/>
               </a:ext>
             </a:extLst>
           </p:cNvPr>
@@ -8375,7 +5680,7 @@
           <p:cNvPr id="33" name="">
             <a:extLst xmlns:a="http://schemas.openxmlformats.org/drawingml/2006/main">
               <a:ext uri="{FF2B5EF4-FFF2-40B4-BE49-F238E27FC236}">
-                <a16:creationId xmlns:a16="http://schemas.microsoft.com/office/drawing/2014/main" id="{0793B771-75ED-4AEC-8A10-598FABFD9240}"/>
+                <a16:creationId xmlns:a16="http://schemas.microsoft.com/office/drawing/2014/main" id="{3027104D-A0A3-429A-8A51-75453040223F}"/>
               </a:ext>
             </a:extLst>
           </p:cNvPr>
@@ -8408,7 +5713,7 @@
           <a:bodyPr xmlns:a="http://schemas.openxmlformats.org/drawingml/2006/main"/>
           <a:lstStyle xmlns:a="http://schemas.openxmlformats.org/drawingml/2006/main"/>
           <a:p xmlns:a="http://schemas.openxmlformats.org/drawingml/2006/main">
-            <a:pPr>
+            <a:pPr algn="ctr">
               <a:defRPr sz="1350" b="1">
                 <a:solidFill>
                   <a:srgbClr val="FFFFFF"/>
@@ -8437,7 +5742,7 @@
           <p:cNvPr id="34" name="">
             <a:extLst xmlns:a="http://schemas.openxmlformats.org/drawingml/2006/main">
               <a:ext uri="{FF2B5EF4-FFF2-40B4-BE49-F238E27FC236}">
-                <a16:creationId xmlns:a16="http://schemas.microsoft.com/office/drawing/2014/main" id="{1CE6F5AC-1E4A-4B12-83E7-11378CC1906C}"/>
+                <a16:creationId xmlns:a16="http://schemas.microsoft.com/office/drawing/2014/main" id="{AB8A1DCC-407A-4C20-90D0-41A3F3EC3496}"/>
               </a:ext>
             </a:extLst>
           </p:cNvPr>
@@ -8567,7 +5872,7 @@
           <p:cNvPr id="35" name="">
             <a:extLst xmlns:a="http://schemas.openxmlformats.org/drawingml/2006/main">
               <a:ext uri="{FF2B5EF4-FFF2-40B4-BE49-F238E27FC236}">
-                <a16:creationId xmlns:a16="http://schemas.microsoft.com/office/drawing/2014/main" id="{02BFC4D4-A6E6-4EED-A279-5F87CC5F404E}"/>
+                <a16:creationId xmlns:a16="http://schemas.microsoft.com/office/drawing/2014/main" id="{DCE24C13-5464-4871-B81C-7AC497BF605E}"/>
               </a:ext>
             </a:extLst>
           </p:cNvPr>
@@ -8602,7 +5907,7 @@
           <p:cNvPr id="36" name="">
             <a:extLst xmlns:a="http://schemas.openxmlformats.org/drawingml/2006/main">
               <a:ext uri="{FF2B5EF4-FFF2-40B4-BE49-F238E27FC236}">
-                <a16:creationId xmlns:a16="http://schemas.microsoft.com/office/drawing/2014/main" id="{ADCA6A8A-C296-4CAF-9736-F3FF33163691}"/>
+                <a16:creationId xmlns:a16="http://schemas.microsoft.com/office/drawing/2014/main" id="{6A2561DB-9F9E-42C1-B3FB-08473D31DD4F}"/>
               </a:ext>
             </a:extLst>
           </p:cNvPr>
@@ -8635,7 +5940,7 @@
           <a:bodyPr xmlns:a="http://schemas.openxmlformats.org/drawingml/2006/main"/>
           <a:lstStyle xmlns:a="http://schemas.openxmlformats.org/drawingml/2006/main"/>
           <a:p xmlns:a="http://schemas.openxmlformats.org/drawingml/2006/main">
-            <a:pPr>
+            <a:pPr algn="ctr">
               <a:defRPr sz="1350" b="1">
                 <a:solidFill>
                   <a:srgbClr val="FFFFFF"/>
@@ -8664,7 +5969,7 @@
           <p:cNvPr id="37" name="">
             <a:extLst xmlns:a="http://schemas.openxmlformats.org/drawingml/2006/main">
               <a:ext uri="{FF2B5EF4-FFF2-40B4-BE49-F238E27FC236}">
-                <a16:creationId xmlns:a16="http://schemas.microsoft.com/office/drawing/2014/main" id="{EA062103-B6B7-4895-858B-064BD7788C9A}"/>
+                <a16:creationId xmlns:a16="http://schemas.microsoft.com/office/drawing/2014/main" id="{A6AAAF36-7608-4BFF-A7AC-0B08BF6F0D9B}"/>
               </a:ext>
             </a:extLst>
           </p:cNvPr>
@@ -8794,7 +6099,7 @@
           <p:cNvPr id="38" name="">
             <a:extLst xmlns:a="http://schemas.openxmlformats.org/drawingml/2006/main">
               <a:ext uri="{FF2B5EF4-FFF2-40B4-BE49-F238E27FC236}">
-                <a16:creationId xmlns:a16="http://schemas.microsoft.com/office/drawing/2014/main" id="{E08C4D67-F616-41D8-8B3D-CACB800178A2}"/>
+                <a16:creationId xmlns:a16="http://schemas.microsoft.com/office/drawing/2014/main" id="{56976805-3772-4B77-B1DE-7C86BA8E2E87}"/>
               </a:ext>
             </a:extLst>
           </p:cNvPr>
@@ -8829,7 +6134,7 @@
           <p:cNvPr id="39" name="">
             <a:extLst xmlns:a="http://schemas.openxmlformats.org/drawingml/2006/main">
               <a:ext uri="{FF2B5EF4-FFF2-40B4-BE49-F238E27FC236}">
-                <a16:creationId xmlns:a16="http://schemas.microsoft.com/office/drawing/2014/main" id="{3E336EA3-E755-4F50-A0F3-5FFBD3B4118F}"/>
+                <a16:creationId xmlns:a16="http://schemas.microsoft.com/office/drawing/2014/main" id="{6A55BD98-2F82-4F9E-932F-55F211993062}"/>
               </a:ext>
             </a:extLst>
           </p:cNvPr>
@@ -8862,7 +6167,7 @@
           <a:bodyPr xmlns:a="http://schemas.openxmlformats.org/drawingml/2006/main"/>
           <a:lstStyle xmlns:a="http://schemas.openxmlformats.org/drawingml/2006/main"/>
           <a:p xmlns:a="http://schemas.openxmlformats.org/drawingml/2006/main">
-            <a:pPr>
+            <a:pPr algn="ctr">
               <a:defRPr sz="1350" b="1">
                 <a:solidFill>
                   <a:srgbClr val="FFFFFF"/>
@@ -8891,7 +6196,7 @@
           <p:cNvPr id="40" name="">
             <a:extLst xmlns:a="http://schemas.openxmlformats.org/drawingml/2006/main">
               <a:ext uri="{FF2B5EF4-FFF2-40B4-BE49-F238E27FC236}">
-                <a16:creationId xmlns:a16="http://schemas.microsoft.com/office/drawing/2014/main" id="{2E24FFD9-752B-4BB5-9C71-CBD47ECCDC3F}"/>
+                <a16:creationId xmlns:a16="http://schemas.microsoft.com/office/drawing/2014/main" id="{82E706DF-4D56-4114-875B-8A9FBA9AC5F5}"/>
               </a:ext>
             </a:extLst>
           </p:cNvPr>
@@ -9021,7 +6326,7 @@
           <p:cNvPr id="41" name="">
             <a:extLst xmlns:a="http://schemas.openxmlformats.org/drawingml/2006/main">
               <a:ext uri="{FF2B5EF4-FFF2-40B4-BE49-F238E27FC236}">
-                <a16:creationId xmlns:a16="http://schemas.microsoft.com/office/drawing/2014/main" id="{EF138113-DEC4-4B61-B0E2-ABAB33CF0F82}"/>
+                <a16:creationId xmlns:a16="http://schemas.microsoft.com/office/drawing/2014/main" id="{87771981-F6ED-4404-97B2-6E54E7EA8F7A}"/>
               </a:ext>
             </a:extLst>
           </p:cNvPr>
@@ -9056,7 +6361,7 @@
           <p:cNvPr id="42" name="">
             <a:extLst xmlns:a="http://schemas.openxmlformats.org/drawingml/2006/main">
               <a:ext uri="{FF2B5EF4-FFF2-40B4-BE49-F238E27FC236}">
-                <a16:creationId xmlns:a16="http://schemas.microsoft.com/office/drawing/2014/main" id="{EBBF31F7-38BA-4DFB-A49E-B1E04D7CDFB5}"/>
+                <a16:creationId xmlns:a16="http://schemas.microsoft.com/office/drawing/2014/main" id="{6E1334EF-E52C-4D88-9241-37C3344C5EEC}"/>
               </a:ext>
             </a:extLst>
           </p:cNvPr>
@@ -9112,7 +6417,7 @@
           <p:cNvPr id="43" name="">
             <a:extLst xmlns:a="http://schemas.openxmlformats.org/drawingml/2006/main">
               <a:ext uri="{FF2B5EF4-FFF2-40B4-BE49-F238E27FC236}">
-                <a16:creationId xmlns:a16="http://schemas.microsoft.com/office/drawing/2014/main" id="{0BC65801-52BF-4AC7-90B9-4421DA9691CC}"/>
+                <a16:creationId xmlns:a16="http://schemas.microsoft.com/office/drawing/2014/main" id="{66476868-7E66-42E1-9379-1864079B9B3D}"/>
               </a:ext>
             </a:extLst>
           </p:cNvPr>
@@ -9145,7 +6450,7 @@
           <p:cNvPr id="44" name="">
             <a:extLst xmlns:a="http://schemas.openxmlformats.org/drawingml/2006/main">
               <a:ext uri="{FF2B5EF4-FFF2-40B4-BE49-F238E27FC236}">
-                <a16:creationId xmlns:a16="http://schemas.microsoft.com/office/drawing/2014/main" id="{95A7025C-12A7-4AE7-810F-5655206324F1}"/>
+                <a16:creationId xmlns:a16="http://schemas.microsoft.com/office/drawing/2014/main" id="{DD24EAF7-857C-445A-B81B-E8BA6C53248B}"/>
               </a:ext>
             </a:extLst>
           </p:cNvPr>
@@ -9178,7 +6483,7 @@
           <p:cNvPr id="45" name="">
             <a:extLst xmlns:a="http://schemas.openxmlformats.org/drawingml/2006/main">
               <a:ext uri="{FF2B5EF4-FFF2-40B4-BE49-F238E27FC236}">
-                <a16:creationId xmlns:a16="http://schemas.microsoft.com/office/drawing/2014/main" id="{56E40ECA-D47D-4432-863F-FFF7DC9B9037}"/>
+                <a16:creationId xmlns:a16="http://schemas.microsoft.com/office/drawing/2014/main" id="{AE6A9164-5F44-49FB-AF71-9109025FFEE4}"/>
               </a:ext>
             </a:extLst>
           </p:cNvPr>
@@ -9234,7 +6539,7 @@
           <p:cNvPr id="46" name="">
             <a:extLst xmlns:a="http://schemas.openxmlformats.org/drawingml/2006/main">
               <a:ext uri="{FF2B5EF4-FFF2-40B4-BE49-F238E27FC236}">
-                <a16:creationId xmlns:a16="http://schemas.microsoft.com/office/drawing/2014/main" id="{279BBB80-0236-45BD-AE9C-C9171F64FE29}"/>
+                <a16:creationId xmlns:a16="http://schemas.microsoft.com/office/drawing/2014/main" id="{60B1EB3F-8D60-4948-99D9-31000CCDC748}"/>
               </a:ext>
             </a:extLst>
           </p:cNvPr>
@@ -9267,7 +6572,7 @@
           <p:cNvPr id="47" name="">
             <a:extLst xmlns:a="http://schemas.openxmlformats.org/drawingml/2006/main">
               <a:ext uri="{FF2B5EF4-FFF2-40B4-BE49-F238E27FC236}">
-                <a16:creationId xmlns:a16="http://schemas.microsoft.com/office/drawing/2014/main" id="{C71ECD6F-BA98-481D-8C1A-2DA215FB5B0D}"/>
+                <a16:creationId xmlns:a16="http://schemas.microsoft.com/office/drawing/2014/main" id="{0D65CC82-3D7F-41FE-8EAF-6887987E0BB8}"/>
               </a:ext>
             </a:extLst>
           </p:cNvPr>
@@ -9294,7 +6599,7 @@
           <a:bodyPr xmlns:a="http://schemas.openxmlformats.org/drawingml/2006/main"/>
           <a:lstStyle xmlns:a="http://schemas.openxmlformats.org/drawingml/2006/main"/>
           <a:p xmlns:a="http://schemas.openxmlformats.org/drawingml/2006/main">
-            <a:pPr>
+            <a:pPr algn="ctr">
               <a:defRPr sz="4950" b="1">
                 <a:solidFill>
                   <a:srgbClr val="075C79"/>
@@ -9323,7 +6628,7 @@
           <p:cNvPr id="48" name="">
             <a:extLst xmlns:a="http://schemas.openxmlformats.org/drawingml/2006/main">
               <a:ext uri="{FF2B5EF4-FFF2-40B4-BE49-F238E27FC236}">
-                <a16:creationId xmlns:a16="http://schemas.microsoft.com/office/drawing/2014/main" id="{D75A4A57-E824-4523-9CE4-44B677161455}"/>
+                <a16:creationId xmlns:a16="http://schemas.microsoft.com/office/drawing/2014/main" id="{878194A1-38E5-4FB3-80FA-78F789FEA291}"/>
               </a:ext>
             </a:extLst>
           </p:cNvPr>
@@ -9350,7 +6655,7 @@
           <a:bodyPr xmlns:a="http://schemas.openxmlformats.org/drawingml/2006/main"/>
           <a:lstStyle xmlns:a="http://schemas.openxmlformats.org/drawingml/2006/main"/>
           <a:p xmlns:a="http://schemas.openxmlformats.org/drawingml/2006/main">
-            <a:pPr>
+            <a:pPr algn="ctr">
               <a:defRPr sz="2100">
                 <a:solidFill>
                   <a:srgbClr val="17324D"/>
@@ -9379,7 +6684,7 @@
           <p:cNvPr id="49" name="">
             <a:extLst xmlns:a="http://schemas.openxmlformats.org/drawingml/2006/main">
               <a:ext uri="{FF2B5EF4-FFF2-40B4-BE49-F238E27FC236}">
-                <a16:creationId xmlns:a16="http://schemas.microsoft.com/office/drawing/2014/main" id="{D90B6F2A-63E5-4E15-B1FC-EACD9B76D797}"/>
+                <a16:creationId xmlns:a16="http://schemas.microsoft.com/office/drawing/2014/main" id="{753BAA26-2E5D-4803-824C-B3288D3F8376}"/>
               </a:ext>
             </a:extLst>
           </p:cNvPr>
@@ -9410,7 +6715,7 @@
           <p:cNvPr id="50" name="">
             <a:extLst xmlns:a="http://schemas.openxmlformats.org/drawingml/2006/main">
               <a:ext uri="{FF2B5EF4-FFF2-40B4-BE49-F238E27FC236}">
-                <a16:creationId xmlns:a16="http://schemas.microsoft.com/office/drawing/2014/main" id="{DB792233-3F98-43D8-BFCA-684BD4DA4A63}"/>
+                <a16:creationId xmlns:a16="http://schemas.microsoft.com/office/drawing/2014/main" id="{5C18B790-68A8-4C5E-84BF-47545DAE83B8}"/>
               </a:ext>
             </a:extLst>
           </p:cNvPr>
@@ -9437,7 +6742,7 @@
           <a:bodyPr xmlns:a="http://schemas.openxmlformats.org/drawingml/2006/main"/>
           <a:lstStyle xmlns:a="http://schemas.openxmlformats.org/drawingml/2006/main"/>
           <a:p xmlns:a="http://schemas.openxmlformats.org/drawingml/2006/main">
-            <a:pPr>
+            <a:pPr algn="ctr">
               <a:defRPr sz="1425">
                 <a:solidFill>
                   <a:srgbClr val="5F6F78"/>
@@ -9457,6 +6762,62 @@
                 <a:cs typeface="微软雅黑"/>
               </a:rPr>
               <a:t>张子琦  |  计算机科学与技术  |  2026年9月27日</a:t>
+            </a:r>
+          </a:p>
+        </p:txBody>
+      </p:sp>
+      <p:sp>
+        <p:nvSpPr>
+          <p:cNvPr id="51" name="">
+            <a:extLst xmlns:a="http://schemas.openxmlformats.org/drawingml/2006/main">
+              <a:ext uri="{FF2B5EF4-FFF2-40B4-BE49-F238E27FC236}">
+                <a16:creationId xmlns:a16="http://schemas.microsoft.com/office/drawing/2014/main" id="{6F6A2EB9-A600-4D93-997F-B7CA4BF4ABE4}"/>
+              </a:ext>
+            </a:extLst>
+          </p:cNvPr>
+          <p:cNvSpPr>
+            <a:spLocks xmlns:a="http://schemas.openxmlformats.org/drawingml/2006/main" noGrp="1"/>
+          </p:cNvSpPr>
+          <p:nvPr/>
+        </p:nvSpPr>
+        <p:spPr>
+          <a:xfrm xmlns:a="http://schemas.openxmlformats.org/drawingml/2006/main">
+            <a:off x="9375172" y="6578632"/>
+            <a:ext cx="2743200" cy="279368"/>
+          </a:xfrm>
+          <a:prstGeom xmlns:a="http://schemas.openxmlformats.org/drawingml/2006/main" prst="rect">
+            <a:avLst/>
+          </a:prstGeom>
+          <a:noFill xmlns:a="http://schemas.openxmlformats.org/drawingml/2006/main"/>
+          <a:ln xmlns:a="http://schemas.openxmlformats.org/drawingml/2006/main" w="0">
+            <a:noFill/>
+            <a:prstDash val="solid"/>
+          </a:ln>
+        </p:spPr>
+        <p:txBody>
+          <a:bodyPr xmlns:a="http://schemas.openxmlformats.org/drawingml/2006/main" anchor="ctr"/>
+          <a:lstStyle xmlns:a="http://schemas.openxmlformats.org/drawingml/2006/main"/>
+          <a:p xmlns:a="http://schemas.openxmlformats.org/drawingml/2006/main">
+            <a:pPr algn="r">
+              <a:defRPr sz="1350" b="1">
+                <a:solidFill>
+                  <a:srgbClr val="FFFFFF"/>
+                </a:solidFill>
+                <a:latin typeface="微软雅黑"/>
+                <a:ea typeface="微软雅黑"/>
+                <a:cs typeface="微软雅黑"/>
+              </a:defRPr>
+            </a:pPr>
+            <a:r>
+              <a:rPr sz="1350" b="1">
+                <a:solidFill>
+                  <a:srgbClr val="FFFFFF"/>
+                </a:solidFill>
+                <a:latin typeface="微软雅黑"/>
+                <a:ea typeface="微软雅黑"/>
+                <a:cs typeface="微软雅黑"/>
+              </a:rPr>
+              <a:t>11</a:t>
             </a:r>
           </a:p>
         </p:txBody>
@@ -9464,7 +6825,7 @@
     </p:spTree>
     <p:extLst>
       <p:ext uri="{BB962C8B-B14F-4D97-AF65-F5344CB8AC3E}">
-        <p14:creationId xmlns:p14="http://schemas.microsoft.com/office/powerpoint/2010/main" val="1099989209"/>
+        <p14:creationId xmlns:p14="http://schemas.microsoft.com/office/powerpoint/2010/main" val="123259388"/>
       </p:ext>
     </p:extLst>
   </p:cSld>
@@ -9488,7 +6849,7 @@
           <p:cNvPr id="7" name="cogwheels_376015">
             <a:extLst xmlns:a="http://schemas.openxmlformats.org/drawingml/2006/main">
               <a:ext uri="{FF2B5EF4-FFF2-40B4-BE49-F238E27FC236}">
-                <a16:creationId xmlns:a16="http://schemas.microsoft.com/office/drawing/2014/main" id="{B0A02852-4D99-4A5B-AAAC-CBB345D6E41B}"/>
+                <a16:creationId xmlns:a16="http://schemas.microsoft.com/office/drawing/2014/main" id="{38D9DEC8-0752-46D3-B878-8FD2E635A23B}"/>
               </a:ext>
             </a:extLst>
           </p:cNvPr>
@@ -10212,91 +7573,10 @@
       </p:sp>
       <p:sp>
         <p:nvSpPr>
-          <p:cNvPr id="8" name="标题 3">
-            <a:extLst xmlns:a="http://schemas.openxmlformats.org/drawingml/2006/main">
-              <a:ext uri="{FF2B5EF4-FFF2-40B4-BE49-F238E27FC236}">
-                <a16:creationId xmlns:a16="http://schemas.microsoft.com/office/drawing/2014/main" id="{243AC8A8-F05F-40A3-9A1A-C0211856C9BC}"/>
-              </a:ext>
-            </a:extLst>
-          </p:cNvPr>
-          <p:cNvSpPr>
-            <a:spLocks xmlns:a="http://schemas.openxmlformats.org/drawingml/2006/main" noGrp="1"/>
-          </p:cNvSpPr>
-          <p:nvPr>
-            <p:ph type="title" idx="0"/>
-          </p:nvPr>
-        </p:nvSpPr>
-        <p:spPr>
-          <a:xfrm xmlns:a="http://schemas.openxmlformats.org/drawingml/2006/main">
-            <a:off x="482600" y="130175"/>
-            <a:ext cx="11214100" cy="621665"/>
-          </a:xfrm>
-        </p:spPr>
-        <p:txBody>
-          <a:bodyPr xmlns:a="http://schemas.openxmlformats.org/drawingml/2006/main">
-            <a:normAutofit/>
-          </a:bodyPr>
-          <a:lstStyle xmlns:a="http://schemas.openxmlformats.org/drawingml/2006/main"/>
-          <a:p xmlns:a="http://schemas.openxmlformats.org/drawingml/2006/main">
-            <a:r>
-              <a:rPr b="1">
-                <a:latin typeface="微软雅黑"/>
-                <a:ea typeface="微软雅黑"/>
-                <a:cs typeface="微软雅黑"/>
-              </a:rPr>
-              <a:t/>
-            </a:r>
-          </a:p>
-        </p:txBody>
-      </p:sp>
-      <p:sp>
-        <p:nvSpPr>
-          <p:cNvPr id="9" name="灯片编号占位符 28">
-            <a:extLst xmlns:a="http://schemas.openxmlformats.org/drawingml/2006/main">
-              <a:ext uri="{FF2B5EF4-FFF2-40B4-BE49-F238E27FC236}">
-                <a16:creationId xmlns:a16="http://schemas.microsoft.com/office/drawing/2014/main" id="{53AFC804-E4DD-46A0-9D44-F1D3453205A9}"/>
-              </a:ext>
-            </a:extLst>
-          </p:cNvPr>
-          <p:cNvSpPr>
-            <a:spLocks xmlns:a="http://schemas.openxmlformats.org/drawingml/2006/main" noGrp="1"/>
-          </p:cNvSpPr>
-          <p:nvPr>
-            <p:ph type="sldNum" idx="12"/>
-          </p:nvPr>
-        </p:nvSpPr>
-        <p:spPr>
-          <a:xfrm xmlns:a="http://schemas.openxmlformats.org/drawingml/2006/main">
-            <a:off x="9375147" y="6578600"/>
-            <a:ext cx="2743200" cy="279400"/>
-          </a:xfrm>
-        </p:spPr>
-        <p:txBody>
-          <a:bodyPr xmlns:a="http://schemas.openxmlformats.org/drawingml/2006/main"/>
-          <a:lstStyle xmlns:a="http://schemas.openxmlformats.org/drawingml/2006/main"/>
-          <a:p xmlns:a="http://schemas.openxmlformats.org/drawingml/2006/main">
-            <a:fld id="{3ACD1EC8-6F57-41A7-99F1-FEDB2874BA2B}" type="slidenum">
-              <a:rPr b="1">
-                <a:solidFill>
-                  <a:schemeClr val="bg1"/>
-                </a:solidFill>
-              </a:rPr>
-              <a:t>2</a:t>
-            </a:fld>
-            <a:endParaRPr b="1">
-              <a:solidFill>
-                <a:schemeClr val="bg1"/>
-              </a:solidFill>
-            </a:endParaRPr>
-          </a:p>
-        </p:txBody>
-      </p:sp>
-      <p:sp>
-        <p:nvSpPr>
           <p:cNvPr id="10" name="矩形 9">
             <a:extLst xmlns:a="http://schemas.openxmlformats.org/drawingml/2006/main">
               <a:ext uri="{FF2B5EF4-FFF2-40B4-BE49-F238E27FC236}">
-                <a16:creationId xmlns:a16="http://schemas.microsoft.com/office/drawing/2014/main" id="{4421564D-DDFD-4249-A28D-0C3ED47B436F}"/>
+                <a16:creationId xmlns:a16="http://schemas.microsoft.com/office/drawing/2014/main" id="{C45BB5E4-FF40-4E3B-8B40-8AFBAB2B33B5}"/>
               </a:ext>
             </a:extLst>
           </p:cNvPr>
@@ -10364,7 +7644,7 @@
           <p:cNvPr id="11" name="直接连接符 10">
             <a:extLst xmlns:a="http://schemas.openxmlformats.org/drawingml/2006/main">
               <a:ext uri="{FF2B5EF4-FFF2-40B4-BE49-F238E27FC236}">
-                <a16:creationId xmlns:a16="http://schemas.microsoft.com/office/drawing/2014/main" id="{5D88D516-FCFF-4808-83EA-F31E935F07D8}"/>
+                <a16:creationId xmlns:a16="http://schemas.microsoft.com/office/drawing/2014/main" id="{3A5BDF9F-19A6-4B4E-94A9-F003093A6554}"/>
               </a:ext>
             </a:extLst>
           </p:cNvPr>
@@ -10407,7 +7687,7 @@
           <p:cNvPr id="12" name="文本框 11">
             <a:extLst xmlns:a="http://schemas.openxmlformats.org/drawingml/2006/main">
               <a:ext uri="{FF2B5EF4-FFF2-40B4-BE49-F238E27FC236}">
-                <a16:creationId xmlns:a16="http://schemas.microsoft.com/office/drawing/2014/main" id="{54E6E3AF-EB28-47C5-BF3F-2DA7F3775DC4}"/>
+                <a16:creationId xmlns:a16="http://schemas.microsoft.com/office/drawing/2014/main" id="{18C2DF1B-1241-44CC-867A-B74B4F7BA7E7}"/>
               </a:ext>
             </a:extLst>
           </p:cNvPr>
@@ -10456,7 +7736,7 @@
           <p:cNvPr id="13" name="矩形 12">
             <a:extLst xmlns:a="http://schemas.openxmlformats.org/drawingml/2006/main">
               <a:ext uri="{FF2B5EF4-FFF2-40B4-BE49-F238E27FC236}">
-                <a16:creationId xmlns:a16="http://schemas.microsoft.com/office/drawing/2014/main" id="{11E2EA61-3495-4279-A42B-4115BAFD5825}"/>
+                <a16:creationId xmlns:a16="http://schemas.microsoft.com/office/drawing/2014/main" id="{00AF81C8-2908-4C5A-9B76-3D7056CF46AF}"/>
               </a:ext>
             </a:extLst>
           </p:cNvPr>
@@ -10524,7 +7804,7 @@
           <p:cNvPr id="14" name="直接连接符 13">
             <a:extLst xmlns:a="http://schemas.openxmlformats.org/drawingml/2006/main">
               <a:ext uri="{FF2B5EF4-FFF2-40B4-BE49-F238E27FC236}">
-                <a16:creationId xmlns:a16="http://schemas.microsoft.com/office/drawing/2014/main" id="{33FAD2CF-1A42-4045-A80E-AB53727FC266}"/>
+                <a16:creationId xmlns:a16="http://schemas.microsoft.com/office/drawing/2014/main" id="{FAAAB8F0-8665-46B3-BD9A-1FFD19FC7E25}"/>
               </a:ext>
             </a:extLst>
           </p:cNvPr>
@@ -10567,7 +7847,7 @@
           <p:cNvPr id="15" name="文本框 14">
             <a:extLst xmlns:a="http://schemas.openxmlformats.org/drawingml/2006/main">
               <a:ext uri="{FF2B5EF4-FFF2-40B4-BE49-F238E27FC236}">
-                <a16:creationId xmlns:a16="http://schemas.microsoft.com/office/drawing/2014/main" id="{42DF29F4-7791-4032-9459-3C3D78C95CE2}"/>
+                <a16:creationId xmlns:a16="http://schemas.microsoft.com/office/drawing/2014/main" id="{65264C6C-6574-43A3-8A40-12FF896CBFC7}"/>
               </a:ext>
             </a:extLst>
           </p:cNvPr>
@@ -10616,7 +7896,7 @@
           <p:cNvPr id="16" name="矩形 15">
             <a:extLst xmlns:a="http://schemas.openxmlformats.org/drawingml/2006/main">
               <a:ext uri="{FF2B5EF4-FFF2-40B4-BE49-F238E27FC236}">
-                <a16:creationId xmlns:a16="http://schemas.microsoft.com/office/drawing/2014/main" id="{F1456E05-62B1-4896-8BEF-0A39271E1A4A}"/>
+                <a16:creationId xmlns:a16="http://schemas.microsoft.com/office/drawing/2014/main" id="{0134C23C-00D6-4C2F-A80C-5CDFCA457AA3}"/>
               </a:ext>
             </a:extLst>
           </p:cNvPr>
@@ -10684,7 +7964,7 @@
           <p:cNvPr id="17" name="直接连接符 16">
             <a:extLst xmlns:a="http://schemas.openxmlformats.org/drawingml/2006/main">
               <a:ext uri="{FF2B5EF4-FFF2-40B4-BE49-F238E27FC236}">
-                <a16:creationId xmlns:a16="http://schemas.microsoft.com/office/drawing/2014/main" id="{8EFDDF85-4ED8-41B0-B28D-C4CE9EE69172}"/>
+                <a16:creationId xmlns:a16="http://schemas.microsoft.com/office/drawing/2014/main" id="{4707528E-2029-438E-8928-22ACDB59127C}"/>
               </a:ext>
             </a:extLst>
           </p:cNvPr>
@@ -10727,7 +8007,7 @@
           <p:cNvPr id="18" name="文本框 17">
             <a:extLst xmlns:a="http://schemas.openxmlformats.org/drawingml/2006/main">
               <a:ext uri="{FF2B5EF4-FFF2-40B4-BE49-F238E27FC236}">
-                <a16:creationId xmlns:a16="http://schemas.microsoft.com/office/drawing/2014/main" id="{5C6E3AE0-89BA-47F7-86FD-3A88CD712FCD}"/>
+                <a16:creationId xmlns:a16="http://schemas.microsoft.com/office/drawing/2014/main" id="{2BE3B7FE-595A-4DCE-B412-A1237D7113C9}"/>
               </a:ext>
             </a:extLst>
           </p:cNvPr>
@@ -10776,7 +8056,7 @@
           <p:cNvPr id="19" name="矩形 18">
             <a:extLst xmlns:a="http://schemas.openxmlformats.org/drawingml/2006/main">
               <a:ext uri="{FF2B5EF4-FFF2-40B4-BE49-F238E27FC236}">
-                <a16:creationId xmlns:a16="http://schemas.microsoft.com/office/drawing/2014/main" id="{2E79FADB-7306-4BEF-B2C2-19FF5627D32E}"/>
+                <a16:creationId xmlns:a16="http://schemas.microsoft.com/office/drawing/2014/main" id="{BDF6C84C-0AA9-4ABC-849F-705A6449C6B3}"/>
               </a:ext>
             </a:extLst>
           </p:cNvPr>
@@ -10844,7 +8124,7 @@
           <p:cNvPr id="20" name="直接连接符 19">
             <a:extLst xmlns:a="http://schemas.openxmlformats.org/drawingml/2006/main">
               <a:ext uri="{FF2B5EF4-FFF2-40B4-BE49-F238E27FC236}">
-                <a16:creationId xmlns:a16="http://schemas.microsoft.com/office/drawing/2014/main" id="{A53F5D9A-5E51-427F-8436-4DC4C7903292}"/>
+                <a16:creationId xmlns:a16="http://schemas.microsoft.com/office/drawing/2014/main" id="{D61B023F-CB07-4747-96B0-F21FC1619E20}"/>
               </a:ext>
             </a:extLst>
           </p:cNvPr>
@@ -10887,7 +8167,7 @@
           <p:cNvPr id="21" name="文本框 20">
             <a:extLst xmlns:a="http://schemas.openxmlformats.org/drawingml/2006/main">
               <a:ext uri="{FF2B5EF4-FFF2-40B4-BE49-F238E27FC236}">
-                <a16:creationId xmlns:a16="http://schemas.microsoft.com/office/drawing/2014/main" id="{9691DA62-6BA6-483D-B8B8-FB6CBCED67C9}"/>
+                <a16:creationId xmlns:a16="http://schemas.microsoft.com/office/drawing/2014/main" id="{23FB4014-52D3-4A24-B7E1-03846A86B633}"/>
               </a:ext>
             </a:extLst>
           </p:cNvPr>
@@ -10936,7 +8216,7 @@
           <p:cNvPr id="22" name="矩形 21">
             <a:extLst xmlns:a="http://schemas.openxmlformats.org/drawingml/2006/main">
               <a:ext uri="{FF2B5EF4-FFF2-40B4-BE49-F238E27FC236}">
-                <a16:creationId xmlns:a16="http://schemas.microsoft.com/office/drawing/2014/main" id="{02261E47-DE69-4A78-B09F-D1A88AD45E00}"/>
+                <a16:creationId xmlns:a16="http://schemas.microsoft.com/office/drawing/2014/main" id="{9DF93513-FFD5-412E-AE64-A70004F8C985}"/>
               </a:ext>
             </a:extLst>
           </p:cNvPr>
@@ -11004,7 +8284,7 @@
           <p:cNvPr id="23" name="直接连接符 22">
             <a:extLst xmlns:a="http://schemas.openxmlformats.org/drawingml/2006/main">
               <a:ext uri="{FF2B5EF4-FFF2-40B4-BE49-F238E27FC236}">
-                <a16:creationId xmlns:a16="http://schemas.microsoft.com/office/drawing/2014/main" id="{4C413643-861A-4C8A-BC1D-7E312EFFE718}"/>
+                <a16:creationId xmlns:a16="http://schemas.microsoft.com/office/drawing/2014/main" id="{98E5522E-2A7F-4259-BF47-1F548C33058B}"/>
               </a:ext>
             </a:extLst>
           </p:cNvPr>
@@ -11047,7 +8327,7 @@
           <p:cNvPr id="24" name="文本框 23">
             <a:extLst xmlns:a="http://schemas.openxmlformats.org/drawingml/2006/main">
               <a:ext uri="{FF2B5EF4-FFF2-40B4-BE49-F238E27FC236}">
-                <a16:creationId xmlns:a16="http://schemas.microsoft.com/office/drawing/2014/main" id="{8C6C5BB4-9F02-491B-8417-D65E7308C52A}"/>
+                <a16:creationId xmlns:a16="http://schemas.microsoft.com/office/drawing/2014/main" id="{701AC813-CADA-4356-AEDB-1215574AB409}"/>
               </a:ext>
             </a:extLst>
           </p:cNvPr>
@@ -11148,7 +8428,7 @@
           <p:cNvPr id="26" name="">
             <a:extLst xmlns:a="http://schemas.openxmlformats.org/drawingml/2006/main">
               <a:ext uri="{FF2B5EF4-FFF2-40B4-BE49-F238E27FC236}">
-                <a16:creationId xmlns:a16="http://schemas.microsoft.com/office/drawing/2014/main" id="{16F0EFB5-B3B6-40AF-ABCD-ED8D06CBC650}"/>
+                <a16:creationId xmlns:a16="http://schemas.microsoft.com/office/drawing/2014/main" id="{F3D355F6-DC98-4994-B4DF-1D2739D6A6C9}"/>
               </a:ext>
             </a:extLst>
           </p:cNvPr>
@@ -11181,7 +8461,7 @@
           <p:cNvPr id="27" name="">
             <a:extLst xmlns:a="http://schemas.openxmlformats.org/drawingml/2006/main">
               <a:ext uri="{FF2B5EF4-FFF2-40B4-BE49-F238E27FC236}">
-                <a16:creationId xmlns:a16="http://schemas.microsoft.com/office/drawing/2014/main" id="{FD1EBE08-C16C-4093-84A3-9498B609BAFE}"/>
+                <a16:creationId xmlns:a16="http://schemas.microsoft.com/office/drawing/2014/main" id="{30195435-A2D0-4F2F-AC02-4FECEB21BC0B}"/>
               </a:ext>
             </a:extLst>
           </p:cNvPr>
@@ -11237,7 +8517,7 @@
           <p:cNvPr id="28" name="">
             <a:extLst xmlns:a="http://schemas.openxmlformats.org/drawingml/2006/main">
               <a:ext uri="{FF2B5EF4-FFF2-40B4-BE49-F238E27FC236}">
-                <a16:creationId xmlns:a16="http://schemas.microsoft.com/office/drawing/2014/main" id="{730A2383-F099-4F9F-9174-FD616473FC1F}"/>
+                <a16:creationId xmlns:a16="http://schemas.microsoft.com/office/drawing/2014/main" id="{050A1244-C9AC-4FA9-BBC1-BCEDFE17B85F}"/>
               </a:ext>
             </a:extLst>
           </p:cNvPr>
@@ -11270,7 +8550,7 @@
           <p:cNvPr id="29" name="">
             <a:extLst xmlns:a="http://schemas.openxmlformats.org/drawingml/2006/main">
               <a:ext uri="{FF2B5EF4-FFF2-40B4-BE49-F238E27FC236}">
-                <a16:creationId xmlns:a16="http://schemas.microsoft.com/office/drawing/2014/main" id="{C3162E35-ACA0-497A-8589-2AC2ECDE74F4}"/>
+                <a16:creationId xmlns:a16="http://schemas.microsoft.com/office/drawing/2014/main" id="{01B8D8C0-DE99-4ABA-B0C0-32089CB6FCCB}"/>
               </a:ext>
             </a:extLst>
           </p:cNvPr>
@@ -11326,7 +8606,7 @@
           <p:cNvPr id="30" name="">
             <a:extLst xmlns:a="http://schemas.openxmlformats.org/drawingml/2006/main">
               <a:ext uri="{FF2B5EF4-FFF2-40B4-BE49-F238E27FC236}">
-                <a16:creationId xmlns:a16="http://schemas.microsoft.com/office/drawing/2014/main" id="{97074FB7-7983-4235-AA6C-1FAEB9EDB043}"/>
+                <a16:creationId xmlns:a16="http://schemas.microsoft.com/office/drawing/2014/main" id="{F3C8AA43-BEBC-4420-9053-470A62BEBEAA}"/>
               </a:ext>
             </a:extLst>
           </p:cNvPr>
@@ -11359,7 +8639,7 @@
           <a:bodyPr xmlns:a="http://schemas.openxmlformats.org/drawingml/2006/main"/>
           <a:lstStyle xmlns:a="http://schemas.openxmlformats.org/drawingml/2006/main"/>
           <a:p xmlns:a="http://schemas.openxmlformats.org/drawingml/2006/main">
-            <a:pPr>
+            <a:pPr algn="ctr">
               <a:defRPr sz="1650" b="1">
                 <a:solidFill>
                   <a:srgbClr val="FFFFFF"/>
@@ -11388,7 +8668,7 @@
           <p:cNvPr id="31" name="">
             <a:extLst xmlns:a="http://schemas.openxmlformats.org/drawingml/2006/main">
               <a:ext uri="{FF2B5EF4-FFF2-40B4-BE49-F238E27FC236}">
-                <a16:creationId xmlns:a16="http://schemas.microsoft.com/office/drawing/2014/main" id="{339E2511-15D0-4554-A5A9-4617F62CEF1C}"/>
+                <a16:creationId xmlns:a16="http://schemas.microsoft.com/office/drawing/2014/main" id="{13E78407-D9F2-4807-9BE4-C313FFE17D82}"/>
               </a:ext>
             </a:extLst>
           </p:cNvPr>
@@ -11444,7 +8724,7 @@
           <p:cNvPr id="32" name="">
             <a:extLst xmlns:a="http://schemas.openxmlformats.org/drawingml/2006/main">
               <a:ext uri="{FF2B5EF4-FFF2-40B4-BE49-F238E27FC236}">
-                <a16:creationId xmlns:a16="http://schemas.microsoft.com/office/drawing/2014/main" id="{6013F14B-4624-4CF1-94F1-0F5E86CA4850}"/>
+                <a16:creationId xmlns:a16="http://schemas.microsoft.com/office/drawing/2014/main" id="{69F97B0B-E75E-49F1-B856-7D42AF1A2F65}"/>
               </a:ext>
             </a:extLst>
           </p:cNvPr>
@@ -11500,7 +8780,7 @@
           <p:cNvPr id="33" name="">
             <a:extLst xmlns:a="http://schemas.openxmlformats.org/drawingml/2006/main">
               <a:ext uri="{FF2B5EF4-FFF2-40B4-BE49-F238E27FC236}">
-                <a16:creationId xmlns:a16="http://schemas.microsoft.com/office/drawing/2014/main" id="{DC2E336A-5AD1-4F4B-9545-AF6773074F1C}"/>
+                <a16:creationId xmlns:a16="http://schemas.microsoft.com/office/drawing/2014/main" id="{2D57ABEA-2F31-4B86-BD68-4446916FF53C}"/>
               </a:ext>
             </a:extLst>
           </p:cNvPr>
@@ -11531,7 +8811,7 @@
           <p:cNvPr id="34" name="">
             <a:extLst xmlns:a="http://schemas.openxmlformats.org/drawingml/2006/main">
               <a:ext uri="{FF2B5EF4-FFF2-40B4-BE49-F238E27FC236}">
-                <a16:creationId xmlns:a16="http://schemas.microsoft.com/office/drawing/2014/main" id="{64B6D565-DDA3-4147-B538-B888759805C7}"/>
+                <a16:creationId xmlns:a16="http://schemas.microsoft.com/office/drawing/2014/main" id="{8378D53C-B93D-498A-AA91-0A78FF3FEBB8}"/>
               </a:ext>
             </a:extLst>
           </p:cNvPr>
@@ -11564,7 +8844,7 @@
           <a:bodyPr xmlns:a="http://schemas.openxmlformats.org/drawingml/2006/main"/>
           <a:lstStyle xmlns:a="http://schemas.openxmlformats.org/drawingml/2006/main"/>
           <a:p xmlns:a="http://schemas.openxmlformats.org/drawingml/2006/main">
-            <a:pPr>
+            <a:pPr algn="ctr">
               <a:defRPr sz="1650" b="1">
                 <a:solidFill>
                   <a:srgbClr val="FFFFFF"/>
@@ -11593,7 +8873,7 @@
           <p:cNvPr id="35" name="">
             <a:extLst xmlns:a="http://schemas.openxmlformats.org/drawingml/2006/main">
               <a:ext uri="{FF2B5EF4-FFF2-40B4-BE49-F238E27FC236}">
-                <a16:creationId xmlns:a16="http://schemas.microsoft.com/office/drawing/2014/main" id="{6BBB6A1C-3C23-4645-90CD-F4E3105B32DD}"/>
+                <a16:creationId xmlns:a16="http://schemas.microsoft.com/office/drawing/2014/main" id="{07F8F6B9-D0C6-452D-891D-6F4C108BF227}"/>
               </a:ext>
             </a:extLst>
           </p:cNvPr>
@@ -11649,7 +8929,7 @@
           <p:cNvPr id="36" name="">
             <a:extLst xmlns:a="http://schemas.openxmlformats.org/drawingml/2006/main">
               <a:ext uri="{FF2B5EF4-FFF2-40B4-BE49-F238E27FC236}">
-                <a16:creationId xmlns:a16="http://schemas.microsoft.com/office/drawing/2014/main" id="{DE23E4A4-A649-4D1B-A325-FC03F74424E8}"/>
+                <a16:creationId xmlns:a16="http://schemas.microsoft.com/office/drawing/2014/main" id="{0F7BEE5D-739C-46CC-AFA3-6B0ABDC8A273}"/>
               </a:ext>
             </a:extLst>
           </p:cNvPr>
@@ -11705,7 +8985,7 @@
           <p:cNvPr id="37" name="">
             <a:extLst xmlns:a="http://schemas.openxmlformats.org/drawingml/2006/main">
               <a:ext uri="{FF2B5EF4-FFF2-40B4-BE49-F238E27FC236}">
-                <a16:creationId xmlns:a16="http://schemas.microsoft.com/office/drawing/2014/main" id="{E6F9065E-83BF-4CEE-B90F-96B86A71409D}"/>
+                <a16:creationId xmlns:a16="http://schemas.microsoft.com/office/drawing/2014/main" id="{6CFEBDDC-EB6B-4DF2-98F7-F9D26EBA1565}"/>
               </a:ext>
             </a:extLst>
           </p:cNvPr>
@@ -11736,7 +9016,7 @@
           <p:cNvPr id="38" name="">
             <a:extLst xmlns:a="http://schemas.openxmlformats.org/drawingml/2006/main">
               <a:ext uri="{FF2B5EF4-FFF2-40B4-BE49-F238E27FC236}">
-                <a16:creationId xmlns:a16="http://schemas.microsoft.com/office/drawing/2014/main" id="{BC8EA093-7748-4ED9-A33A-BFC11147C7B7}"/>
+                <a16:creationId xmlns:a16="http://schemas.microsoft.com/office/drawing/2014/main" id="{5920E85C-9694-4914-B2E8-014AA8813E03}"/>
               </a:ext>
             </a:extLst>
           </p:cNvPr>
@@ -11769,7 +9049,7 @@
           <a:bodyPr xmlns:a="http://schemas.openxmlformats.org/drawingml/2006/main"/>
           <a:lstStyle xmlns:a="http://schemas.openxmlformats.org/drawingml/2006/main"/>
           <a:p xmlns:a="http://schemas.openxmlformats.org/drawingml/2006/main">
-            <a:pPr>
+            <a:pPr algn="ctr">
               <a:defRPr sz="1650" b="1">
                 <a:solidFill>
                   <a:srgbClr val="FFFFFF"/>
@@ -11798,7 +9078,7 @@
           <p:cNvPr id="39" name="">
             <a:extLst xmlns:a="http://schemas.openxmlformats.org/drawingml/2006/main">
               <a:ext uri="{FF2B5EF4-FFF2-40B4-BE49-F238E27FC236}">
-                <a16:creationId xmlns:a16="http://schemas.microsoft.com/office/drawing/2014/main" id="{181A9FEF-6F9B-4AF3-983B-1286ECD389C8}"/>
+                <a16:creationId xmlns:a16="http://schemas.microsoft.com/office/drawing/2014/main" id="{E37D5219-F965-4A83-8B05-16E37E6F48F8}"/>
               </a:ext>
             </a:extLst>
           </p:cNvPr>
@@ -11854,7 +9134,7 @@
           <p:cNvPr id="40" name="">
             <a:extLst xmlns:a="http://schemas.openxmlformats.org/drawingml/2006/main">
               <a:ext uri="{FF2B5EF4-FFF2-40B4-BE49-F238E27FC236}">
-                <a16:creationId xmlns:a16="http://schemas.microsoft.com/office/drawing/2014/main" id="{18A3D9F4-C30D-46FB-8A50-CF56FA88AB75}"/>
+                <a16:creationId xmlns:a16="http://schemas.microsoft.com/office/drawing/2014/main" id="{BA1D4766-33D6-47C0-87A4-C4F8CA0001AD}"/>
               </a:ext>
             </a:extLst>
           </p:cNvPr>
@@ -11910,7 +9190,7 @@
           <p:cNvPr id="41" name="">
             <a:extLst xmlns:a="http://schemas.openxmlformats.org/drawingml/2006/main">
               <a:ext uri="{FF2B5EF4-FFF2-40B4-BE49-F238E27FC236}">
-                <a16:creationId xmlns:a16="http://schemas.microsoft.com/office/drawing/2014/main" id="{4C489BBC-360A-4467-85F1-EB98968A508C}"/>
+                <a16:creationId xmlns:a16="http://schemas.microsoft.com/office/drawing/2014/main" id="{5581AB80-2BC2-4475-9FF5-98D6624F3D83}"/>
               </a:ext>
             </a:extLst>
           </p:cNvPr>
@@ -11945,7 +9225,7 @@
           <p:cNvPr id="42" name="">
             <a:extLst xmlns:a="http://schemas.openxmlformats.org/drawingml/2006/main">
               <a:ext uri="{FF2B5EF4-FFF2-40B4-BE49-F238E27FC236}">
-                <a16:creationId xmlns:a16="http://schemas.microsoft.com/office/drawing/2014/main" id="{785C9247-CDED-4426-9624-906EFD37843B}"/>
+                <a16:creationId xmlns:a16="http://schemas.microsoft.com/office/drawing/2014/main" id="{0C126970-B5F9-4A2B-9B29-453B6F156861}"/>
               </a:ext>
             </a:extLst>
           </p:cNvPr>
@@ -11996,10 +9276,66 @@
           </a:p>
         </p:txBody>
       </p:sp>
+      <p:sp>
+        <p:nvSpPr>
+          <p:cNvPr id="43" name="">
+            <a:extLst xmlns:a="http://schemas.openxmlformats.org/drawingml/2006/main">
+              <a:ext uri="{FF2B5EF4-FFF2-40B4-BE49-F238E27FC236}">
+                <a16:creationId xmlns:a16="http://schemas.microsoft.com/office/drawing/2014/main" id="{2520AEA6-3D8C-472C-891B-21793FA0FB72}"/>
+              </a:ext>
+            </a:extLst>
+          </p:cNvPr>
+          <p:cNvSpPr>
+            <a:spLocks xmlns:a="http://schemas.openxmlformats.org/drawingml/2006/main" noGrp="1"/>
+          </p:cNvSpPr>
+          <p:nvPr/>
+        </p:nvSpPr>
+        <p:spPr>
+          <a:xfrm xmlns:a="http://schemas.openxmlformats.org/drawingml/2006/main">
+            <a:off x="9375172" y="6578632"/>
+            <a:ext cx="2743200" cy="279368"/>
+          </a:xfrm>
+          <a:prstGeom xmlns:a="http://schemas.openxmlformats.org/drawingml/2006/main" prst="rect">
+            <a:avLst/>
+          </a:prstGeom>
+          <a:noFill xmlns:a="http://schemas.openxmlformats.org/drawingml/2006/main"/>
+          <a:ln xmlns:a="http://schemas.openxmlformats.org/drawingml/2006/main" w="0">
+            <a:noFill/>
+            <a:prstDash val="solid"/>
+          </a:ln>
+        </p:spPr>
+        <p:txBody>
+          <a:bodyPr xmlns:a="http://schemas.openxmlformats.org/drawingml/2006/main" anchor="ctr"/>
+          <a:lstStyle xmlns:a="http://schemas.openxmlformats.org/drawingml/2006/main"/>
+          <a:p xmlns:a="http://schemas.openxmlformats.org/drawingml/2006/main">
+            <a:pPr algn="r">
+              <a:defRPr sz="1350" b="1">
+                <a:solidFill>
+                  <a:srgbClr val="FFFFFF"/>
+                </a:solidFill>
+                <a:latin typeface="微软雅黑"/>
+                <a:ea typeface="微软雅黑"/>
+                <a:cs typeface="微软雅黑"/>
+              </a:defRPr>
+            </a:pPr>
+            <a:r>
+              <a:rPr sz="1350" b="1">
+                <a:solidFill>
+                  <a:srgbClr val="FFFFFF"/>
+                </a:solidFill>
+                <a:latin typeface="微软雅黑"/>
+                <a:ea typeface="微软雅黑"/>
+                <a:cs typeface="微软雅黑"/>
+              </a:rPr>
+              <a:t>2</a:t>
+            </a:r>
+          </a:p>
+        </p:txBody>
+      </p:sp>
     </p:spTree>
     <p:extLst>
       <p:ext uri="{BB962C8B-B14F-4D97-AF65-F5344CB8AC3E}">
-        <p14:creationId xmlns:p14="http://schemas.microsoft.com/office/powerpoint/2010/main" val="1810590877"/>
+        <p14:creationId xmlns:p14="http://schemas.microsoft.com/office/powerpoint/2010/main" val="79825395"/>
       </p:ext>
     </p:extLst>
   </p:cSld>
@@ -12020,49 +9356,10 @@
       </p:grpSpPr>
       <p:sp>
         <p:nvSpPr>
-          <p:cNvPr id="2" name="标题 1">
-            <a:extLst xmlns:a="http://schemas.openxmlformats.org/drawingml/2006/main">
-              <a:ext uri="{FF2B5EF4-FFF2-40B4-BE49-F238E27FC236}">
-                <a16:creationId xmlns:a16="http://schemas.microsoft.com/office/drawing/2014/main" id="{69BD9D30-E7DA-4372-B267-E32B038569EE}"/>
-              </a:ext>
-            </a:extLst>
-          </p:cNvPr>
-          <p:cNvSpPr>
-            <a:spLocks xmlns:a="http://schemas.openxmlformats.org/drawingml/2006/main" noGrp="1"/>
-          </p:cNvSpPr>
-          <p:nvPr>
-            <p:ph type="title" idx="0"/>
-          </p:nvPr>
-        </p:nvSpPr>
-        <p:spPr>
-          <a:xfrm xmlns:a="http://schemas.openxmlformats.org/drawingml/2006/main">
-            <a:off x="482600" y="136525"/>
-            <a:ext cx="11214100" cy="615159"/>
-          </a:xfrm>
-        </p:spPr>
-        <p:txBody>
-          <a:bodyPr xmlns:a="http://schemas.openxmlformats.org/drawingml/2006/main">
-            <a:noAutofit/>
-          </a:bodyPr>
-          <a:lstStyle xmlns:a="http://schemas.openxmlformats.org/drawingml/2006/main"/>
-          <a:p xmlns:a="http://schemas.openxmlformats.org/drawingml/2006/main">
-            <a:r>
-              <a:rPr sz="2800" b="1">
-                <a:latin typeface="微软雅黑"/>
-                <a:ea typeface="微软雅黑"/>
-                <a:cs typeface="微软雅黑"/>
-              </a:rPr>
-              <a:t/>
-            </a:r>
-          </a:p>
-        </p:txBody>
-      </p:sp>
-      <p:sp>
-        <p:nvSpPr>
           <p:cNvPr id="3" name="直角三角形 2">
             <a:extLst xmlns:a="http://schemas.openxmlformats.org/drawingml/2006/main">
               <a:ext uri="{FF2B5EF4-FFF2-40B4-BE49-F238E27FC236}">
-                <a16:creationId xmlns:a16="http://schemas.microsoft.com/office/drawing/2014/main" id="{61600F77-B0B9-4ED8-8B59-F4A393DB8576}"/>
+                <a16:creationId xmlns:a16="http://schemas.microsoft.com/office/drawing/2014/main" id="{332B83E6-CB73-41BC-8B8F-48EA7B213965}"/>
               </a:ext>
             </a:extLst>
           </p:cNvPr>
@@ -12120,7 +9417,7 @@
           <p:cNvPr id="4" name="圆角矩形 2">
             <a:extLst xmlns:a="http://schemas.openxmlformats.org/drawingml/2006/main">
               <a:ext uri="{FF2B5EF4-FFF2-40B4-BE49-F238E27FC236}">
-                <a16:creationId xmlns:a16="http://schemas.microsoft.com/office/drawing/2014/main" id="{0EAD623B-952E-4AB2-A6A8-D730D167F186}"/>
+                <a16:creationId xmlns:a16="http://schemas.microsoft.com/office/drawing/2014/main" id="{D98E5284-33DB-44F7-8A15-DD6A17D54E69}"/>
               </a:ext>
             </a:extLst>
           </p:cNvPr>
@@ -12180,7 +9477,7 @@
           <p:cNvPr id="5" name="对角圆角矩形 80">
             <a:extLst xmlns:a="http://schemas.openxmlformats.org/drawingml/2006/main">
               <a:ext uri="{FF2B5EF4-FFF2-40B4-BE49-F238E27FC236}">
-                <a16:creationId xmlns:a16="http://schemas.microsoft.com/office/drawing/2014/main" id="{C6774A63-0CCD-457E-8B50-510F44132EFB}"/>
+                <a16:creationId xmlns:a16="http://schemas.microsoft.com/office/drawing/2014/main" id="{B24FA072-DD2C-4BB0-975D-91B68766DB24}"/>
               </a:ext>
             </a:extLst>
           </p:cNvPr>
@@ -12251,43 +9548,10 @@
       </p:sp>
       <p:sp>
         <p:nvSpPr>
-          <p:cNvPr id="6" name="灯片编号占位符 5">
-            <a:extLst xmlns:a="http://schemas.openxmlformats.org/drawingml/2006/main">
-              <a:ext uri="{FF2B5EF4-FFF2-40B4-BE49-F238E27FC236}">
-                <a16:creationId xmlns:a16="http://schemas.microsoft.com/office/drawing/2014/main" id="{EA1A0946-7497-4B3B-8A9A-7A008C77B7D2}"/>
-              </a:ext>
-            </a:extLst>
-          </p:cNvPr>
-          <p:cNvSpPr>
-            <a:spLocks xmlns:a="http://schemas.openxmlformats.org/drawingml/2006/main" noGrp="1"/>
-          </p:cNvSpPr>
-          <p:nvPr>
-            <p:ph type="sldNum" idx="12"/>
-          </p:nvPr>
-        </p:nvSpPr>
-        <p:spPr>
-          <a:xfrm xmlns:a="http://schemas.openxmlformats.org/drawingml/2006/main">
-            <a:off x="9375147" y="6578600"/>
-            <a:ext cx="2743200" cy="279400"/>
-          </a:xfrm>
-        </p:spPr>
-        <p:txBody>
-          <a:bodyPr xmlns:a="http://schemas.openxmlformats.org/drawingml/2006/main"/>
-          <a:lstStyle xmlns:a="http://schemas.openxmlformats.org/drawingml/2006/main"/>
-          <a:p xmlns:a="http://schemas.openxmlformats.org/drawingml/2006/main">
-            <a:fld id="{3ACD1EC8-6F57-41A7-99F1-FEDB2874BA2B}" type="slidenum">
-              <a:t>3</a:t>
-            </a:fld>
-            <a:endParaRPr/>
-          </a:p>
-        </p:txBody>
-      </p:sp>
-      <p:sp>
-        <p:nvSpPr>
           <p:cNvPr id="7" name="">
             <a:extLst xmlns:a="http://schemas.openxmlformats.org/drawingml/2006/main">
               <a:ext uri="{FF2B5EF4-FFF2-40B4-BE49-F238E27FC236}">
-                <a16:creationId xmlns:a16="http://schemas.microsoft.com/office/drawing/2014/main" id="{D1A7EB91-00F2-42D1-9D22-DEEF52C54A4B}"/>
+                <a16:creationId xmlns:a16="http://schemas.microsoft.com/office/drawing/2014/main" id="{9FAFA7B9-48D0-443B-AADB-B5C7DEBF9D2F}"/>
               </a:ext>
             </a:extLst>
           </p:cNvPr>
@@ -12320,7 +9584,7 @@
           <p:cNvPr id="8" name="">
             <a:extLst xmlns:a="http://schemas.openxmlformats.org/drawingml/2006/main">
               <a:ext uri="{FF2B5EF4-FFF2-40B4-BE49-F238E27FC236}">
-                <a16:creationId xmlns:a16="http://schemas.microsoft.com/office/drawing/2014/main" id="{C43E446C-9C34-4DBA-9D07-92D86B30A1B8}"/>
+                <a16:creationId xmlns:a16="http://schemas.microsoft.com/office/drawing/2014/main" id="{29539A9A-A3AB-4A94-8DFA-088A41F44EA6}"/>
               </a:ext>
             </a:extLst>
           </p:cNvPr>
@@ -12376,7 +9640,7 @@
           <p:cNvPr id="9" name="">
             <a:extLst xmlns:a="http://schemas.openxmlformats.org/drawingml/2006/main">
               <a:ext uri="{FF2B5EF4-FFF2-40B4-BE49-F238E27FC236}">
-                <a16:creationId xmlns:a16="http://schemas.microsoft.com/office/drawing/2014/main" id="{9C8950EF-FB2D-489B-B14A-419087F21351}"/>
+                <a16:creationId xmlns:a16="http://schemas.microsoft.com/office/drawing/2014/main" id="{25A24604-824C-4987-B523-24F69C27C4C0}"/>
               </a:ext>
             </a:extLst>
           </p:cNvPr>
@@ -12409,7 +9673,7 @@
           <p:cNvPr id="10" name="">
             <a:extLst xmlns:a="http://schemas.openxmlformats.org/drawingml/2006/main">
               <a:ext uri="{FF2B5EF4-FFF2-40B4-BE49-F238E27FC236}">
-                <a16:creationId xmlns:a16="http://schemas.microsoft.com/office/drawing/2014/main" id="{735C0716-BB06-4DA1-9F27-EB763FD7EE96}"/>
+                <a16:creationId xmlns:a16="http://schemas.microsoft.com/office/drawing/2014/main" id="{8CAEC4C7-542C-4D05-BDC6-169448E01994}"/>
               </a:ext>
             </a:extLst>
           </p:cNvPr>
@@ -12462,14 +9726,14 @@
       </p:sp>
       <p:pic>
         <p:nvPicPr>
-          <p:cNvPr id="21" name=""/>
+          <p:cNvPr id="20" name=""/>
           <p:cNvPicPr>
             <a:picLocks xmlns:a="http://schemas.openxmlformats.org/drawingml/2006/main" noChangeAspect="1"/>
           </p:cNvPicPr>
           <p:nvPr/>
         </p:nvPicPr>
         <p:blipFill>
-          <a:blip xmlns:r="http://schemas.openxmlformats.org/officeDocument/2006/relationships" xmlns:a="http://schemas.openxmlformats.org/drawingml/2006/main" r:embed="Rf7cd5e3ea44042f6"/>
+          <a:blip xmlns:r="http://schemas.openxmlformats.org/officeDocument/2006/relationships" xmlns:a="http://schemas.openxmlformats.org/drawingml/2006/main" r:embed="R6626bedbad3a471c"/>
           <a:stretch xmlns:a="http://schemas.openxmlformats.org/drawingml/2006/main"/>
         </p:blipFill>
         <p:spPr>
@@ -12482,10 +9746,66 @@
           </a:prstGeom>
         </p:spPr>
       </p:pic>
+      <p:sp>
+        <p:nvSpPr>
+          <p:cNvPr id="12" name="">
+            <a:extLst xmlns:a="http://schemas.openxmlformats.org/drawingml/2006/main">
+              <a:ext uri="{FF2B5EF4-FFF2-40B4-BE49-F238E27FC236}">
+                <a16:creationId xmlns:a16="http://schemas.microsoft.com/office/drawing/2014/main" id="{85477D00-038C-4531-AFE0-17E01286C79E}"/>
+              </a:ext>
+            </a:extLst>
+          </p:cNvPr>
+          <p:cNvSpPr>
+            <a:spLocks xmlns:a="http://schemas.openxmlformats.org/drawingml/2006/main" noGrp="1"/>
+          </p:cNvSpPr>
+          <p:nvPr/>
+        </p:nvSpPr>
+        <p:spPr>
+          <a:xfrm xmlns:a="http://schemas.openxmlformats.org/drawingml/2006/main">
+            <a:off x="9375172" y="6578632"/>
+            <a:ext cx="2743200" cy="279368"/>
+          </a:xfrm>
+          <a:prstGeom xmlns:a="http://schemas.openxmlformats.org/drawingml/2006/main" prst="rect">
+            <a:avLst/>
+          </a:prstGeom>
+          <a:noFill xmlns:a="http://schemas.openxmlformats.org/drawingml/2006/main"/>
+          <a:ln xmlns:a="http://schemas.openxmlformats.org/drawingml/2006/main" w="0">
+            <a:noFill/>
+            <a:prstDash val="solid"/>
+          </a:ln>
+        </p:spPr>
+        <p:txBody>
+          <a:bodyPr xmlns:a="http://schemas.openxmlformats.org/drawingml/2006/main" anchor="ctr"/>
+          <a:lstStyle xmlns:a="http://schemas.openxmlformats.org/drawingml/2006/main"/>
+          <a:p xmlns:a="http://schemas.openxmlformats.org/drawingml/2006/main">
+            <a:pPr algn="r">
+              <a:defRPr sz="1350" b="1">
+                <a:solidFill>
+                  <a:srgbClr val="FFFFFF"/>
+                </a:solidFill>
+                <a:latin typeface="微软雅黑"/>
+                <a:ea typeface="微软雅黑"/>
+                <a:cs typeface="微软雅黑"/>
+              </a:defRPr>
+            </a:pPr>
+            <a:r>
+              <a:rPr sz="1350" b="1">
+                <a:solidFill>
+                  <a:srgbClr val="FFFFFF"/>
+                </a:solidFill>
+                <a:latin typeface="微软雅黑"/>
+                <a:ea typeface="微软雅黑"/>
+                <a:cs typeface="微软雅黑"/>
+              </a:rPr>
+              <a:t>3</a:t>
+            </a:r>
+          </a:p>
+        </p:txBody>
+      </p:sp>
     </p:spTree>
     <p:extLst>
       <p:ext uri="{BB962C8B-B14F-4D97-AF65-F5344CB8AC3E}">
-        <p14:creationId xmlns:p14="http://schemas.microsoft.com/office/powerpoint/2010/main" val="1488624767"/>
+        <p14:creationId xmlns:p14="http://schemas.microsoft.com/office/powerpoint/2010/main" val="1907108248"/>
       </p:ext>
     </p:extLst>
   </p:cSld>
@@ -12509,7 +9829,7 @@
           <p:cNvPr id="3" name="直角三角形 2">
             <a:extLst xmlns:a="http://schemas.openxmlformats.org/drawingml/2006/main">
               <a:ext uri="{FF2B5EF4-FFF2-40B4-BE49-F238E27FC236}">
-                <a16:creationId xmlns:a16="http://schemas.microsoft.com/office/drawing/2014/main" id="{4975FC12-D587-4451-AF43-698AA35F0983}"/>
+                <a16:creationId xmlns:a16="http://schemas.microsoft.com/office/drawing/2014/main" id="{C4621ECD-CE7E-47EF-ACA3-B6D0DCD88B8A}"/>
               </a:ext>
             </a:extLst>
           </p:cNvPr>
@@ -12567,7 +9887,7 @@
           <p:cNvPr id="4" name="圆角矩形 2">
             <a:extLst xmlns:a="http://schemas.openxmlformats.org/drawingml/2006/main">
               <a:ext uri="{FF2B5EF4-FFF2-40B4-BE49-F238E27FC236}">
-                <a16:creationId xmlns:a16="http://schemas.microsoft.com/office/drawing/2014/main" id="{F6D85E6E-C62D-4785-84F5-8F76791E0B34}"/>
+                <a16:creationId xmlns:a16="http://schemas.microsoft.com/office/drawing/2014/main" id="{CC9903B3-C73B-41B1-A122-993E18968082}"/>
               </a:ext>
             </a:extLst>
           </p:cNvPr>
@@ -12627,7 +9947,7 @@
           <p:cNvPr id="5" name="对角圆角矩形 80">
             <a:extLst xmlns:a="http://schemas.openxmlformats.org/drawingml/2006/main">
               <a:ext uri="{FF2B5EF4-FFF2-40B4-BE49-F238E27FC236}">
-                <a16:creationId xmlns:a16="http://schemas.microsoft.com/office/drawing/2014/main" id="{EF5F4756-CCFB-4B14-A7F9-60F456B7B503}"/>
+                <a16:creationId xmlns:a16="http://schemas.microsoft.com/office/drawing/2014/main" id="{884D206C-C0B3-4CC2-AD08-FFF26A24A567}"/>
               </a:ext>
             </a:extLst>
           </p:cNvPr>
@@ -12698,82 +10018,10 @@
       </p:sp>
       <p:sp>
         <p:nvSpPr>
-          <p:cNvPr id="6" name="灯片编号占位符 5">
-            <a:extLst xmlns:a="http://schemas.openxmlformats.org/drawingml/2006/main">
-              <a:ext uri="{FF2B5EF4-FFF2-40B4-BE49-F238E27FC236}">
-                <a16:creationId xmlns:a16="http://schemas.microsoft.com/office/drawing/2014/main" id="{EB298E09-17A8-463A-B580-EAEE9C40B2D6}"/>
-              </a:ext>
-            </a:extLst>
-          </p:cNvPr>
-          <p:cNvSpPr>
-            <a:spLocks xmlns:a="http://schemas.openxmlformats.org/drawingml/2006/main" noGrp="1"/>
-          </p:cNvSpPr>
-          <p:nvPr>
-            <p:ph type="sldNum" idx="12"/>
-          </p:nvPr>
-        </p:nvSpPr>
-        <p:spPr>
-          <a:xfrm xmlns:a="http://schemas.openxmlformats.org/drawingml/2006/main">
-            <a:off x="9375147" y="6578600"/>
-            <a:ext cx="2743200" cy="279400"/>
-          </a:xfrm>
-        </p:spPr>
-        <p:txBody>
-          <a:bodyPr xmlns:a="http://schemas.openxmlformats.org/drawingml/2006/main"/>
-          <a:lstStyle xmlns:a="http://schemas.openxmlformats.org/drawingml/2006/main"/>
-          <a:p xmlns:a="http://schemas.openxmlformats.org/drawingml/2006/main">
-            <a:fld id="{3ACD1EC8-6F57-41A7-99F1-FEDB2874BA2B}" type="slidenum">
-              <a:t>4</a:t>
-            </a:fld>
-            <a:endParaRPr/>
-          </a:p>
-        </p:txBody>
-      </p:sp>
-      <p:sp>
-        <p:nvSpPr>
-          <p:cNvPr id="2" name="标题 1">
-            <a:extLst xmlns:a="http://schemas.openxmlformats.org/drawingml/2006/main">
-              <a:ext uri="{FF2B5EF4-FFF2-40B4-BE49-F238E27FC236}">
-                <a16:creationId xmlns:a16="http://schemas.microsoft.com/office/drawing/2014/main" id="{560B5543-3822-4925-AC33-D97505CBE8EF}"/>
-              </a:ext>
-            </a:extLst>
-          </p:cNvPr>
-          <p:cNvSpPr>
-            <a:spLocks xmlns:a="http://schemas.openxmlformats.org/drawingml/2006/main" noGrp="1"/>
-          </p:cNvSpPr>
-          <p:nvPr>
-            <p:ph type="title" idx="0"/>
-          </p:nvPr>
-        </p:nvSpPr>
-        <p:spPr>
-          <a:xfrm xmlns:a="http://schemas.openxmlformats.org/drawingml/2006/main">
-            <a:off x="482600" y="136525"/>
-            <a:ext cx="11214100" cy="615159"/>
-          </a:xfrm>
-        </p:spPr>
-        <p:txBody>
-          <a:bodyPr xmlns:a="http://schemas.openxmlformats.org/drawingml/2006/main">
-            <a:noAutofit/>
-          </a:bodyPr>
-          <a:lstStyle xmlns:a="http://schemas.openxmlformats.org/drawingml/2006/main"/>
-          <a:p xmlns:a="http://schemas.openxmlformats.org/drawingml/2006/main">
-            <a:r>
-              <a:rPr sz="2800" b="1">
-                <a:latin typeface="微软雅黑"/>
-                <a:ea typeface="微软雅黑"/>
-                <a:cs typeface="微软雅黑"/>
-              </a:rPr>
-              <a:t/>
-            </a:r>
-          </a:p>
-        </p:txBody>
-      </p:sp>
-      <p:sp>
-        <p:nvSpPr>
           <p:cNvPr id="7" name="">
             <a:extLst xmlns:a="http://schemas.openxmlformats.org/drawingml/2006/main">
               <a:ext uri="{FF2B5EF4-FFF2-40B4-BE49-F238E27FC236}">
-                <a16:creationId xmlns:a16="http://schemas.microsoft.com/office/drawing/2014/main" id="{6F762A56-C91E-4B01-9917-3C82CA11176B}"/>
+                <a16:creationId xmlns:a16="http://schemas.microsoft.com/office/drawing/2014/main" id="{DF9579B2-7E70-4CE0-AA38-18959335F178}"/>
               </a:ext>
             </a:extLst>
           </p:cNvPr>
@@ -12806,7 +10054,7 @@
           <p:cNvPr id="8" name="">
             <a:extLst xmlns:a="http://schemas.openxmlformats.org/drawingml/2006/main">
               <a:ext uri="{FF2B5EF4-FFF2-40B4-BE49-F238E27FC236}">
-                <a16:creationId xmlns:a16="http://schemas.microsoft.com/office/drawing/2014/main" id="{3438B9B1-EB24-4375-BC93-9502C7C66205}"/>
+                <a16:creationId xmlns:a16="http://schemas.microsoft.com/office/drawing/2014/main" id="{AD4DCF80-DF38-449C-A2EE-A719D7FEB7E8}"/>
               </a:ext>
             </a:extLst>
           </p:cNvPr>
@@ -12862,7 +10110,7 @@
           <p:cNvPr id="9" name="">
             <a:extLst xmlns:a="http://schemas.openxmlformats.org/drawingml/2006/main">
               <a:ext uri="{FF2B5EF4-FFF2-40B4-BE49-F238E27FC236}">
-                <a16:creationId xmlns:a16="http://schemas.microsoft.com/office/drawing/2014/main" id="{36DBE9D0-B211-436A-933F-5901510FDD8B}"/>
+                <a16:creationId xmlns:a16="http://schemas.microsoft.com/office/drawing/2014/main" id="{3B10EBBE-5245-4817-887C-1E86AE3F47C9}"/>
               </a:ext>
             </a:extLst>
           </p:cNvPr>
@@ -12892,14 +10140,14 @@
       </p:sp>
       <p:pic>
         <p:nvPicPr>
-          <p:cNvPr id="21" name=""/>
+          <p:cNvPr id="20" name=""/>
           <p:cNvPicPr>
             <a:picLocks xmlns:a="http://schemas.openxmlformats.org/drawingml/2006/main" noChangeAspect="1"/>
           </p:cNvPicPr>
           <p:nvPr/>
         </p:nvPicPr>
         <p:blipFill>
-          <a:blip xmlns:r="http://schemas.openxmlformats.org/officeDocument/2006/relationships" xmlns:a="http://schemas.openxmlformats.org/drawingml/2006/main" r:embed="Rac2cf67e0c6f414b"/>
+          <a:blip xmlns:r="http://schemas.openxmlformats.org/officeDocument/2006/relationships" xmlns:a="http://schemas.openxmlformats.org/drawingml/2006/main" r:embed="R070bb67514c64190"/>
           <a:stretch xmlns:a="http://schemas.openxmlformats.org/drawingml/2006/main"/>
         </p:blipFill>
         <p:spPr>
@@ -12917,7 +10165,7 @@
           <p:cNvPr id="11" name="">
             <a:extLst xmlns:a="http://schemas.openxmlformats.org/drawingml/2006/main">
               <a:ext uri="{FF2B5EF4-FFF2-40B4-BE49-F238E27FC236}">
-                <a16:creationId xmlns:a16="http://schemas.microsoft.com/office/drawing/2014/main" id="{E97F9FB9-B4DD-4EFB-BCF6-980B1A145130}"/>
+                <a16:creationId xmlns:a16="http://schemas.microsoft.com/office/drawing/2014/main" id="{4FCD70EE-0CAF-4235-A40A-2545DFEE13BC}"/>
               </a:ext>
             </a:extLst>
           </p:cNvPr>
@@ -12952,7 +10200,7 @@
           <p:cNvPr id="12" name="">
             <a:extLst xmlns:a="http://schemas.openxmlformats.org/drawingml/2006/main">
               <a:ext uri="{FF2B5EF4-FFF2-40B4-BE49-F238E27FC236}">
-                <a16:creationId xmlns:a16="http://schemas.microsoft.com/office/drawing/2014/main" id="{FC0FF3FD-D162-48F1-B453-23B171484F32}"/>
+                <a16:creationId xmlns:a16="http://schemas.microsoft.com/office/drawing/2014/main" id="{6CBF58E8-1347-4671-9640-45C9C2D70B30}"/>
               </a:ext>
             </a:extLst>
           </p:cNvPr>
@@ -13003,10 +10251,66 @@
           </a:p>
         </p:txBody>
       </p:sp>
+      <p:sp>
+        <p:nvSpPr>
+          <p:cNvPr id="13" name="">
+            <a:extLst xmlns:a="http://schemas.openxmlformats.org/drawingml/2006/main">
+              <a:ext uri="{FF2B5EF4-FFF2-40B4-BE49-F238E27FC236}">
+                <a16:creationId xmlns:a16="http://schemas.microsoft.com/office/drawing/2014/main" id="{5FDF3771-FA91-4142-8B93-176740C7A804}"/>
+              </a:ext>
+            </a:extLst>
+          </p:cNvPr>
+          <p:cNvSpPr>
+            <a:spLocks xmlns:a="http://schemas.openxmlformats.org/drawingml/2006/main" noGrp="1"/>
+          </p:cNvSpPr>
+          <p:nvPr/>
+        </p:nvSpPr>
+        <p:spPr>
+          <a:xfrm xmlns:a="http://schemas.openxmlformats.org/drawingml/2006/main">
+            <a:off x="9375172" y="6578632"/>
+            <a:ext cx="2743200" cy="279368"/>
+          </a:xfrm>
+          <a:prstGeom xmlns:a="http://schemas.openxmlformats.org/drawingml/2006/main" prst="rect">
+            <a:avLst/>
+          </a:prstGeom>
+          <a:noFill xmlns:a="http://schemas.openxmlformats.org/drawingml/2006/main"/>
+          <a:ln xmlns:a="http://schemas.openxmlformats.org/drawingml/2006/main" w="0">
+            <a:noFill/>
+            <a:prstDash val="solid"/>
+          </a:ln>
+        </p:spPr>
+        <p:txBody>
+          <a:bodyPr xmlns:a="http://schemas.openxmlformats.org/drawingml/2006/main" anchor="ctr"/>
+          <a:lstStyle xmlns:a="http://schemas.openxmlformats.org/drawingml/2006/main"/>
+          <a:p xmlns:a="http://schemas.openxmlformats.org/drawingml/2006/main">
+            <a:pPr algn="r">
+              <a:defRPr sz="1350" b="1">
+                <a:solidFill>
+                  <a:srgbClr val="FFFFFF"/>
+                </a:solidFill>
+                <a:latin typeface="微软雅黑"/>
+                <a:ea typeface="微软雅黑"/>
+                <a:cs typeface="微软雅黑"/>
+              </a:defRPr>
+            </a:pPr>
+            <a:r>
+              <a:rPr sz="1350" b="1">
+                <a:solidFill>
+                  <a:srgbClr val="FFFFFF"/>
+                </a:solidFill>
+                <a:latin typeface="微软雅黑"/>
+                <a:ea typeface="微软雅黑"/>
+                <a:cs typeface="微软雅黑"/>
+              </a:rPr>
+              <a:t>4</a:t>
+            </a:r>
+          </a:p>
+        </p:txBody>
+      </p:sp>
     </p:spTree>
     <p:extLst>
       <p:ext uri="{BB962C8B-B14F-4D97-AF65-F5344CB8AC3E}">
-        <p14:creationId xmlns:p14="http://schemas.microsoft.com/office/powerpoint/2010/main" val="1662470303"/>
+        <p14:creationId xmlns:p14="http://schemas.microsoft.com/office/powerpoint/2010/main" val="1509404504"/>
       </p:ext>
     </p:extLst>
   </p:cSld>
@@ -13030,7 +10334,7 @@
           <p:cNvPr id="8" name="直角三角形 7">
             <a:extLst xmlns:a="http://schemas.openxmlformats.org/drawingml/2006/main">
               <a:ext uri="{FF2B5EF4-FFF2-40B4-BE49-F238E27FC236}">
-                <a16:creationId xmlns:a16="http://schemas.microsoft.com/office/drawing/2014/main" id="{B1AB143A-A450-4D42-96A7-EFDCCBE90EFB}"/>
+                <a16:creationId xmlns:a16="http://schemas.microsoft.com/office/drawing/2014/main" id="{93035EC0-1E4F-4E31-87D9-843F03709E6F}"/>
               </a:ext>
             </a:extLst>
           </p:cNvPr>
@@ -13088,7 +10392,7 @@
           <p:cNvPr id="9" name="直角三角形 8">
             <a:extLst xmlns:a="http://schemas.openxmlformats.org/drawingml/2006/main">
               <a:ext uri="{FF2B5EF4-FFF2-40B4-BE49-F238E27FC236}">
-                <a16:creationId xmlns:a16="http://schemas.microsoft.com/office/drawing/2014/main" id="{A3973B7D-9F07-4713-899A-9279A15AF32C}"/>
+                <a16:creationId xmlns:a16="http://schemas.microsoft.com/office/drawing/2014/main" id="{D6E9AD69-92A0-48D5-A1B9-023E014EAD59}"/>
               </a:ext>
             </a:extLst>
           </p:cNvPr>
@@ -13146,7 +10450,7 @@
           <p:cNvPr id="10" name="直角三角形 9">
             <a:extLst xmlns:a="http://schemas.openxmlformats.org/drawingml/2006/main">
               <a:ext uri="{FF2B5EF4-FFF2-40B4-BE49-F238E27FC236}">
-                <a16:creationId xmlns:a16="http://schemas.microsoft.com/office/drawing/2014/main" id="{11115D7F-CEF2-477A-944C-B80F28FC45EB}"/>
+                <a16:creationId xmlns:a16="http://schemas.microsoft.com/office/drawing/2014/main" id="{FADC25D8-1AFE-4E81-BE13-C5B2D0CF8AD7}"/>
               </a:ext>
             </a:extLst>
           </p:cNvPr>
@@ -13204,7 +10508,7 @@
           <p:cNvPr id="11" name="圆角矩形 2">
             <a:extLst xmlns:a="http://schemas.openxmlformats.org/drawingml/2006/main">
               <a:ext uri="{FF2B5EF4-FFF2-40B4-BE49-F238E27FC236}">
-                <a16:creationId xmlns:a16="http://schemas.microsoft.com/office/drawing/2014/main" id="{63031288-46DB-421A-9F82-FD802CC45D11}"/>
+                <a16:creationId xmlns:a16="http://schemas.microsoft.com/office/drawing/2014/main" id="{2B09BECB-0DFB-4F82-BB83-846D8088903C}"/>
               </a:ext>
             </a:extLst>
           </p:cNvPr>
@@ -13264,7 +10568,7 @@
           <p:cNvPr id="12" name="圆角矩形 2">
             <a:extLst xmlns:a="http://schemas.openxmlformats.org/drawingml/2006/main">
               <a:ext uri="{FF2B5EF4-FFF2-40B4-BE49-F238E27FC236}">
-                <a16:creationId xmlns:a16="http://schemas.microsoft.com/office/drawing/2014/main" id="{F823AE75-FC34-4017-A095-8ADFA75CDD53}"/>
+                <a16:creationId xmlns:a16="http://schemas.microsoft.com/office/drawing/2014/main" id="{AB410391-290F-4C1F-8047-7F4138C57BF5}"/>
               </a:ext>
             </a:extLst>
           </p:cNvPr>
@@ -13324,7 +10628,7 @@
           <p:cNvPr id="13" name="对角圆角矩形 80">
             <a:extLst xmlns:a="http://schemas.openxmlformats.org/drawingml/2006/main">
               <a:ext uri="{FF2B5EF4-FFF2-40B4-BE49-F238E27FC236}">
-                <a16:creationId xmlns:a16="http://schemas.microsoft.com/office/drawing/2014/main" id="{7CAC453F-EF78-469C-9635-6BFE2505E98E}"/>
+                <a16:creationId xmlns:a16="http://schemas.microsoft.com/office/drawing/2014/main" id="{40CFF1F3-9545-4C8B-A3B4-BA67479B685E}"/>
               </a:ext>
             </a:extLst>
           </p:cNvPr>
@@ -13398,7 +10702,7 @@
           <p:cNvPr id="14" name="对角圆角矩形 80">
             <a:extLst xmlns:a="http://schemas.openxmlformats.org/drawingml/2006/main">
               <a:ext uri="{FF2B5EF4-FFF2-40B4-BE49-F238E27FC236}">
-                <a16:creationId xmlns:a16="http://schemas.microsoft.com/office/drawing/2014/main" id="{2EB727DB-0C39-48BA-A338-3AE4081050DF}"/>
+                <a16:creationId xmlns:a16="http://schemas.microsoft.com/office/drawing/2014/main" id="{2DAC582A-4A3E-48D3-88B7-D2FE38C7CF03}"/>
               </a:ext>
             </a:extLst>
           </p:cNvPr>
@@ -13469,82 +10773,10 @@
       </p:sp>
       <p:sp>
         <p:nvSpPr>
-          <p:cNvPr id="15" name="灯片编号占位符 14">
-            <a:extLst xmlns:a="http://schemas.openxmlformats.org/drawingml/2006/main">
-              <a:ext uri="{FF2B5EF4-FFF2-40B4-BE49-F238E27FC236}">
-                <a16:creationId xmlns:a16="http://schemas.microsoft.com/office/drawing/2014/main" id="{F59EFBDD-3C21-4F9F-B913-F376DF6A527F}"/>
-              </a:ext>
-            </a:extLst>
-          </p:cNvPr>
-          <p:cNvSpPr>
-            <a:spLocks xmlns:a="http://schemas.openxmlformats.org/drawingml/2006/main" noGrp="1"/>
-          </p:cNvSpPr>
-          <p:nvPr>
-            <p:ph type="sldNum" idx="12"/>
-          </p:nvPr>
-        </p:nvSpPr>
-        <p:spPr>
-          <a:xfrm xmlns:a="http://schemas.openxmlformats.org/drawingml/2006/main">
-            <a:off x="9375147" y="6578600"/>
-            <a:ext cx="2743200" cy="279400"/>
-          </a:xfrm>
-        </p:spPr>
-        <p:txBody>
-          <a:bodyPr xmlns:a="http://schemas.openxmlformats.org/drawingml/2006/main"/>
-          <a:lstStyle xmlns:a="http://schemas.openxmlformats.org/drawingml/2006/main"/>
-          <a:p xmlns:a="http://schemas.openxmlformats.org/drawingml/2006/main">
-            <a:fld id="{3ACD1EC8-6F57-41A7-99F1-FEDB2874BA2B}" type="slidenum">
-              <a:t>5</a:t>
-            </a:fld>
-            <a:endParaRPr/>
-          </a:p>
-        </p:txBody>
-      </p:sp>
-      <p:sp>
-        <p:nvSpPr>
-          <p:cNvPr id="2" name="标题 1">
-            <a:extLst xmlns:a="http://schemas.openxmlformats.org/drawingml/2006/main">
-              <a:ext uri="{FF2B5EF4-FFF2-40B4-BE49-F238E27FC236}">
-                <a16:creationId xmlns:a16="http://schemas.microsoft.com/office/drawing/2014/main" id="{88EE0021-5979-4E9E-B8D7-0493515A0FD8}"/>
-              </a:ext>
-            </a:extLst>
-          </p:cNvPr>
-          <p:cNvSpPr>
-            <a:spLocks xmlns:a="http://schemas.openxmlformats.org/drawingml/2006/main" noGrp="1"/>
-          </p:cNvSpPr>
-          <p:nvPr>
-            <p:ph type="title" idx="0"/>
-          </p:nvPr>
-        </p:nvSpPr>
-        <p:spPr>
-          <a:xfrm xmlns:a="http://schemas.openxmlformats.org/drawingml/2006/main">
-            <a:off x="482600" y="136525"/>
-            <a:ext cx="11214100" cy="615159"/>
-          </a:xfrm>
-        </p:spPr>
-        <p:txBody>
-          <a:bodyPr xmlns:a="http://schemas.openxmlformats.org/drawingml/2006/main">
-            <a:noAutofit/>
-          </a:bodyPr>
-          <a:lstStyle xmlns:a="http://schemas.openxmlformats.org/drawingml/2006/main"/>
-          <a:p xmlns:a="http://schemas.openxmlformats.org/drawingml/2006/main">
-            <a:r>
-              <a:rPr sz="2800" b="1">
-                <a:latin typeface="微软雅黑"/>
-                <a:ea typeface="微软雅黑"/>
-                <a:cs typeface="微软雅黑"/>
-              </a:rPr>
-              <a:t/>
-            </a:r>
-          </a:p>
-        </p:txBody>
-      </p:sp>
-      <p:sp>
-        <p:nvSpPr>
           <p:cNvPr id="16" name="">
             <a:extLst xmlns:a="http://schemas.openxmlformats.org/drawingml/2006/main">
               <a:ext uri="{FF2B5EF4-FFF2-40B4-BE49-F238E27FC236}">
-                <a16:creationId xmlns:a16="http://schemas.microsoft.com/office/drawing/2014/main" id="{CD7828D5-83BF-40EF-AFB5-F5C25DC5C516}"/>
+                <a16:creationId xmlns:a16="http://schemas.microsoft.com/office/drawing/2014/main" id="{9192AAF6-15ED-4750-AE46-AAB824203F3E}"/>
               </a:ext>
             </a:extLst>
           </p:cNvPr>
@@ -13577,7 +10809,7 @@
           <p:cNvPr id="17" name="">
             <a:extLst xmlns:a="http://schemas.openxmlformats.org/drawingml/2006/main">
               <a:ext uri="{FF2B5EF4-FFF2-40B4-BE49-F238E27FC236}">
-                <a16:creationId xmlns:a16="http://schemas.microsoft.com/office/drawing/2014/main" id="{7117C38B-2680-4BCF-BF1E-B65087A38EEB}"/>
+                <a16:creationId xmlns:a16="http://schemas.microsoft.com/office/drawing/2014/main" id="{0BA4C6FA-CEBA-41DD-BC13-E4E636303F17}"/>
               </a:ext>
             </a:extLst>
           </p:cNvPr>
@@ -13633,7 +10865,7 @@
           <p:cNvPr id="18" name="">
             <a:extLst xmlns:a="http://schemas.openxmlformats.org/drawingml/2006/main">
               <a:ext uri="{FF2B5EF4-FFF2-40B4-BE49-F238E27FC236}">
-                <a16:creationId xmlns:a16="http://schemas.microsoft.com/office/drawing/2014/main" id="{9D33E0AD-19BB-488A-91E2-920777A2F6EE}"/>
+                <a16:creationId xmlns:a16="http://schemas.microsoft.com/office/drawing/2014/main" id="{8076077D-3037-43BA-8022-CBBA54282997}"/>
               </a:ext>
             </a:extLst>
           </p:cNvPr>
@@ -13663,14 +10895,14 @@
       </p:sp>
       <p:pic>
         <p:nvPicPr>
-          <p:cNvPr id="42" name=""/>
+          <p:cNvPr id="41" name=""/>
           <p:cNvPicPr>
             <a:picLocks xmlns:a="http://schemas.openxmlformats.org/drawingml/2006/main" noChangeAspect="1"/>
           </p:cNvPicPr>
           <p:nvPr/>
         </p:nvPicPr>
         <p:blipFill>
-          <a:blip xmlns:r="http://schemas.openxmlformats.org/officeDocument/2006/relationships" xmlns:a="http://schemas.openxmlformats.org/drawingml/2006/main" r:embed="R48611aac23e9448b"/>
+          <a:blip xmlns:r="http://schemas.openxmlformats.org/officeDocument/2006/relationships" xmlns:a="http://schemas.openxmlformats.org/drawingml/2006/main" r:embed="R44e7927d7aef4e1d"/>
           <a:stretch xmlns:a="http://schemas.openxmlformats.org/drawingml/2006/main"/>
         </p:blipFill>
         <p:spPr>
@@ -13688,7 +10920,7 @@
           <p:cNvPr id="20" name="">
             <a:extLst xmlns:a="http://schemas.openxmlformats.org/drawingml/2006/main">
               <a:ext uri="{FF2B5EF4-FFF2-40B4-BE49-F238E27FC236}">
-                <a16:creationId xmlns:a16="http://schemas.microsoft.com/office/drawing/2014/main" id="{D6A34F81-AF0D-477B-A262-B16D17ABCCE5}"/>
+                <a16:creationId xmlns:a16="http://schemas.microsoft.com/office/drawing/2014/main" id="{F487C70B-B741-4880-8EC2-EFD59E4E7C6E}"/>
               </a:ext>
             </a:extLst>
           </p:cNvPr>
@@ -13744,7 +10976,7 @@
           <p:cNvPr id="21" name="">
             <a:extLst xmlns:a="http://schemas.openxmlformats.org/drawingml/2006/main">
               <a:ext uri="{FF2B5EF4-FFF2-40B4-BE49-F238E27FC236}">
-                <a16:creationId xmlns:a16="http://schemas.microsoft.com/office/drawing/2014/main" id="{62339328-D837-43C2-B336-DB167311CCA0}"/>
+                <a16:creationId xmlns:a16="http://schemas.microsoft.com/office/drawing/2014/main" id="{D83EA715-6293-4ADA-BEFD-4C07ECA5EF4A}"/>
               </a:ext>
             </a:extLst>
           </p:cNvPr>
@@ -13777,7 +11009,7 @@
           <a:bodyPr xmlns:a="http://schemas.openxmlformats.org/drawingml/2006/main"/>
           <a:lstStyle xmlns:a="http://schemas.openxmlformats.org/drawingml/2006/main"/>
           <a:p xmlns:a="http://schemas.openxmlformats.org/drawingml/2006/main">
-            <a:pPr>
+            <a:pPr algn="ctr">
               <a:defRPr sz="1200" b="1">
                 <a:solidFill>
                   <a:srgbClr val="FFFFFF"/>
@@ -13806,7 +11038,7 @@
           <p:cNvPr id="22" name="">
             <a:extLst xmlns:a="http://schemas.openxmlformats.org/drawingml/2006/main">
               <a:ext uri="{FF2B5EF4-FFF2-40B4-BE49-F238E27FC236}">
-                <a16:creationId xmlns:a16="http://schemas.microsoft.com/office/drawing/2014/main" id="{73A0996C-455D-4798-9231-F373090DF311}"/>
+                <a16:creationId xmlns:a16="http://schemas.microsoft.com/office/drawing/2014/main" id="{FCBF6A1B-5226-45B3-93B0-3C00909AFD44}"/>
               </a:ext>
             </a:extLst>
           </p:cNvPr>
@@ -13862,7 +11094,7 @@
           <p:cNvPr id="23" name="">
             <a:extLst xmlns:a="http://schemas.openxmlformats.org/drawingml/2006/main">
               <a:ext uri="{FF2B5EF4-FFF2-40B4-BE49-F238E27FC236}">
-                <a16:creationId xmlns:a16="http://schemas.microsoft.com/office/drawing/2014/main" id="{227205A1-64B6-42C7-B7E6-4F84DD570F11}"/>
+                <a16:creationId xmlns:a16="http://schemas.microsoft.com/office/drawing/2014/main" id="{FBB0A4DD-7C63-414E-8502-7F873F2D9AE5}"/>
               </a:ext>
             </a:extLst>
           </p:cNvPr>
@@ -13895,7 +11127,7 @@
           <a:bodyPr xmlns:a="http://schemas.openxmlformats.org/drawingml/2006/main"/>
           <a:lstStyle xmlns:a="http://schemas.openxmlformats.org/drawingml/2006/main"/>
           <a:p xmlns:a="http://schemas.openxmlformats.org/drawingml/2006/main">
-            <a:pPr>
+            <a:pPr algn="ctr">
               <a:defRPr sz="1200" b="1">
                 <a:solidFill>
                   <a:srgbClr val="FFFFFF"/>
@@ -13924,7 +11156,7 @@
           <p:cNvPr id="24" name="">
             <a:extLst xmlns:a="http://schemas.openxmlformats.org/drawingml/2006/main">
               <a:ext uri="{FF2B5EF4-FFF2-40B4-BE49-F238E27FC236}">
-                <a16:creationId xmlns:a16="http://schemas.microsoft.com/office/drawing/2014/main" id="{A36E5452-A76B-4D27-AB75-2EF171FFF853}"/>
+                <a16:creationId xmlns:a16="http://schemas.microsoft.com/office/drawing/2014/main" id="{B26CBAB8-4E8D-49AA-8ED3-8E4563E584E6}"/>
               </a:ext>
             </a:extLst>
           </p:cNvPr>
@@ -13980,7 +11212,7 @@
           <p:cNvPr id="25" name="">
             <a:extLst xmlns:a="http://schemas.openxmlformats.org/drawingml/2006/main">
               <a:ext uri="{FF2B5EF4-FFF2-40B4-BE49-F238E27FC236}">
-                <a16:creationId xmlns:a16="http://schemas.microsoft.com/office/drawing/2014/main" id="{2F6FCF26-D936-42E5-B164-2CE70A5296CB}"/>
+                <a16:creationId xmlns:a16="http://schemas.microsoft.com/office/drawing/2014/main" id="{FCB7C4B0-338E-498C-A0FA-DA73EC30FEE6}"/>
               </a:ext>
             </a:extLst>
           </p:cNvPr>
@@ -14013,7 +11245,7 @@
           <a:bodyPr xmlns:a="http://schemas.openxmlformats.org/drawingml/2006/main"/>
           <a:lstStyle xmlns:a="http://schemas.openxmlformats.org/drawingml/2006/main"/>
           <a:p xmlns:a="http://schemas.openxmlformats.org/drawingml/2006/main">
-            <a:pPr>
+            <a:pPr algn="ctr">
               <a:defRPr sz="1200" b="1">
                 <a:solidFill>
                   <a:srgbClr val="FFFFFF"/>
@@ -14042,7 +11274,7 @@
           <p:cNvPr id="26" name="">
             <a:extLst xmlns:a="http://schemas.openxmlformats.org/drawingml/2006/main">
               <a:ext uri="{FF2B5EF4-FFF2-40B4-BE49-F238E27FC236}">
-                <a16:creationId xmlns:a16="http://schemas.microsoft.com/office/drawing/2014/main" id="{F82C5E14-8E12-4957-82BE-51A86E157F0A}"/>
+                <a16:creationId xmlns:a16="http://schemas.microsoft.com/office/drawing/2014/main" id="{718AA7BD-42FE-4C03-BCD1-CD2B2D2070AD}"/>
               </a:ext>
             </a:extLst>
           </p:cNvPr>
@@ -14098,7 +11330,7 @@
           <p:cNvPr id="27" name="">
             <a:extLst xmlns:a="http://schemas.openxmlformats.org/drawingml/2006/main">
               <a:ext uri="{FF2B5EF4-FFF2-40B4-BE49-F238E27FC236}">
-                <a16:creationId xmlns:a16="http://schemas.microsoft.com/office/drawing/2014/main" id="{00A4CBE8-D2A0-494B-B58F-68E92F380B11}"/>
+                <a16:creationId xmlns:a16="http://schemas.microsoft.com/office/drawing/2014/main" id="{C36142E9-2868-4995-8F0C-1D30525FEE7F}"/>
               </a:ext>
             </a:extLst>
           </p:cNvPr>
@@ -14133,7 +11365,7 @@
           <p:cNvPr id="28" name="">
             <a:extLst xmlns:a="http://schemas.openxmlformats.org/drawingml/2006/main">
               <a:ext uri="{FF2B5EF4-FFF2-40B4-BE49-F238E27FC236}">
-                <a16:creationId xmlns:a16="http://schemas.microsoft.com/office/drawing/2014/main" id="{9F12251D-86A7-4EC1-B837-FEED9FD335BD}"/>
+                <a16:creationId xmlns:a16="http://schemas.microsoft.com/office/drawing/2014/main" id="{E4E225CA-0D34-43AF-AF4C-A0D63BAE3915}"/>
               </a:ext>
             </a:extLst>
           </p:cNvPr>
@@ -14189,7 +11421,7 @@
           <p:cNvPr id="29" name="">
             <a:extLst xmlns:a="http://schemas.openxmlformats.org/drawingml/2006/main">
               <a:ext uri="{FF2B5EF4-FFF2-40B4-BE49-F238E27FC236}">
-                <a16:creationId xmlns:a16="http://schemas.microsoft.com/office/drawing/2014/main" id="{5B0DBDF9-591B-4778-AF10-38B5DD39A9D6}"/>
+                <a16:creationId xmlns:a16="http://schemas.microsoft.com/office/drawing/2014/main" id="{28A3921D-ABEB-463D-8FC0-1FA1ADAF45E6}"/>
               </a:ext>
             </a:extLst>
           </p:cNvPr>
@@ -14240,10 +11472,66 @@
           </a:p>
         </p:txBody>
       </p:sp>
+      <p:sp>
+        <p:nvSpPr>
+          <p:cNvPr id="30" name="">
+            <a:extLst xmlns:a="http://schemas.openxmlformats.org/drawingml/2006/main">
+              <a:ext uri="{FF2B5EF4-FFF2-40B4-BE49-F238E27FC236}">
+                <a16:creationId xmlns:a16="http://schemas.microsoft.com/office/drawing/2014/main" id="{F110D7DE-56B1-4457-8CBD-A6F5FF7532E2}"/>
+              </a:ext>
+            </a:extLst>
+          </p:cNvPr>
+          <p:cNvSpPr>
+            <a:spLocks xmlns:a="http://schemas.openxmlformats.org/drawingml/2006/main" noGrp="1"/>
+          </p:cNvSpPr>
+          <p:nvPr/>
+        </p:nvSpPr>
+        <p:spPr>
+          <a:xfrm xmlns:a="http://schemas.openxmlformats.org/drawingml/2006/main">
+            <a:off x="9375172" y="6578632"/>
+            <a:ext cx="2743200" cy="279368"/>
+          </a:xfrm>
+          <a:prstGeom xmlns:a="http://schemas.openxmlformats.org/drawingml/2006/main" prst="rect">
+            <a:avLst/>
+          </a:prstGeom>
+          <a:noFill xmlns:a="http://schemas.openxmlformats.org/drawingml/2006/main"/>
+          <a:ln xmlns:a="http://schemas.openxmlformats.org/drawingml/2006/main" w="0">
+            <a:noFill/>
+            <a:prstDash val="solid"/>
+          </a:ln>
+        </p:spPr>
+        <p:txBody>
+          <a:bodyPr xmlns:a="http://schemas.openxmlformats.org/drawingml/2006/main" anchor="ctr"/>
+          <a:lstStyle xmlns:a="http://schemas.openxmlformats.org/drawingml/2006/main"/>
+          <a:p xmlns:a="http://schemas.openxmlformats.org/drawingml/2006/main">
+            <a:pPr algn="r">
+              <a:defRPr sz="1350" b="1">
+                <a:solidFill>
+                  <a:srgbClr val="FFFFFF"/>
+                </a:solidFill>
+                <a:latin typeface="微软雅黑"/>
+                <a:ea typeface="微软雅黑"/>
+                <a:cs typeface="微软雅黑"/>
+              </a:defRPr>
+            </a:pPr>
+            <a:r>
+              <a:rPr sz="1350" b="1">
+                <a:solidFill>
+                  <a:srgbClr val="FFFFFF"/>
+                </a:solidFill>
+                <a:latin typeface="微软雅黑"/>
+                <a:ea typeface="微软雅黑"/>
+                <a:cs typeface="微软雅黑"/>
+              </a:rPr>
+              <a:t>5</a:t>
+            </a:r>
+          </a:p>
+        </p:txBody>
+      </p:sp>
     </p:spTree>
     <p:extLst>
       <p:ext uri="{BB962C8B-B14F-4D97-AF65-F5344CB8AC3E}">
-        <p14:creationId xmlns:p14="http://schemas.microsoft.com/office/powerpoint/2010/main" val="1313561835"/>
+        <p14:creationId xmlns:p14="http://schemas.microsoft.com/office/powerpoint/2010/main" val="550653712"/>
       </p:ext>
     </p:extLst>
   </p:cSld>
@@ -14267,7 +11555,7 @@
           <p:cNvPr id="18" name="直角三角形 17">
             <a:extLst xmlns:a="http://schemas.openxmlformats.org/drawingml/2006/main">
               <a:ext uri="{FF2B5EF4-FFF2-40B4-BE49-F238E27FC236}">
-                <a16:creationId xmlns:a16="http://schemas.microsoft.com/office/drawing/2014/main" id="{577CB455-2695-46D6-A474-03F032677799}"/>
+                <a16:creationId xmlns:a16="http://schemas.microsoft.com/office/drawing/2014/main" id="{C1644077-3F33-4567-95EE-B69B85A9E358}"/>
               </a:ext>
             </a:extLst>
           </p:cNvPr>
@@ -14325,7 +11613,7 @@
           <p:cNvPr id="19" name="直角三角形 18">
             <a:extLst xmlns:a="http://schemas.openxmlformats.org/drawingml/2006/main">
               <a:ext uri="{FF2B5EF4-FFF2-40B4-BE49-F238E27FC236}">
-                <a16:creationId xmlns:a16="http://schemas.microsoft.com/office/drawing/2014/main" id="{15CC32B7-1F35-4C8F-B8C5-60B8A54F07B5}"/>
+                <a16:creationId xmlns:a16="http://schemas.microsoft.com/office/drawing/2014/main" id="{D11670B4-5E22-472C-A4B9-C36CF21148A8}"/>
               </a:ext>
             </a:extLst>
           </p:cNvPr>
@@ -14383,7 +11671,7 @@
           <p:cNvPr id="20" name="圆角矩形 2">
             <a:extLst xmlns:a="http://schemas.openxmlformats.org/drawingml/2006/main">
               <a:ext uri="{FF2B5EF4-FFF2-40B4-BE49-F238E27FC236}">
-                <a16:creationId xmlns:a16="http://schemas.microsoft.com/office/drawing/2014/main" id="{C1D0E857-9954-44C5-ADD2-D1818D3B7222}"/>
+                <a16:creationId xmlns:a16="http://schemas.microsoft.com/office/drawing/2014/main" id="{7149E51A-56C0-44DE-95AA-F3CD30CD99FD}"/>
               </a:ext>
             </a:extLst>
           </p:cNvPr>
@@ -14443,7 +11731,7 @@
           <p:cNvPr id="21" name="对角圆角矩形 80">
             <a:extLst xmlns:a="http://schemas.openxmlformats.org/drawingml/2006/main">
               <a:ext uri="{FF2B5EF4-FFF2-40B4-BE49-F238E27FC236}">
-                <a16:creationId xmlns:a16="http://schemas.microsoft.com/office/drawing/2014/main" id="{B0EA11AD-3B83-46B6-8E8A-4EEEACEAA6F0}"/>
+                <a16:creationId xmlns:a16="http://schemas.microsoft.com/office/drawing/2014/main" id="{76C0EAF4-7916-45F9-B297-9E6ACC847D21}"/>
               </a:ext>
             </a:extLst>
           </p:cNvPr>
@@ -14517,7 +11805,7 @@
           <p:cNvPr id="22" name="圆角矩形 2">
             <a:extLst xmlns:a="http://schemas.openxmlformats.org/drawingml/2006/main">
               <a:ext uri="{FF2B5EF4-FFF2-40B4-BE49-F238E27FC236}">
-                <a16:creationId xmlns:a16="http://schemas.microsoft.com/office/drawing/2014/main" id="{3B6F4E8A-E84E-460C-A559-6705DC7F0B2A}"/>
+                <a16:creationId xmlns:a16="http://schemas.microsoft.com/office/drawing/2014/main" id="{8E958127-01EF-4CD6-A0D5-48DC7BD85458}"/>
               </a:ext>
             </a:extLst>
           </p:cNvPr>
@@ -14577,7 +11865,7 @@
           <p:cNvPr id="23" name="对角圆角矩形 80">
             <a:extLst xmlns:a="http://schemas.openxmlformats.org/drawingml/2006/main">
               <a:ext uri="{FF2B5EF4-FFF2-40B4-BE49-F238E27FC236}">
-                <a16:creationId xmlns:a16="http://schemas.microsoft.com/office/drawing/2014/main" id="{BF730531-8C91-4A99-B851-B6A02665B6E2}"/>
+                <a16:creationId xmlns:a16="http://schemas.microsoft.com/office/drawing/2014/main" id="{DA184691-E7F4-435B-9979-BC8A9DC34DDE}"/>
               </a:ext>
             </a:extLst>
           </p:cNvPr>
@@ -14651,7 +11939,7 @@
           <p:cNvPr id="24" name="直角三角形 23">
             <a:extLst xmlns:a="http://schemas.openxmlformats.org/drawingml/2006/main">
               <a:ext uri="{FF2B5EF4-FFF2-40B4-BE49-F238E27FC236}">
-                <a16:creationId xmlns:a16="http://schemas.microsoft.com/office/drawing/2014/main" id="{E57BD96B-59A7-4A57-8C60-7CE13A16F531}"/>
+                <a16:creationId xmlns:a16="http://schemas.microsoft.com/office/drawing/2014/main" id="{0348DDAC-F469-406E-908C-242F4B0042F5}"/>
               </a:ext>
             </a:extLst>
           </p:cNvPr>
@@ -14709,7 +11997,7 @@
           <p:cNvPr id="25" name="圆角矩形 2">
             <a:extLst xmlns:a="http://schemas.openxmlformats.org/drawingml/2006/main">
               <a:ext uri="{FF2B5EF4-FFF2-40B4-BE49-F238E27FC236}">
-                <a16:creationId xmlns:a16="http://schemas.microsoft.com/office/drawing/2014/main" id="{94FF7B1A-B7E0-4D6E-BC6C-FCA8BCF8016B}"/>
+                <a16:creationId xmlns:a16="http://schemas.microsoft.com/office/drawing/2014/main" id="{4154454D-19A9-48C2-9C73-BC20753A40EB}"/>
               </a:ext>
             </a:extLst>
           </p:cNvPr>
@@ -14769,7 +12057,7 @@
           <p:cNvPr id="26" name="对角圆角矩形 80">
             <a:extLst xmlns:a="http://schemas.openxmlformats.org/drawingml/2006/main">
               <a:ext uri="{FF2B5EF4-FFF2-40B4-BE49-F238E27FC236}">
-                <a16:creationId xmlns:a16="http://schemas.microsoft.com/office/drawing/2014/main" id="{D0774957-4E83-4F3D-B816-536F922C0DAF}"/>
+                <a16:creationId xmlns:a16="http://schemas.microsoft.com/office/drawing/2014/main" id="{BB13481D-C289-45E9-B8EE-387537CA7916}"/>
               </a:ext>
             </a:extLst>
           </p:cNvPr>
@@ -14840,82 +12128,10 @@
       </p:sp>
       <p:sp>
         <p:nvSpPr>
-          <p:cNvPr id="27" name="灯片编号占位符 13">
-            <a:extLst xmlns:a="http://schemas.openxmlformats.org/drawingml/2006/main">
-              <a:ext uri="{FF2B5EF4-FFF2-40B4-BE49-F238E27FC236}">
-                <a16:creationId xmlns:a16="http://schemas.microsoft.com/office/drawing/2014/main" id="{200D2263-4B45-4C9C-8822-374F14D33B2E}"/>
-              </a:ext>
-            </a:extLst>
-          </p:cNvPr>
-          <p:cNvSpPr>
-            <a:spLocks xmlns:a="http://schemas.openxmlformats.org/drawingml/2006/main" noGrp="1"/>
-          </p:cNvSpPr>
-          <p:nvPr>
-            <p:ph type="sldNum" idx="12"/>
-          </p:nvPr>
-        </p:nvSpPr>
-        <p:spPr>
-          <a:xfrm xmlns:a="http://schemas.openxmlformats.org/drawingml/2006/main">
-            <a:off x="9375147" y="6578600"/>
-            <a:ext cx="2743200" cy="279400"/>
-          </a:xfrm>
-        </p:spPr>
-        <p:txBody>
-          <a:bodyPr xmlns:a="http://schemas.openxmlformats.org/drawingml/2006/main"/>
-          <a:lstStyle xmlns:a="http://schemas.openxmlformats.org/drawingml/2006/main"/>
-          <a:p xmlns:a="http://schemas.openxmlformats.org/drawingml/2006/main">
-            <a:fld id="{3ACD1EC8-6F57-41A7-99F1-FEDB2874BA2B}" type="slidenum">
-              <a:t>6</a:t>
-            </a:fld>
-            <a:endParaRPr/>
-          </a:p>
-        </p:txBody>
-      </p:sp>
-      <p:sp>
-        <p:nvSpPr>
-          <p:cNvPr id="2" name="标题 1">
-            <a:extLst xmlns:a="http://schemas.openxmlformats.org/drawingml/2006/main">
-              <a:ext uri="{FF2B5EF4-FFF2-40B4-BE49-F238E27FC236}">
-                <a16:creationId xmlns:a16="http://schemas.microsoft.com/office/drawing/2014/main" id="{4510B6F7-EE4D-4CDD-92F2-BD2560AD0552}"/>
-              </a:ext>
-            </a:extLst>
-          </p:cNvPr>
-          <p:cNvSpPr>
-            <a:spLocks xmlns:a="http://schemas.openxmlformats.org/drawingml/2006/main" noGrp="1"/>
-          </p:cNvSpPr>
-          <p:nvPr>
-            <p:ph type="title" idx="0"/>
-          </p:nvPr>
-        </p:nvSpPr>
-        <p:spPr>
-          <a:xfrm xmlns:a="http://schemas.openxmlformats.org/drawingml/2006/main">
-            <a:off x="482600" y="136525"/>
-            <a:ext cx="11214100" cy="615159"/>
-          </a:xfrm>
-        </p:spPr>
-        <p:txBody>
-          <a:bodyPr xmlns:a="http://schemas.openxmlformats.org/drawingml/2006/main">
-            <a:noAutofit/>
-          </a:bodyPr>
-          <a:lstStyle xmlns:a="http://schemas.openxmlformats.org/drawingml/2006/main"/>
-          <a:p xmlns:a="http://schemas.openxmlformats.org/drawingml/2006/main">
-            <a:r>
-              <a:rPr sz="2800" b="1">
-                <a:latin typeface="微软雅黑"/>
-                <a:ea typeface="微软雅黑"/>
-                <a:cs typeface="微软雅黑"/>
-              </a:rPr>
-              <a:t/>
-            </a:r>
-          </a:p>
-        </p:txBody>
-      </p:sp>
-      <p:sp>
-        <p:nvSpPr>
           <p:cNvPr id="28" name="">
             <a:extLst xmlns:a="http://schemas.openxmlformats.org/drawingml/2006/main">
               <a:ext uri="{FF2B5EF4-FFF2-40B4-BE49-F238E27FC236}">
-                <a16:creationId xmlns:a16="http://schemas.microsoft.com/office/drawing/2014/main" id="{94CD4947-155E-4D02-9C6F-C4F87BCC09C6}"/>
+                <a16:creationId xmlns:a16="http://schemas.microsoft.com/office/drawing/2014/main" id="{DE277C09-985B-4E32-9E2C-FF2F9B86D1CD}"/>
               </a:ext>
             </a:extLst>
           </p:cNvPr>
@@ -14948,7 +12164,7 @@
           <p:cNvPr id="29" name="">
             <a:extLst xmlns:a="http://schemas.openxmlformats.org/drawingml/2006/main">
               <a:ext uri="{FF2B5EF4-FFF2-40B4-BE49-F238E27FC236}">
-                <a16:creationId xmlns:a16="http://schemas.microsoft.com/office/drawing/2014/main" id="{79865A89-A406-4D5C-AC83-A2878B698EFC}"/>
+                <a16:creationId xmlns:a16="http://schemas.microsoft.com/office/drawing/2014/main" id="{E947A102-4607-4F29-948F-58692B5D9C9B}"/>
               </a:ext>
             </a:extLst>
           </p:cNvPr>
@@ -15004,7 +12220,7 @@
           <p:cNvPr id="30" name="">
             <a:extLst xmlns:a="http://schemas.openxmlformats.org/drawingml/2006/main">
               <a:ext uri="{FF2B5EF4-FFF2-40B4-BE49-F238E27FC236}">
-                <a16:creationId xmlns:a16="http://schemas.microsoft.com/office/drawing/2014/main" id="{99621379-0718-4573-B8C5-EA105C60F5E6}"/>
+                <a16:creationId xmlns:a16="http://schemas.microsoft.com/office/drawing/2014/main" id="{1C78B78E-E761-412D-AFB6-6308117EE382}"/>
               </a:ext>
             </a:extLst>
           </p:cNvPr>
@@ -15037,7 +12253,7 @@
           <p:cNvPr id="31" name="">
             <a:extLst xmlns:a="http://schemas.openxmlformats.org/drawingml/2006/main">
               <a:ext uri="{FF2B5EF4-FFF2-40B4-BE49-F238E27FC236}">
-                <a16:creationId xmlns:a16="http://schemas.microsoft.com/office/drawing/2014/main" id="{B1C59350-D677-460B-82B0-66EDADB5139C}"/>
+                <a16:creationId xmlns:a16="http://schemas.microsoft.com/office/drawing/2014/main" id="{E260AE56-7EA8-4438-8B55-54B41A177EFD}"/>
               </a:ext>
             </a:extLst>
           </p:cNvPr>
@@ -15093,7 +12309,7 @@
           <p:cNvPr id="32" name="">
             <a:extLst xmlns:a="http://schemas.openxmlformats.org/drawingml/2006/main">
               <a:ext uri="{FF2B5EF4-FFF2-40B4-BE49-F238E27FC236}">
-                <a16:creationId xmlns:a16="http://schemas.microsoft.com/office/drawing/2014/main" id="{FA54D2AA-9F46-4E72-BF68-BF3AFDA61D6B}"/>
+                <a16:creationId xmlns:a16="http://schemas.microsoft.com/office/drawing/2014/main" id="{6AA30660-3F66-4F7C-9ED2-22C049F338E1}"/>
               </a:ext>
             </a:extLst>
           </p:cNvPr>
@@ -15128,7 +12344,7 @@
           <p:cNvPr id="33" name="">
             <a:extLst xmlns:a="http://schemas.openxmlformats.org/drawingml/2006/main">
               <a:ext uri="{FF2B5EF4-FFF2-40B4-BE49-F238E27FC236}">
-                <a16:creationId xmlns:a16="http://schemas.microsoft.com/office/drawing/2014/main" id="{0793B771-75ED-4AEC-8A10-598FABFD9240}"/>
+                <a16:creationId xmlns:a16="http://schemas.microsoft.com/office/drawing/2014/main" id="{3027104D-A0A3-429A-8A51-75453040223F}"/>
               </a:ext>
             </a:extLst>
           </p:cNvPr>
@@ -15161,7 +12377,7 @@
           <a:bodyPr xmlns:a="http://schemas.openxmlformats.org/drawingml/2006/main"/>
           <a:lstStyle xmlns:a="http://schemas.openxmlformats.org/drawingml/2006/main"/>
           <a:p xmlns:a="http://schemas.openxmlformats.org/drawingml/2006/main">
-            <a:pPr>
+            <a:pPr algn="ctr">
               <a:defRPr sz="1350" b="1">
                 <a:solidFill>
                   <a:srgbClr val="FFFFFF"/>
@@ -15190,7 +12406,7 @@
           <p:cNvPr id="34" name="">
             <a:extLst xmlns:a="http://schemas.openxmlformats.org/drawingml/2006/main">
               <a:ext uri="{FF2B5EF4-FFF2-40B4-BE49-F238E27FC236}">
-                <a16:creationId xmlns:a16="http://schemas.microsoft.com/office/drawing/2014/main" id="{1CE6F5AC-1E4A-4B12-83E7-11378CC1906C}"/>
+                <a16:creationId xmlns:a16="http://schemas.microsoft.com/office/drawing/2014/main" id="{AB8A1DCC-407A-4C20-90D0-41A3F3EC3496}"/>
               </a:ext>
             </a:extLst>
           </p:cNvPr>
@@ -15320,7 +12536,7 @@
           <p:cNvPr id="35" name="">
             <a:extLst xmlns:a="http://schemas.openxmlformats.org/drawingml/2006/main">
               <a:ext uri="{FF2B5EF4-FFF2-40B4-BE49-F238E27FC236}">
-                <a16:creationId xmlns:a16="http://schemas.microsoft.com/office/drawing/2014/main" id="{02BFC4D4-A6E6-4EED-A279-5F87CC5F404E}"/>
+                <a16:creationId xmlns:a16="http://schemas.microsoft.com/office/drawing/2014/main" id="{DCE24C13-5464-4871-B81C-7AC497BF605E}"/>
               </a:ext>
             </a:extLst>
           </p:cNvPr>
@@ -15355,7 +12571,7 @@
           <p:cNvPr id="36" name="">
             <a:extLst xmlns:a="http://schemas.openxmlformats.org/drawingml/2006/main">
               <a:ext uri="{FF2B5EF4-FFF2-40B4-BE49-F238E27FC236}">
-                <a16:creationId xmlns:a16="http://schemas.microsoft.com/office/drawing/2014/main" id="{ADCA6A8A-C296-4CAF-9736-F3FF33163691}"/>
+                <a16:creationId xmlns:a16="http://schemas.microsoft.com/office/drawing/2014/main" id="{6A2561DB-9F9E-42C1-B3FB-08473D31DD4F}"/>
               </a:ext>
             </a:extLst>
           </p:cNvPr>
@@ -15388,7 +12604,7 @@
           <a:bodyPr xmlns:a="http://schemas.openxmlformats.org/drawingml/2006/main"/>
           <a:lstStyle xmlns:a="http://schemas.openxmlformats.org/drawingml/2006/main"/>
           <a:p xmlns:a="http://schemas.openxmlformats.org/drawingml/2006/main">
-            <a:pPr>
+            <a:pPr algn="ctr">
               <a:defRPr sz="1350" b="1">
                 <a:solidFill>
                   <a:srgbClr val="FFFFFF"/>
@@ -15417,7 +12633,7 @@
           <p:cNvPr id="37" name="">
             <a:extLst xmlns:a="http://schemas.openxmlformats.org/drawingml/2006/main">
               <a:ext uri="{FF2B5EF4-FFF2-40B4-BE49-F238E27FC236}">
-                <a16:creationId xmlns:a16="http://schemas.microsoft.com/office/drawing/2014/main" id="{EA062103-B6B7-4895-858B-064BD7788C9A}"/>
+                <a16:creationId xmlns:a16="http://schemas.microsoft.com/office/drawing/2014/main" id="{A6AAAF36-7608-4BFF-A7AC-0B08BF6F0D9B}"/>
               </a:ext>
             </a:extLst>
           </p:cNvPr>
@@ -15547,7 +12763,7 @@
           <p:cNvPr id="38" name="">
             <a:extLst xmlns:a="http://schemas.openxmlformats.org/drawingml/2006/main">
               <a:ext uri="{FF2B5EF4-FFF2-40B4-BE49-F238E27FC236}">
-                <a16:creationId xmlns:a16="http://schemas.microsoft.com/office/drawing/2014/main" id="{E08C4D67-F616-41D8-8B3D-CACB800178A2}"/>
+                <a16:creationId xmlns:a16="http://schemas.microsoft.com/office/drawing/2014/main" id="{56976805-3772-4B77-B1DE-7C86BA8E2E87}"/>
               </a:ext>
             </a:extLst>
           </p:cNvPr>
@@ -15582,7 +12798,7 @@
           <p:cNvPr id="39" name="">
             <a:extLst xmlns:a="http://schemas.openxmlformats.org/drawingml/2006/main">
               <a:ext uri="{FF2B5EF4-FFF2-40B4-BE49-F238E27FC236}">
-                <a16:creationId xmlns:a16="http://schemas.microsoft.com/office/drawing/2014/main" id="{3E336EA3-E755-4F50-A0F3-5FFBD3B4118F}"/>
+                <a16:creationId xmlns:a16="http://schemas.microsoft.com/office/drawing/2014/main" id="{6A55BD98-2F82-4F9E-932F-55F211993062}"/>
               </a:ext>
             </a:extLst>
           </p:cNvPr>
@@ -15615,7 +12831,7 @@
           <a:bodyPr xmlns:a="http://schemas.openxmlformats.org/drawingml/2006/main"/>
           <a:lstStyle xmlns:a="http://schemas.openxmlformats.org/drawingml/2006/main"/>
           <a:p xmlns:a="http://schemas.openxmlformats.org/drawingml/2006/main">
-            <a:pPr>
+            <a:pPr algn="ctr">
               <a:defRPr sz="1350" b="1">
                 <a:solidFill>
                   <a:srgbClr val="FFFFFF"/>
@@ -15644,7 +12860,7 @@
           <p:cNvPr id="40" name="">
             <a:extLst xmlns:a="http://schemas.openxmlformats.org/drawingml/2006/main">
               <a:ext uri="{FF2B5EF4-FFF2-40B4-BE49-F238E27FC236}">
-                <a16:creationId xmlns:a16="http://schemas.microsoft.com/office/drawing/2014/main" id="{2E24FFD9-752B-4BB5-9C71-CBD47ECCDC3F}"/>
+                <a16:creationId xmlns:a16="http://schemas.microsoft.com/office/drawing/2014/main" id="{82E706DF-4D56-4114-875B-8A9FBA9AC5F5}"/>
               </a:ext>
             </a:extLst>
           </p:cNvPr>
@@ -15774,7 +12990,7 @@
           <p:cNvPr id="41" name="">
             <a:extLst xmlns:a="http://schemas.openxmlformats.org/drawingml/2006/main">
               <a:ext uri="{FF2B5EF4-FFF2-40B4-BE49-F238E27FC236}">
-                <a16:creationId xmlns:a16="http://schemas.microsoft.com/office/drawing/2014/main" id="{EF138113-DEC4-4B61-B0E2-ABAB33CF0F82}"/>
+                <a16:creationId xmlns:a16="http://schemas.microsoft.com/office/drawing/2014/main" id="{87771981-F6ED-4404-97B2-6E54E7EA8F7A}"/>
               </a:ext>
             </a:extLst>
           </p:cNvPr>
@@ -15809,7 +13025,7 @@
           <p:cNvPr id="42" name="">
             <a:extLst xmlns:a="http://schemas.openxmlformats.org/drawingml/2006/main">
               <a:ext uri="{FF2B5EF4-FFF2-40B4-BE49-F238E27FC236}">
-                <a16:creationId xmlns:a16="http://schemas.microsoft.com/office/drawing/2014/main" id="{EBBF31F7-38BA-4DFB-A49E-B1E04D7CDFB5}"/>
+                <a16:creationId xmlns:a16="http://schemas.microsoft.com/office/drawing/2014/main" id="{6E1334EF-E52C-4D88-9241-37C3344C5EEC}"/>
               </a:ext>
             </a:extLst>
           </p:cNvPr>
@@ -15860,10 +13076,66 @@
           </a:p>
         </p:txBody>
       </p:sp>
+      <p:sp>
+        <p:nvSpPr>
+          <p:cNvPr id="43" name="">
+            <a:extLst xmlns:a="http://schemas.openxmlformats.org/drawingml/2006/main">
+              <a:ext uri="{FF2B5EF4-FFF2-40B4-BE49-F238E27FC236}">
+                <a16:creationId xmlns:a16="http://schemas.microsoft.com/office/drawing/2014/main" id="{131E010A-48C7-4D83-B37B-8ED535085651}"/>
+              </a:ext>
+            </a:extLst>
+          </p:cNvPr>
+          <p:cNvSpPr>
+            <a:spLocks xmlns:a="http://schemas.openxmlformats.org/drawingml/2006/main" noGrp="1"/>
+          </p:cNvSpPr>
+          <p:nvPr/>
+        </p:nvSpPr>
+        <p:spPr>
+          <a:xfrm xmlns:a="http://schemas.openxmlformats.org/drawingml/2006/main">
+            <a:off x="9375172" y="6578632"/>
+            <a:ext cx="2743200" cy="279368"/>
+          </a:xfrm>
+          <a:prstGeom xmlns:a="http://schemas.openxmlformats.org/drawingml/2006/main" prst="rect">
+            <a:avLst/>
+          </a:prstGeom>
+          <a:noFill xmlns:a="http://schemas.openxmlformats.org/drawingml/2006/main"/>
+          <a:ln xmlns:a="http://schemas.openxmlformats.org/drawingml/2006/main" w="0">
+            <a:noFill/>
+            <a:prstDash val="solid"/>
+          </a:ln>
+        </p:spPr>
+        <p:txBody>
+          <a:bodyPr xmlns:a="http://schemas.openxmlformats.org/drawingml/2006/main" anchor="ctr"/>
+          <a:lstStyle xmlns:a="http://schemas.openxmlformats.org/drawingml/2006/main"/>
+          <a:p xmlns:a="http://schemas.openxmlformats.org/drawingml/2006/main">
+            <a:pPr algn="r">
+              <a:defRPr sz="1350" b="1">
+                <a:solidFill>
+                  <a:srgbClr val="FFFFFF"/>
+                </a:solidFill>
+                <a:latin typeface="微软雅黑"/>
+                <a:ea typeface="微软雅黑"/>
+                <a:cs typeface="微软雅黑"/>
+              </a:defRPr>
+            </a:pPr>
+            <a:r>
+              <a:rPr sz="1350" b="1">
+                <a:solidFill>
+                  <a:srgbClr val="FFFFFF"/>
+                </a:solidFill>
+                <a:latin typeface="微软雅黑"/>
+                <a:ea typeface="微软雅黑"/>
+                <a:cs typeface="微软雅黑"/>
+              </a:rPr>
+              <a:t>6</a:t>
+            </a:r>
+          </a:p>
+        </p:txBody>
+      </p:sp>
     </p:spTree>
     <p:extLst>
       <p:ext uri="{BB962C8B-B14F-4D97-AF65-F5344CB8AC3E}">
-        <p14:creationId xmlns:p14="http://schemas.microsoft.com/office/powerpoint/2010/main" val="1099989209"/>
+        <p14:creationId xmlns:p14="http://schemas.microsoft.com/office/powerpoint/2010/main" val="123259388"/>
       </p:ext>
     </p:extLst>
   </p:cSld>
@@ -15884,43 +13156,10 @@
       </p:grpSpPr>
       <p:sp>
         <p:nvSpPr>
-          <p:cNvPr id="3" name="灯片编号占位符 2">
-            <a:extLst xmlns:a="http://schemas.openxmlformats.org/drawingml/2006/main">
-              <a:ext uri="{FF2B5EF4-FFF2-40B4-BE49-F238E27FC236}">
-                <a16:creationId xmlns:a16="http://schemas.microsoft.com/office/drawing/2014/main" id="{B8579A8A-5EB2-455D-88A5-1C2BBFAFF26D}"/>
-              </a:ext>
-            </a:extLst>
-          </p:cNvPr>
-          <p:cNvSpPr>
-            <a:spLocks xmlns:a="http://schemas.openxmlformats.org/drawingml/2006/main" noGrp="1"/>
-          </p:cNvSpPr>
-          <p:nvPr>
-            <p:ph type="sldNum" idx="12"/>
-          </p:nvPr>
-        </p:nvSpPr>
-        <p:spPr>
-          <a:xfrm xmlns:a="http://schemas.openxmlformats.org/drawingml/2006/main">
-            <a:off x="9375147" y="6578600"/>
-            <a:ext cx="2743200" cy="279400"/>
-          </a:xfrm>
-        </p:spPr>
-        <p:txBody>
-          <a:bodyPr xmlns:a="http://schemas.openxmlformats.org/drawingml/2006/main"/>
-          <a:lstStyle xmlns:a="http://schemas.openxmlformats.org/drawingml/2006/main"/>
-          <a:p xmlns:a="http://schemas.openxmlformats.org/drawingml/2006/main">
-            <a:fld id="{3ACD1EC8-6F57-41A7-99F1-FEDB2874BA2B}" type="slidenum">
-              <a:t>7</a:t>
-            </a:fld>
-            <a:endParaRPr/>
-          </a:p>
-        </p:txBody>
-      </p:sp>
-      <p:sp>
-        <p:nvSpPr>
           <p:cNvPr id="4" name="直角三角形 3">
             <a:extLst xmlns:a="http://schemas.openxmlformats.org/drawingml/2006/main">
               <a:ext uri="{FF2B5EF4-FFF2-40B4-BE49-F238E27FC236}">
-                <a16:creationId xmlns:a16="http://schemas.microsoft.com/office/drawing/2014/main" id="{9DEFBA9A-DCE1-40E2-9E7A-920ED84F7B8E}"/>
+                <a16:creationId xmlns:a16="http://schemas.microsoft.com/office/drawing/2014/main" id="{9427A8CF-EFDA-4B0E-8F56-140020B29876}"/>
               </a:ext>
             </a:extLst>
           </p:cNvPr>
@@ -15978,7 +13217,7 @@
           <p:cNvPr id="5" name="直角三角形 4">
             <a:extLst xmlns:a="http://schemas.openxmlformats.org/drawingml/2006/main">
               <a:ext uri="{FF2B5EF4-FFF2-40B4-BE49-F238E27FC236}">
-                <a16:creationId xmlns:a16="http://schemas.microsoft.com/office/drawing/2014/main" id="{C4E06DE9-8382-4366-AA92-C96361999B4E}"/>
+                <a16:creationId xmlns:a16="http://schemas.microsoft.com/office/drawing/2014/main" id="{D7E677C2-9A75-466F-91CA-60795F86A71D}"/>
               </a:ext>
             </a:extLst>
           </p:cNvPr>
@@ -16036,7 +13275,7 @@
           <p:cNvPr id="6" name="圆角矩形 2">
             <a:extLst xmlns:a="http://schemas.openxmlformats.org/drawingml/2006/main">
               <a:ext uri="{FF2B5EF4-FFF2-40B4-BE49-F238E27FC236}">
-                <a16:creationId xmlns:a16="http://schemas.microsoft.com/office/drawing/2014/main" id="{CC1F5A19-7CE9-4A8E-B725-71BDAB3A306B}"/>
+                <a16:creationId xmlns:a16="http://schemas.microsoft.com/office/drawing/2014/main" id="{CB7BA873-D3DF-4F06-9C71-0DC5FBD0CE6E}"/>
               </a:ext>
             </a:extLst>
           </p:cNvPr>
@@ -16096,7 +13335,7 @@
           <p:cNvPr id="7" name="圆角矩形 2">
             <a:extLst xmlns:a="http://schemas.openxmlformats.org/drawingml/2006/main">
               <a:ext uri="{FF2B5EF4-FFF2-40B4-BE49-F238E27FC236}">
-                <a16:creationId xmlns:a16="http://schemas.microsoft.com/office/drawing/2014/main" id="{E236E652-345E-4414-840D-C13D4BC061FD}"/>
+                <a16:creationId xmlns:a16="http://schemas.microsoft.com/office/drawing/2014/main" id="{AA4A31BA-A971-44F6-AFF7-24A0D3D646B7}"/>
               </a:ext>
             </a:extLst>
           </p:cNvPr>
@@ -16156,7 +13395,7 @@
           <p:cNvPr id="8" name="对角圆角矩形 80">
             <a:extLst xmlns:a="http://schemas.openxmlformats.org/drawingml/2006/main">
               <a:ext uri="{FF2B5EF4-FFF2-40B4-BE49-F238E27FC236}">
-                <a16:creationId xmlns:a16="http://schemas.microsoft.com/office/drawing/2014/main" id="{ED63781C-EC90-4781-AC88-EB1BBDFF00A7}"/>
+                <a16:creationId xmlns:a16="http://schemas.microsoft.com/office/drawing/2014/main" id="{73685B7C-AC09-48F2-8DDB-2FFFDD269F2B}"/>
               </a:ext>
             </a:extLst>
           </p:cNvPr>
@@ -16230,7 +13469,7 @@
           <p:cNvPr id="9" name="对角圆角矩形 81">
             <a:extLst xmlns:a="http://schemas.openxmlformats.org/drawingml/2006/main">
               <a:ext uri="{FF2B5EF4-FFF2-40B4-BE49-F238E27FC236}">
-                <a16:creationId xmlns:a16="http://schemas.microsoft.com/office/drawing/2014/main" id="{9C0C9826-99EE-486D-BC6C-1A33FCDEB3D9}"/>
+                <a16:creationId xmlns:a16="http://schemas.microsoft.com/office/drawing/2014/main" id="{3572CE6C-B482-4D32-A308-B3F910FC47A0}"/>
               </a:ext>
             </a:extLst>
           </p:cNvPr>
@@ -16301,49 +13540,10 @@
       </p:sp>
       <p:sp>
         <p:nvSpPr>
-          <p:cNvPr id="10" name="标题 9">
-            <a:extLst xmlns:a="http://schemas.openxmlformats.org/drawingml/2006/main">
-              <a:ext uri="{FF2B5EF4-FFF2-40B4-BE49-F238E27FC236}">
-                <a16:creationId xmlns:a16="http://schemas.microsoft.com/office/drawing/2014/main" id="{569B5FDE-99A3-4E7F-9DE9-9D371F831AAE}"/>
-              </a:ext>
-            </a:extLst>
-          </p:cNvPr>
-          <p:cNvSpPr>
-            <a:spLocks xmlns:a="http://schemas.openxmlformats.org/drawingml/2006/main" noGrp="1"/>
-          </p:cNvSpPr>
-          <p:nvPr>
-            <p:ph type="title" idx="0"/>
-          </p:nvPr>
-        </p:nvSpPr>
-        <p:spPr>
-          <a:xfrm xmlns:a="http://schemas.openxmlformats.org/drawingml/2006/main">
-            <a:off x="482600" y="136525"/>
-            <a:ext cx="11214100" cy="615159"/>
-          </a:xfrm>
-        </p:spPr>
-        <p:txBody>
-          <a:bodyPr xmlns:a="http://schemas.openxmlformats.org/drawingml/2006/main">
-            <a:noAutofit/>
-          </a:bodyPr>
-          <a:lstStyle xmlns:a="http://schemas.openxmlformats.org/drawingml/2006/main"/>
-          <a:p xmlns:a="http://schemas.openxmlformats.org/drawingml/2006/main">
-            <a:r>
-              <a:rPr sz="2800" b="1">
-                <a:latin typeface="微软雅黑"/>
-                <a:ea typeface="微软雅黑"/>
-                <a:cs typeface="微软雅黑"/>
-              </a:rPr>
-              <a:t/>
-            </a:r>
-          </a:p>
-        </p:txBody>
-      </p:sp>
-      <p:sp>
-        <p:nvSpPr>
           <p:cNvPr id="11" name="">
             <a:extLst xmlns:a="http://schemas.openxmlformats.org/drawingml/2006/main">
               <a:ext uri="{FF2B5EF4-FFF2-40B4-BE49-F238E27FC236}">
-                <a16:creationId xmlns:a16="http://schemas.microsoft.com/office/drawing/2014/main" id="{BF97C2AB-E0B8-4ADC-A52B-23EA63017C76}"/>
+                <a16:creationId xmlns:a16="http://schemas.microsoft.com/office/drawing/2014/main" id="{367C3AFE-00F3-4190-8FDB-191BDF82F0A4}"/>
               </a:ext>
             </a:extLst>
           </p:cNvPr>
@@ -16376,7 +13576,7 @@
           <p:cNvPr id="12" name="">
             <a:extLst xmlns:a="http://schemas.openxmlformats.org/drawingml/2006/main">
               <a:ext uri="{FF2B5EF4-FFF2-40B4-BE49-F238E27FC236}">
-                <a16:creationId xmlns:a16="http://schemas.microsoft.com/office/drawing/2014/main" id="{33788E86-D07A-4F41-B915-1AEAED7B1581}"/>
+                <a16:creationId xmlns:a16="http://schemas.microsoft.com/office/drawing/2014/main" id="{A51061FC-9941-4C89-9DC3-4CB4B3FC9128}"/>
               </a:ext>
             </a:extLst>
           </p:cNvPr>
@@ -16432,7 +13632,7 @@
           <p:cNvPr id="13" name="">
             <a:extLst xmlns:a="http://schemas.openxmlformats.org/drawingml/2006/main">
               <a:ext uri="{FF2B5EF4-FFF2-40B4-BE49-F238E27FC236}">
-                <a16:creationId xmlns:a16="http://schemas.microsoft.com/office/drawing/2014/main" id="{97856315-E460-4BE2-89F8-7AE7DFA34546}"/>
+                <a16:creationId xmlns:a16="http://schemas.microsoft.com/office/drawing/2014/main" id="{8CFDDBF4-2936-4D5B-A0F1-B0D5FE6FC847}"/>
               </a:ext>
             </a:extLst>
           </p:cNvPr>
@@ -16465,7 +13665,7 @@
           <p:cNvPr id="14" name="">
             <a:extLst xmlns:a="http://schemas.openxmlformats.org/drawingml/2006/main">
               <a:ext uri="{FF2B5EF4-FFF2-40B4-BE49-F238E27FC236}">
-                <a16:creationId xmlns:a16="http://schemas.microsoft.com/office/drawing/2014/main" id="{1C5411AF-01DA-4AFF-ADF1-56FE50D43787}"/>
+                <a16:creationId xmlns:a16="http://schemas.microsoft.com/office/drawing/2014/main" id="{5D5391EB-6B17-4D4E-9DC5-50FAEAD24ADC}"/>
               </a:ext>
             </a:extLst>
           </p:cNvPr>
@@ -16521,7 +13721,7 @@
           <p:cNvPr id="15" name="">
             <a:extLst xmlns:a="http://schemas.openxmlformats.org/drawingml/2006/main">
               <a:ext uri="{FF2B5EF4-FFF2-40B4-BE49-F238E27FC236}">
-                <a16:creationId xmlns:a16="http://schemas.microsoft.com/office/drawing/2014/main" id="{C11F0F58-836D-4107-A9A9-D33A3E08986F}"/>
+                <a16:creationId xmlns:a16="http://schemas.microsoft.com/office/drawing/2014/main" id="{1DEF708F-7258-417A-A7DA-EDCB78ADBD39}"/>
               </a:ext>
             </a:extLst>
           </p:cNvPr>
@@ -16556,7 +13756,7 @@
           <p:cNvPr id="16" name="">
             <a:extLst xmlns:a="http://schemas.openxmlformats.org/drawingml/2006/main">
               <a:ext uri="{FF2B5EF4-FFF2-40B4-BE49-F238E27FC236}">
-                <a16:creationId xmlns:a16="http://schemas.microsoft.com/office/drawing/2014/main" id="{D0E21DD9-11EA-45AE-8B83-B5D728C7DA94}"/>
+                <a16:creationId xmlns:a16="http://schemas.microsoft.com/office/drawing/2014/main" id="{868F2A90-8F44-4AE2-BBC4-7F8F1C760C60}"/>
               </a:ext>
             </a:extLst>
           </p:cNvPr>
@@ -16589,7 +13789,7 @@
           <a:bodyPr xmlns:a="http://schemas.openxmlformats.org/drawingml/2006/main"/>
           <a:lstStyle xmlns:a="http://schemas.openxmlformats.org/drawingml/2006/main"/>
           <a:p xmlns:a="http://schemas.openxmlformats.org/drawingml/2006/main">
-            <a:pPr>
+            <a:pPr algn="ctr">
               <a:defRPr sz="1350" b="1">
                 <a:solidFill>
                   <a:srgbClr val="FFFFFF"/>
@@ -16618,7 +13818,7 @@
           <p:cNvPr id="17" name="">
             <a:extLst xmlns:a="http://schemas.openxmlformats.org/drawingml/2006/main">
               <a:ext uri="{FF2B5EF4-FFF2-40B4-BE49-F238E27FC236}">
-                <a16:creationId xmlns:a16="http://schemas.microsoft.com/office/drawing/2014/main" id="{B7B7C928-BE13-4E79-9074-E60DFCC47B60}"/>
+                <a16:creationId xmlns:a16="http://schemas.microsoft.com/office/drawing/2014/main" id="{77BFB922-CC08-4266-A7FF-39B8703A3051}"/>
               </a:ext>
             </a:extLst>
           </p:cNvPr>
@@ -16748,7 +13948,7 @@
           <p:cNvPr id="18" name="">
             <a:extLst xmlns:a="http://schemas.openxmlformats.org/drawingml/2006/main">
               <a:ext uri="{FF2B5EF4-FFF2-40B4-BE49-F238E27FC236}">
-                <a16:creationId xmlns:a16="http://schemas.microsoft.com/office/drawing/2014/main" id="{2D38A18E-579F-46FE-8B84-A00FF15D4BE5}"/>
+                <a16:creationId xmlns:a16="http://schemas.microsoft.com/office/drawing/2014/main" id="{D573DB20-0FBF-4AB0-84C5-B6E14945162B}"/>
               </a:ext>
             </a:extLst>
           </p:cNvPr>
@@ -16783,7 +13983,7 @@
           <p:cNvPr id="19" name="">
             <a:extLst xmlns:a="http://schemas.openxmlformats.org/drawingml/2006/main">
               <a:ext uri="{FF2B5EF4-FFF2-40B4-BE49-F238E27FC236}">
-                <a16:creationId xmlns:a16="http://schemas.microsoft.com/office/drawing/2014/main" id="{D9B428D3-59A6-42BD-A265-7693C06E7A81}"/>
+                <a16:creationId xmlns:a16="http://schemas.microsoft.com/office/drawing/2014/main" id="{3D7CD1C1-1286-4999-BBCF-5D0969770872}"/>
               </a:ext>
             </a:extLst>
           </p:cNvPr>
@@ -16816,7 +14016,7 @@
           <a:bodyPr xmlns:a="http://schemas.openxmlformats.org/drawingml/2006/main"/>
           <a:lstStyle xmlns:a="http://schemas.openxmlformats.org/drawingml/2006/main"/>
           <a:p xmlns:a="http://schemas.openxmlformats.org/drawingml/2006/main">
-            <a:pPr>
+            <a:pPr algn="ctr">
               <a:defRPr sz="1350" b="1">
                 <a:solidFill>
                   <a:srgbClr val="FFFFFF"/>
@@ -16845,7 +14045,7 @@
           <p:cNvPr id="20" name="">
             <a:extLst xmlns:a="http://schemas.openxmlformats.org/drawingml/2006/main">
               <a:ext uri="{FF2B5EF4-FFF2-40B4-BE49-F238E27FC236}">
-                <a16:creationId xmlns:a16="http://schemas.microsoft.com/office/drawing/2014/main" id="{9B440786-014C-4630-88C5-2A5783BBBA01}"/>
+                <a16:creationId xmlns:a16="http://schemas.microsoft.com/office/drawing/2014/main" id="{C7E2E22C-551D-4431-8F73-B4299FEA192E}"/>
               </a:ext>
             </a:extLst>
           </p:cNvPr>
@@ -16975,7 +14175,7 @@
           <p:cNvPr id="21" name="">
             <a:extLst xmlns:a="http://schemas.openxmlformats.org/drawingml/2006/main">
               <a:ext uri="{FF2B5EF4-FFF2-40B4-BE49-F238E27FC236}">
-                <a16:creationId xmlns:a16="http://schemas.microsoft.com/office/drawing/2014/main" id="{594EE736-F89D-4BC0-B353-CCB4AB2AFA33}"/>
+                <a16:creationId xmlns:a16="http://schemas.microsoft.com/office/drawing/2014/main" id="{E93F3F3B-444C-4FE7-8522-26E81BABDD23}"/>
               </a:ext>
             </a:extLst>
           </p:cNvPr>
@@ -17010,7 +14210,7 @@
           <p:cNvPr id="22" name="">
             <a:extLst xmlns:a="http://schemas.openxmlformats.org/drawingml/2006/main">
               <a:ext uri="{FF2B5EF4-FFF2-40B4-BE49-F238E27FC236}">
-                <a16:creationId xmlns:a16="http://schemas.microsoft.com/office/drawing/2014/main" id="{D5A23FAC-1C20-463C-B5D6-E8630B2069CC}"/>
+                <a16:creationId xmlns:a16="http://schemas.microsoft.com/office/drawing/2014/main" id="{C84DA585-E660-4214-8806-DA99D8AACA06}"/>
               </a:ext>
             </a:extLst>
           </p:cNvPr>
@@ -17043,7 +14243,7 @@
           <a:bodyPr xmlns:a="http://schemas.openxmlformats.org/drawingml/2006/main"/>
           <a:lstStyle xmlns:a="http://schemas.openxmlformats.org/drawingml/2006/main"/>
           <a:p xmlns:a="http://schemas.openxmlformats.org/drawingml/2006/main">
-            <a:pPr>
+            <a:pPr algn="ctr">
               <a:defRPr sz="1350" b="1">
                 <a:solidFill>
                   <a:srgbClr val="FFFFFF"/>
@@ -17072,7 +14272,7 @@
           <p:cNvPr id="23" name="">
             <a:extLst xmlns:a="http://schemas.openxmlformats.org/drawingml/2006/main">
               <a:ext uri="{FF2B5EF4-FFF2-40B4-BE49-F238E27FC236}">
-                <a16:creationId xmlns:a16="http://schemas.microsoft.com/office/drawing/2014/main" id="{F98031AD-8873-4129-826D-6429BF21113D}"/>
+                <a16:creationId xmlns:a16="http://schemas.microsoft.com/office/drawing/2014/main" id="{A96CD283-2B53-4026-A502-B030DFE16E9F}"/>
               </a:ext>
             </a:extLst>
           </p:cNvPr>
@@ -17202,7 +14402,7 @@
           <p:cNvPr id="24" name="">
             <a:extLst xmlns:a="http://schemas.openxmlformats.org/drawingml/2006/main">
               <a:ext uri="{FF2B5EF4-FFF2-40B4-BE49-F238E27FC236}">
-                <a16:creationId xmlns:a16="http://schemas.microsoft.com/office/drawing/2014/main" id="{C5D6FA5E-E805-4D49-A5DB-8BEAFD48185B}"/>
+                <a16:creationId xmlns:a16="http://schemas.microsoft.com/office/drawing/2014/main" id="{B48DEDEE-D8A5-4F92-98A5-6D18926E4509}"/>
               </a:ext>
             </a:extLst>
           </p:cNvPr>
@@ -17237,7 +14437,7 @@
           <p:cNvPr id="25" name="">
             <a:extLst xmlns:a="http://schemas.openxmlformats.org/drawingml/2006/main">
               <a:ext uri="{FF2B5EF4-FFF2-40B4-BE49-F238E27FC236}">
-                <a16:creationId xmlns:a16="http://schemas.microsoft.com/office/drawing/2014/main" id="{DDF65C4E-DA24-4164-B268-C41AB30FEBEB}"/>
+                <a16:creationId xmlns:a16="http://schemas.microsoft.com/office/drawing/2014/main" id="{F10A13B0-DD99-4640-9FBB-D2BF7C124BA0}"/>
               </a:ext>
             </a:extLst>
           </p:cNvPr>
@@ -17288,10 +14488,66 @@
           </a:p>
         </p:txBody>
       </p:sp>
+      <p:sp>
+        <p:nvSpPr>
+          <p:cNvPr id="26" name="">
+            <a:extLst xmlns:a="http://schemas.openxmlformats.org/drawingml/2006/main">
+              <a:ext uri="{FF2B5EF4-FFF2-40B4-BE49-F238E27FC236}">
+                <a16:creationId xmlns:a16="http://schemas.microsoft.com/office/drawing/2014/main" id="{52EF03FF-82C8-442B-95B0-C4ECC10BD0CB}"/>
+              </a:ext>
+            </a:extLst>
+          </p:cNvPr>
+          <p:cNvSpPr>
+            <a:spLocks xmlns:a="http://schemas.openxmlformats.org/drawingml/2006/main" noGrp="1"/>
+          </p:cNvSpPr>
+          <p:nvPr/>
+        </p:nvSpPr>
+        <p:spPr>
+          <a:xfrm xmlns:a="http://schemas.openxmlformats.org/drawingml/2006/main">
+            <a:off x="9375172" y="6578632"/>
+            <a:ext cx="2743200" cy="279368"/>
+          </a:xfrm>
+          <a:prstGeom xmlns:a="http://schemas.openxmlformats.org/drawingml/2006/main" prst="rect">
+            <a:avLst/>
+          </a:prstGeom>
+          <a:noFill xmlns:a="http://schemas.openxmlformats.org/drawingml/2006/main"/>
+          <a:ln xmlns:a="http://schemas.openxmlformats.org/drawingml/2006/main" w="0">
+            <a:noFill/>
+            <a:prstDash val="solid"/>
+          </a:ln>
+        </p:spPr>
+        <p:txBody>
+          <a:bodyPr xmlns:a="http://schemas.openxmlformats.org/drawingml/2006/main" anchor="ctr"/>
+          <a:lstStyle xmlns:a="http://schemas.openxmlformats.org/drawingml/2006/main"/>
+          <a:p xmlns:a="http://schemas.openxmlformats.org/drawingml/2006/main">
+            <a:pPr algn="r">
+              <a:defRPr sz="1350" b="1">
+                <a:solidFill>
+                  <a:srgbClr val="FFFFFF"/>
+                </a:solidFill>
+                <a:latin typeface="微软雅黑"/>
+                <a:ea typeface="微软雅黑"/>
+                <a:cs typeface="微软雅黑"/>
+              </a:defRPr>
+            </a:pPr>
+            <a:r>
+              <a:rPr sz="1350" b="1">
+                <a:solidFill>
+                  <a:srgbClr val="FFFFFF"/>
+                </a:solidFill>
+                <a:latin typeface="微软雅黑"/>
+                <a:ea typeface="微软雅黑"/>
+                <a:cs typeface="微软雅黑"/>
+              </a:rPr>
+              <a:t>7</a:t>
+            </a:r>
+          </a:p>
+        </p:txBody>
+      </p:sp>
     </p:spTree>
     <p:extLst>
       <p:ext uri="{BB962C8B-B14F-4D97-AF65-F5344CB8AC3E}">
-        <p14:creationId xmlns:p14="http://schemas.microsoft.com/office/powerpoint/2010/main" val="1962864629"/>
+        <p14:creationId xmlns:p14="http://schemas.microsoft.com/office/powerpoint/2010/main" val="1615703694"/>
       </p:ext>
     </p:extLst>
   </p:cSld>
@@ -17312,43 +14568,10 @@
       </p:grpSpPr>
       <p:sp>
         <p:nvSpPr>
-          <p:cNvPr id="3" name="灯片编号占位符 2">
-            <a:extLst xmlns:a="http://schemas.openxmlformats.org/drawingml/2006/main">
-              <a:ext uri="{FF2B5EF4-FFF2-40B4-BE49-F238E27FC236}">
-                <a16:creationId xmlns:a16="http://schemas.microsoft.com/office/drawing/2014/main" id="{2858ABC0-723A-4CCA-BD03-16AC2964007C}"/>
-              </a:ext>
-            </a:extLst>
-          </p:cNvPr>
-          <p:cNvSpPr>
-            <a:spLocks xmlns:a="http://schemas.openxmlformats.org/drawingml/2006/main" noGrp="1"/>
-          </p:cNvSpPr>
-          <p:nvPr>
-            <p:ph type="sldNum" idx="12"/>
-          </p:nvPr>
-        </p:nvSpPr>
-        <p:spPr>
-          <a:xfrm xmlns:a="http://schemas.openxmlformats.org/drawingml/2006/main">
-            <a:off x="9375147" y="6578600"/>
-            <a:ext cx="2743200" cy="279400"/>
-          </a:xfrm>
-        </p:spPr>
-        <p:txBody>
-          <a:bodyPr xmlns:a="http://schemas.openxmlformats.org/drawingml/2006/main"/>
-          <a:lstStyle xmlns:a="http://schemas.openxmlformats.org/drawingml/2006/main"/>
-          <a:p xmlns:a="http://schemas.openxmlformats.org/drawingml/2006/main">
-            <a:fld id="{3ACD1EC8-6F57-41A7-99F1-FEDB2874BA2B}" type="slidenum">
-              <a:t>8</a:t>
-            </a:fld>
-            <a:endParaRPr/>
-          </a:p>
-        </p:txBody>
-      </p:sp>
-      <p:sp>
-        <p:nvSpPr>
           <p:cNvPr id="4" name="直角三角形 3">
             <a:extLst xmlns:a="http://schemas.openxmlformats.org/drawingml/2006/main">
               <a:ext uri="{FF2B5EF4-FFF2-40B4-BE49-F238E27FC236}">
-                <a16:creationId xmlns:a16="http://schemas.microsoft.com/office/drawing/2014/main" id="{F17316AB-7099-4AEC-AF81-7069C79438FA}"/>
+                <a16:creationId xmlns:a16="http://schemas.microsoft.com/office/drawing/2014/main" id="{3B19CB5B-F494-4FE9-97B8-C50A353E69A9}"/>
               </a:ext>
             </a:extLst>
           </p:cNvPr>
@@ -17406,7 +14629,7 @@
           <p:cNvPr id="5" name="圆角矩形 2">
             <a:extLst xmlns:a="http://schemas.openxmlformats.org/drawingml/2006/main">
               <a:ext uri="{FF2B5EF4-FFF2-40B4-BE49-F238E27FC236}">
-                <a16:creationId xmlns:a16="http://schemas.microsoft.com/office/drawing/2014/main" id="{CAB77141-E7E7-40D1-A047-E1AEEFF9CE86}"/>
+                <a16:creationId xmlns:a16="http://schemas.microsoft.com/office/drawing/2014/main" id="{F78026ED-34D7-48FF-9D74-486DE66636AD}"/>
               </a:ext>
             </a:extLst>
           </p:cNvPr>
@@ -17466,7 +14689,7 @@
           <p:cNvPr id="6" name="对角圆角矩形 80">
             <a:extLst xmlns:a="http://schemas.openxmlformats.org/drawingml/2006/main">
               <a:ext uri="{FF2B5EF4-FFF2-40B4-BE49-F238E27FC236}">
-                <a16:creationId xmlns:a16="http://schemas.microsoft.com/office/drawing/2014/main" id="{18FBE0D5-43B4-4EC0-9E9F-E3E966F9915A}"/>
+                <a16:creationId xmlns:a16="http://schemas.microsoft.com/office/drawing/2014/main" id="{39C36C26-EC52-4FA8-935A-C80E1EB3D336}"/>
               </a:ext>
             </a:extLst>
           </p:cNvPr>
@@ -17540,7 +14763,7 @@
           <p:cNvPr id="7" name="直角三角形 6">
             <a:extLst xmlns:a="http://schemas.openxmlformats.org/drawingml/2006/main">
               <a:ext uri="{FF2B5EF4-FFF2-40B4-BE49-F238E27FC236}">
-                <a16:creationId xmlns:a16="http://schemas.microsoft.com/office/drawing/2014/main" id="{A80CD7BC-FF54-4205-9F5B-FDE3CCB33F38}"/>
+                <a16:creationId xmlns:a16="http://schemas.microsoft.com/office/drawing/2014/main" id="{AB2674C8-01F0-4BC0-BA36-8066FCAE77AD}"/>
               </a:ext>
             </a:extLst>
           </p:cNvPr>
@@ -17598,7 +14821,7 @@
           <p:cNvPr id="8" name="圆角矩形 2">
             <a:extLst xmlns:a="http://schemas.openxmlformats.org/drawingml/2006/main">
               <a:ext uri="{FF2B5EF4-FFF2-40B4-BE49-F238E27FC236}">
-                <a16:creationId xmlns:a16="http://schemas.microsoft.com/office/drawing/2014/main" id="{3CB7ED48-475B-4781-B914-30B4E07047AA}"/>
+                <a16:creationId xmlns:a16="http://schemas.microsoft.com/office/drawing/2014/main" id="{28936605-FC7B-48C8-9138-F4A36866A74B}"/>
               </a:ext>
             </a:extLst>
           </p:cNvPr>
@@ -17658,7 +14881,7 @@
           <p:cNvPr id="9" name="对角圆角矩形 80">
             <a:extLst xmlns:a="http://schemas.openxmlformats.org/drawingml/2006/main">
               <a:ext uri="{FF2B5EF4-FFF2-40B4-BE49-F238E27FC236}">
-                <a16:creationId xmlns:a16="http://schemas.microsoft.com/office/drawing/2014/main" id="{139E1E37-27A9-4DB0-B512-3278ECC8D542}"/>
+                <a16:creationId xmlns:a16="http://schemas.microsoft.com/office/drawing/2014/main" id="{3B63DF55-BC82-4CB8-8A3A-21F7E3374F1B}"/>
               </a:ext>
             </a:extLst>
           </p:cNvPr>
@@ -17732,7 +14955,7 @@
           <p:cNvPr id="10" name="直角三角形 9">
             <a:extLst xmlns:a="http://schemas.openxmlformats.org/drawingml/2006/main">
               <a:ext uri="{FF2B5EF4-FFF2-40B4-BE49-F238E27FC236}">
-                <a16:creationId xmlns:a16="http://schemas.microsoft.com/office/drawing/2014/main" id="{6ABDBD77-2F69-41F1-BD50-9DAC27B1D16B}"/>
+                <a16:creationId xmlns:a16="http://schemas.microsoft.com/office/drawing/2014/main" id="{F266D5D9-09A8-43F8-ABCB-AE6CF4A5587A}"/>
               </a:ext>
             </a:extLst>
           </p:cNvPr>
@@ -17790,7 +15013,7 @@
           <p:cNvPr id="11" name="圆角矩形 2">
             <a:extLst xmlns:a="http://schemas.openxmlformats.org/drawingml/2006/main">
               <a:ext uri="{FF2B5EF4-FFF2-40B4-BE49-F238E27FC236}">
-                <a16:creationId xmlns:a16="http://schemas.microsoft.com/office/drawing/2014/main" id="{431C4FB5-D715-4546-84A8-ECB0E5160993}"/>
+                <a16:creationId xmlns:a16="http://schemas.microsoft.com/office/drawing/2014/main" id="{F9E46E32-6878-4BD7-9B13-3B22C1BE80AC}"/>
               </a:ext>
             </a:extLst>
           </p:cNvPr>
@@ -17850,7 +15073,7 @@
           <p:cNvPr id="12" name="对角圆角矩形 80">
             <a:extLst xmlns:a="http://schemas.openxmlformats.org/drawingml/2006/main">
               <a:ext uri="{FF2B5EF4-FFF2-40B4-BE49-F238E27FC236}">
-                <a16:creationId xmlns:a16="http://schemas.microsoft.com/office/drawing/2014/main" id="{BA1BF00E-121A-4A88-81D6-46D18FA5B641}"/>
+                <a16:creationId xmlns:a16="http://schemas.microsoft.com/office/drawing/2014/main" id="{F3358290-DA19-4844-A7E8-50216051FB2C}"/>
               </a:ext>
             </a:extLst>
           </p:cNvPr>
@@ -17921,49 +15144,10 @@
       </p:sp>
       <p:sp>
         <p:nvSpPr>
-          <p:cNvPr id="13" name="标题 12">
-            <a:extLst xmlns:a="http://schemas.openxmlformats.org/drawingml/2006/main">
-              <a:ext uri="{FF2B5EF4-FFF2-40B4-BE49-F238E27FC236}">
-                <a16:creationId xmlns:a16="http://schemas.microsoft.com/office/drawing/2014/main" id="{24EA97CD-637F-44E5-98AB-C2EA1232239B}"/>
-              </a:ext>
-            </a:extLst>
-          </p:cNvPr>
-          <p:cNvSpPr>
-            <a:spLocks xmlns:a="http://schemas.openxmlformats.org/drawingml/2006/main" noGrp="1"/>
-          </p:cNvSpPr>
-          <p:nvPr>
-            <p:ph type="title" idx="0"/>
-          </p:nvPr>
-        </p:nvSpPr>
-        <p:spPr>
-          <a:xfrm xmlns:a="http://schemas.openxmlformats.org/drawingml/2006/main">
-            <a:off x="482600" y="136525"/>
-            <a:ext cx="11214100" cy="615159"/>
-          </a:xfrm>
-        </p:spPr>
-        <p:txBody>
-          <a:bodyPr xmlns:a="http://schemas.openxmlformats.org/drawingml/2006/main">
-            <a:noAutofit/>
-          </a:bodyPr>
-          <a:lstStyle xmlns:a="http://schemas.openxmlformats.org/drawingml/2006/main"/>
-          <a:p xmlns:a="http://schemas.openxmlformats.org/drawingml/2006/main">
-            <a:r>
-              <a:rPr sz="2800" b="1">
-                <a:latin typeface="微软雅黑"/>
-                <a:ea typeface="微软雅黑"/>
-                <a:cs typeface="微软雅黑"/>
-              </a:rPr>
-              <a:t/>
-            </a:r>
-          </a:p>
-        </p:txBody>
-      </p:sp>
-      <p:sp>
-        <p:nvSpPr>
           <p:cNvPr id="14" name="">
             <a:extLst xmlns:a="http://schemas.openxmlformats.org/drawingml/2006/main">
               <a:ext uri="{FF2B5EF4-FFF2-40B4-BE49-F238E27FC236}">
-                <a16:creationId xmlns:a16="http://schemas.microsoft.com/office/drawing/2014/main" id="{F470BF6B-EC22-48FC-987E-3D23F7F65FB0}"/>
+                <a16:creationId xmlns:a16="http://schemas.microsoft.com/office/drawing/2014/main" id="{5BCD2419-B3B4-4AA4-8611-BB9BD6ED7AE7}"/>
               </a:ext>
             </a:extLst>
           </p:cNvPr>
@@ -17996,7 +15180,7 @@
           <p:cNvPr id="15" name="">
             <a:extLst xmlns:a="http://schemas.openxmlformats.org/drawingml/2006/main">
               <a:ext uri="{FF2B5EF4-FFF2-40B4-BE49-F238E27FC236}">
-                <a16:creationId xmlns:a16="http://schemas.microsoft.com/office/drawing/2014/main" id="{B966C975-A5F0-46D1-967F-87B182DB93F2}"/>
+                <a16:creationId xmlns:a16="http://schemas.microsoft.com/office/drawing/2014/main" id="{901916D3-07FE-4CAE-9FF5-6CF6684D55EB}"/>
               </a:ext>
             </a:extLst>
           </p:cNvPr>
@@ -18052,7 +15236,7 @@
           <p:cNvPr id="16" name="">
             <a:extLst xmlns:a="http://schemas.openxmlformats.org/drawingml/2006/main">
               <a:ext uri="{FF2B5EF4-FFF2-40B4-BE49-F238E27FC236}">
-                <a16:creationId xmlns:a16="http://schemas.microsoft.com/office/drawing/2014/main" id="{67C41723-3E49-41E7-9E8A-4FC80BF57A5E}"/>
+                <a16:creationId xmlns:a16="http://schemas.microsoft.com/office/drawing/2014/main" id="{86490812-2184-4008-BC46-68F921346F21}"/>
               </a:ext>
             </a:extLst>
           </p:cNvPr>
@@ -18085,7 +15269,7 @@
           <p:cNvPr id="17" name="">
             <a:extLst xmlns:a="http://schemas.openxmlformats.org/drawingml/2006/main">
               <a:ext uri="{FF2B5EF4-FFF2-40B4-BE49-F238E27FC236}">
-                <a16:creationId xmlns:a16="http://schemas.microsoft.com/office/drawing/2014/main" id="{D4E660B3-1D65-426B-9012-74CB082CA9D8}"/>
+                <a16:creationId xmlns:a16="http://schemas.microsoft.com/office/drawing/2014/main" id="{182DD10E-DCD6-4971-A0BD-C8A0FDF4AA97}"/>
               </a:ext>
             </a:extLst>
           </p:cNvPr>
@@ -18141,7 +15325,7 @@
           <p:cNvPr id="18" name="">
             <a:extLst xmlns:a="http://schemas.openxmlformats.org/drawingml/2006/main">
               <a:ext uri="{FF2B5EF4-FFF2-40B4-BE49-F238E27FC236}">
-                <a16:creationId xmlns:a16="http://schemas.microsoft.com/office/drawing/2014/main" id="{77AFAD60-3184-4B47-AA01-CBAA60A5514B}"/>
+                <a16:creationId xmlns:a16="http://schemas.microsoft.com/office/drawing/2014/main" id="{E594EA64-936B-4ACE-812F-4F9F919EFF51}"/>
               </a:ext>
             </a:extLst>
           </p:cNvPr>
@@ -18176,7 +15360,7 @@
           <p:cNvPr id="19" name="">
             <a:extLst xmlns:a="http://schemas.openxmlformats.org/drawingml/2006/main">
               <a:ext uri="{FF2B5EF4-FFF2-40B4-BE49-F238E27FC236}">
-                <a16:creationId xmlns:a16="http://schemas.microsoft.com/office/drawing/2014/main" id="{BEE625FA-B2FA-4C8F-97F7-9F3E748F47B4}"/>
+                <a16:creationId xmlns:a16="http://schemas.microsoft.com/office/drawing/2014/main" id="{3C82F6BA-CD30-4345-A018-0896CAD968F8}"/>
               </a:ext>
             </a:extLst>
           </p:cNvPr>
@@ -18209,7 +15393,7 @@
           <a:bodyPr xmlns:a="http://schemas.openxmlformats.org/drawingml/2006/main"/>
           <a:lstStyle xmlns:a="http://schemas.openxmlformats.org/drawingml/2006/main"/>
           <a:p xmlns:a="http://schemas.openxmlformats.org/drawingml/2006/main">
-            <a:pPr>
+            <a:pPr algn="ctr">
               <a:defRPr sz="1350" b="1">
                 <a:solidFill>
                   <a:srgbClr val="FFFFFF"/>
@@ -18238,7 +15422,7 @@
           <p:cNvPr id="20" name="">
             <a:extLst xmlns:a="http://schemas.openxmlformats.org/drawingml/2006/main">
               <a:ext uri="{FF2B5EF4-FFF2-40B4-BE49-F238E27FC236}">
-                <a16:creationId xmlns:a16="http://schemas.microsoft.com/office/drawing/2014/main" id="{C82868BF-8B1F-4712-BE01-684C6ED7C476}"/>
+                <a16:creationId xmlns:a16="http://schemas.microsoft.com/office/drawing/2014/main" id="{2B197C96-5A02-45C4-8C07-98BD93D285D4}"/>
               </a:ext>
             </a:extLst>
           </p:cNvPr>
@@ -18386,7 +15570,7 @@
           <p:cNvPr id="21" name="">
             <a:extLst xmlns:a="http://schemas.openxmlformats.org/drawingml/2006/main">
               <a:ext uri="{FF2B5EF4-FFF2-40B4-BE49-F238E27FC236}">
-                <a16:creationId xmlns:a16="http://schemas.microsoft.com/office/drawing/2014/main" id="{31F3A5B5-2EE5-40C6-928F-CE6D1162227B}"/>
+                <a16:creationId xmlns:a16="http://schemas.microsoft.com/office/drawing/2014/main" id="{9744E2A0-6EB1-4A6E-9B0C-04D33F5F7FDB}"/>
               </a:ext>
             </a:extLst>
           </p:cNvPr>
@@ -18421,7 +15605,7 @@
           <p:cNvPr id="22" name="">
             <a:extLst xmlns:a="http://schemas.openxmlformats.org/drawingml/2006/main">
               <a:ext uri="{FF2B5EF4-FFF2-40B4-BE49-F238E27FC236}">
-                <a16:creationId xmlns:a16="http://schemas.microsoft.com/office/drawing/2014/main" id="{4022FFA0-5B80-4875-976D-16A2AB1E4D52}"/>
+                <a16:creationId xmlns:a16="http://schemas.microsoft.com/office/drawing/2014/main" id="{89986CF2-7498-4E81-BC99-EE647CAF97C6}"/>
               </a:ext>
             </a:extLst>
           </p:cNvPr>
@@ -18454,7 +15638,7 @@
           <a:bodyPr xmlns:a="http://schemas.openxmlformats.org/drawingml/2006/main"/>
           <a:lstStyle xmlns:a="http://schemas.openxmlformats.org/drawingml/2006/main"/>
           <a:p xmlns:a="http://schemas.openxmlformats.org/drawingml/2006/main">
-            <a:pPr>
+            <a:pPr algn="ctr">
               <a:defRPr sz="1350" b="1">
                 <a:solidFill>
                   <a:srgbClr val="FFFFFF"/>
@@ -18483,7 +15667,7 @@
           <p:cNvPr id="23" name="">
             <a:extLst xmlns:a="http://schemas.openxmlformats.org/drawingml/2006/main">
               <a:ext uri="{FF2B5EF4-FFF2-40B4-BE49-F238E27FC236}">
-                <a16:creationId xmlns:a16="http://schemas.microsoft.com/office/drawing/2014/main" id="{A0020747-24B4-4292-A0AC-66BF065E3179}"/>
+                <a16:creationId xmlns:a16="http://schemas.microsoft.com/office/drawing/2014/main" id="{4806EB55-5100-49A0-AB17-99BECD970170}"/>
               </a:ext>
             </a:extLst>
           </p:cNvPr>
@@ -18631,7 +15815,7 @@
           <p:cNvPr id="24" name="">
             <a:extLst xmlns:a="http://schemas.openxmlformats.org/drawingml/2006/main">
               <a:ext uri="{FF2B5EF4-FFF2-40B4-BE49-F238E27FC236}">
-                <a16:creationId xmlns:a16="http://schemas.microsoft.com/office/drawing/2014/main" id="{E5AC163A-EB26-4F57-A8F5-1564E46672D2}"/>
+                <a16:creationId xmlns:a16="http://schemas.microsoft.com/office/drawing/2014/main" id="{54632157-E958-4DC4-AE14-EFC794C4248B}"/>
               </a:ext>
             </a:extLst>
           </p:cNvPr>
@@ -18658,7 +15842,7 @@
           <a:bodyPr xmlns:a="http://schemas.openxmlformats.org/drawingml/2006/main"/>
           <a:lstStyle xmlns:a="http://schemas.openxmlformats.org/drawingml/2006/main"/>
           <a:p xmlns:a="http://schemas.openxmlformats.org/drawingml/2006/main">
-            <a:pPr>
+            <a:pPr algn="ctr">
               <a:defRPr sz="1275" b="1">
                 <a:solidFill>
                   <a:srgbClr val="17324D"/>
@@ -18678,6 +15862,62 @@
                 <a:cs typeface="微软雅黑"/>
               </a:rPr>
               <a:t>每个正式实验记录配置、随机种子、环境与原始指标，避免把待验证假设写成结论。</a:t>
+            </a:r>
+          </a:p>
+        </p:txBody>
+      </p:sp>
+      <p:sp>
+        <p:nvSpPr>
+          <p:cNvPr id="25" name="">
+            <a:extLst xmlns:a="http://schemas.openxmlformats.org/drawingml/2006/main">
+              <a:ext uri="{FF2B5EF4-FFF2-40B4-BE49-F238E27FC236}">
+                <a16:creationId xmlns:a16="http://schemas.microsoft.com/office/drawing/2014/main" id="{31A68D49-3BD4-40B3-97E9-64006404C886}"/>
+              </a:ext>
+            </a:extLst>
+          </p:cNvPr>
+          <p:cNvSpPr>
+            <a:spLocks xmlns:a="http://schemas.openxmlformats.org/drawingml/2006/main" noGrp="1"/>
+          </p:cNvSpPr>
+          <p:nvPr/>
+        </p:nvSpPr>
+        <p:spPr>
+          <a:xfrm xmlns:a="http://schemas.openxmlformats.org/drawingml/2006/main">
+            <a:off x="9375172" y="6578632"/>
+            <a:ext cx="2743200" cy="279368"/>
+          </a:xfrm>
+          <a:prstGeom xmlns:a="http://schemas.openxmlformats.org/drawingml/2006/main" prst="rect">
+            <a:avLst/>
+          </a:prstGeom>
+          <a:noFill xmlns:a="http://schemas.openxmlformats.org/drawingml/2006/main"/>
+          <a:ln xmlns:a="http://schemas.openxmlformats.org/drawingml/2006/main" w="0">
+            <a:noFill/>
+            <a:prstDash val="solid"/>
+          </a:ln>
+        </p:spPr>
+        <p:txBody>
+          <a:bodyPr xmlns:a="http://schemas.openxmlformats.org/drawingml/2006/main" anchor="ctr"/>
+          <a:lstStyle xmlns:a="http://schemas.openxmlformats.org/drawingml/2006/main"/>
+          <a:p xmlns:a="http://schemas.openxmlformats.org/drawingml/2006/main">
+            <a:pPr algn="r">
+              <a:defRPr sz="1350" b="1">
+                <a:solidFill>
+                  <a:srgbClr val="FFFFFF"/>
+                </a:solidFill>
+                <a:latin typeface="微软雅黑"/>
+                <a:ea typeface="微软雅黑"/>
+                <a:cs typeface="微软雅黑"/>
+              </a:defRPr>
+            </a:pPr>
+            <a:r>
+              <a:rPr sz="1350" b="1">
+                <a:solidFill>
+                  <a:srgbClr val="FFFFFF"/>
+                </a:solidFill>
+                <a:latin typeface="微软雅黑"/>
+                <a:ea typeface="微软雅黑"/>
+                <a:cs typeface="微软雅黑"/>
+              </a:rPr>
+              <a:t>8</a:t>
             </a:r>
           </a:p>
         </p:txBody>
@@ -18685,7 +15925,7 @@
     </p:spTree>
     <p:extLst>
       <p:ext uri="{BB962C8B-B14F-4D97-AF65-F5344CB8AC3E}">
-        <p14:creationId xmlns:p14="http://schemas.microsoft.com/office/powerpoint/2010/main" val="961404695"/>
+        <p14:creationId xmlns:p14="http://schemas.microsoft.com/office/powerpoint/2010/main" val="48134091"/>
       </p:ext>
     </p:extLst>
   </p:cSld>
@@ -18698,7 +15938,7 @@
     <p:bg>
       <p:bgPr>
         <a:blipFill xmlns:a="http://schemas.openxmlformats.org/drawingml/2006/main" rotWithShape="1">
-          <a:blip xmlns:r="http://schemas.openxmlformats.org/officeDocument/2006/relationships" r:embed="R7f38d95926ba4bd8">
+          <a:blip xmlns:r="http://schemas.openxmlformats.org/officeDocument/2006/relationships" r:embed="R99595a0854c640f9">
             <a:lum/>
           </a:blip>
           <a:srcRect l="0" t="0" r="0" b="0"/>
@@ -18726,7 +15966,7 @@
           <p:nvPr/>
         </p:nvPicPr>
         <p:blipFill>
-          <a:blip xmlns:r="http://schemas.openxmlformats.org/officeDocument/2006/relationships" xmlns:a="http://schemas.openxmlformats.org/drawingml/2006/main" r:embed="Rcb1c0b337f524c73"/>
+          <a:blip xmlns:r="http://schemas.openxmlformats.org/officeDocument/2006/relationships" xmlns:a="http://schemas.openxmlformats.org/drawingml/2006/main" r:embed="R2940e33741eb4155"/>
           <a:stretch xmlns:a="http://schemas.openxmlformats.org/drawingml/2006/main">
             <a:fillRect l="0" t="0" r="0" b="0"/>
           </a:stretch>
@@ -18746,7 +15986,7 @@
           <p:cNvPr id="2" name="矩形 1">
             <a:extLst xmlns:a="http://schemas.openxmlformats.org/drawingml/2006/main">
               <a:ext uri="{FF2B5EF4-FFF2-40B4-BE49-F238E27FC236}">
-                <a16:creationId xmlns:a16="http://schemas.microsoft.com/office/drawing/2014/main" id="{996557EE-2E3A-4C5D-BE92-8EFE4C2B41C8}"/>
+                <a16:creationId xmlns:a16="http://schemas.microsoft.com/office/drawing/2014/main" id="{281F14AA-0664-4310-9BE3-735E9EC8FE33}"/>
               </a:ext>
             </a:extLst>
           </p:cNvPr>
@@ -18802,7 +16042,7 @@
           <p:cNvPr id="3" name="矩形 2">
             <a:extLst xmlns:a="http://schemas.openxmlformats.org/drawingml/2006/main">
               <a:ext uri="{FF2B5EF4-FFF2-40B4-BE49-F238E27FC236}">
-                <a16:creationId xmlns:a16="http://schemas.microsoft.com/office/drawing/2014/main" id="{8835FDCE-B588-4B69-8B25-544D19A63CDF}"/>
+                <a16:creationId xmlns:a16="http://schemas.microsoft.com/office/drawing/2014/main" id="{561AFED2-BD2C-412E-9178-9F0EA77A6517}"/>
               </a:ext>
             </a:extLst>
           </p:cNvPr>
@@ -18862,7 +16102,7 @@
           <p:cNvPr id="4" name="直接连接符 3">
             <a:extLst xmlns:a="http://schemas.openxmlformats.org/drawingml/2006/main">
               <a:ext uri="{FF2B5EF4-FFF2-40B4-BE49-F238E27FC236}">
-                <a16:creationId xmlns:a16="http://schemas.microsoft.com/office/drawing/2014/main" id="{6E0ACAF4-158C-48CE-B988-45A79382A66D}"/>
+                <a16:creationId xmlns:a16="http://schemas.microsoft.com/office/drawing/2014/main" id="{E667425E-0DF7-4608-B119-42BE64DBCE5D}"/>
               </a:ext>
             </a:extLst>
           </p:cNvPr>
@@ -18905,7 +16145,7 @@
           <p:cNvPr id="5" name="标题 1">
             <a:extLst xmlns:a="http://schemas.openxmlformats.org/drawingml/2006/main">
               <a:ext uri="{FF2B5EF4-FFF2-40B4-BE49-F238E27FC236}">
-                <a16:creationId xmlns:a16="http://schemas.microsoft.com/office/drawing/2014/main" id="{507266C3-00D8-4E75-ACEE-EB41A0A6D737}"/>
+                <a16:creationId xmlns:a16="http://schemas.microsoft.com/office/drawing/2014/main" id="{FAA59BB3-0E2D-4DFE-AD1D-C850077D83CA}"/>
               </a:ext>
             </a:extLst>
           </p:cNvPr>
@@ -18969,7 +16209,7 @@
           <p:cNvPr id="8" name="直接连接符 7">
             <a:extLst xmlns:a="http://schemas.openxmlformats.org/drawingml/2006/main">
               <a:ext uri="{FF2B5EF4-FFF2-40B4-BE49-F238E27FC236}">
-                <a16:creationId xmlns:a16="http://schemas.microsoft.com/office/drawing/2014/main" id="{66258522-D3B9-446E-B472-AF61D804CC8F}"/>
+                <a16:creationId xmlns:a16="http://schemas.microsoft.com/office/drawing/2014/main" id="{3B88E8C6-B8F2-4E15-A56F-79338DC16CF0}"/>
               </a:ext>
             </a:extLst>
           </p:cNvPr>
@@ -19016,7 +16256,7 @@
           <p:nvPr/>
         </p:nvPicPr>
         <p:blipFill>
-          <a:blip xmlns:r="http://schemas.openxmlformats.org/officeDocument/2006/relationships" xmlns:a="http://schemas.openxmlformats.org/drawingml/2006/main" r:embed="R9928489aea93495d"/>
+          <a:blip xmlns:r="http://schemas.openxmlformats.org/officeDocument/2006/relationships" xmlns:a="http://schemas.openxmlformats.org/drawingml/2006/main" r:embed="R7e6db7aa34194680"/>
           <a:stretch xmlns:a="http://schemas.openxmlformats.org/drawingml/2006/main">
             <a:fillRect l="0" t="0" r="0" b="0"/>
           </a:stretch>
@@ -19033,55 +16273,10 @@
       </p:pic>
       <p:sp>
         <p:nvSpPr>
-          <p:cNvPr id="9" name="副标题 2">
-            <a:extLst xmlns:a="http://schemas.openxmlformats.org/drawingml/2006/main">
-              <a:ext uri="{FF2B5EF4-FFF2-40B4-BE49-F238E27FC236}">
-                <a16:creationId xmlns:a16="http://schemas.microsoft.com/office/drawing/2014/main" id="{E8115814-C505-4275-A772-980D4A1C044A}"/>
-              </a:ext>
-            </a:extLst>
-          </p:cNvPr>
-          <p:cNvSpPr>
-            <a:spLocks xmlns:a="http://schemas.openxmlformats.org/drawingml/2006/main" noGrp="1"/>
-          </p:cNvSpPr>
-          <p:nvPr>
-            <p:ph type="subTitle" idx="1"/>
-          </p:nvPr>
-        </p:nvSpPr>
-        <p:spPr>
-          <a:xfrm xmlns:a="http://schemas.openxmlformats.org/drawingml/2006/main">
-            <a:off x="0" y="4758488"/>
-            <a:ext cx="12192000" cy="680085"/>
-          </a:xfrm>
-        </p:spPr>
-        <p:txBody>
-          <a:bodyPr xmlns:a="http://schemas.openxmlformats.org/drawingml/2006/main">
-            <a:normAutofit/>
-          </a:bodyPr>
-          <a:lstStyle xmlns:a="http://schemas.openxmlformats.org/drawingml/2006/main"/>
-          <a:p xmlns:a="http://schemas.openxmlformats.org/drawingml/2006/main">
-            <a:pPr marL="0" indent="0" algn="ctr">
-              <a:buNone/>
-            </a:pPr>
-            <a:r>
-              <a:rPr sz="2400" b="1">
-                <a:solidFill>
-                  <a:srgbClr val="005376"/>
-                </a:solidFill>
-                <a:latin typeface="微软雅黑"/>
-                <a:ea typeface="微软雅黑"/>
-                <a:cs typeface="微软雅黑"/>
-              </a:rPr>
-              <a:t/>
-            </a:r>
-          </a:p>
-        </p:txBody>
-      </p:sp>
-      <p:sp>
-        <p:nvSpPr>
           <p:cNvPr id="12" name="副标题 2">
             <a:extLst xmlns:a="http://schemas.openxmlformats.org/drawingml/2006/main">
               <a:ext uri="{FF2B5EF4-FFF2-40B4-BE49-F238E27FC236}">
-                <a16:creationId xmlns:a16="http://schemas.microsoft.com/office/drawing/2014/main" id="{2DE40953-D626-4B26-8E63-E49B1A28F7F1}"/>
+                <a16:creationId xmlns:a16="http://schemas.microsoft.com/office/drawing/2014/main" id="{2800F83A-61B1-47DD-808F-264D672FA511}"/>
               </a:ext>
             </a:extLst>
           </p:cNvPr>
@@ -19284,14 +16479,14 @@
       </p:sp>
       <p:pic>
         <p:nvPicPr>
-          <p:cNvPr id="33" name="图片 5"/>
+          <p:cNvPr id="32" name="图片 5"/>
           <p:cNvPicPr>
             <a:picLocks xmlns:a="http://schemas.openxmlformats.org/drawingml/2006/main" noChangeAspect="1"/>
           </p:cNvPicPr>
           <p:nvPr/>
         </p:nvPicPr>
         <p:blipFill>
-          <a:blip xmlns:r="http://schemas.openxmlformats.org/officeDocument/2006/relationships" xmlns:a="http://schemas.openxmlformats.org/drawingml/2006/main" r:embed="R2cf78fda0aa54ff1"/>
+          <a:blip xmlns:r="http://schemas.openxmlformats.org/officeDocument/2006/relationships" xmlns:a="http://schemas.openxmlformats.org/drawingml/2006/main" r:embed="R88aef989da0e4305"/>
           <a:stretch xmlns:a="http://schemas.openxmlformats.org/drawingml/2006/main">
             <a:fillRect l="0" t="0" r="0" b="0"/>
           </a:stretch>
@@ -19525,7 +16720,7 @@
           <p:cNvPr id="20" name="">
             <a:extLst xmlns:a="http://schemas.openxmlformats.org/drawingml/2006/main">
               <a:ext uri="{FF2B5EF4-FFF2-40B4-BE49-F238E27FC236}">
-                <a16:creationId xmlns:a16="http://schemas.microsoft.com/office/drawing/2014/main" id="{B320FC46-C437-4E1F-8E1B-81EE6E425711}"/>
+                <a16:creationId xmlns:a16="http://schemas.microsoft.com/office/drawing/2014/main" id="{E6C30B27-321E-40A9-99E1-0E887CAD09FA}"/>
               </a:ext>
             </a:extLst>
           </p:cNvPr>
@@ -19558,7 +16753,7 @@
           <p:cNvPr id="21" name="">
             <a:extLst xmlns:a="http://schemas.openxmlformats.org/drawingml/2006/main">
               <a:ext uri="{FF2B5EF4-FFF2-40B4-BE49-F238E27FC236}">
-                <a16:creationId xmlns:a16="http://schemas.microsoft.com/office/drawing/2014/main" id="{D0FA5903-86C5-4FED-82BE-00CC41E3043A}"/>
+                <a16:creationId xmlns:a16="http://schemas.microsoft.com/office/drawing/2014/main" id="{27F452A7-DFA1-4791-8268-6A0A185FB947}"/>
               </a:ext>
             </a:extLst>
           </p:cNvPr>
@@ -19614,7 +16809,7 @@
           <p:cNvPr id="22" name="">
             <a:extLst xmlns:a="http://schemas.openxmlformats.org/drawingml/2006/main">
               <a:ext uri="{FF2B5EF4-FFF2-40B4-BE49-F238E27FC236}">
-                <a16:creationId xmlns:a16="http://schemas.microsoft.com/office/drawing/2014/main" id="{002667F8-A9E2-4F3F-B7C0-C0AC110CD4BF}"/>
+                <a16:creationId xmlns:a16="http://schemas.microsoft.com/office/drawing/2014/main" id="{03A7CCA7-E189-4A04-83BE-6BC42D670570}"/>
               </a:ext>
             </a:extLst>
           </p:cNvPr>
@@ -19644,14 +16839,14 @@
       </p:sp>
       <p:pic>
         <p:nvPicPr>
-          <p:cNvPr id="38" name=""/>
+          <p:cNvPr id="37" name=""/>
           <p:cNvPicPr>
             <a:picLocks xmlns:a="http://schemas.openxmlformats.org/drawingml/2006/main" noChangeAspect="1"/>
           </p:cNvPicPr>
           <p:nvPr/>
         </p:nvPicPr>
         <p:blipFill>
-          <a:blip xmlns:r="http://schemas.openxmlformats.org/officeDocument/2006/relationships" xmlns:a="http://schemas.openxmlformats.org/drawingml/2006/main" r:embed="R3970cce2dff84c23"/>
+          <a:blip xmlns:r="http://schemas.openxmlformats.org/officeDocument/2006/relationships" xmlns:a="http://schemas.openxmlformats.org/drawingml/2006/main" r:embed="R82f137125da14a00"/>
           <a:stretch xmlns:a="http://schemas.openxmlformats.org/drawingml/2006/main"/>
         </p:blipFill>
         <p:spPr>
@@ -19667,7 +16862,7 @@
     </p:spTree>
     <p:extLst>
       <p:ext uri="{BB962C8B-B14F-4D97-AF65-F5344CB8AC3E}">
-        <p14:creationId xmlns:p14="http://schemas.microsoft.com/office/powerpoint/2010/main" val="1215593738"/>
+        <p14:creationId xmlns:p14="http://schemas.microsoft.com/office/powerpoint/2010/main" val="1973566765"/>
       </p:ext>
     </p:extLst>
   </p:cSld>

--- a/Papers/output/presentation/开题答辩PPT-在线策略蒸馏-20260927.pptx
+++ b/Papers/output/presentation/开题答辩PPT-在线策略蒸馏-20260927.pptx
@@ -2,23 +2,23 @@
 <file path=ppt/presentation.xml><?xml version="1.0" encoding="utf-8"?>
 <p:presentation xmlns:p="http://schemas.openxmlformats.org/presentationml/2006/main">
   <p:sldMasterIdLst>
-    <p:sldMasterId xmlns:r="http://schemas.openxmlformats.org/officeDocument/2006/relationships" id="2147483648" r:id="R8336a8f9d7b44dff"/>
+    <p:sldMasterId xmlns:r="http://schemas.openxmlformats.org/officeDocument/2006/relationships" id="2147483648" r:id="R436da4fc3a3b47bc"/>
   </p:sldMasterIdLst>
   <p:notesMasterIdLst>
-    <p:notesMasterId xmlns:r="http://schemas.openxmlformats.org/officeDocument/2006/relationships" r:id="R0211fd4c97344019"/>
+    <p:notesMasterId xmlns:r="http://schemas.openxmlformats.org/officeDocument/2006/relationships" r:id="R2c9463d8fe474732"/>
   </p:notesMasterIdLst>
   <p:sldIdLst>
-    <p:sldId xmlns:r="http://schemas.openxmlformats.org/officeDocument/2006/relationships" id="256" r:id="R32e20fea64de4a7e"/>
-    <p:sldId xmlns:r="http://schemas.openxmlformats.org/officeDocument/2006/relationships" id="257" r:id="R9726240327c1478f"/>
-    <p:sldId xmlns:r="http://schemas.openxmlformats.org/officeDocument/2006/relationships" id="258" r:id="Rd075925e58b24a3b"/>
-    <p:sldId xmlns:r="http://schemas.openxmlformats.org/officeDocument/2006/relationships" id="259" r:id="Rc852e9a630a44264"/>
-    <p:sldId xmlns:r="http://schemas.openxmlformats.org/officeDocument/2006/relationships" id="260" r:id="Ra687567af3934a31"/>
-    <p:sldId xmlns:r="http://schemas.openxmlformats.org/officeDocument/2006/relationships" id="261" r:id="R91c763a8b1144625"/>
-    <p:sldId xmlns:r="http://schemas.openxmlformats.org/officeDocument/2006/relationships" id="262" r:id="Re32e4616100f43b3"/>
-    <p:sldId xmlns:r="http://schemas.openxmlformats.org/officeDocument/2006/relationships" id="263" r:id="Rf5af1ee8bd1f44fd"/>
-    <p:sldId xmlns:r="http://schemas.openxmlformats.org/officeDocument/2006/relationships" id="264" r:id="Rf5a7c4cdcb3b4030"/>
-    <p:sldId xmlns:r="http://schemas.openxmlformats.org/officeDocument/2006/relationships" id="265" r:id="Re5fb90e6d7234b69"/>
-    <p:sldId xmlns:r="http://schemas.openxmlformats.org/officeDocument/2006/relationships" id="266" r:id="Rd7029300e35144dd"/>
+    <p:sldId xmlns:r="http://schemas.openxmlformats.org/officeDocument/2006/relationships" id="256" r:id="R982208217531469f"/>
+    <p:sldId xmlns:r="http://schemas.openxmlformats.org/officeDocument/2006/relationships" id="257" r:id="Ra3e86d0e03ce49a5"/>
+    <p:sldId xmlns:r="http://schemas.openxmlformats.org/officeDocument/2006/relationships" id="258" r:id="Ref4fd69b2b254220"/>
+    <p:sldId xmlns:r="http://schemas.openxmlformats.org/officeDocument/2006/relationships" id="259" r:id="Rea3cdbd0ebe84f01"/>
+    <p:sldId xmlns:r="http://schemas.openxmlformats.org/officeDocument/2006/relationships" id="260" r:id="R10f154069a1b4b59"/>
+    <p:sldId xmlns:r="http://schemas.openxmlformats.org/officeDocument/2006/relationships" id="261" r:id="R6df7986717c14525"/>
+    <p:sldId xmlns:r="http://schemas.openxmlformats.org/officeDocument/2006/relationships" id="262" r:id="R9a2de1f2b7604a1a"/>
+    <p:sldId xmlns:r="http://schemas.openxmlformats.org/officeDocument/2006/relationships" id="263" r:id="R04c66b5a64a3400a"/>
+    <p:sldId xmlns:r="http://schemas.openxmlformats.org/officeDocument/2006/relationships" id="264" r:id="Rf1930a511c57432c"/>
+    <p:sldId xmlns:r="http://schemas.openxmlformats.org/officeDocument/2006/relationships" id="265" r:id="R80b719b1ceeb49b2"/>
+    <p:sldId xmlns:r="http://schemas.openxmlformats.org/officeDocument/2006/relationships" id="266" r:id="R60f6007d12ae45ab"/>
   </p:sldIdLst>
   <p:sldSz cx="12192000" cy="6858000"/>
   <p:notesSz cx="6858000" cy="9144000"/>
@@ -973,7 +973,7 @@
           </a:p>
           <a:p xmlns:a="http://schemas.openxmlformats.org/drawingml/2006/main">
             <a:r>
-              <a:t>要点：学生先按当前策略 rollout，教师在真实学生状态上反馈，随后只更新 LoRA；图4展示训练到评测的闭环。</a:t>
+              <a:t>要点：学生先按当前策略 rollout，教师在真实学生状态上反馈；公式说明状态定义与逐位置在线目标，图4展示训练到评测的闭环。</a:t>
             </a:r>
           </a:p>
           <a:p xmlns:a="http://schemas.openxmlformats.org/drawingml/2006/main">
@@ -1058,7 +1058,7 @@
           </a:p>
           <a:p xmlns:a="http://schemas.openxmlformats.org/drawingml/2006/main">
             <a:r>
-              <a:t>要点：Forward KL、Reverse KL 与广义散度的权重位置不同，可能引起不同的覆盖或聚焦行为；本研究在相同状态和预算下比较。</a:t>
+              <a:t>要点：两个 KL 公式展示不同的加权方向，Jensen-Shannon 公式给出严谨的混合分布定义；本研究在相同状态和预算下比较。</a:t>
             </a:r>
           </a:p>
           <a:p xmlns:a="http://schemas.openxmlformats.org/drawingml/2006/main">
@@ -1143,7 +1143,7 @@
           </a:p>
           <a:p xmlns:a="http://schemas.openxmlformats.org/drawingml/2006/main">
             <a:r>
-              <a:t>要点：比较全词表、Top-K、K=1 采样 token 三种监督粒度，强调信息量和教师反馈成本的共同权衡。</a:t>
+              <a:t>要点：Top-K 公式明确支持集截断与重新归一化，K1 公式明确它是教师交叉熵项的单样本估计；三种粒度共享预算。</a:t>
             </a:r>
           </a:p>
           <a:p xmlns:a="http://schemas.openxmlformats.org/drawingml/2006/main">
@@ -1546,7 +1546,7 @@
     <p:bg>
       <p:bgPr>
         <a:blipFill xmlns:a="http://schemas.openxmlformats.org/drawingml/2006/main" rotWithShape="1">
-          <a:blip xmlns:r="http://schemas.openxmlformats.org/officeDocument/2006/relationships" r:embed="R0bb068443b2f4dea">
+          <a:blip xmlns:r="http://schemas.openxmlformats.org/officeDocument/2006/relationships" r:embed="R368faa6f6fac4f00">
             <a:lum/>
           </a:blip>
           <a:srcRect l="0" t="0" r="0" b="0"/>
@@ -1569,17 +1569,17 @@
   </p:cSld>
   <p:clrMap bg1="lt1" tx1="dk1" bg2="lt2" tx2="dk2" accent1="accent1" accent2="accent2" accent3="accent3" accent4="accent4" accent5="accent5" accent6="accent6" hlink="hlink" folHlink="folHlink"/>
   <p:sldLayoutIdLst>
-    <p:sldLayoutId xmlns:r="http://schemas.openxmlformats.org/officeDocument/2006/relationships" id="2147483649" r:id="R0321059b9ce6463a"/>
-    <p:sldLayoutId xmlns:r="http://schemas.openxmlformats.org/officeDocument/2006/relationships" id="2147483650" r:id="R99c9e6c9a9c14406"/>
-    <p:sldLayoutId xmlns:r="http://schemas.openxmlformats.org/officeDocument/2006/relationships" id="2147483651" r:id="R73616b4e18b74648"/>
-    <p:sldLayoutId xmlns:r="http://schemas.openxmlformats.org/officeDocument/2006/relationships" id="2147483652" r:id="Rd7c91a08d3934c52"/>
-    <p:sldLayoutId xmlns:r="http://schemas.openxmlformats.org/officeDocument/2006/relationships" id="2147483653" r:id="R4fad9b93d0404bae"/>
-    <p:sldLayoutId xmlns:r="http://schemas.openxmlformats.org/officeDocument/2006/relationships" id="2147483654" r:id="R708058d529e5434a"/>
-    <p:sldLayoutId xmlns:r="http://schemas.openxmlformats.org/officeDocument/2006/relationships" id="2147483655" r:id="Rb0de06ea413c4bee"/>
-    <p:sldLayoutId xmlns:r="http://schemas.openxmlformats.org/officeDocument/2006/relationships" id="2147483656" r:id="Ra59bac696c15466a"/>
-    <p:sldLayoutId xmlns:r="http://schemas.openxmlformats.org/officeDocument/2006/relationships" id="2147483657" r:id="R03f75c1508064bbd"/>
-    <p:sldLayoutId xmlns:r="http://schemas.openxmlformats.org/officeDocument/2006/relationships" id="2147483658" r:id="R5eba4deca36d4bfd"/>
-    <p:sldLayoutId xmlns:r="http://schemas.openxmlformats.org/officeDocument/2006/relationships" id="2147483659" r:id="Rf8e019fbe8204006"/>
+    <p:sldLayoutId xmlns:r="http://schemas.openxmlformats.org/officeDocument/2006/relationships" id="2147483649" r:id="R3de02a9c61b94d4f"/>
+    <p:sldLayoutId xmlns:r="http://schemas.openxmlformats.org/officeDocument/2006/relationships" id="2147483650" r:id="Rf9927d794f244d12"/>
+    <p:sldLayoutId xmlns:r="http://schemas.openxmlformats.org/officeDocument/2006/relationships" id="2147483651" r:id="R204aaefb0889402a"/>
+    <p:sldLayoutId xmlns:r="http://schemas.openxmlformats.org/officeDocument/2006/relationships" id="2147483652" r:id="R2bb41c1fdedc4502"/>
+    <p:sldLayoutId xmlns:r="http://schemas.openxmlformats.org/officeDocument/2006/relationships" id="2147483653" r:id="R47bf2b7a9a5e46f6"/>
+    <p:sldLayoutId xmlns:r="http://schemas.openxmlformats.org/officeDocument/2006/relationships" id="2147483654" r:id="R54facc3859954f11"/>
+    <p:sldLayoutId xmlns:r="http://schemas.openxmlformats.org/officeDocument/2006/relationships" id="2147483655" r:id="R33295dcd4ea64aee"/>
+    <p:sldLayoutId xmlns:r="http://schemas.openxmlformats.org/officeDocument/2006/relationships" id="2147483656" r:id="R7e8711451ff04004"/>
+    <p:sldLayoutId xmlns:r="http://schemas.openxmlformats.org/officeDocument/2006/relationships" id="2147483657" r:id="Raa0f7268c14147c2"/>
+    <p:sldLayoutId xmlns:r="http://schemas.openxmlformats.org/officeDocument/2006/relationships" id="2147483658" r:id="R972fd69aa61f4313"/>
+    <p:sldLayoutId xmlns:r="http://schemas.openxmlformats.org/officeDocument/2006/relationships" id="2147483659" r:id="R8c02897041fd4fe0"/>
   </p:sldLayoutIdLst>
   <p:txStyles>
     <p:titleStyle>
@@ -2149,7 +2149,7 @@
           <p:nvPr/>
         </p:nvPicPr>
         <p:blipFill>
-          <a:blip xmlns:r="http://schemas.openxmlformats.org/officeDocument/2006/relationships" xmlns:a="http://schemas.openxmlformats.org/drawingml/2006/main" r:embed="Ra8568058e6d04e5c"/>
+          <a:blip xmlns:r="http://schemas.openxmlformats.org/officeDocument/2006/relationships" xmlns:a="http://schemas.openxmlformats.org/drawingml/2006/main" r:embed="Rb9f02e993ac3468e"/>
           <a:stretch xmlns:a="http://schemas.openxmlformats.org/drawingml/2006/main">
             <a:fillRect l="0" t="0" r="0" b="0"/>
           </a:stretch>
@@ -2169,7 +2169,7 @@
           <p:cNvPr id="4" name="矩形 3">
             <a:extLst xmlns:a="http://schemas.openxmlformats.org/drawingml/2006/main">
               <a:ext uri="{FF2B5EF4-FFF2-40B4-BE49-F238E27FC236}">
-                <a16:creationId xmlns:a16="http://schemas.microsoft.com/office/drawing/2014/main" id="{E0DD24A5-5F45-405A-8C58-06DD33D7F103}"/>
+                <a16:creationId xmlns:a16="http://schemas.microsoft.com/office/drawing/2014/main" id="{2619E822-A312-4996-BF30-6158F3CF4693}"/>
               </a:ext>
             </a:extLst>
           </p:cNvPr>
@@ -2227,7 +2227,7 @@
           <p:cNvPr id="5" name="矩形 4">
             <a:extLst xmlns:a="http://schemas.openxmlformats.org/drawingml/2006/main">
               <a:ext uri="{FF2B5EF4-FFF2-40B4-BE49-F238E27FC236}">
-                <a16:creationId xmlns:a16="http://schemas.microsoft.com/office/drawing/2014/main" id="{DAF2D0DF-9F10-4956-91A3-560F026A35E8}"/>
+                <a16:creationId xmlns:a16="http://schemas.microsoft.com/office/drawing/2014/main" id="{1140C4FE-E654-4099-8A71-50978901F8B0}"/>
               </a:ext>
             </a:extLst>
           </p:cNvPr>
@@ -2289,7 +2289,7 @@
           <p:cNvPr id="6" name="直接连接符 5">
             <a:extLst xmlns:a="http://schemas.openxmlformats.org/drawingml/2006/main">
               <a:ext uri="{FF2B5EF4-FFF2-40B4-BE49-F238E27FC236}">
-                <a16:creationId xmlns:a16="http://schemas.microsoft.com/office/drawing/2014/main" id="{A240280B-CD50-48F7-B2F8-06F1498BF278}"/>
+                <a16:creationId xmlns:a16="http://schemas.microsoft.com/office/drawing/2014/main" id="{F0479655-78CC-4E9E-9D68-DE6F8D178EA6}"/>
               </a:ext>
             </a:extLst>
           </p:cNvPr>
@@ -2332,7 +2332,7 @@
           <p:cNvPr id="9" name="副标题 2">
             <a:extLst xmlns:a="http://schemas.openxmlformats.org/drawingml/2006/main">
               <a:ext uri="{FF2B5EF4-FFF2-40B4-BE49-F238E27FC236}">
-                <a16:creationId xmlns:a16="http://schemas.microsoft.com/office/drawing/2014/main" id="{67551A8D-D277-4D63-A5D1-CEF790E268F4}"/>
+                <a16:creationId xmlns:a16="http://schemas.microsoft.com/office/drawing/2014/main" id="{B9FE66E0-5ABC-4588-A4C1-9C5716530D78}"/>
               </a:ext>
             </a:extLst>
           </p:cNvPr>
@@ -2546,7 +2546,7 @@
           <p:cNvPr id="10" name="文本框 9">
             <a:extLst xmlns:a="http://schemas.openxmlformats.org/drawingml/2006/main">
               <a:ext uri="{FF2B5EF4-FFF2-40B4-BE49-F238E27FC236}">
-                <a16:creationId xmlns:a16="http://schemas.microsoft.com/office/drawing/2014/main" id="{CE3320CC-C53D-4C90-B3C4-D0742C770D1D}"/>
+                <a16:creationId xmlns:a16="http://schemas.microsoft.com/office/drawing/2014/main" id="{3A412CF4-80D5-4B84-AC6D-AF89583F9D82}"/>
               </a:ext>
             </a:extLst>
           </p:cNvPr>
@@ -2602,7 +2602,7 @@
           <p:nvPr/>
         </p:nvPicPr>
         <p:blipFill>
-          <a:blip xmlns:r="http://schemas.openxmlformats.org/officeDocument/2006/relationships" xmlns:a="http://schemas.openxmlformats.org/drawingml/2006/main" r:embed="Rce8edbc8f67f4ebe"/>
+          <a:blip xmlns:r="http://schemas.openxmlformats.org/officeDocument/2006/relationships" xmlns:a="http://schemas.openxmlformats.org/drawingml/2006/main" r:embed="R9edd1c64ddfc4149"/>
           <a:stretch xmlns:a="http://schemas.openxmlformats.org/drawingml/2006/main">
             <a:fillRect l="0" t="0" r="0" b="0"/>
           </a:stretch>
@@ -2626,7 +2626,7 @@
           <p:nvPr/>
         </p:nvPicPr>
         <p:blipFill>
-          <a:blip xmlns:r="http://schemas.openxmlformats.org/officeDocument/2006/relationships" xmlns:a="http://schemas.openxmlformats.org/drawingml/2006/main" r:embed="R23fb481530134a58"/>
+          <a:blip xmlns:r="http://schemas.openxmlformats.org/officeDocument/2006/relationships" xmlns:a="http://schemas.openxmlformats.org/drawingml/2006/main" r:embed="R7904a91680f747bb"/>
           <a:stretch xmlns:a="http://schemas.openxmlformats.org/drawingml/2006/main">
             <a:fillRect l="0" t="0" r="0" b="0"/>
           </a:stretch>
@@ -2868,7 +2868,7 @@
           <p:cNvPr id="16" name="">
             <a:extLst xmlns:a="http://schemas.openxmlformats.org/drawingml/2006/main">
               <a:ext uri="{FF2B5EF4-FFF2-40B4-BE49-F238E27FC236}">
-                <a16:creationId xmlns:a16="http://schemas.microsoft.com/office/drawing/2014/main" id="{12E92CDB-4CFC-491E-A84F-0EEB991921D0}"/>
+                <a16:creationId xmlns:a16="http://schemas.microsoft.com/office/drawing/2014/main" id="{B9B786D1-A662-4750-B853-D343D6F1F7FF}"/>
               </a:ext>
             </a:extLst>
           </p:cNvPr>
@@ -2947,7 +2947,7 @@
           <p:cNvPr id="17" name="">
             <a:extLst xmlns:a="http://schemas.openxmlformats.org/drawingml/2006/main">
               <a:ext uri="{FF2B5EF4-FFF2-40B4-BE49-F238E27FC236}">
-                <a16:creationId xmlns:a16="http://schemas.microsoft.com/office/drawing/2014/main" id="{53BE2CC9-9487-4E79-8427-9DF8C5790C51}"/>
+                <a16:creationId xmlns:a16="http://schemas.microsoft.com/office/drawing/2014/main" id="{3D0A0FEA-F474-4A23-B51B-8A984941F4DF}"/>
               </a:ext>
             </a:extLst>
           </p:cNvPr>
@@ -3001,7 +3001,7 @@
     </p:spTree>
     <p:extLst>
       <p:ext uri="{BB962C8B-B14F-4D97-AF65-F5344CB8AC3E}">
-        <p14:creationId xmlns:p14="http://schemas.microsoft.com/office/powerpoint/2010/main" val="967900549"/>
+        <p14:creationId xmlns:p14="http://schemas.microsoft.com/office/powerpoint/2010/main" val="567257750"/>
       </p:ext>
     </p:extLst>
   </p:cSld>
@@ -3014,7 +3014,7 @@
     <p:bg>
       <p:bgPr>
         <a:blipFill xmlns:a="http://schemas.openxmlformats.org/drawingml/2006/main" rotWithShape="1">
-          <a:blip xmlns:r="http://schemas.openxmlformats.org/officeDocument/2006/relationships" r:embed="Re5a4b3609bae4463">
+          <a:blip xmlns:r="http://schemas.openxmlformats.org/officeDocument/2006/relationships" r:embed="R164dd156e0984789">
             <a:lum/>
           </a:blip>
           <a:srcRect l="0" t="0" r="0" b="0"/>
@@ -3042,7 +3042,7 @@
           <p:nvPr/>
         </p:nvPicPr>
         <p:blipFill>
-          <a:blip xmlns:r="http://schemas.openxmlformats.org/officeDocument/2006/relationships" xmlns:a="http://schemas.openxmlformats.org/drawingml/2006/main" r:embed="R3aa8fe91c04f45b0"/>
+          <a:blip xmlns:r="http://schemas.openxmlformats.org/officeDocument/2006/relationships" xmlns:a="http://schemas.openxmlformats.org/drawingml/2006/main" r:embed="Rfa17d2f9479c4013"/>
           <a:stretch xmlns:a="http://schemas.openxmlformats.org/drawingml/2006/main">
             <a:fillRect l="0" t="0" r="0" b="0"/>
           </a:stretch>
@@ -3062,7 +3062,7 @@
           <p:cNvPr id="2" name="矩形 1">
             <a:extLst xmlns:a="http://schemas.openxmlformats.org/drawingml/2006/main">
               <a:ext uri="{FF2B5EF4-FFF2-40B4-BE49-F238E27FC236}">
-                <a16:creationId xmlns:a16="http://schemas.microsoft.com/office/drawing/2014/main" id="{281F14AA-0664-4310-9BE3-735E9EC8FE33}"/>
+                <a16:creationId xmlns:a16="http://schemas.microsoft.com/office/drawing/2014/main" id="{D9B2EBBF-68B7-48B7-8BE6-E621AF326B8C}"/>
               </a:ext>
             </a:extLst>
           </p:cNvPr>
@@ -3118,7 +3118,7 @@
           <p:cNvPr id="3" name="矩形 2">
             <a:extLst xmlns:a="http://schemas.openxmlformats.org/drawingml/2006/main">
               <a:ext uri="{FF2B5EF4-FFF2-40B4-BE49-F238E27FC236}">
-                <a16:creationId xmlns:a16="http://schemas.microsoft.com/office/drawing/2014/main" id="{561AFED2-BD2C-412E-9178-9F0EA77A6517}"/>
+                <a16:creationId xmlns:a16="http://schemas.microsoft.com/office/drawing/2014/main" id="{E8A9E0CD-D767-4B74-86A7-A8A7D9337557}"/>
               </a:ext>
             </a:extLst>
           </p:cNvPr>
@@ -3178,7 +3178,7 @@
           <p:cNvPr id="4" name="直接连接符 3">
             <a:extLst xmlns:a="http://schemas.openxmlformats.org/drawingml/2006/main">
               <a:ext uri="{FF2B5EF4-FFF2-40B4-BE49-F238E27FC236}">
-                <a16:creationId xmlns:a16="http://schemas.microsoft.com/office/drawing/2014/main" id="{E667425E-0DF7-4608-B119-42BE64DBCE5D}"/>
+                <a16:creationId xmlns:a16="http://schemas.microsoft.com/office/drawing/2014/main" id="{4AFF3E7F-8FB0-4628-9EBC-E809C97272C7}"/>
               </a:ext>
             </a:extLst>
           </p:cNvPr>
@@ -3221,7 +3221,7 @@
           <p:cNvPr id="5" name="标题 1">
             <a:extLst xmlns:a="http://schemas.openxmlformats.org/drawingml/2006/main">
               <a:ext uri="{FF2B5EF4-FFF2-40B4-BE49-F238E27FC236}">
-                <a16:creationId xmlns:a16="http://schemas.microsoft.com/office/drawing/2014/main" id="{FAA59BB3-0E2D-4DFE-AD1D-C850077D83CA}"/>
+                <a16:creationId xmlns:a16="http://schemas.microsoft.com/office/drawing/2014/main" id="{AD745C27-B6F3-45FE-AFC2-141883CC9FD4}"/>
               </a:ext>
             </a:extLst>
           </p:cNvPr>
@@ -3307,7 +3307,7 @@
           <p:cNvPr id="8" name="直接连接符 7">
             <a:extLst xmlns:a="http://schemas.openxmlformats.org/drawingml/2006/main">
               <a:ext uri="{FF2B5EF4-FFF2-40B4-BE49-F238E27FC236}">
-                <a16:creationId xmlns:a16="http://schemas.microsoft.com/office/drawing/2014/main" id="{3B88E8C6-B8F2-4E15-A56F-79338DC16CF0}"/>
+                <a16:creationId xmlns:a16="http://schemas.microsoft.com/office/drawing/2014/main" id="{34DAABE9-81BD-47AC-BE3F-7366399DBEAC}"/>
               </a:ext>
             </a:extLst>
           </p:cNvPr>
@@ -3354,7 +3354,7 @@
           <p:nvPr/>
         </p:nvPicPr>
         <p:blipFill>
-          <a:blip xmlns:r="http://schemas.openxmlformats.org/officeDocument/2006/relationships" xmlns:a="http://schemas.openxmlformats.org/drawingml/2006/main" r:embed="R99ee718d7f5c495b"/>
+          <a:blip xmlns:r="http://schemas.openxmlformats.org/officeDocument/2006/relationships" xmlns:a="http://schemas.openxmlformats.org/drawingml/2006/main" r:embed="Re4e9d97f2a9546ee"/>
           <a:stretch xmlns:a="http://schemas.openxmlformats.org/drawingml/2006/main">
             <a:fillRect l="0" t="0" r="0" b="0"/>
           </a:stretch>
@@ -3374,7 +3374,7 @@
           <p:cNvPr id="12" name="副标题 2">
             <a:extLst xmlns:a="http://schemas.openxmlformats.org/drawingml/2006/main">
               <a:ext uri="{FF2B5EF4-FFF2-40B4-BE49-F238E27FC236}">
-                <a16:creationId xmlns:a16="http://schemas.microsoft.com/office/drawing/2014/main" id="{2800F83A-61B1-47DD-808F-264D672FA511}"/>
+                <a16:creationId xmlns:a16="http://schemas.microsoft.com/office/drawing/2014/main" id="{1694A54C-F118-4EB2-8033-600E96D4D4A5}"/>
               </a:ext>
             </a:extLst>
           </p:cNvPr>
@@ -3639,7 +3639,7 @@
           <p:nvPr/>
         </p:nvPicPr>
         <p:blipFill>
-          <a:blip xmlns:r="http://schemas.openxmlformats.org/officeDocument/2006/relationships" xmlns:a="http://schemas.openxmlformats.org/drawingml/2006/main" r:embed="R9a39c09e89cd4347"/>
+          <a:blip xmlns:r="http://schemas.openxmlformats.org/officeDocument/2006/relationships" xmlns:a="http://schemas.openxmlformats.org/drawingml/2006/main" r:embed="R203ec6b3498548e3"/>
           <a:stretch xmlns:a="http://schemas.openxmlformats.org/drawingml/2006/main">
             <a:fillRect l="0" t="0" r="0" b="0"/>
           </a:stretch>
@@ -3906,7 +3906,7 @@
           <p:cNvPr id="20" name="">
             <a:extLst xmlns:a="http://schemas.openxmlformats.org/drawingml/2006/main">
               <a:ext uri="{FF2B5EF4-FFF2-40B4-BE49-F238E27FC236}">
-                <a16:creationId xmlns:a16="http://schemas.microsoft.com/office/drawing/2014/main" id="{346E35BD-7131-4049-93B7-634F31A64D1C}"/>
+                <a16:creationId xmlns:a16="http://schemas.microsoft.com/office/drawing/2014/main" id="{93BEEDBE-C255-4125-9295-B5AFC6093545}"/>
               </a:ext>
             </a:extLst>
           </p:cNvPr>
@@ -3939,7 +3939,7 @@
           <p:cNvPr id="21" name="">
             <a:extLst xmlns:a="http://schemas.openxmlformats.org/drawingml/2006/main">
               <a:ext uri="{FF2B5EF4-FFF2-40B4-BE49-F238E27FC236}">
-                <a16:creationId xmlns:a16="http://schemas.microsoft.com/office/drawing/2014/main" id="{DBCA4565-3503-4559-90A8-4286AEB61B4F}"/>
+                <a16:creationId xmlns:a16="http://schemas.microsoft.com/office/drawing/2014/main" id="{E62C8D24-113A-4D24-A768-41E3B472C336}"/>
               </a:ext>
             </a:extLst>
           </p:cNvPr>
@@ -3995,7 +3995,7 @@
           <p:cNvPr id="22" name="">
             <a:extLst xmlns:a="http://schemas.openxmlformats.org/drawingml/2006/main">
               <a:ext uri="{FF2B5EF4-FFF2-40B4-BE49-F238E27FC236}">
-                <a16:creationId xmlns:a16="http://schemas.microsoft.com/office/drawing/2014/main" id="{03EE884D-22BA-4D92-BE85-3D7F02579680}"/>
+                <a16:creationId xmlns:a16="http://schemas.microsoft.com/office/drawing/2014/main" id="{951C4C23-8427-4CE6-900A-C595CA2378F2}"/>
               </a:ext>
             </a:extLst>
           </p:cNvPr>
@@ -4028,7 +4028,7 @@
           <p:cNvPr id="23" name="">
             <a:extLst xmlns:a="http://schemas.openxmlformats.org/drawingml/2006/main">
               <a:ext uri="{FF2B5EF4-FFF2-40B4-BE49-F238E27FC236}">
-                <a16:creationId xmlns:a16="http://schemas.microsoft.com/office/drawing/2014/main" id="{D469F24A-CB0A-470A-A400-195368DAA40C}"/>
+                <a16:creationId xmlns:a16="http://schemas.microsoft.com/office/drawing/2014/main" id="{9BC4ED42-CF04-4C1B-9197-C7DB6FBF86E4}"/>
               </a:ext>
             </a:extLst>
           </p:cNvPr>
@@ -4063,7 +4063,7 @@
           <p:cNvPr id="24" name="">
             <a:extLst xmlns:a="http://schemas.openxmlformats.org/drawingml/2006/main">
               <a:ext uri="{FF2B5EF4-FFF2-40B4-BE49-F238E27FC236}">
-                <a16:creationId xmlns:a16="http://schemas.microsoft.com/office/drawing/2014/main" id="{AF57AB83-B952-41A7-AE58-0046C77D4528}"/>
+                <a16:creationId xmlns:a16="http://schemas.microsoft.com/office/drawing/2014/main" id="{AF542D67-23A9-4F45-B5D9-0168EC71B146}"/>
               </a:ext>
             </a:extLst>
           </p:cNvPr>
@@ -4125,7 +4125,7 @@
           <p:cNvPr id="25" name="">
             <a:extLst xmlns:a="http://schemas.openxmlformats.org/drawingml/2006/main">
               <a:ext uri="{FF2B5EF4-FFF2-40B4-BE49-F238E27FC236}">
-                <a16:creationId xmlns:a16="http://schemas.microsoft.com/office/drawing/2014/main" id="{1A87D366-963B-45C5-B7F9-D2D77E0030B0}"/>
+                <a16:creationId xmlns:a16="http://schemas.microsoft.com/office/drawing/2014/main" id="{07CD53F3-BB6D-401D-BFF0-59419A11055A}"/>
               </a:ext>
             </a:extLst>
           </p:cNvPr>
@@ -4278,7 +4278,7 @@
           <p:cNvPr id="26" name="">
             <a:extLst xmlns:a="http://schemas.openxmlformats.org/drawingml/2006/main">
               <a:ext uri="{FF2B5EF4-FFF2-40B4-BE49-F238E27FC236}">
-                <a16:creationId xmlns:a16="http://schemas.microsoft.com/office/drawing/2014/main" id="{A5B68979-EFC4-43EE-90C5-F3AD6B027A23}"/>
+                <a16:creationId xmlns:a16="http://schemas.microsoft.com/office/drawing/2014/main" id="{A05E889C-87F1-47CB-8BDE-B63868007445}"/>
               </a:ext>
             </a:extLst>
           </p:cNvPr>
@@ -4313,7 +4313,7 @@
           <p:cNvPr id="27" name="">
             <a:extLst xmlns:a="http://schemas.openxmlformats.org/drawingml/2006/main">
               <a:ext uri="{FF2B5EF4-FFF2-40B4-BE49-F238E27FC236}">
-                <a16:creationId xmlns:a16="http://schemas.microsoft.com/office/drawing/2014/main" id="{A5B58AFA-920E-487D-A17F-A990F3C66C63}"/>
+                <a16:creationId xmlns:a16="http://schemas.microsoft.com/office/drawing/2014/main" id="{3CEF1233-D66D-4FF3-9FF6-2756793ED580}"/>
               </a:ext>
             </a:extLst>
           </p:cNvPr>
@@ -4375,7 +4375,7 @@
           <p:cNvPr id="28" name="">
             <a:extLst xmlns:a="http://schemas.openxmlformats.org/drawingml/2006/main">
               <a:ext uri="{FF2B5EF4-FFF2-40B4-BE49-F238E27FC236}">
-                <a16:creationId xmlns:a16="http://schemas.microsoft.com/office/drawing/2014/main" id="{54D40A98-B935-4B88-AB56-3E1F534BEC9E}"/>
+                <a16:creationId xmlns:a16="http://schemas.microsoft.com/office/drawing/2014/main" id="{90E9CA58-171A-4E17-BC99-7F8E980E4878}"/>
               </a:ext>
             </a:extLst>
           </p:cNvPr>
@@ -4528,7 +4528,7 @@
           <p:cNvPr id="29" name="">
             <a:extLst xmlns:a="http://schemas.openxmlformats.org/drawingml/2006/main">
               <a:ext uri="{FF2B5EF4-FFF2-40B4-BE49-F238E27FC236}">
-                <a16:creationId xmlns:a16="http://schemas.microsoft.com/office/drawing/2014/main" id="{814FE092-B5EB-44B2-91CD-4566C35BED3E}"/>
+                <a16:creationId xmlns:a16="http://schemas.microsoft.com/office/drawing/2014/main" id="{BAC0C990-45B1-4B39-82EC-29097E933B4E}"/>
               </a:ext>
             </a:extLst>
           </p:cNvPr>
@@ -4563,7 +4563,7 @@
           <p:cNvPr id="30" name="">
             <a:extLst xmlns:a="http://schemas.openxmlformats.org/drawingml/2006/main">
               <a:ext uri="{FF2B5EF4-FFF2-40B4-BE49-F238E27FC236}">
-                <a16:creationId xmlns:a16="http://schemas.microsoft.com/office/drawing/2014/main" id="{671F5885-1A1A-4D55-96E4-F9729ACA5649}"/>
+                <a16:creationId xmlns:a16="http://schemas.microsoft.com/office/drawing/2014/main" id="{E3CBC870-BD50-4011-9868-97A7D0411FB8}"/>
               </a:ext>
             </a:extLst>
           </p:cNvPr>
@@ -4625,7 +4625,7 @@
           <p:cNvPr id="31" name="">
             <a:extLst xmlns:a="http://schemas.openxmlformats.org/drawingml/2006/main">
               <a:ext uri="{FF2B5EF4-FFF2-40B4-BE49-F238E27FC236}">
-                <a16:creationId xmlns:a16="http://schemas.microsoft.com/office/drawing/2014/main" id="{C11DB12C-6F0B-4F6E-AF4C-E5AC362F70C4}"/>
+                <a16:creationId xmlns:a16="http://schemas.microsoft.com/office/drawing/2014/main" id="{0996A2E1-6FD9-41FC-A416-5189D116D111}"/>
               </a:ext>
             </a:extLst>
           </p:cNvPr>
@@ -4778,7 +4778,7 @@
           <p:cNvPr id="32" name="">
             <a:extLst xmlns:a="http://schemas.openxmlformats.org/drawingml/2006/main">
               <a:ext uri="{FF2B5EF4-FFF2-40B4-BE49-F238E27FC236}">
-                <a16:creationId xmlns:a16="http://schemas.microsoft.com/office/drawing/2014/main" id="{CA37B866-FBD0-4166-A653-6DD36BD8ABEF}"/>
+                <a16:creationId xmlns:a16="http://schemas.microsoft.com/office/drawing/2014/main" id="{429B36D5-3DC6-4CEF-B86F-65BACCA9657A}"/>
               </a:ext>
             </a:extLst>
           </p:cNvPr>
@@ -4813,7 +4813,7 @@
           <p:cNvPr id="33" name="">
             <a:extLst xmlns:a="http://schemas.openxmlformats.org/drawingml/2006/main">
               <a:ext uri="{FF2B5EF4-FFF2-40B4-BE49-F238E27FC236}">
-                <a16:creationId xmlns:a16="http://schemas.microsoft.com/office/drawing/2014/main" id="{A665F5AF-C503-4FDB-9014-D11F82DAAA70}"/>
+                <a16:creationId xmlns:a16="http://schemas.microsoft.com/office/drawing/2014/main" id="{7AF3A0E6-75BC-4645-B99A-AC24A9EFF439}"/>
               </a:ext>
             </a:extLst>
           </p:cNvPr>
@@ -4867,7 +4867,7 @@
     </p:spTree>
     <p:extLst>
       <p:ext uri="{BB962C8B-B14F-4D97-AF65-F5344CB8AC3E}">
-        <p14:creationId xmlns:p14="http://schemas.microsoft.com/office/powerpoint/2010/main" val="1973566765"/>
+        <p14:creationId xmlns:p14="http://schemas.microsoft.com/office/powerpoint/2010/main" val="1073358223"/>
       </p:ext>
     </p:extLst>
   </p:cSld>
@@ -4891,7 +4891,7 @@
           <p:cNvPr id="18" name="直角三角形 17">
             <a:extLst xmlns:a="http://schemas.openxmlformats.org/drawingml/2006/main">
               <a:ext uri="{FF2B5EF4-FFF2-40B4-BE49-F238E27FC236}">
-                <a16:creationId xmlns:a16="http://schemas.microsoft.com/office/drawing/2014/main" id="{C1644077-3F33-4567-95EE-B69B85A9E358}"/>
+                <a16:creationId xmlns:a16="http://schemas.microsoft.com/office/drawing/2014/main" id="{B7BDB45F-58A3-47FE-BC35-048A5A12C4C9}"/>
               </a:ext>
             </a:extLst>
           </p:cNvPr>
@@ -4949,7 +4949,7 @@
           <p:cNvPr id="19" name="直角三角形 18">
             <a:extLst xmlns:a="http://schemas.openxmlformats.org/drawingml/2006/main">
               <a:ext uri="{FF2B5EF4-FFF2-40B4-BE49-F238E27FC236}">
-                <a16:creationId xmlns:a16="http://schemas.microsoft.com/office/drawing/2014/main" id="{D11670B4-5E22-472C-A4B9-C36CF21148A8}"/>
+                <a16:creationId xmlns:a16="http://schemas.microsoft.com/office/drawing/2014/main" id="{CDF557E2-851E-4B96-ADA4-CE0278EF516C}"/>
               </a:ext>
             </a:extLst>
           </p:cNvPr>
@@ -5007,7 +5007,7 @@
           <p:cNvPr id="20" name="圆角矩形 2">
             <a:extLst xmlns:a="http://schemas.openxmlformats.org/drawingml/2006/main">
               <a:ext uri="{FF2B5EF4-FFF2-40B4-BE49-F238E27FC236}">
-                <a16:creationId xmlns:a16="http://schemas.microsoft.com/office/drawing/2014/main" id="{7149E51A-56C0-44DE-95AA-F3CD30CD99FD}"/>
+                <a16:creationId xmlns:a16="http://schemas.microsoft.com/office/drawing/2014/main" id="{37BD35C7-6BC3-48C2-A02B-96926EF3DD54}"/>
               </a:ext>
             </a:extLst>
           </p:cNvPr>
@@ -5067,7 +5067,7 @@
           <p:cNvPr id="21" name="对角圆角矩形 80">
             <a:extLst xmlns:a="http://schemas.openxmlformats.org/drawingml/2006/main">
               <a:ext uri="{FF2B5EF4-FFF2-40B4-BE49-F238E27FC236}">
-                <a16:creationId xmlns:a16="http://schemas.microsoft.com/office/drawing/2014/main" id="{76C0EAF4-7916-45F9-B297-9E6ACC847D21}"/>
+                <a16:creationId xmlns:a16="http://schemas.microsoft.com/office/drawing/2014/main" id="{EA607DEC-3577-4D3A-9283-F65B538A68B3}"/>
               </a:ext>
             </a:extLst>
           </p:cNvPr>
@@ -5141,7 +5141,7 @@
           <p:cNvPr id="22" name="圆角矩形 2">
             <a:extLst xmlns:a="http://schemas.openxmlformats.org/drawingml/2006/main">
               <a:ext uri="{FF2B5EF4-FFF2-40B4-BE49-F238E27FC236}">
-                <a16:creationId xmlns:a16="http://schemas.microsoft.com/office/drawing/2014/main" id="{8E958127-01EF-4CD6-A0D5-48DC7BD85458}"/>
+                <a16:creationId xmlns:a16="http://schemas.microsoft.com/office/drawing/2014/main" id="{B126FE4A-C9F5-43B0-A065-0C5A7003E28A}"/>
               </a:ext>
             </a:extLst>
           </p:cNvPr>
@@ -5201,7 +5201,7 @@
           <p:cNvPr id="23" name="对角圆角矩形 80">
             <a:extLst xmlns:a="http://schemas.openxmlformats.org/drawingml/2006/main">
               <a:ext uri="{FF2B5EF4-FFF2-40B4-BE49-F238E27FC236}">
-                <a16:creationId xmlns:a16="http://schemas.microsoft.com/office/drawing/2014/main" id="{DA184691-E7F4-435B-9979-BC8A9DC34DDE}"/>
+                <a16:creationId xmlns:a16="http://schemas.microsoft.com/office/drawing/2014/main" id="{B11E5D3E-90F7-41A7-8736-BF026FB194E7}"/>
               </a:ext>
             </a:extLst>
           </p:cNvPr>
@@ -5275,7 +5275,7 @@
           <p:cNvPr id="24" name="直角三角形 23">
             <a:extLst xmlns:a="http://schemas.openxmlformats.org/drawingml/2006/main">
               <a:ext uri="{FF2B5EF4-FFF2-40B4-BE49-F238E27FC236}">
-                <a16:creationId xmlns:a16="http://schemas.microsoft.com/office/drawing/2014/main" id="{0348DDAC-F469-406E-908C-242F4B0042F5}"/>
+                <a16:creationId xmlns:a16="http://schemas.microsoft.com/office/drawing/2014/main" id="{1B588B61-67BB-47F6-B4F8-8D345D2789EB}"/>
               </a:ext>
             </a:extLst>
           </p:cNvPr>
@@ -5333,7 +5333,7 @@
           <p:cNvPr id="25" name="圆角矩形 2">
             <a:extLst xmlns:a="http://schemas.openxmlformats.org/drawingml/2006/main">
               <a:ext uri="{FF2B5EF4-FFF2-40B4-BE49-F238E27FC236}">
-                <a16:creationId xmlns:a16="http://schemas.microsoft.com/office/drawing/2014/main" id="{4154454D-19A9-48C2-9C73-BC20753A40EB}"/>
+                <a16:creationId xmlns:a16="http://schemas.microsoft.com/office/drawing/2014/main" id="{C7932C18-B564-461D-8E0B-3D50F31456DD}"/>
               </a:ext>
             </a:extLst>
           </p:cNvPr>
@@ -5393,7 +5393,7 @@
           <p:cNvPr id="26" name="对角圆角矩形 80">
             <a:extLst xmlns:a="http://schemas.openxmlformats.org/drawingml/2006/main">
               <a:ext uri="{FF2B5EF4-FFF2-40B4-BE49-F238E27FC236}">
-                <a16:creationId xmlns:a16="http://schemas.microsoft.com/office/drawing/2014/main" id="{BB13481D-C289-45E9-B8EE-387537CA7916}"/>
+                <a16:creationId xmlns:a16="http://schemas.microsoft.com/office/drawing/2014/main" id="{C087EC68-F125-4290-ACFC-5840F27D7638}"/>
               </a:ext>
             </a:extLst>
           </p:cNvPr>
@@ -5467,7 +5467,7 @@
           <p:cNvPr id="28" name="">
             <a:extLst xmlns:a="http://schemas.openxmlformats.org/drawingml/2006/main">
               <a:ext uri="{FF2B5EF4-FFF2-40B4-BE49-F238E27FC236}">
-                <a16:creationId xmlns:a16="http://schemas.microsoft.com/office/drawing/2014/main" id="{DE277C09-985B-4E32-9E2C-FF2F9B86D1CD}"/>
+                <a16:creationId xmlns:a16="http://schemas.microsoft.com/office/drawing/2014/main" id="{467FF4AD-6D9E-4CAE-967B-7B7C50765ECE}"/>
               </a:ext>
             </a:extLst>
           </p:cNvPr>
@@ -5500,7 +5500,7 @@
           <p:cNvPr id="29" name="">
             <a:extLst xmlns:a="http://schemas.openxmlformats.org/drawingml/2006/main">
               <a:ext uri="{FF2B5EF4-FFF2-40B4-BE49-F238E27FC236}">
-                <a16:creationId xmlns:a16="http://schemas.microsoft.com/office/drawing/2014/main" id="{E947A102-4607-4F29-948F-58692B5D9C9B}"/>
+                <a16:creationId xmlns:a16="http://schemas.microsoft.com/office/drawing/2014/main" id="{BF47179D-87E8-4911-8E65-F6399AF825F9}"/>
               </a:ext>
             </a:extLst>
           </p:cNvPr>
@@ -5556,7 +5556,7 @@
           <p:cNvPr id="30" name="">
             <a:extLst xmlns:a="http://schemas.openxmlformats.org/drawingml/2006/main">
               <a:ext uri="{FF2B5EF4-FFF2-40B4-BE49-F238E27FC236}">
-                <a16:creationId xmlns:a16="http://schemas.microsoft.com/office/drawing/2014/main" id="{1C78B78E-E761-412D-AFB6-6308117EE382}"/>
+                <a16:creationId xmlns:a16="http://schemas.microsoft.com/office/drawing/2014/main" id="{F4E9B1F5-7C72-4819-B662-1A1DD0BDD86C}"/>
               </a:ext>
             </a:extLst>
           </p:cNvPr>
@@ -5589,7 +5589,7 @@
           <p:cNvPr id="31" name="">
             <a:extLst xmlns:a="http://schemas.openxmlformats.org/drawingml/2006/main">
               <a:ext uri="{FF2B5EF4-FFF2-40B4-BE49-F238E27FC236}">
-                <a16:creationId xmlns:a16="http://schemas.microsoft.com/office/drawing/2014/main" id="{E260AE56-7EA8-4438-8B55-54B41A177EFD}"/>
+                <a16:creationId xmlns:a16="http://schemas.microsoft.com/office/drawing/2014/main" id="{2193187D-7097-4A6A-AFCB-97C191CE1D61}"/>
               </a:ext>
             </a:extLst>
           </p:cNvPr>
@@ -5640,28 +5640,94 @@
           </a:p>
         </p:txBody>
       </p:sp>
-      <p:sp>
-        <p:nvSpPr>
-          <p:cNvPr id="32" name="">
-            <a:extLst xmlns:a="http://schemas.openxmlformats.org/drawingml/2006/main">
-              <a:ext uri="{FF2B5EF4-FFF2-40B4-BE49-F238E27FC236}">
-                <a16:creationId xmlns:a16="http://schemas.microsoft.com/office/drawing/2014/main" id="{6AA30660-3F66-4F7C-9ED2-22C049F338E1}"/>
-              </a:ext>
-            </a:extLst>
-          </p:cNvPr>
-          <p:cNvSpPr>
-            <a:spLocks xmlns:a="http://schemas.openxmlformats.org/drawingml/2006/main" noGrp="1"/>
-          </p:cNvSpPr>
-          <p:nvPr/>
-        </p:nvSpPr>
-        <p:spPr>
-          <a:xfrm xmlns:a="http://schemas.openxmlformats.org/drawingml/2006/main">
-            <a:off x="552450" y="1428750"/>
-            <a:ext cx="3429000" cy="3638550"/>
+      <p:pic>
+        <p:nvPicPr>
+          <p:cNvPr id="68" name=""/>
+          <p:cNvPicPr>
+            <a:picLocks xmlns:a="http://schemas.openxmlformats.org/drawingml/2006/main" noChangeAspect="1"/>
+          </p:cNvPicPr>
+          <p:nvPr/>
+        </p:nvPicPr>
+        <p:blipFill>
+          <a:blip xmlns:r="http://schemas.openxmlformats.org/officeDocument/2006/relationships" xmlns:a="http://schemas.openxmlformats.org/drawingml/2006/main" r:embed="R6ac11d7a23ea4932"/>
+          <a:stretch xmlns:a="http://schemas.openxmlformats.org/drawingml/2006/main"/>
+        </p:blipFill>
+        <p:spPr>
+          <a:xfrm xmlns:a="http://schemas.openxmlformats.org/drawingml/2006/main">
+            <a:off x="721110" y="1257300"/>
+            <a:ext cx="5225279" cy="342900"/>
+          </a:xfrm>
+          <a:prstGeom xmlns:a="http://schemas.openxmlformats.org/drawingml/2006/main" prst="rect">
+            <a:avLst/>
+          </a:prstGeom>
+        </p:spPr>
+      </p:pic>
+      <p:pic>
+        <p:nvPicPr>
+          <p:cNvPr id="69" name=""/>
+          <p:cNvPicPr>
+            <a:picLocks xmlns:a="http://schemas.openxmlformats.org/drawingml/2006/main" noChangeAspect="1"/>
+          </p:cNvPicPr>
+          <p:nvPr/>
+        </p:nvPicPr>
+        <p:blipFill>
+          <a:blip xmlns:r="http://schemas.openxmlformats.org/officeDocument/2006/relationships" xmlns:a="http://schemas.openxmlformats.org/drawingml/2006/main" r:embed="Rf98df9cfdf2245de"/>
+          <a:stretch xmlns:a="http://schemas.openxmlformats.org/drawingml/2006/main"/>
+        </p:blipFill>
+        <p:spPr>
+          <a:xfrm xmlns:a="http://schemas.openxmlformats.org/drawingml/2006/main">
+            <a:off x="6245610" y="1257300"/>
+            <a:ext cx="5225279" cy="342900"/>
+          </a:xfrm>
+          <a:prstGeom xmlns:a="http://schemas.openxmlformats.org/drawingml/2006/main" prst="rect">
+            <a:avLst/>
+          </a:prstGeom>
+        </p:spPr>
+      </p:pic>
+      <p:pic>
+        <p:nvPicPr>
+          <p:cNvPr id="70" name=""/>
+          <p:cNvPicPr>
+            <a:picLocks xmlns:a="http://schemas.openxmlformats.org/drawingml/2006/main" noChangeAspect="1"/>
+          </p:cNvPicPr>
+          <p:nvPr/>
+        </p:nvPicPr>
+        <p:blipFill>
+          <a:blip xmlns:r="http://schemas.openxmlformats.org/officeDocument/2006/relationships" xmlns:a="http://schemas.openxmlformats.org/drawingml/2006/main" r:embed="R48fdd2f8a9984c75"/>
+          <a:stretch xmlns:a="http://schemas.openxmlformats.org/drawingml/2006/main"/>
+        </p:blipFill>
+        <p:spPr>
+          <a:xfrm xmlns:a="http://schemas.openxmlformats.org/drawingml/2006/main">
+            <a:off x="3752078" y="1619250"/>
+            <a:ext cx="4687845" cy="285750"/>
+          </a:xfrm>
+          <a:prstGeom xmlns:a="http://schemas.openxmlformats.org/drawingml/2006/main" prst="rect">
+            <a:avLst/>
+          </a:prstGeom>
+        </p:spPr>
+      </p:pic>
+      <p:sp>
+        <p:nvSpPr>
+          <p:cNvPr id="35" name="">
+            <a:extLst xmlns:a="http://schemas.openxmlformats.org/drawingml/2006/main">
+              <a:ext uri="{FF2B5EF4-FFF2-40B4-BE49-F238E27FC236}">
+                <a16:creationId xmlns:a16="http://schemas.microsoft.com/office/drawing/2014/main" id="{BEA8C2AF-9AC5-4940-9D66-EBF19B98B85E}"/>
+              </a:ext>
+            </a:extLst>
+          </p:cNvPr>
+          <p:cNvSpPr>
+            <a:spLocks xmlns:a="http://schemas.openxmlformats.org/drawingml/2006/main" noGrp="1"/>
+          </p:cNvSpPr>
+          <p:nvPr/>
+        </p:nvSpPr>
+        <p:spPr>
+          <a:xfrm xmlns:a="http://schemas.openxmlformats.org/drawingml/2006/main">
+            <a:off x="552450" y="2000250"/>
+            <a:ext cx="3429000" cy="3067050"/>
           </a:xfrm>
           <a:prstGeom xmlns:a="http://schemas.openxmlformats.org/drawingml/2006/main" prst="roundRect">
             <a:avLst>
-              <a:gd name="adj" fmla="val 3333"/>
+              <a:gd name="adj" fmla="val 3727"/>
             </a:avLst>
           </a:prstGeom>
           <a:solidFill xmlns:a="http://schemas.openxmlformats.org/drawingml/2006/main">
@@ -5677,21 +5743,21 @@
       </p:sp>
       <p:sp>
         <p:nvSpPr>
-          <p:cNvPr id="33" name="">
-            <a:extLst xmlns:a="http://schemas.openxmlformats.org/drawingml/2006/main">
-              <a:ext uri="{FF2B5EF4-FFF2-40B4-BE49-F238E27FC236}">
-                <a16:creationId xmlns:a16="http://schemas.microsoft.com/office/drawing/2014/main" id="{3027104D-A0A3-429A-8A51-75453040223F}"/>
-              </a:ext>
-            </a:extLst>
-          </p:cNvPr>
-          <p:cNvSpPr>
-            <a:spLocks xmlns:a="http://schemas.openxmlformats.org/drawingml/2006/main" noGrp="1"/>
-          </p:cNvSpPr>
-          <p:nvPr/>
-        </p:nvSpPr>
-        <p:spPr>
-          <a:xfrm xmlns:a="http://schemas.openxmlformats.org/drawingml/2006/main">
-            <a:off x="685800" y="1562100"/>
+          <p:cNvPr id="36" name="">
+            <a:extLst xmlns:a="http://schemas.openxmlformats.org/drawingml/2006/main">
+              <a:ext uri="{FF2B5EF4-FFF2-40B4-BE49-F238E27FC236}">
+                <a16:creationId xmlns:a16="http://schemas.microsoft.com/office/drawing/2014/main" id="{F66D693B-049C-4033-8315-FFE22119B90E}"/>
+              </a:ext>
+            </a:extLst>
+          </p:cNvPr>
+          <p:cNvSpPr>
+            <a:spLocks xmlns:a="http://schemas.openxmlformats.org/drawingml/2006/main" noGrp="1"/>
+          </p:cNvSpPr>
+          <p:nvPr/>
+        </p:nvSpPr>
+        <p:spPr>
+          <a:xfrm xmlns:a="http://schemas.openxmlformats.org/drawingml/2006/main">
+            <a:off x="685800" y="2133600"/>
             <a:ext cx="1828800" cy="457200"/>
           </a:xfrm>
           <a:prstGeom xmlns:a="http://schemas.openxmlformats.org/drawingml/2006/main" prst="roundRect">
@@ -5739,22 +5805,22 @@
       </p:sp>
       <p:sp>
         <p:nvSpPr>
-          <p:cNvPr id="34" name="">
-            <a:extLst xmlns:a="http://schemas.openxmlformats.org/drawingml/2006/main">
-              <a:ext uri="{FF2B5EF4-FFF2-40B4-BE49-F238E27FC236}">
-                <a16:creationId xmlns:a16="http://schemas.microsoft.com/office/drawing/2014/main" id="{AB8A1DCC-407A-4C20-90D0-41A3F3EC3496}"/>
-              </a:ext>
-            </a:extLst>
-          </p:cNvPr>
-          <p:cNvSpPr>
-            <a:spLocks xmlns:a="http://schemas.openxmlformats.org/drawingml/2006/main" noGrp="1"/>
-          </p:cNvSpPr>
-          <p:nvPr/>
-        </p:nvSpPr>
-        <p:spPr>
-          <a:xfrm xmlns:a="http://schemas.openxmlformats.org/drawingml/2006/main">
-            <a:off x="781050" y="2171700"/>
-            <a:ext cx="2971800" cy="2781300"/>
+          <p:cNvPr id="37" name="">
+            <a:extLst xmlns:a="http://schemas.openxmlformats.org/drawingml/2006/main">
+              <a:ext uri="{FF2B5EF4-FFF2-40B4-BE49-F238E27FC236}">
+                <a16:creationId xmlns:a16="http://schemas.microsoft.com/office/drawing/2014/main" id="{1A005501-ED01-47FB-8813-73F07847819E}"/>
+              </a:ext>
+            </a:extLst>
+          </p:cNvPr>
+          <p:cNvSpPr>
+            <a:spLocks xmlns:a="http://schemas.openxmlformats.org/drawingml/2006/main" noGrp="1"/>
+          </p:cNvSpPr>
+          <p:nvPr/>
+        </p:nvSpPr>
+        <p:spPr>
+          <a:xfrm xmlns:a="http://schemas.openxmlformats.org/drawingml/2006/main">
+            <a:off x="781050" y="2743200"/>
+            <a:ext cx="2971800" cy="2209800"/>
           </a:xfrm>
           <a:prstGeom xmlns:a="http://schemas.openxmlformats.org/drawingml/2006/main" prst="rect">
             <a:avLst/>
@@ -5869,26 +5935,26 @@
       </p:sp>
       <p:sp>
         <p:nvSpPr>
-          <p:cNvPr id="35" name="">
-            <a:extLst xmlns:a="http://schemas.openxmlformats.org/drawingml/2006/main">
-              <a:ext uri="{FF2B5EF4-FFF2-40B4-BE49-F238E27FC236}">
-                <a16:creationId xmlns:a16="http://schemas.microsoft.com/office/drawing/2014/main" id="{DCE24C13-5464-4871-B81C-7AC497BF605E}"/>
-              </a:ext>
-            </a:extLst>
-          </p:cNvPr>
-          <p:cNvSpPr>
-            <a:spLocks xmlns:a="http://schemas.openxmlformats.org/drawingml/2006/main" noGrp="1"/>
-          </p:cNvSpPr>
-          <p:nvPr/>
-        </p:nvSpPr>
-        <p:spPr>
-          <a:xfrm xmlns:a="http://schemas.openxmlformats.org/drawingml/2006/main">
-            <a:off x="4381500" y="1428750"/>
-            <a:ext cx="3429000" cy="3638550"/>
+          <p:cNvPr id="38" name="">
+            <a:extLst xmlns:a="http://schemas.openxmlformats.org/drawingml/2006/main">
+              <a:ext uri="{FF2B5EF4-FFF2-40B4-BE49-F238E27FC236}">
+                <a16:creationId xmlns:a16="http://schemas.microsoft.com/office/drawing/2014/main" id="{F96A3F99-B155-42FC-A3CE-3FFAC0C8923E}"/>
+              </a:ext>
+            </a:extLst>
+          </p:cNvPr>
+          <p:cNvSpPr>
+            <a:spLocks xmlns:a="http://schemas.openxmlformats.org/drawingml/2006/main" noGrp="1"/>
+          </p:cNvSpPr>
+          <p:nvPr/>
+        </p:nvSpPr>
+        <p:spPr>
+          <a:xfrm xmlns:a="http://schemas.openxmlformats.org/drawingml/2006/main">
+            <a:off x="4381500" y="2000250"/>
+            <a:ext cx="3429000" cy="3067050"/>
           </a:xfrm>
           <a:prstGeom xmlns:a="http://schemas.openxmlformats.org/drawingml/2006/main" prst="roundRect">
             <a:avLst>
-              <a:gd name="adj" fmla="val 3333"/>
+              <a:gd name="adj" fmla="val 3727"/>
             </a:avLst>
           </a:prstGeom>
           <a:solidFill xmlns:a="http://schemas.openxmlformats.org/drawingml/2006/main">
@@ -5904,21 +5970,21 @@
       </p:sp>
       <p:sp>
         <p:nvSpPr>
-          <p:cNvPr id="36" name="">
-            <a:extLst xmlns:a="http://schemas.openxmlformats.org/drawingml/2006/main">
-              <a:ext uri="{FF2B5EF4-FFF2-40B4-BE49-F238E27FC236}">
-                <a16:creationId xmlns:a16="http://schemas.microsoft.com/office/drawing/2014/main" id="{6A2561DB-9F9E-42C1-B3FB-08473D31DD4F}"/>
-              </a:ext>
-            </a:extLst>
-          </p:cNvPr>
-          <p:cNvSpPr>
-            <a:spLocks xmlns:a="http://schemas.openxmlformats.org/drawingml/2006/main" noGrp="1"/>
-          </p:cNvSpPr>
-          <p:nvPr/>
-        </p:nvSpPr>
-        <p:spPr>
-          <a:xfrm xmlns:a="http://schemas.openxmlformats.org/drawingml/2006/main">
-            <a:off x="4514850" y="1562100"/>
+          <p:cNvPr id="39" name="">
+            <a:extLst xmlns:a="http://schemas.openxmlformats.org/drawingml/2006/main">
+              <a:ext uri="{FF2B5EF4-FFF2-40B4-BE49-F238E27FC236}">
+                <a16:creationId xmlns:a16="http://schemas.microsoft.com/office/drawing/2014/main" id="{845C50B5-17D4-408C-8CAD-451970B85B56}"/>
+              </a:ext>
+            </a:extLst>
+          </p:cNvPr>
+          <p:cNvSpPr>
+            <a:spLocks xmlns:a="http://schemas.openxmlformats.org/drawingml/2006/main" noGrp="1"/>
+          </p:cNvSpPr>
+          <p:nvPr/>
+        </p:nvSpPr>
+        <p:spPr>
+          <a:xfrm xmlns:a="http://schemas.openxmlformats.org/drawingml/2006/main">
+            <a:off x="4514850" y="2133600"/>
             <a:ext cx="1828800" cy="457200"/>
           </a:xfrm>
           <a:prstGeom xmlns:a="http://schemas.openxmlformats.org/drawingml/2006/main" prst="roundRect">
@@ -5966,22 +6032,22 @@
       </p:sp>
       <p:sp>
         <p:nvSpPr>
-          <p:cNvPr id="37" name="">
-            <a:extLst xmlns:a="http://schemas.openxmlformats.org/drawingml/2006/main">
-              <a:ext uri="{FF2B5EF4-FFF2-40B4-BE49-F238E27FC236}">
-                <a16:creationId xmlns:a16="http://schemas.microsoft.com/office/drawing/2014/main" id="{A6AAAF36-7608-4BFF-A7AC-0B08BF6F0D9B}"/>
-              </a:ext>
-            </a:extLst>
-          </p:cNvPr>
-          <p:cNvSpPr>
-            <a:spLocks xmlns:a="http://schemas.openxmlformats.org/drawingml/2006/main" noGrp="1"/>
-          </p:cNvSpPr>
-          <p:nvPr/>
-        </p:nvSpPr>
-        <p:spPr>
-          <a:xfrm xmlns:a="http://schemas.openxmlformats.org/drawingml/2006/main">
-            <a:off x="4610100" y="2171700"/>
-            <a:ext cx="2971800" cy="2781300"/>
+          <p:cNvPr id="40" name="">
+            <a:extLst xmlns:a="http://schemas.openxmlformats.org/drawingml/2006/main">
+              <a:ext uri="{FF2B5EF4-FFF2-40B4-BE49-F238E27FC236}">
+                <a16:creationId xmlns:a16="http://schemas.microsoft.com/office/drawing/2014/main" id="{2A01DC16-E873-487F-BD31-5C20F7825986}"/>
+              </a:ext>
+            </a:extLst>
+          </p:cNvPr>
+          <p:cNvSpPr>
+            <a:spLocks xmlns:a="http://schemas.openxmlformats.org/drawingml/2006/main" noGrp="1"/>
+          </p:cNvSpPr>
+          <p:nvPr/>
+        </p:nvSpPr>
+        <p:spPr>
+          <a:xfrm xmlns:a="http://schemas.openxmlformats.org/drawingml/2006/main">
+            <a:off x="4610100" y="2743200"/>
+            <a:ext cx="2971800" cy="2209800"/>
           </a:xfrm>
           <a:prstGeom xmlns:a="http://schemas.openxmlformats.org/drawingml/2006/main" prst="rect">
             <a:avLst/>
@@ -6096,26 +6162,26 @@
       </p:sp>
       <p:sp>
         <p:nvSpPr>
-          <p:cNvPr id="38" name="">
-            <a:extLst xmlns:a="http://schemas.openxmlformats.org/drawingml/2006/main">
-              <a:ext uri="{FF2B5EF4-FFF2-40B4-BE49-F238E27FC236}">
-                <a16:creationId xmlns:a16="http://schemas.microsoft.com/office/drawing/2014/main" id="{56976805-3772-4B77-B1DE-7C86BA8E2E87}"/>
-              </a:ext>
-            </a:extLst>
-          </p:cNvPr>
-          <p:cNvSpPr>
-            <a:spLocks xmlns:a="http://schemas.openxmlformats.org/drawingml/2006/main" noGrp="1"/>
-          </p:cNvSpPr>
-          <p:nvPr/>
-        </p:nvSpPr>
-        <p:spPr>
-          <a:xfrm xmlns:a="http://schemas.openxmlformats.org/drawingml/2006/main">
-            <a:off x="8210550" y="1428750"/>
-            <a:ext cx="3429000" cy="3638550"/>
+          <p:cNvPr id="41" name="">
+            <a:extLst xmlns:a="http://schemas.openxmlformats.org/drawingml/2006/main">
+              <a:ext uri="{FF2B5EF4-FFF2-40B4-BE49-F238E27FC236}">
+                <a16:creationId xmlns:a16="http://schemas.microsoft.com/office/drawing/2014/main" id="{7CC6B34D-25BB-4AFA-826A-2F47F10EFE65}"/>
+              </a:ext>
+            </a:extLst>
+          </p:cNvPr>
+          <p:cNvSpPr>
+            <a:spLocks xmlns:a="http://schemas.openxmlformats.org/drawingml/2006/main" noGrp="1"/>
+          </p:cNvSpPr>
+          <p:nvPr/>
+        </p:nvSpPr>
+        <p:spPr>
+          <a:xfrm xmlns:a="http://schemas.openxmlformats.org/drawingml/2006/main">
+            <a:off x="8210550" y="2000250"/>
+            <a:ext cx="3429000" cy="3067050"/>
           </a:xfrm>
           <a:prstGeom xmlns:a="http://schemas.openxmlformats.org/drawingml/2006/main" prst="roundRect">
             <a:avLst>
-              <a:gd name="adj" fmla="val 3333"/>
+              <a:gd name="adj" fmla="val 3727"/>
             </a:avLst>
           </a:prstGeom>
           <a:solidFill xmlns:a="http://schemas.openxmlformats.org/drawingml/2006/main">
@@ -6131,21 +6197,21 @@
       </p:sp>
       <p:sp>
         <p:nvSpPr>
-          <p:cNvPr id="39" name="">
-            <a:extLst xmlns:a="http://schemas.openxmlformats.org/drawingml/2006/main">
-              <a:ext uri="{FF2B5EF4-FFF2-40B4-BE49-F238E27FC236}">
-                <a16:creationId xmlns:a16="http://schemas.microsoft.com/office/drawing/2014/main" id="{6A55BD98-2F82-4F9E-932F-55F211993062}"/>
-              </a:ext>
-            </a:extLst>
-          </p:cNvPr>
-          <p:cNvSpPr>
-            <a:spLocks xmlns:a="http://schemas.openxmlformats.org/drawingml/2006/main" noGrp="1"/>
-          </p:cNvSpPr>
-          <p:nvPr/>
-        </p:nvSpPr>
-        <p:spPr>
-          <a:xfrm xmlns:a="http://schemas.openxmlformats.org/drawingml/2006/main">
-            <a:off x="8343900" y="1562100"/>
+          <p:cNvPr id="42" name="">
+            <a:extLst xmlns:a="http://schemas.openxmlformats.org/drawingml/2006/main">
+              <a:ext uri="{FF2B5EF4-FFF2-40B4-BE49-F238E27FC236}">
+                <a16:creationId xmlns:a16="http://schemas.microsoft.com/office/drawing/2014/main" id="{B344D18F-2FB0-49DE-8832-B2A951B4A2E6}"/>
+              </a:ext>
+            </a:extLst>
+          </p:cNvPr>
+          <p:cNvSpPr>
+            <a:spLocks xmlns:a="http://schemas.openxmlformats.org/drawingml/2006/main" noGrp="1"/>
+          </p:cNvSpPr>
+          <p:nvPr/>
+        </p:nvSpPr>
+        <p:spPr>
+          <a:xfrm xmlns:a="http://schemas.openxmlformats.org/drawingml/2006/main">
+            <a:off x="8343900" y="2133600"/>
             <a:ext cx="1828800" cy="457200"/>
           </a:xfrm>
           <a:prstGeom xmlns:a="http://schemas.openxmlformats.org/drawingml/2006/main" prst="roundRect">
@@ -6193,22 +6259,22 @@
       </p:sp>
       <p:sp>
         <p:nvSpPr>
-          <p:cNvPr id="40" name="">
-            <a:extLst xmlns:a="http://schemas.openxmlformats.org/drawingml/2006/main">
-              <a:ext uri="{FF2B5EF4-FFF2-40B4-BE49-F238E27FC236}">
-                <a16:creationId xmlns:a16="http://schemas.microsoft.com/office/drawing/2014/main" id="{82E706DF-4D56-4114-875B-8A9FBA9AC5F5}"/>
-              </a:ext>
-            </a:extLst>
-          </p:cNvPr>
-          <p:cNvSpPr>
-            <a:spLocks xmlns:a="http://schemas.openxmlformats.org/drawingml/2006/main" noGrp="1"/>
-          </p:cNvSpPr>
-          <p:nvPr/>
-        </p:nvSpPr>
-        <p:spPr>
-          <a:xfrm xmlns:a="http://schemas.openxmlformats.org/drawingml/2006/main">
-            <a:off x="8439150" y="2171700"/>
-            <a:ext cx="2971800" cy="2781300"/>
+          <p:cNvPr id="43" name="">
+            <a:extLst xmlns:a="http://schemas.openxmlformats.org/drawingml/2006/main">
+              <a:ext uri="{FF2B5EF4-FFF2-40B4-BE49-F238E27FC236}">
+                <a16:creationId xmlns:a16="http://schemas.microsoft.com/office/drawing/2014/main" id="{C536FDC0-B694-488C-AF5A-5357CA70F974}"/>
+              </a:ext>
+            </a:extLst>
+          </p:cNvPr>
+          <p:cNvSpPr>
+            <a:spLocks xmlns:a="http://schemas.openxmlformats.org/drawingml/2006/main" noGrp="1"/>
+          </p:cNvSpPr>
+          <p:nvPr/>
+        </p:nvSpPr>
+        <p:spPr>
+          <a:xfrm xmlns:a="http://schemas.openxmlformats.org/drawingml/2006/main">
+            <a:off x="8439150" y="2743200"/>
+            <a:ext cx="2971800" cy="2209800"/>
           </a:xfrm>
           <a:prstGeom xmlns:a="http://schemas.openxmlformats.org/drawingml/2006/main" prst="rect">
             <a:avLst/>
@@ -6323,10 +6389,10 @@
       </p:sp>
       <p:sp>
         <p:nvSpPr>
-          <p:cNvPr id="41" name="">
-            <a:extLst xmlns:a="http://schemas.openxmlformats.org/drawingml/2006/main">
-              <a:ext uri="{FF2B5EF4-FFF2-40B4-BE49-F238E27FC236}">
-                <a16:creationId xmlns:a16="http://schemas.microsoft.com/office/drawing/2014/main" id="{87771981-F6ED-4404-97B2-6E54E7EA8F7A}"/>
+          <p:cNvPr id="44" name="">
+            <a:extLst xmlns:a="http://schemas.openxmlformats.org/drawingml/2006/main">
+              <a:ext uri="{FF2B5EF4-FFF2-40B4-BE49-F238E27FC236}">
+                <a16:creationId xmlns:a16="http://schemas.microsoft.com/office/drawing/2014/main" id="{9CDCBA5A-CEDD-473A-9328-2F26A0EA83BD}"/>
               </a:ext>
             </a:extLst>
           </p:cNvPr>
@@ -6358,10 +6424,10 @@
       </p:sp>
       <p:sp>
         <p:nvSpPr>
-          <p:cNvPr id="42" name="">
-            <a:extLst xmlns:a="http://schemas.openxmlformats.org/drawingml/2006/main">
-              <a:ext uri="{FF2B5EF4-FFF2-40B4-BE49-F238E27FC236}">
-                <a16:creationId xmlns:a16="http://schemas.microsoft.com/office/drawing/2014/main" id="{6E1334EF-E52C-4D88-9241-37C3344C5EEC}"/>
+          <p:cNvPr id="45" name="">
+            <a:extLst xmlns:a="http://schemas.openxmlformats.org/drawingml/2006/main">
+              <a:ext uri="{FF2B5EF4-FFF2-40B4-BE49-F238E27FC236}">
+                <a16:creationId xmlns:a16="http://schemas.microsoft.com/office/drawing/2014/main" id="{73E1F86B-7EB1-4EA1-BFA8-AC3C60D35D5D}"/>
               </a:ext>
             </a:extLst>
           </p:cNvPr>
@@ -6414,10 +6480,10 @@
       </p:sp>
       <p:sp>
         <p:nvSpPr>
-          <p:cNvPr id="43" name="">
-            <a:extLst xmlns:a="http://schemas.openxmlformats.org/drawingml/2006/main">
-              <a:ext uri="{FF2B5EF4-FFF2-40B4-BE49-F238E27FC236}">
-                <a16:creationId xmlns:a16="http://schemas.microsoft.com/office/drawing/2014/main" id="{66476868-7E66-42E1-9379-1864079B9B3D}"/>
+          <p:cNvPr id="46" name="">
+            <a:extLst xmlns:a="http://schemas.openxmlformats.org/drawingml/2006/main">
+              <a:ext uri="{FF2B5EF4-FFF2-40B4-BE49-F238E27FC236}">
+                <a16:creationId xmlns:a16="http://schemas.microsoft.com/office/drawing/2014/main" id="{00B92C6E-8BB7-4E5B-A9D0-EBC26765C064}"/>
               </a:ext>
             </a:extLst>
           </p:cNvPr>
@@ -6447,10 +6513,10 @@
       </p:sp>
       <p:sp>
         <p:nvSpPr>
-          <p:cNvPr id="44" name="">
-            <a:extLst xmlns:a="http://schemas.openxmlformats.org/drawingml/2006/main">
-              <a:ext uri="{FF2B5EF4-FFF2-40B4-BE49-F238E27FC236}">
-                <a16:creationId xmlns:a16="http://schemas.microsoft.com/office/drawing/2014/main" id="{DD24EAF7-857C-445A-B81B-E8BA6C53248B}"/>
+          <p:cNvPr id="47" name="">
+            <a:extLst xmlns:a="http://schemas.openxmlformats.org/drawingml/2006/main">
+              <a:ext uri="{FF2B5EF4-FFF2-40B4-BE49-F238E27FC236}">
+                <a16:creationId xmlns:a16="http://schemas.microsoft.com/office/drawing/2014/main" id="{C78883DA-AD00-4569-9076-C0BDAC06CD69}"/>
               </a:ext>
             </a:extLst>
           </p:cNvPr>
@@ -6480,10 +6546,10 @@
       </p:sp>
       <p:sp>
         <p:nvSpPr>
-          <p:cNvPr id="45" name="">
-            <a:extLst xmlns:a="http://schemas.openxmlformats.org/drawingml/2006/main">
-              <a:ext uri="{FF2B5EF4-FFF2-40B4-BE49-F238E27FC236}">
-                <a16:creationId xmlns:a16="http://schemas.microsoft.com/office/drawing/2014/main" id="{AE6A9164-5F44-49FB-AF71-9109025FFEE4}"/>
+          <p:cNvPr id="48" name="">
+            <a:extLst xmlns:a="http://schemas.openxmlformats.org/drawingml/2006/main">
+              <a:ext uri="{FF2B5EF4-FFF2-40B4-BE49-F238E27FC236}">
+                <a16:creationId xmlns:a16="http://schemas.microsoft.com/office/drawing/2014/main" id="{6E866131-85DC-4634-81F5-4358EEA2290F}"/>
               </a:ext>
             </a:extLst>
           </p:cNvPr>
@@ -6536,10 +6602,10 @@
       </p:sp>
       <p:sp>
         <p:nvSpPr>
-          <p:cNvPr id="46" name="">
-            <a:extLst xmlns:a="http://schemas.openxmlformats.org/drawingml/2006/main">
-              <a:ext uri="{FF2B5EF4-FFF2-40B4-BE49-F238E27FC236}">
-                <a16:creationId xmlns:a16="http://schemas.microsoft.com/office/drawing/2014/main" id="{60B1EB3F-8D60-4948-99D9-31000CCDC748}"/>
+          <p:cNvPr id="49" name="">
+            <a:extLst xmlns:a="http://schemas.openxmlformats.org/drawingml/2006/main">
+              <a:ext uri="{FF2B5EF4-FFF2-40B4-BE49-F238E27FC236}">
+                <a16:creationId xmlns:a16="http://schemas.microsoft.com/office/drawing/2014/main" id="{41620DFE-7AF7-47F2-8436-553EEB994B34}"/>
               </a:ext>
             </a:extLst>
           </p:cNvPr>
@@ -6569,10 +6635,10 @@
       </p:sp>
       <p:sp>
         <p:nvSpPr>
-          <p:cNvPr id="47" name="">
-            <a:extLst xmlns:a="http://schemas.openxmlformats.org/drawingml/2006/main">
-              <a:ext uri="{FF2B5EF4-FFF2-40B4-BE49-F238E27FC236}">
-                <a16:creationId xmlns:a16="http://schemas.microsoft.com/office/drawing/2014/main" id="{0D65CC82-3D7F-41FE-8EAF-6887987E0BB8}"/>
+          <p:cNvPr id="50" name="">
+            <a:extLst xmlns:a="http://schemas.openxmlformats.org/drawingml/2006/main">
+              <a:ext uri="{FF2B5EF4-FFF2-40B4-BE49-F238E27FC236}">
+                <a16:creationId xmlns:a16="http://schemas.microsoft.com/office/drawing/2014/main" id="{FF4F2103-F75A-41C3-A955-6460282DEB99}"/>
               </a:ext>
             </a:extLst>
           </p:cNvPr>
@@ -6625,10 +6691,10 @@
       </p:sp>
       <p:sp>
         <p:nvSpPr>
-          <p:cNvPr id="48" name="">
-            <a:extLst xmlns:a="http://schemas.openxmlformats.org/drawingml/2006/main">
-              <a:ext uri="{FF2B5EF4-FFF2-40B4-BE49-F238E27FC236}">
-                <a16:creationId xmlns:a16="http://schemas.microsoft.com/office/drawing/2014/main" id="{878194A1-38E5-4FB3-80FA-78F789FEA291}"/>
+          <p:cNvPr id="51" name="">
+            <a:extLst xmlns:a="http://schemas.openxmlformats.org/drawingml/2006/main">
+              <a:ext uri="{FF2B5EF4-FFF2-40B4-BE49-F238E27FC236}">
+                <a16:creationId xmlns:a16="http://schemas.microsoft.com/office/drawing/2014/main" id="{C2ED62E6-1C83-4A42-B08A-8A5587D47C94}"/>
               </a:ext>
             </a:extLst>
           </p:cNvPr>
@@ -6681,10 +6747,10 @@
       </p:sp>
       <p:sp>
         <p:nvSpPr>
-          <p:cNvPr id="49" name="">
-            <a:extLst xmlns:a="http://schemas.openxmlformats.org/drawingml/2006/main">
-              <a:ext uri="{FF2B5EF4-FFF2-40B4-BE49-F238E27FC236}">
-                <a16:creationId xmlns:a16="http://schemas.microsoft.com/office/drawing/2014/main" id="{753BAA26-2E5D-4803-824C-B3288D3F8376}"/>
+          <p:cNvPr id="52" name="">
+            <a:extLst xmlns:a="http://schemas.openxmlformats.org/drawingml/2006/main">
+              <a:ext uri="{FF2B5EF4-FFF2-40B4-BE49-F238E27FC236}">
+                <a16:creationId xmlns:a16="http://schemas.microsoft.com/office/drawing/2014/main" id="{000E17E3-114B-4C4D-9E8F-278E3E128621}"/>
               </a:ext>
             </a:extLst>
           </p:cNvPr>
@@ -6712,10 +6778,10 @@
       </p:sp>
       <p:sp>
         <p:nvSpPr>
-          <p:cNvPr id="50" name="">
-            <a:extLst xmlns:a="http://schemas.openxmlformats.org/drawingml/2006/main">
-              <a:ext uri="{FF2B5EF4-FFF2-40B4-BE49-F238E27FC236}">
-                <a16:creationId xmlns:a16="http://schemas.microsoft.com/office/drawing/2014/main" id="{5C18B790-68A8-4C5E-84BF-47545DAE83B8}"/>
+          <p:cNvPr id="53" name="">
+            <a:extLst xmlns:a="http://schemas.openxmlformats.org/drawingml/2006/main">
+              <a:ext uri="{FF2B5EF4-FFF2-40B4-BE49-F238E27FC236}">
+                <a16:creationId xmlns:a16="http://schemas.microsoft.com/office/drawing/2014/main" id="{2C07D789-396B-43DD-A274-C600A98376F1}"/>
               </a:ext>
             </a:extLst>
           </p:cNvPr>
@@ -6768,10 +6834,10 @@
       </p:sp>
       <p:sp>
         <p:nvSpPr>
-          <p:cNvPr id="51" name="">
-            <a:extLst xmlns:a="http://schemas.openxmlformats.org/drawingml/2006/main">
-              <a:ext uri="{FF2B5EF4-FFF2-40B4-BE49-F238E27FC236}">
-                <a16:creationId xmlns:a16="http://schemas.microsoft.com/office/drawing/2014/main" id="{6F6A2EB9-A600-4D93-997F-B7CA4BF4ABE4}"/>
+          <p:cNvPr id="54" name="">
+            <a:extLst xmlns:a="http://schemas.openxmlformats.org/drawingml/2006/main">
+              <a:ext uri="{FF2B5EF4-FFF2-40B4-BE49-F238E27FC236}">
+                <a16:creationId xmlns:a16="http://schemas.microsoft.com/office/drawing/2014/main" id="{6EE956D9-673E-49E9-8A00-0F014C7E451B}"/>
               </a:ext>
             </a:extLst>
           </p:cNvPr>
@@ -6825,7 +6891,7 @@
     </p:spTree>
     <p:extLst>
       <p:ext uri="{BB962C8B-B14F-4D97-AF65-F5344CB8AC3E}">
-        <p14:creationId xmlns:p14="http://schemas.microsoft.com/office/powerpoint/2010/main" val="123259388"/>
+        <p14:creationId xmlns:p14="http://schemas.microsoft.com/office/powerpoint/2010/main" val="1479963713"/>
       </p:ext>
     </p:extLst>
   </p:cSld>
@@ -6849,7 +6915,7 @@
           <p:cNvPr id="7" name="cogwheels_376015">
             <a:extLst xmlns:a="http://schemas.openxmlformats.org/drawingml/2006/main">
               <a:ext uri="{FF2B5EF4-FFF2-40B4-BE49-F238E27FC236}">
-                <a16:creationId xmlns:a16="http://schemas.microsoft.com/office/drawing/2014/main" id="{38D9DEC8-0752-46D3-B878-8FD2E635A23B}"/>
+                <a16:creationId xmlns:a16="http://schemas.microsoft.com/office/drawing/2014/main" id="{86ADC6B0-98E1-40B7-A549-7F11F604300C}"/>
               </a:ext>
             </a:extLst>
           </p:cNvPr>
@@ -7576,7 +7642,7 @@
           <p:cNvPr id="10" name="矩形 9">
             <a:extLst xmlns:a="http://schemas.openxmlformats.org/drawingml/2006/main">
               <a:ext uri="{FF2B5EF4-FFF2-40B4-BE49-F238E27FC236}">
-                <a16:creationId xmlns:a16="http://schemas.microsoft.com/office/drawing/2014/main" id="{C45BB5E4-FF40-4E3B-8B40-8AFBAB2B33B5}"/>
+                <a16:creationId xmlns:a16="http://schemas.microsoft.com/office/drawing/2014/main" id="{8DF0B98D-1D3B-4325-8F51-999B6E7CEC49}"/>
               </a:ext>
             </a:extLst>
           </p:cNvPr>
@@ -7644,7 +7710,7 @@
           <p:cNvPr id="11" name="直接连接符 10">
             <a:extLst xmlns:a="http://schemas.openxmlformats.org/drawingml/2006/main">
               <a:ext uri="{FF2B5EF4-FFF2-40B4-BE49-F238E27FC236}">
-                <a16:creationId xmlns:a16="http://schemas.microsoft.com/office/drawing/2014/main" id="{3A5BDF9F-19A6-4B4E-94A9-F003093A6554}"/>
+                <a16:creationId xmlns:a16="http://schemas.microsoft.com/office/drawing/2014/main" id="{B8B8B353-EC6E-47BE-93B0-A1BBE5C3D56D}"/>
               </a:ext>
             </a:extLst>
           </p:cNvPr>
@@ -7687,7 +7753,7 @@
           <p:cNvPr id="12" name="文本框 11">
             <a:extLst xmlns:a="http://schemas.openxmlformats.org/drawingml/2006/main">
               <a:ext uri="{FF2B5EF4-FFF2-40B4-BE49-F238E27FC236}">
-                <a16:creationId xmlns:a16="http://schemas.microsoft.com/office/drawing/2014/main" id="{18C2DF1B-1241-44CC-867A-B74B4F7BA7E7}"/>
+                <a16:creationId xmlns:a16="http://schemas.microsoft.com/office/drawing/2014/main" id="{796423C1-73A0-4AE1-B91F-5C76FD8EE852}"/>
               </a:ext>
             </a:extLst>
           </p:cNvPr>
@@ -7736,7 +7802,7 @@
           <p:cNvPr id="13" name="矩形 12">
             <a:extLst xmlns:a="http://schemas.openxmlformats.org/drawingml/2006/main">
               <a:ext uri="{FF2B5EF4-FFF2-40B4-BE49-F238E27FC236}">
-                <a16:creationId xmlns:a16="http://schemas.microsoft.com/office/drawing/2014/main" id="{00AF81C8-2908-4C5A-9B76-3D7056CF46AF}"/>
+                <a16:creationId xmlns:a16="http://schemas.microsoft.com/office/drawing/2014/main" id="{80C875E3-E15A-468C-9F77-68F7AA54110D}"/>
               </a:ext>
             </a:extLst>
           </p:cNvPr>
@@ -7804,7 +7870,7 @@
           <p:cNvPr id="14" name="直接连接符 13">
             <a:extLst xmlns:a="http://schemas.openxmlformats.org/drawingml/2006/main">
               <a:ext uri="{FF2B5EF4-FFF2-40B4-BE49-F238E27FC236}">
-                <a16:creationId xmlns:a16="http://schemas.microsoft.com/office/drawing/2014/main" id="{FAAAB8F0-8665-46B3-BD9A-1FFD19FC7E25}"/>
+                <a16:creationId xmlns:a16="http://schemas.microsoft.com/office/drawing/2014/main" id="{BC7C7F24-0301-41C6-A395-B85D67F063F6}"/>
               </a:ext>
             </a:extLst>
           </p:cNvPr>
@@ -7847,7 +7913,7 @@
           <p:cNvPr id="15" name="文本框 14">
             <a:extLst xmlns:a="http://schemas.openxmlformats.org/drawingml/2006/main">
               <a:ext uri="{FF2B5EF4-FFF2-40B4-BE49-F238E27FC236}">
-                <a16:creationId xmlns:a16="http://schemas.microsoft.com/office/drawing/2014/main" id="{65264C6C-6574-43A3-8A40-12FF896CBFC7}"/>
+                <a16:creationId xmlns:a16="http://schemas.microsoft.com/office/drawing/2014/main" id="{9DC2A4D1-34C5-42F5-B586-FA6645547060}"/>
               </a:ext>
             </a:extLst>
           </p:cNvPr>
@@ -7896,7 +7962,7 @@
           <p:cNvPr id="16" name="矩形 15">
             <a:extLst xmlns:a="http://schemas.openxmlformats.org/drawingml/2006/main">
               <a:ext uri="{FF2B5EF4-FFF2-40B4-BE49-F238E27FC236}">
-                <a16:creationId xmlns:a16="http://schemas.microsoft.com/office/drawing/2014/main" id="{0134C23C-00D6-4C2F-A80C-5CDFCA457AA3}"/>
+                <a16:creationId xmlns:a16="http://schemas.microsoft.com/office/drawing/2014/main" id="{641F1037-D76D-457D-815B-815FC837734D}"/>
               </a:ext>
             </a:extLst>
           </p:cNvPr>
@@ -7964,7 +8030,7 @@
           <p:cNvPr id="17" name="直接连接符 16">
             <a:extLst xmlns:a="http://schemas.openxmlformats.org/drawingml/2006/main">
               <a:ext uri="{FF2B5EF4-FFF2-40B4-BE49-F238E27FC236}">
-                <a16:creationId xmlns:a16="http://schemas.microsoft.com/office/drawing/2014/main" id="{4707528E-2029-438E-8928-22ACDB59127C}"/>
+                <a16:creationId xmlns:a16="http://schemas.microsoft.com/office/drawing/2014/main" id="{8B4D2F77-1158-45AA-B43B-F5C4C9E14734}"/>
               </a:ext>
             </a:extLst>
           </p:cNvPr>
@@ -8007,7 +8073,7 @@
           <p:cNvPr id="18" name="文本框 17">
             <a:extLst xmlns:a="http://schemas.openxmlformats.org/drawingml/2006/main">
               <a:ext uri="{FF2B5EF4-FFF2-40B4-BE49-F238E27FC236}">
-                <a16:creationId xmlns:a16="http://schemas.microsoft.com/office/drawing/2014/main" id="{2BE3B7FE-595A-4DCE-B412-A1237D7113C9}"/>
+                <a16:creationId xmlns:a16="http://schemas.microsoft.com/office/drawing/2014/main" id="{F2F39AEA-6313-458C-82A9-F54A7D1D9DD3}"/>
               </a:ext>
             </a:extLst>
           </p:cNvPr>
@@ -8056,7 +8122,7 @@
           <p:cNvPr id="19" name="矩形 18">
             <a:extLst xmlns:a="http://schemas.openxmlformats.org/drawingml/2006/main">
               <a:ext uri="{FF2B5EF4-FFF2-40B4-BE49-F238E27FC236}">
-                <a16:creationId xmlns:a16="http://schemas.microsoft.com/office/drawing/2014/main" id="{BDF6C84C-0AA9-4ABC-849F-705A6449C6B3}"/>
+                <a16:creationId xmlns:a16="http://schemas.microsoft.com/office/drawing/2014/main" id="{6C7166C5-59A0-4C9C-84BE-2256DDB17501}"/>
               </a:ext>
             </a:extLst>
           </p:cNvPr>
@@ -8124,7 +8190,7 @@
           <p:cNvPr id="20" name="直接连接符 19">
             <a:extLst xmlns:a="http://schemas.openxmlformats.org/drawingml/2006/main">
               <a:ext uri="{FF2B5EF4-FFF2-40B4-BE49-F238E27FC236}">
-                <a16:creationId xmlns:a16="http://schemas.microsoft.com/office/drawing/2014/main" id="{D61B023F-CB07-4747-96B0-F21FC1619E20}"/>
+                <a16:creationId xmlns:a16="http://schemas.microsoft.com/office/drawing/2014/main" id="{D5B1BD64-E1BB-4CC2-B876-D5614E52D81E}"/>
               </a:ext>
             </a:extLst>
           </p:cNvPr>
@@ -8167,7 +8233,7 @@
           <p:cNvPr id="21" name="文本框 20">
             <a:extLst xmlns:a="http://schemas.openxmlformats.org/drawingml/2006/main">
               <a:ext uri="{FF2B5EF4-FFF2-40B4-BE49-F238E27FC236}">
-                <a16:creationId xmlns:a16="http://schemas.microsoft.com/office/drawing/2014/main" id="{23FB4014-52D3-4A24-B7E1-03846A86B633}"/>
+                <a16:creationId xmlns:a16="http://schemas.microsoft.com/office/drawing/2014/main" id="{C0211A6A-5636-4AF3-8E07-C0126A74CFC3}"/>
               </a:ext>
             </a:extLst>
           </p:cNvPr>
@@ -8216,7 +8282,7 @@
           <p:cNvPr id="22" name="矩形 21">
             <a:extLst xmlns:a="http://schemas.openxmlformats.org/drawingml/2006/main">
               <a:ext uri="{FF2B5EF4-FFF2-40B4-BE49-F238E27FC236}">
-                <a16:creationId xmlns:a16="http://schemas.microsoft.com/office/drawing/2014/main" id="{9DF93513-FFD5-412E-AE64-A70004F8C985}"/>
+                <a16:creationId xmlns:a16="http://schemas.microsoft.com/office/drawing/2014/main" id="{F3DF01F6-C19E-4078-8369-0D201AB8ABAF}"/>
               </a:ext>
             </a:extLst>
           </p:cNvPr>
@@ -8284,7 +8350,7 @@
           <p:cNvPr id="23" name="直接连接符 22">
             <a:extLst xmlns:a="http://schemas.openxmlformats.org/drawingml/2006/main">
               <a:ext uri="{FF2B5EF4-FFF2-40B4-BE49-F238E27FC236}">
-                <a16:creationId xmlns:a16="http://schemas.microsoft.com/office/drawing/2014/main" id="{98E5522E-2A7F-4259-BF47-1F548C33058B}"/>
+                <a16:creationId xmlns:a16="http://schemas.microsoft.com/office/drawing/2014/main" id="{E48302F2-36FD-44BF-85AB-4F290D6D199D}"/>
               </a:ext>
             </a:extLst>
           </p:cNvPr>
@@ -8327,7 +8393,7 @@
           <p:cNvPr id="24" name="文本框 23">
             <a:extLst xmlns:a="http://schemas.openxmlformats.org/drawingml/2006/main">
               <a:ext uri="{FF2B5EF4-FFF2-40B4-BE49-F238E27FC236}">
-                <a16:creationId xmlns:a16="http://schemas.microsoft.com/office/drawing/2014/main" id="{701AC813-CADA-4356-AEDB-1215574AB409}"/>
+                <a16:creationId xmlns:a16="http://schemas.microsoft.com/office/drawing/2014/main" id="{F7B97590-98C8-43C2-8EF3-77F04EBB7F4C}"/>
               </a:ext>
             </a:extLst>
           </p:cNvPr>
@@ -8428,7 +8494,7 @@
           <p:cNvPr id="26" name="">
             <a:extLst xmlns:a="http://schemas.openxmlformats.org/drawingml/2006/main">
               <a:ext uri="{FF2B5EF4-FFF2-40B4-BE49-F238E27FC236}">
-                <a16:creationId xmlns:a16="http://schemas.microsoft.com/office/drawing/2014/main" id="{F3D355F6-DC98-4994-B4DF-1D2739D6A6C9}"/>
+                <a16:creationId xmlns:a16="http://schemas.microsoft.com/office/drawing/2014/main" id="{BD2D299B-7C3C-4D0B-BC31-91EF718C0EA5}"/>
               </a:ext>
             </a:extLst>
           </p:cNvPr>
@@ -8461,7 +8527,7 @@
           <p:cNvPr id="27" name="">
             <a:extLst xmlns:a="http://schemas.openxmlformats.org/drawingml/2006/main">
               <a:ext uri="{FF2B5EF4-FFF2-40B4-BE49-F238E27FC236}">
-                <a16:creationId xmlns:a16="http://schemas.microsoft.com/office/drawing/2014/main" id="{30195435-A2D0-4F2F-AC02-4FECEB21BC0B}"/>
+                <a16:creationId xmlns:a16="http://schemas.microsoft.com/office/drawing/2014/main" id="{6C1555B1-9C18-453E-8242-3472C3B058D4}"/>
               </a:ext>
             </a:extLst>
           </p:cNvPr>
@@ -8517,7 +8583,7 @@
           <p:cNvPr id="28" name="">
             <a:extLst xmlns:a="http://schemas.openxmlformats.org/drawingml/2006/main">
               <a:ext uri="{FF2B5EF4-FFF2-40B4-BE49-F238E27FC236}">
-                <a16:creationId xmlns:a16="http://schemas.microsoft.com/office/drawing/2014/main" id="{050A1244-C9AC-4FA9-BBC1-BCEDFE17B85F}"/>
+                <a16:creationId xmlns:a16="http://schemas.microsoft.com/office/drawing/2014/main" id="{C6288AF5-07FC-4A59-8CF8-8F725778C2C2}"/>
               </a:ext>
             </a:extLst>
           </p:cNvPr>
@@ -8550,7 +8616,7 @@
           <p:cNvPr id="29" name="">
             <a:extLst xmlns:a="http://schemas.openxmlformats.org/drawingml/2006/main">
               <a:ext uri="{FF2B5EF4-FFF2-40B4-BE49-F238E27FC236}">
-                <a16:creationId xmlns:a16="http://schemas.microsoft.com/office/drawing/2014/main" id="{01B8D8C0-DE99-4ABA-B0C0-32089CB6FCCB}"/>
+                <a16:creationId xmlns:a16="http://schemas.microsoft.com/office/drawing/2014/main" id="{660CAC4F-4B30-43BB-9BE7-1953DDB0B55D}"/>
               </a:ext>
             </a:extLst>
           </p:cNvPr>
@@ -8606,7 +8672,7 @@
           <p:cNvPr id="30" name="">
             <a:extLst xmlns:a="http://schemas.openxmlformats.org/drawingml/2006/main">
               <a:ext uri="{FF2B5EF4-FFF2-40B4-BE49-F238E27FC236}">
-                <a16:creationId xmlns:a16="http://schemas.microsoft.com/office/drawing/2014/main" id="{F3C8AA43-BEBC-4420-9053-470A62BEBEAA}"/>
+                <a16:creationId xmlns:a16="http://schemas.microsoft.com/office/drawing/2014/main" id="{638C4A5A-8F3E-4DD1-A125-009D4B01B12F}"/>
               </a:ext>
             </a:extLst>
           </p:cNvPr>
@@ -8668,7 +8734,7 @@
           <p:cNvPr id="31" name="">
             <a:extLst xmlns:a="http://schemas.openxmlformats.org/drawingml/2006/main">
               <a:ext uri="{FF2B5EF4-FFF2-40B4-BE49-F238E27FC236}">
-                <a16:creationId xmlns:a16="http://schemas.microsoft.com/office/drawing/2014/main" id="{13E78407-D9F2-4807-9BE4-C313FFE17D82}"/>
+                <a16:creationId xmlns:a16="http://schemas.microsoft.com/office/drawing/2014/main" id="{54AE7A11-8ABA-4CB4-BAE1-32B3FEE8B0C5}"/>
               </a:ext>
             </a:extLst>
           </p:cNvPr>
@@ -8724,7 +8790,7 @@
           <p:cNvPr id="32" name="">
             <a:extLst xmlns:a="http://schemas.openxmlformats.org/drawingml/2006/main">
               <a:ext uri="{FF2B5EF4-FFF2-40B4-BE49-F238E27FC236}">
-                <a16:creationId xmlns:a16="http://schemas.microsoft.com/office/drawing/2014/main" id="{69F97B0B-E75E-49F1-B856-7D42AF1A2F65}"/>
+                <a16:creationId xmlns:a16="http://schemas.microsoft.com/office/drawing/2014/main" id="{45C85D7C-9AD6-4B60-B1B4-DFF5F502F61B}"/>
               </a:ext>
             </a:extLst>
           </p:cNvPr>
@@ -8780,7 +8846,7 @@
           <p:cNvPr id="33" name="">
             <a:extLst xmlns:a="http://schemas.openxmlformats.org/drawingml/2006/main">
               <a:ext uri="{FF2B5EF4-FFF2-40B4-BE49-F238E27FC236}">
-                <a16:creationId xmlns:a16="http://schemas.microsoft.com/office/drawing/2014/main" id="{2D57ABEA-2F31-4B86-BD68-4446916FF53C}"/>
+                <a16:creationId xmlns:a16="http://schemas.microsoft.com/office/drawing/2014/main" id="{631C8F6B-16E8-48FB-B7BE-C295C8949436}"/>
               </a:ext>
             </a:extLst>
           </p:cNvPr>
@@ -8811,7 +8877,7 @@
           <p:cNvPr id="34" name="">
             <a:extLst xmlns:a="http://schemas.openxmlformats.org/drawingml/2006/main">
               <a:ext uri="{FF2B5EF4-FFF2-40B4-BE49-F238E27FC236}">
-                <a16:creationId xmlns:a16="http://schemas.microsoft.com/office/drawing/2014/main" id="{8378D53C-B93D-498A-AA91-0A78FF3FEBB8}"/>
+                <a16:creationId xmlns:a16="http://schemas.microsoft.com/office/drawing/2014/main" id="{8E3A0513-10DF-4C34-9629-F71EBF46AC3E}"/>
               </a:ext>
             </a:extLst>
           </p:cNvPr>
@@ -8873,7 +8939,7 @@
           <p:cNvPr id="35" name="">
             <a:extLst xmlns:a="http://schemas.openxmlformats.org/drawingml/2006/main">
               <a:ext uri="{FF2B5EF4-FFF2-40B4-BE49-F238E27FC236}">
-                <a16:creationId xmlns:a16="http://schemas.microsoft.com/office/drawing/2014/main" id="{07F8F6B9-D0C6-452D-891D-6F4C108BF227}"/>
+                <a16:creationId xmlns:a16="http://schemas.microsoft.com/office/drawing/2014/main" id="{975B562B-771C-42EF-934E-07D1F58868C0}"/>
               </a:ext>
             </a:extLst>
           </p:cNvPr>
@@ -8929,7 +8995,7 @@
           <p:cNvPr id="36" name="">
             <a:extLst xmlns:a="http://schemas.openxmlformats.org/drawingml/2006/main">
               <a:ext uri="{FF2B5EF4-FFF2-40B4-BE49-F238E27FC236}">
-                <a16:creationId xmlns:a16="http://schemas.microsoft.com/office/drawing/2014/main" id="{0F7BEE5D-739C-46CC-AFA3-6B0ABDC8A273}"/>
+                <a16:creationId xmlns:a16="http://schemas.microsoft.com/office/drawing/2014/main" id="{E88AAB2C-178C-4D7D-9055-0D25A97555F1}"/>
               </a:ext>
             </a:extLst>
           </p:cNvPr>
@@ -8985,7 +9051,7 @@
           <p:cNvPr id="37" name="">
             <a:extLst xmlns:a="http://schemas.openxmlformats.org/drawingml/2006/main">
               <a:ext uri="{FF2B5EF4-FFF2-40B4-BE49-F238E27FC236}">
-                <a16:creationId xmlns:a16="http://schemas.microsoft.com/office/drawing/2014/main" id="{6CFEBDDC-EB6B-4DF2-98F7-F9D26EBA1565}"/>
+                <a16:creationId xmlns:a16="http://schemas.microsoft.com/office/drawing/2014/main" id="{D66B6060-374E-4E25-BD4A-1453959A22C9}"/>
               </a:ext>
             </a:extLst>
           </p:cNvPr>
@@ -9016,7 +9082,7 @@
           <p:cNvPr id="38" name="">
             <a:extLst xmlns:a="http://schemas.openxmlformats.org/drawingml/2006/main">
               <a:ext uri="{FF2B5EF4-FFF2-40B4-BE49-F238E27FC236}">
-                <a16:creationId xmlns:a16="http://schemas.microsoft.com/office/drawing/2014/main" id="{5920E85C-9694-4914-B2E8-014AA8813E03}"/>
+                <a16:creationId xmlns:a16="http://schemas.microsoft.com/office/drawing/2014/main" id="{8062F4A0-467A-448D-BC36-0062926A2D68}"/>
               </a:ext>
             </a:extLst>
           </p:cNvPr>
@@ -9078,7 +9144,7 @@
           <p:cNvPr id="39" name="">
             <a:extLst xmlns:a="http://schemas.openxmlformats.org/drawingml/2006/main">
               <a:ext uri="{FF2B5EF4-FFF2-40B4-BE49-F238E27FC236}">
-                <a16:creationId xmlns:a16="http://schemas.microsoft.com/office/drawing/2014/main" id="{E37D5219-F965-4A83-8B05-16E37E6F48F8}"/>
+                <a16:creationId xmlns:a16="http://schemas.microsoft.com/office/drawing/2014/main" id="{C3147134-438A-4ACE-B13C-B75186B0F57C}"/>
               </a:ext>
             </a:extLst>
           </p:cNvPr>
@@ -9134,7 +9200,7 @@
           <p:cNvPr id="40" name="">
             <a:extLst xmlns:a="http://schemas.openxmlformats.org/drawingml/2006/main">
               <a:ext uri="{FF2B5EF4-FFF2-40B4-BE49-F238E27FC236}">
-                <a16:creationId xmlns:a16="http://schemas.microsoft.com/office/drawing/2014/main" id="{BA1D4766-33D6-47C0-87A4-C4F8CA0001AD}"/>
+                <a16:creationId xmlns:a16="http://schemas.microsoft.com/office/drawing/2014/main" id="{6A20E327-421E-47C7-A9A3-17B954E10BDA}"/>
               </a:ext>
             </a:extLst>
           </p:cNvPr>
@@ -9190,7 +9256,7 @@
           <p:cNvPr id="41" name="">
             <a:extLst xmlns:a="http://schemas.openxmlformats.org/drawingml/2006/main">
               <a:ext uri="{FF2B5EF4-FFF2-40B4-BE49-F238E27FC236}">
-                <a16:creationId xmlns:a16="http://schemas.microsoft.com/office/drawing/2014/main" id="{5581AB80-2BC2-4475-9FF5-98D6624F3D83}"/>
+                <a16:creationId xmlns:a16="http://schemas.microsoft.com/office/drawing/2014/main" id="{34EFA70F-AB83-4A30-A323-69AD30C0A309}"/>
               </a:ext>
             </a:extLst>
           </p:cNvPr>
@@ -9225,7 +9291,7 @@
           <p:cNvPr id="42" name="">
             <a:extLst xmlns:a="http://schemas.openxmlformats.org/drawingml/2006/main">
               <a:ext uri="{FF2B5EF4-FFF2-40B4-BE49-F238E27FC236}">
-                <a16:creationId xmlns:a16="http://schemas.microsoft.com/office/drawing/2014/main" id="{0C126970-B5F9-4A2B-9B29-453B6F156861}"/>
+                <a16:creationId xmlns:a16="http://schemas.microsoft.com/office/drawing/2014/main" id="{FD17047E-0C8A-481C-9EBD-D2E65EA55762}"/>
               </a:ext>
             </a:extLst>
           </p:cNvPr>
@@ -9281,7 +9347,7 @@
           <p:cNvPr id="43" name="">
             <a:extLst xmlns:a="http://schemas.openxmlformats.org/drawingml/2006/main">
               <a:ext uri="{FF2B5EF4-FFF2-40B4-BE49-F238E27FC236}">
-                <a16:creationId xmlns:a16="http://schemas.microsoft.com/office/drawing/2014/main" id="{2520AEA6-3D8C-472C-891B-21793FA0FB72}"/>
+                <a16:creationId xmlns:a16="http://schemas.microsoft.com/office/drawing/2014/main" id="{CDF6EDFE-036F-472D-ABEF-A427F73A2B79}"/>
               </a:ext>
             </a:extLst>
           </p:cNvPr>
@@ -9335,7 +9401,7 @@
     </p:spTree>
     <p:extLst>
       <p:ext uri="{BB962C8B-B14F-4D97-AF65-F5344CB8AC3E}">
-        <p14:creationId xmlns:p14="http://schemas.microsoft.com/office/powerpoint/2010/main" val="79825395"/>
+        <p14:creationId xmlns:p14="http://schemas.microsoft.com/office/powerpoint/2010/main" val="1413488793"/>
       </p:ext>
     </p:extLst>
   </p:cSld>
@@ -9359,7 +9425,7 @@
           <p:cNvPr id="3" name="直角三角形 2">
             <a:extLst xmlns:a="http://schemas.openxmlformats.org/drawingml/2006/main">
               <a:ext uri="{FF2B5EF4-FFF2-40B4-BE49-F238E27FC236}">
-                <a16:creationId xmlns:a16="http://schemas.microsoft.com/office/drawing/2014/main" id="{332B83E6-CB73-41BC-8B8F-48EA7B213965}"/>
+                <a16:creationId xmlns:a16="http://schemas.microsoft.com/office/drawing/2014/main" id="{464B37EA-2474-4E02-A8F8-DDEF92F0CACA}"/>
               </a:ext>
             </a:extLst>
           </p:cNvPr>
@@ -9417,7 +9483,7 @@
           <p:cNvPr id="4" name="圆角矩形 2">
             <a:extLst xmlns:a="http://schemas.openxmlformats.org/drawingml/2006/main">
               <a:ext uri="{FF2B5EF4-FFF2-40B4-BE49-F238E27FC236}">
-                <a16:creationId xmlns:a16="http://schemas.microsoft.com/office/drawing/2014/main" id="{D98E5284-33DB-44F7-8A15-DD6A17D54E69}"/>
+                <a16:creationId xmlns:a16="http://schemas.microsoft.com/office/drawing/2014/main" id="{7BBA9F30-FCFD-428F-88E5-5D105813D3B3}"/>
               </a:ext>
             </a:extLst>
           </p:cNvPr>
@@ -9477,7 +9543,7 @@
           <p:cNvPr id="5" name="对角圆角矩形 80">
             <a:extLst xmlns:a="http://schemas.openxmlformats.org/drawingml/2006/main">
               <a:ext uri="{FF2B5EF4-FFF2-40B4-BE49-F238E27FC236}">
-                <a16:creationId xmlns:a16="http://schemas.microsoft.com/office/drawing/2014/main" id="{B24FA072-DD2C-4BB0-975D-91B68766DB24}"/>
+                <a16:creationId xmlns:a16="http://schemas.microsoft.com/office/drawing/2014/main" id="{B77FCB03-23B6-41C0-AE2D-7A47D6F51FDC}"/>
               </a:ext>
             </a:extLst>
           </p:cNvPr>
@@ -9551,7 +9617,7 @@
           <p:cNvPr id="7" name="">
             <a:extLst xmlns:a="http://schemas.openxmlformats.org/drawingml/2006/main">
               <a:ext uri="{FF2B5EF4-FFF2-40B4-BE49-F238E27FC236}">
-                <a16:creationId xmlns:a16="http://schemas.microsoft.com/office/drawing/2014/main" id="{9FAFA7B9-48D0-443B-AADB-B5C7DEBF9D2F}"/>
+                <a16:creationId xmlns:a16="http://schemas.microsoft.com/office/drawing/2014/main" id="{2B1C0FCA-2101-4727-A7EE-616CFEF16597}"/>
               </a:ext>
             </a:extLst>
           </p:cNvPr>
@@ -9584,7 +9650,7 @@
           <p:cNvPr id="8" name="">
             <a:extLst xmlns:a="http://schemas.openxmlformats.org/drawingml/2006/main">
               <a:ext uri="{FF2B5EF4-FFF2-40B4-BE49-F238E27FC236}">
-                <a16:creationId xmlns:a16="http://schemas.microsoft.com/office/drawing/2014/main" id="{29539A9A-A3AB-4A94-8DFA-088A41F44EA6}"/>
+                <a16:creationId xmlns:a16="http://schemas.microsoft.com/office/drawing/2014/main" id="{2C41E327-2D2B-405C-A996-82ED2F909A07}"/>
               </a:ext>
             </a:extLst>
           </p:cNvPr>
@@ -9640,7 +9706,7 @@
           <p:cNvPr id="9" name="">
             <a:extLst xmlns:a="http://schemas.openxmlformats.org/drawingml/2006/main">
               <a:ext uri="{FF2B5EF4-FFF2-40B4-BE49-F238E27FC236}">
-                <a16:creationId xmlns:a16="http://schemas.microsoft.com/office/drawing/2014/main" id="{25A24604-824C-4987-B523-24F69C27C4C0}"/>
+                <a16:creationId xmlns:a16="http://schemas.microsoft.com/office/drawing/2014/main" id="{37B1EC37-92C5-4F64-A862-EF14CEDC923B}"/>
               </a:ext>
             </a:extLst>
           </p:cNvPr>
@@ -9673,7 +9739,7 @@
           <p:cNvPr id="10" name="">
             <a:extLst xmlns:a="http://schemas.openxmlformats.org/drawingml/2006/main">
               <a:ext uri="{FF2B5EF4-FFF2-40B4-BE49-F238E27FC236}">
-                <a16:creationId xmlns:a16="http://schemas.microsoft.com/office/drawing/2014/main" id="{8CAEC4C7-542C-4D05-BDC6-169448E01994}"/>
+                <a16:creationId xmlns:a16="http://schemas.microsoft.com/office/drawing/2014/main" id="{00D79C5D-0B64-4F14-BA39-0614AE430B6E}"/>
               </a:ext>
             </a:extLst>
           </p:cNvPr>
@@ -9733,7 +9799,7 @@
           <p:nvPr/>
         </p:nvPicPr>
         <p:blipFill>
-          <a:blip xmlns:r="http://schemas.openxmlformats.org/officeDocument/2006/relationships" xmlns:a="http://schemas.openxmlformats.org/drawingml/2006/main" r:embed="R6626bedbad3a471c"/>
+          <a:blip xmlns:r="http://schemas.openxmlformats.org/officeDocument/2006/relationships" xmlns:a="http://schemas.openxmlformats.org/drawingml/2006/main" r:embed="Rffd4484fda8a4b8a"/>
           <a:stretch xmlns:a="http://schemas.openxmlformats.org/drawingml/2006/main"/>
         </p:blipFill>
         <p:spPr>
@@ -9751,7 +9817,7 @@
           <p:cNvPr id="12" name="">
             <a:extLst xmlns:a="http://schemas.openxmlformats.org/drawingml/2006/main">
               <a:ext uri="{FF2B5EF4-FFF2-40B4-BE49-F238E27FC236}">
-                <a16:creationId xmlns:a16="http://schemas.microsoft.com/office/drawing/2014/main" id="{85477D00-038C-4531-AFE0-17E01286C79E}"/>
+                <a16:creationId xmlns:a16="http://schemas.microsoft.com/office/drawing/2014/main" id="{6085DE8D-D944-48B6-BA37-B69108E247A8}"/>
               </a:ext>
             </a:extLst>
           </p:cNvPr>
@@ -9805,7 +9871,7 @@
     </p:spTree>
     <p:extLst>
       <p:ext uri="{BB962C8B-B14F-4D97-AF65-F5344CB8AC3E}">
-        <p14:creationId xmlns:p14="http://schemas.microsoft.com/office/powerpoint/2010/main" val="1907108248"/>
+        <p14:creationId xmlns:p14="http://schemas.microsoft.com/office/powerpoint/2010/main" val="1403377483"/>
       </p:ext>
     </p:extLst>
   </p:cSld>
@@ -9829,7 +9895,7 @@
           <p:cNvPr id="3" name="直角三角形 2">
             <a:extLst xmlns:a="http://schemas.openxmlformats.org/drawingml/2006/main">
               <a:ext uri="{FF2B5EF4-FFF2-40B4-BE49-F238E27FC236}">
-                <a16:creationId xmlns:a16="http://schemas.microsoft.com/office/drawing/2014/main" id="{C4621ECD-CE7E-47EF-ACA3-B6D0DCD88B8A}"/>
+                <a16:creationId xmlns:a16="http://schemas.microsoft.com/office/drawing/2014/main" id="{C3A251FD-5CD3-4BBA-BA82-038F02A4E93D}"/>
               </a:ext>
             </a:extLst>
           </p:cNvPr>
@@ -9887,7 +9953,7 @@
           <p:cNvPr id="4" name="圆角矩形 2">
             <a:extLst xmlns:a="http://schemas.openxmlformats.org/drawingml/2006/main">
               <a:ext uri="{FF2B5EF4-FFF2-40B4-BE49-F238E27FC236}">
-                <a16:creationId xmlns:a16="http://schemas.microsoft.com/office/drawing/2014/main" id="{CC9903B3-C73B-41B1-A122-993E18968082}"/>
+                <a16:creationId xmlns:a16="http://schemas.microsoft.com/office/drawing/2014/main" id="{87F5D6A7-75EF-4A57-AAA4-C86A2E992145}"/>
               </a:ext>
             </a:extLst>
           </p:cNvPr>
@@ -9947,7 +10013,7 @@
           <p:cNvPr id="5" name="对角圆角矩形 80">
             <a:extLst xmlns:a="http://schemas.openxmlformats.org/drawingml/2006/main">
               <a:ext uri="{FF2B5EF4-FFF2-40B4-BE49-F238E27FC236}">
-                <a16:creationId xmlns:a16="http://schemas.microsoft.com/office/drawing/2014/main" id="{884D206C-C0B3-4CC2-AD08-FFF26A24A567}"/>
+                <a16:creationId xmlns:a16="http://schemas.microsoft.com/office/drawing/2014/main" id="{B195960C-89EF-44B3-A47D-E1B40B64A0DE}"/>
               </a:ext>
             </a:extLst>
           </p:cNvPr>
@@ -10021,7 +10087,7 @@
           <p:cNvPr id="7" name="">
             <a:extLst xmlns:a="http://schemas.openxmlformats.org/drawingml/2006/main">
               <a:ext uri="{FF2B5EF4-FFF2-40B4-BE49-F238E27FC236}">
-                <a16:creationId xmlns:a16="http://schemas.microsoft.com/office/drawing/2014/main" id="{DF9579B2-7E70-4CE0-AA38-18959335F178}"/>
+                <a16:creationId xmlns:a16="http://schemas.microsoft.com/office/drawing/2014/main" id="{A8370864-E997-42FD-9CE3-D2F672A81DA8}"/>
               </a:ext>
             </a:extLst>
           </p:cNvPr>
@@ -10054,7 +10120,7 @@
           <p:cNvPr id="8" name="">
             <a:extLst xmlns:a="http://schemas.openxmlformats.org/drawingml/2006/main">
               <a:ext uri="{FF2B5EF4-FFF2-40B4-BE49-F238E27FC236}">
-                <a16:creationId xmlns:a16="http://schemas.microsoft.com/office/drawing/2014/main" id="{AD4DCF80-DF38-449C-A2EE-A719D7FEB7E8}"/>
+                <a16:creationId xmlns:a16="http://schemas.microsoft.com/office/drawing/2014/main" id="{08C997D9-298B-42D5-A4A9-DD77EB06FE13}"/>
               </a:ext>
             </a:extLst>
           </p:cNvPr>
@@ -10110,7 +10176,7 @@
           <p:cNvPr id="9" name="">
             <a:extLst xmlns:a="http://schemas.openxmlformats.org/drawingml/2006/main">
               <a:ext uri="{FF2B5EF4-FFF2-40B4-BE49-F238E27FC236}">
-                <a16:creationId xmlns:a16="http://schemas.microsoft.com/office/drawing/2014/main" id="{3B10EBBE-5245-4817-887C-1E86AE3F47C9}"/>
+                <a16:creationId xmlns:a16="http://schemas.microsoft.com/office/drawing/2014/main" id="{1AF5B5E7-156F-4EA3-91FF-88A37573D3F9}"/>
               </a:ext>
             </a:extLst>
           </p:cNvPr>
@@ -10147,7 +10213,7 @@
           <p:nvPr/>
         </p:nvPicPr>
         <p:blipFill>
-          <a:blip xmlns:r="http://schemas.openxmlformats.org/officeDocument/2006/relationships" xmlns:a="http://schemas.openxmlformats.org/drawingml/2006/main" r:embed="R070bb67514c64190"/>
+          <a:blip xmlns:r="http://schemas.openxmlformats.org/officeDocument/2006/relationships" xmlns:a="http://schemas.openxmlformats.org/drawingml/2006/main" r:embed="Rf56208e15f024afc"/>
           <a:stretch xmlns:a="http://schemas.openxmlformats.org/drawingml/2006/main"/>
         </p:blipFill>
         <p:spPr>
@@ -10165,7 +10231,7 @@
           <p:cNvPr id="11" name="">
             <a:extLst xmlns:a="http://schemas.openxmlformats.org/drawingml/2006/main">
               <a:ext uri="{FF2B5EF4-FFF2-40B4-BE49-F238E27FC236}">
-                <a16:creationId xmlns:a16="http://schemas.microsoft.com/office/drawing/2014/main" id="{4FCD70EE-0CAF-4235-A40A-2545DFEE13BC}"/>
+                <a16:creationId xmlns:a16="http://schemas.microsoft.com/office/drawing/2014/main" id="{34F5FDD6-C4B5-4580-89DE-CB5D963B201A}"/>
               </a:ext>
             </a:extLst>
           </p:cNvPr>
@@ -10200,7 +10266,7 @@
           <p:cNvPr id="12" name="">
             <a:extLst xmlns:a="http://schemas.openxmlformats.org/drawingml/2006/main">
               <a:ext uri="{FF2B5EF4-FFF2-40B4-BE49-F238E27FC236}">
-                <a16:creationId xmlns:a16="http://schemas.microsoft.com/office/drawing/2014/main" id="{6CBF58E8-1347-4671-9640-45C9C2D70B30}"/>
+                <a16:creationId xmlns:a16="http://schemas.microsoft.com/office/drawing/2014/main" id="{A512EBA0-F9E4-4B67-940E-212FF0185373}"/>
               </a:ext>
             </a:extLst>
           </p:cNvPr>
@@ -10256,7 +10322,7 @@
           <p:cNvPr id="13" name="">
             <a:extLst xmlns:a="http://schemas.openxmlformats.org/drawingml/2006/main">
               <a:ext uri="{FF2B5EF4-FFF2-40B4-BE49-F238E27FC236}">
-                <a16:creationId xmlns:a16="http://schemas.microsoft.com/office/drawing/2014/main" id="{5FDF3771-FA91-4142-8B93-176740C7A804}"/>
+                <a16:creationId xmlns:a16="http://schemas.microsoft.com/office/drawing/2014/main" id="{614369DE-888D-4FBD-8E57-992FF2941B2E}"/>
               </a:ext>
             </a:extLst>
           </p:cNvPr>
@@ -10310,7 +10376,7 @@
     </p:spTree>
     <p:extLst>
       <p:ext uri="{BB962C8B-B14F-4D97-AF65-F5344CB8AC3E}">
-        <p14:creationId xmlns:p14="http://schemas.microsoft.com/office/powerpoint/2010/main" val="1509404504"/>
+        <p14:creationId xmlns:p14="http://schemas.microsoft.com/office/powerpoint/2010/main" val="255335953"/>
       </p:ext>
     </p:extLst>
   </p:cSld>
@@ -10334,7 +10400,7 @@
           <p:cNvPr id="8" name="直角三角形 7">
             <a:extLst xmlns:a="http://schemas.openxmlformats.org/drawingml/2006/main">
               <a:ext uri="{FF2B5EF4-FFF2-40B4-BE49-F238E27FC236}">
-                <a16:creationId xmlns:a16="http://schemas.microsoft.com/office/drawing/2014/main" id="{93035EC0-1E4F-4E31-87D9-843F03709E6F}"/>
+                <a16:creationId xmlns:a16="http://schemas.microsoft.com/office/drawing/2014/main" id="{B446128E-1BA1-4E29-A675-4E0B58D6A011}"/>
               </a:ext>
             </a:extLst>
           </p:cNvPr>
@@ -10392,7 +10458,7 @@
           <p:cNvPr id="9" name="直角三角形 8">
             <a:extLst xmlns:a="http://schemas.openxmlformats.org/drawingml/2006/main">
               <a:ext uri="{FF2B5EF4-FFF2-40B4-BE49-F238E27FC236}">
-                <a16:creationId xmlns:a16="http://schemas.microsoft.com/office/drawing/2014/main" id="{D6E9AD69-92A0-48D5-A1B9-023E014EAD59}"/>
+                <a16:creationId xmlns:a16="http://schemas.microsoft.com/office/drawing/2014/main" id="{12BCDE73-43C5-4109-9B56-1DFD29F42C5C}"/>
               </a:ext>
             </a:extLst>
           </p:cNvPr>
@@ -10450,7 +10516,7 @@
           <p:cNvPr id="10" name="直角三角形 9">
             <a:extLst xmlns:a="http://schemas.openxmlformats.org/drawingml/2006/main">
               <a:ext uri="{FF2B5EF4-FFF2-40B4-BE49-F238E27FC236}">
-                <a16:creationId xmlns:a16="http://schemas.microsoft.com/office/drawing/2014/main" id="{FADC25D8-1AFE-4E81-BE13-C5B2D0CF8AD7}"/>
+                <a16:creationId xmlns:a16="http://schemas.microsoft.com/office/drawing/2014/main" id="{8581EDCE-DF68-43D1-B777-1303FCD47F5B}"/>
               </a:ext>
             </a:extLst>
           </p:cNvPr>
@@ -10508,7 +10574,7 @@
           <p:cNvPr id="11" name="圆角矩形 2">
             <a:extLst xmlns:a="http://schemas.openxmlformats.org/drawingml/2006/main">
               <a:ext uri="{FF2B5EF4-FFF2-40B4-BE49-F238E27FC236}">
-                <a16:creationId xmlns:a16="http://schemas.microsoft.com/office/drawing/2014/main" id="{2B09BECB-0DFB-4F82-BB83-846D8088903C}"/>
+                <a16:creationId xmlns:a16="http://schemas.microsoft.com/office/drawing/2014/main" id="{38B54DE0-A3EB-41D5-AEFC-D05273E00AFB}"/>
               </a:ext>
             </a:extLst>
           </p:cNvPr>
@@ -10568,7 +10634,7 @@
           <p:cNvPr id="12" name="圆角矩形 2">
             <a:extLst xmlns:a="http://schemas.openxmlformats.org/drawingml/2006/main">
               <a:ext uri="{FF2B5EF4-FFF2-40B4-BE49-F238E27FC236}">
-                <a16:creationId xmlns:a16="http://schemas.microsoft.com/office/drawing/2014/main" id="{AB410391-290F-4C1F-8047-7F4138C57BF5}"/>
+                <a16:creationId xmlns:a16="http://schemas.microsoft.com/office/drawing/2014/main" id="{CB00D74F-4BDA-4114-9DD2-DC17019AEBDA}"/>
               </a:ext>
             </a:extLst>
           </p:cNvPr>
@@ -10628,7 +10694,7 @@
           <p:cNvPr id="13" name="对角圆角矩形 80">
             <a:extLst xmlns:a="http://schemas.openxmlformats.org/drawingml/2006/main">
               <a:ext uri="{FF2B5EF4-FFF2-40B4-BE49-F238E27FC236}">
-                <a16:creationId xmlns:a16="http://schemas.microsoft.com/office/drawing/2014/main" id="{40CFF1F3-9545-4C8B-A3B4-BA67479B685E}"/>
+                <a16:creationId xmlns:a16="http://schemas.microsoft.com/office/drawing/2014/main" id="{908C453B-C0DE-429D-A8BB-C223DBCA7C19}"/>
               </a:ext>
             </a:extLst>
           </p:cNvPr>
@@ -10702,7 +10768,7 @@
           <p:cNvPr id="14" name="对角圆角矩形 80">
             <a:extLst xmlns:a="http://schemas.openxmlformats.org/drawingml/2006/main">
               <a:ext uri="{FF2B5EF4-FFF2-40B4-BE49-F238E27FC236}">
-                <a16:creationId xmlns:a16="http://schemas.microsoft.com/office/drawing/2014/main" id="{2DAC582A-4A3E-48D3-88B7-D2FE38C7CF03}"/>
+                <a16:creationId xmlns:a16="http://schemas.microsoft.com/office/drawing/2014/main" id="{5BD401D7-0CD7-4B3D-8189-AC9965CAA27D}"/>
               </a:ext>
             </a:extLst>
           </p:cNvPr>
@@ -10776,7 +10842,7 @@
           <p:cNvPr id="16" name="">
             <a:extLst xmlns:a="http://schemas.openxmlformats.org/drawingml/2006/main">
               <a:ext uri="{FF2B5EF4-FFF2-40B4-BE49-F238E27FC236}">
-                <a16:creationId xmlns:a16="http://schemas.microsoft.com/office/drawing/2014/main" id="{9192AAF6-15ED-4750-AE46-AAB824203F3E}"/>
+                <a16:creationId xmlns:a16="http://schemas.microsoft.com/office/drawing/2014/main" id="{342BC74B-61B7-422A-8CE0-70A435FE7EF9}"/>
               </a:ext>
             </a:extLst>
           </p:cNvPr>
@@ -10809,7 +10875,7 @@
           <p:cNvPr id="17" name="">
             <a:extLst xmlns:a="http://schemas.openxmlformats.org/drawingml/2006/main">
               <a:ext uri="{FF2B5EF4-FFF2-40B4-BE49-F238E27FC236}">
-                <a16:creationId xmlns:a16="http://schemas.microsoft.com/office/drawing/2014/main" id="{0BA4C6FA-CEBA-41DD-BC13-E4E636303F17}"/>
+                <a16:creationId xmlns:a16="http://schemas.microsoft.com/office/drawing/2014/main" id="{1AB7ABD4-EA94-4CA9-B492-99B646158722}"/>
               </a:ext>
             </a:extLst>
           </p:cNvPr>
@@ -10865,7 +10931,7 @@
           <p:cNvPr id="18" name="">
             <a:extLst xmlns:a="http://schemas.openxmlformats.org/drawingml/2006/main">
               <a:ext uri="{FF2B5EF4-FFF2-40B4-BE49-F238E27FC236}">
-                <a16:creationId xmlns:a16="http://schemas.microsoft.com/office/drawing/2014/main" id="{8076077D-3037-43BA-8022-CBBA54282997}"/>
+                <a16:creationId xmlns:a16="http://schemas.microsoft.com/office/drawing/2014/main" id="{C8CFC0C0-A32C-406A-B8A9-A986ACC77D32}"/>
               </a:ext>
             </a:extLst>
           </p:cNvPr>
@@ -10895,20 +10961,20 @@
       </p:sp>
       <p:pic>
         <p:nvPicPr>
-          <p:cNvPr id="41" name=""/>
+          <p:cNvPr id="44" name=""/>
           <p:cNvPicPr>
             <a:picLocks xmlns:a="http://schemas.openxmlformats.org/drawingml/2006/main" noChangeAspect="1"/>
           </p:cNvPicPr>
           <p:nvPr/>
         </p:nvPicPr>
         <p:blipFill>
-          <a:blip xmlns:r="http://schemas.openxmlformats.org/officeDocument/2006/relationships" xmlns:a="http://schemas.openxmlformats.org/drawingml/2006/main" r:embed="R44e7927d7aef4e1d"/>
+          <a:blip xmlns:r="http://schemas.openxmlformats.org/officeDocument/2006/relationships" xmlns:a="http://schemas.openxmlformats.org/drawingml/2006/main" r:embed="Rff7c5e6ddd7c46d3"/>
           <a:stretch xmlns:a="http://schemas.openxmlformats.org/drawingml/2006/main"/>
         </p:blipFill>
         <p:spPr>
           <a:xfrm xmlns:a="http://schemas.openxmlformats.org/drawingml/2006/main">
-            <a:off x="514350" y="1049133"/>
-            <a:ext cx="6743700" cy="3426235"/>
+            <a:off x="1120926" y="1047750"/>
+            <a:ext cx="5530548" cy="2809875"/>
           </a:xfrm>
           <a:prstGeom xmlns:a="http://schemas.openxmlformats.org/drawingml/2006/main" prst="rect">
             <a:avLst/>
@@ -10920,7 +10986,86 @@
           <p:cNvPr id="20" name="">
             <a:extLst xmlns:a="http://schemas.openxmlformats.org/drawingml/2006/main">
               <a:ext uri="{FF2B5EF4-FFF2-40B4-BE49-F238E27FC236}">
-                <a16:creationId xmlns:a16="http://schemas.microsoft.com/office/drawing/2014/main" id="{F487C70B-B741-4880-8EC2-EFD59E4E7C6E}"/>
+                <a16:creationId xmlns:a16="http://schemas.microsoft.com/office/drawing/2014/main" id="{F346DD72-E218-4D5F-9D56-3FBBA038DE4F}"/>
+              </a:ext>
+            </a:extLst>
+          </p:cNvPr>
+          <p:cNvSpPr>
+            <a:spLocks xmlns:a="http://schemas.openxmlformats.org/drawingml/2006/main" noGrp="1"/>
+          </p:cNvSpPr>
+          <p:nvPr/>
+        </p:nvSpPr>
+        <p:spPr>
+          <a:xfrm xmlns:a="http://schemas.openxmlformats.org/drawingml/2006/main">
+            <a:off x="514350" y="3924300"/>
+            <a:ext cx="6743700" cy="876300"/>
+          </a:xfrm>
+          <a:prstGeom xmlns:a="http://schemas.openxmlformats.org/drawingml/2006/main" prst="roundRect">
+            <a:avLst>
+              <a:gd name="adj" fmla="val 8696"/>
+            </a:avLst>
+          </a:prstGeom>
+          <a:solidFill xmlns:a="http://schemas.openxmlformats.org/drawingml/2006/main">
+            <a:srgbClr val="FFFFFF"/>
+          </a:solidFill>
+          <a:ln xmlns:a="http://schemas.openxmlformats.org/drawingml/2006/main" w="9525">
+            <a:solidFill>
+              <a:srgbClr val="8FB2BE"/>
+            </a:solidFill>
+            <a:prstDash val="solid"/>
+          </a:ln>
+        </p:spPr>
+      </p:sp>
+      <p:pic>
+        <p:nvPicPr>
+          <p:cNvPr id="46" name=""/>
+          <p:cNvPicPr>
+            <a:picLocks xmlns:a="http://schemas.openxmlformats.org/drawingml/2006/main" noChangeAspect="1"/>
+          </p:cNvPicPr>
+          <p:nvPr/>
+        </p:nvPicPr>
+        <p:blipFill>
+          <a:blip xmlns:r="http://schemas.openxmlformats.org/officeDocument/2006/relationships" xmlns:a="http://schemas.openxmlformats.org/drawingml/2006/main" r:embed="R0997a9cb835b4dd6"/>
+          <a:stretch xmlns:a="http://schemas.openxmlformats.org/drawingml/2006/main"/>
+        </p:blipFill>
+        <p:spPr>
+          <a:xfrm xmlns:a="http://schemas.openxmlformats.org/drawingml/2006/main">
+            <a:off x="1229755" y="3962400"/>
+            <a:ext cx="5312891" cy="323850"/>
+          </a:xfrm>
+          <a:prstGeom xmlns:a="http://schemas.openxmlformats.org/drawingml/2006/main" prst="rect">
+            <a:avLst/>
+          </a:prstGeom>
+        </p:spPr>
+      </p:pic>
+      <p:pic>
+        <p:nvPicPr>
+          <p:cNvPr id="47" name=""/>
+          <p:cNvPicPr>
+            <a:picLocks xmlns:a="http://schemas.openxmlformats.org/drawingml/2006/main" noChangeAspect="1"/>
+          </p:cNvPicPr>
+          <p:nvPr/>
+        </p:nvPicPr>
+        <p:blipFill>
+          <a:blip xmlns:r="http://schemas.openxmlformats.org/officeDocument/2006/relationships" xmlns:a="http://schemas.openxmlformats.org/drawingml/2006/main" r:embed="Rbf45c7abd29e47f0"/>
+          <a:stretch xmlns:a="http://schemas.openxmlformats.org/drawingml/2006/main"/>
+        </p:blipFill>
+        <p:spPr>
+          <a:xfrm xmlns:a="http://schemas.openxmlformats.org/drawingml/2006/main">
+            <a:off x="685800" y="4329293"/>
+            <a:ext cx="6400800" cy="390164"/>
+          </a:xfrm>
+          <a:prstGeom xmlns:a="http://schemas.openxmlformats.org/drawingml/2006/main" prst="rect">
+            <a:avLst/>
+          </a:prstGeom>
+        </p:spPr>
+      </p:pic>
+      <p:sp>
+        <p:nvSpPr>
+          <p:cNvPr id="23" name="">
+            <a:extLst xmlns:a="http://schemas.openxmlformats.org/drawingml/2006/main">
+              <a:ext uri="{FF2B5EF4-FFF2-40B4-BE49-F238E27FC236}">
+                <a16:creationId xmlns:a16="http://schemas.microsoft.com/office/drawing/2014/main" id="{CC9C6594-2255-4FA4-850A-D67F7502CFF7}"/>
               </a:ext>
             </a:extLst>
           </p:cNvPr>
@@ -10973,10 +11118,10 @@
       </p:sp>
       <p:sp>
         <p:nvSpPr>
-          <p:cNvPr id="21" name="">
-            <a:extLst xmlns:a="http://schemas.openxmlformats.org/drawingml/2006/main">
-              <a:ext uri="{FF2B5EF4-FFF2-40B4-BE49-F238E27FC236}">
-                <a16:creationId xmlns:a16="http://schemas.microsoft.com/office/drawing/2014/main" id="{D83EA715-6293-4ADA-BEFD-4C07ECA5EF4A}"/>
+          <p:cNvPr id="24" name="">
+            <a:extLst xmlns:a="http://schemas.openxmlformats.org/drawingml/2006/main">
+              <a:ext uri="{FF2B5EF4-FFF2-40B4-BE49-F238E27FC236}">
+                <a16:creationId xmlns:a16="http://schemas.microsoft.com/office/drawing/2014/main" id="{1F6C7700-4F6E-4602-A125-FAC62E4B31E7}"/>
               </a:ext>
             </a:extLst>
           </p:cNvPr>
@@ -11035,10 +11180,10 @@
       </p:sp>
       <p:sp>
         <p:nvSpPr>
-          <p:cNvPr id="22" name="">
-            <a:extLst xmlns:a="http://schemas.openxmlformats.org/drawingml/2006/main">
-              <a:ext uri="{FF2B5EF4-FFF2-40B4-BE49-F238E27FC236}">
-                <a16:creationId xmlns:a16="http://schemas.microsoft.com/office/drawing/2014/main" id="{FCBF6A1B-5226-45B3-93B0-3C00909AFD44}"/>
+          <p:cNvPr id="25" name="">
+            <a:extLst xmlns:a="http://schemas.openxmlformats.org/drawingml/2006/main">
+              <a:ext uri="{FF2B5EF4-FFF2-40B4-BE49-F238E27FC236}">
+                <a16:creationId xmlns:a16="http://schemas.microsoft.com/office/drawing/2014/main" id="{2146B2B1-9C89-413A-8E42-7A0D3FF28EF7}"/>
               </a:ext>
             </a:extLst>
           </p:cNvPr>
@@ -11091,10 +11236,10 @@
       </p:sp>
       <p:sp>
         <p:nvSpPr>
-          <p:cNvPr id="23" name="">
-            <a:extLst xmlns:a="http://schemas.openxmlformats.org/drawingml/2006/main">
-              <a:ext uri="{FF2B5EF4-FFF2-40B4-BE49-F238E27FC236}">
-                <a16:creationId xmlns:a16="http://schemas.microsoft.com/office/drawing/2014/main" id="{FBB0A4DD-7C63-414E-8502-7F873F2D9AE5}"/>
+          <p:cNvPr id="26" name="">
+            <a:extLst xmlns:a="http://schemas.openxmlformats.org/drawingml/2006/main">
+              <a:ext uri="{FF2B5EF4-FFF2-40B4-BE49-F238E27FC236}">
+                <a16:creationId xmlns:a16="http://schemas.microsoft.com/office/drawing/2014/main" id="{5A153799-E14F-41DC-98B3-7D22EB770AE2}"/>
               </a:ext>
             </a:extLst>
           </p:cNvPr>
@@ -11153,10 +11298,10 @@
       </p:sp>
       <p:sp>
         <p:nvSpPr>
-          <p:cNvPr id="24" name="">
-            <a:extLst xmlns:a="http://schemas.openxmlformats.org/drawingml/2006/main">
-              <a:ext uri="{FF2B5EF4-FFF2-40B4-BE49-F238E27FC236}">
-                <a16:creationId xmlns:a16="http://schemas.microsoft.com/office/drawing/2014/main" id="{B26CBAB8-4E8D-49AA-8ED3-8E4563E584E6}"/>
+          <p:cNvPr id="27" name="">
+            <a:extLst xmlns:a="http://schemas.openxmlformats.org/drawingml/2006/main">
+              <a:ext uri="{FF2B5EF4-FFF2-40B4-BE49-F238E27FC236}">
+                <a16:creationId xmlns:a16="http://schemas.microsoft.com/office/drawing/2014/main" id="{6B8FFCC2-C1F7-4F77-9231-C78723077857}"/>
               </a:ext>
             </a:extLst>
           </p:cNvPr>
@@ -11209,10 +11354,10 @@
       </p:sp>
       <p:sp>
         <p:nvSpPr>
-          <p:cNvPr id="25" name="">
-            <a:extLst xmlns:a="http://schemas.openxmlformats.org/drawingml/2006/main">
-              <a:ext uri="{FF2B5EF4-FFF2-40B4-BE49-F238E27FC236}">
-                <a16:creationId xmlns:a16="http://schemas.microsoft.com/office/drawing/2014/main" id="{FCB7C4B0-338E-498C-A0FA-DA73EC30FEE6}"/>
+          <p:cNvPr id="28" name="">
+            <a:extLst xmlns:a="http://schemas.openxmlformats.org/drawingml/2006/main">
+              <a:ext uri="{FF2B5EF4-FFF2-40B4-BE49-F238E27FC236}">
+                <a16:creationId xmlns:a16="http://schemas.microsoft.com/office/drawing/2014/main" id="{744A7FCB-B9EB-4F0F-9585-9F5104CD0DEF}"/>
               </a:ext>
             </a:extLst>
           </p:cNvPr>
@@ -11271,10 +11416,10 @@
       </p:sp>
       <p:sp>
         <p:nvSpPr>
-          <p:cNvPr id="26" name="">
-            <a:extLst xmlns:a="http://schemas.openxmlformats.org/drawingml/2006/main">
-              <a:ext uri="{FF2B5EF4-FFF2-40B4-BE49-F238E27FC236}">
-                <a16:creationId xmlns:a16="http://schemas.microsoft.com/office/drawing/2014/main" id="{718AA7BD-42FE-4C03-BCD1-CD2B2D2070AD}"/>
+          <p:cNvPr id="29" name="">
+            <a:extLst xmlns:a="http://schemas.openxmlformats.org/drawingml/2006/main">
+              <a:ext uri="{FF2B5EF4-FFF2-40B4-BE49-F238E27FC236}">
+                <a16:creationId xmlns:a16="http://schemas.microsoft.com/office/drawing/2014/main" id="{86571C1A-A533-4E5D-B112-3B16E17EBAC4}"/>
               </a:ext>
             </a:extLst>
           </p:cNvPr>
@@ -11327,26 +11472,26 @@
       </p:sp>
       <p:sp>
         <p:nvSpPr>
-          <p:cNvPr id="27" name="">
-            <a:extLst xmlns:a="http://schemas.openxmlformats.org/drawingml/2006/main">
-              <a:ext uri="{FF2B5EF4-FFF2-40B4-BE49-F238E27FC236}">
-                <a16:creationId xmlns:a16="http://schemas.microsoft.com/office/drawing/2014/main" id="{C36142E9-2868-4995-8F0C-1D30525FEE7F}"/>
-              </a:ext>
-            </a:extLst>
-          </p:cNvPr>
-          <p:cNvSpPr>
-            <a:spLocks xmlns:a="http://schemas.openxmlformats.org/drawingml/2006/main" noGrp="1"/>
-          </p:cNvSpPr>
-          <p:nvPr/>
-        </p:nvSpPr>
-        <p:spPr>
-          <a:xfrm xmlns:a="http://schemas.openxmlformats.org/drawingml/2006/main">
-            <a:off x="666750" y="4810125"/>
-            <a:ext cx="10858500" cy="1066800"/>
+          <p:cNvPr id="30" name="">
+            <a:extLst xmlns:a="http://schemas.openxmlformats.org/drawingml/2006/main">
+              <a:ext uri="{FF2B5EF4-FFF2-40B4-BE49-F238E27FC236}">
+                <a16:creationId xmlns:a16="http://schemas.microsoft.com/office/drawing/2014/main" id="{215D4F17-33D9-475C-89E3-F0D4963AC837}"/>
+              </a:ext>
+            </a:extLst>
+          </p:cNvPr>
+          <p:cNvSpPr>
+            <a:spLocks xmlns:a="http://schemas.openxmlformats.org/drawingml/2006/main" noGrp="1"/>
+          </p:cNvSpPr>
+          <p:nvPr/>
+        </p:nvSpPr>
+        <p:spPr>
+          <a:xfrm xmlns:a="http://schemas.openxmlformats.org/drawingml/2006/main">
+            <a:off x="666750" y="4914900"/>
+            <a:ext cx="10858500" cy="962025"/>
           </a:xfrm>
           <a:prstGeom xmlns:a="http://schemas.openxmlformats.org/drawingml/2006/main" prst="roundRect">
             <a:avLst>
-              <a:gd name="adj" fmla="val 7143"/>
+              <a:gd name="adj" fmla="val 7921"/>
             </a:avLst>
           </a:prstGeom>
           <a:solidFill xmlns:a="http://schemas.openxmlformats.org/drawingml/2006/main">
@@ -11362,21 +11507,21 @@
       </p:sp>
       <p:sp>
         <p:nvSpPr>
-          <p:cNvPr id="28" name="">
-            <a:extLst xmlns:a="http://schemas.openxmlformats.org/drawingml/2006/main">
-              <a:ext uri="{FF2B5EF4-FFF2-40B4-BE49-F238E27FC236}">
-                <a16:creationId xmlns:a16="http://schemas.microsoft.com/office/drawing/2014/main" id="{E4E225CA-0D34-43AF-AF4C-A0D63BAE3915}"/>
-              </a:ext>
-            </a:extLst>
-          </p:cNvPr>
-          <p:cNvSpPr>
-            <a:spLocks xmlns:a="http://schemas.openxmlformats.org/drawingml/2006/main" noGrp="1"/>
-          </p:cNvSpPr>
-          <p:nvPr/>
-        </p:nvSpPr>
-        <p:spPr>
-          <a:xfrm xmlns:a="http://schemas.openxmlformats.org/drawingml/2006/main">
-            <a:off x="876300" y="4981575"/>
+          <p:cNvPr id="31" name="">
+            <a:extLst xmlns:a="http://schemas.openxmlformats.org/drawingml/2006/main">
+              <a:ext uri="{FF2B5EF4-FFF2-40B4-BE49-F238E27FC236}">
+                <a16:creationId xmlns:a16="http://schemas.microsoft.com/office/drawing/2014/main" id="{D77981B4-B94C-46A1-88FF-693767398D91}"/>
+              </a:ext>
+            </a:extLst>
+          </p:cNvPr>
+          <p:cNvSpPr>
+            <a:spLocks xmlns:a="http://schemas.openxmlformats.org/drawingml/2006/main" noGrp="1"/>
+          </p:cNvSpPr>
+          <p:nvPr/>
+        </p:nvSpPr>
+        <p:spPr>
+          <a:xfrm xmlns:a="http://schemas.openxmlformats.org/drawingml/2006/main">
+            <a:off x="876300" y="5048250"/>
             <a:ext cx="10420350" cy="266700"/>
           </a:xfrm>
           <a:prstGeom xmlns:a="http://schemas.openxmlformats.org/drawingml/2006/main" prst="rect">
@@ -11418,21 +11563,21 @@
       </p:sp>
       <p:sp>
         <p:nvSpPr>
-          <p:cNvPr id="29" name="">
-            <a:extLst xmlns:a="http://schemas.openxmlformats.org/drawingml/2006/main">
-              <a:ext uri="{FF2B5EF4-FFF2-40B4-BE49-F238E27FC236}">
-                <a16:creationId xmlns:a16="http://schemas.microsoft.com/office/drawing/2014/main" id="{28A3921D-ABEB-463D-8FC0-1FA1ADAF45E6}"/>
-              </a:ext>
-            </a:extLst>
-          </p:cNvPr>
-          <p:cNvSpPr>
-            <a:spLocks xmlns:a="http://schemas.openxmlformats.org/drawingml/2006/main" noGrp="1"/>
-          </p:cNvSpPr>
-          <p:nvPr/>
-        </p:nvSpPr>
-        <p:spPr>
-          <a:xfrm xmlns:a="http://schemas.openxmlformats.org/drawingml/2006/main">
-            <a:off x="876300" y="5372100"/>
+          <p:cNvPr id="32" name="">
+            <a:extLst xmlns:a="http://schemas.openxmlformats.org/drawingml/2006/main">
+              <a:ext uri="{FF2B5EF4-FFF2-40B4-BE49-F238E27FC236}">
+                <a16:creationId xmlns:a16="http://schemas.microsoft.com/office/drawing/2014/main" id="{0073B778-A120-4B07-87B8-E61E548D6E6B}"/>
+              </a:ext>
+            </a:extLst>
+          </p:cNvPr>
+          <p:cNvSpPr>
+            <a:spLocks xmlns:a="http://schemas.openxmlformats.org/drawingml/2006/main" noGrp="1"/>
+          </p:cNvSpPr>
+          <p:nvPr/>
+        </p:nvSpPr>
+        <p:spPr>
+          <a:xfrm xmlns:a="http://schemas.openxmlformats.org/drawingml/2006/main">
+            <a:off x="876300" y="5410200"/>
             <a:ext cx="10420350" cy="257175"/>
           </a:xfrm>
           <a:prstGeom xmlns:a="http://schemas.openxmlformats.org/drawingml/2006/main" prst="rect">
@@ -11474,10 +11619,10 @@
       </p:sp>
       <p:sp>
         <p:nvSpPr>
-          <p:cNvPr id="30" name="">
-            <a:extLst xmlns:a="http://schemas.openxmlformats.org/drawingml/2006/main">
-              <a:ext uri="{FF2B5EF4-FFF2-40B4-BE49-F238E27FC236}">
-                <a16:creationId xmlns:a16="http://schemas.microsoft.com/office/drawing/2014/main" id="{F110D7DE-56B1-4457-8CBD-A6F5FF7532E2}"/>
+          <p:cNvPr id="33" name="">
+            <a:extLst xmlns:a="http://schemas.openxmlformats.org/drawingml/2006/main">
+              <a:ext uri="{FF2B5EF4-FFF2-40B4-BE49-F238E27FC236}">
+                <a16:creationId xmlns:a16="http://schemas.microsoft.com/office/drawing/2014/main" id="{B6CA36AB-EF6E-40A0-A353-E2195DC6F3B9}"/>
               </a:ext>
             </a:extLst>
           </p:cNvPr>
@@ -11531,7 +11676,7 @@
     </p:spTree>
     <p:extLst>
       <p:ext uri="{BB962C8B-B14F-4D97-AF65-F5344CB8AC3E}">
-        <p14:creationId xmlns:p14="http://schemas.microsoft.com/office/powerpoint/2010/main" val="550653712"/>
+        <p14:creationId xmlns:p14="http://schemas.microsoft.com/office/powerpoint/2010/main" val="1983409492"/>
       </p:ext>
     </p:extLst>
   </p:cSld>
@@ -11555,7 +11700,7 @@
           <p:cNvPr id="18" name="直角三角形 17">
             <a:extLst xmlns:a="http://schemas.openxmlformats.org/drawingml/2006/main">
               <a:ext uri="{FF2B5EF4-FFF2-40B4-BE49-F238E27FC236}">
-                <a16:creationId xmlns:a16="http://schemas.microsoft.com/office/drawing/2014/main" id="{C1644077-3F33-4567-95EE-B69B85A9E358}"/>
+                <a16:creationId xmlns:a16="http://schemas.microsoft.com/office/drawing/2014/main" id="{B7BDB45F-58A3-47FE-BC35-048A5A12C4C9}"/>
               </a:ext>
             </a:extLst>
           </p:cNvPr>
@@ -11613,7 +11758,7 @@
           <p:cNvPr id="19" name="直角三角形 18">
             <a:extLst xmlns:a="http://schemas.openxmlformats.org/drawingml/2006/main">
               <a:ext uri="{FF2B5EF4-FFF2-40B4-BE49-F238E27FC236}">
-                <a16:creationId xmlns:a16="http://schemas.microsoft.com/office/drawing/2014/main" id="{D11670B4-5E22-472C-A4B9-C36CF21148A8}"/>
+                <a16:creationId xmlns:a16="http://schemas.microsoft.com/office/drawing/2014/main" id="{CDF557E2-851E-4B96-ADA4-CE0278EF516C}"/>
               </a:ext>
             </a:extLst>
           </p:cNvPr>
@@ -11671,7 +11816,7 @@
           <p:cNvPr id="20" name="圆角矩形 2">
             <a:extLst xmlns:a="http://schemas.openxmlformats.org/drawingml/2006/main">
               <a:ext uri="{FF2B5EF4-FFF2-40B4-BE49-F238E27FC236}">
-                <a16:creationId xmlns:a16="http://schemas.microsoft.com/office/drawing/2014/main" id="{7149E51A-56C0-44DE-95AA-F3CD30CD99FD}"/>
+                <a16:creationId xmlns:a16="http://schemas.microsoft.com/office/drawing/2014/main" id="{37BD35C7-6BC3-48C2-A02B-96926EF3DD54}"/>
               </a:ext>
             </a:extLst>
           </p:cNvPr>
@@ -11731,7 +11876,7 @@
           <p:cNvPr id="21" name="对角圆角矩形 80">
             <a:extLst xmlns:a="http://schemas.openxmlformats.org/drawingml/2006/main">
               <a:ext uri="{FF2B5EF4-FFF2-40B4-BE49-F238E27FC236}">
-                <a16:creationId xmlns:a16="http://schemas.microsoft.com/office/drawing/2014/main" id="{76C0EAF4-7916-45F9-B297-9E6ACC847D21}"/>
+                <a16:creationId xmlns:a16="http://schemas.microsoft.com/office/drawing/2014/main" id="{EA607DEC-3577-4D3A-9283-F65B538A68B3}"/>
               </a:ext>
             </a:extLst>
           </p:cNvPr>
@@ -11805,7 +11950,7 @@
           <p:cNvPr id="22" name="圆角矩形 2">
             <a:extLst xmlns:a="http://schemas.openxmlformats.org/drawingml/2006/main">
               <a:ext uri="{FF2B5EF4-FFF2-40B4-BE49-F238E27FC236}">
-                <a16:creationId xmlns:a16="http://schemas.microsoft.com/office/drawing/2014/main" id="{8E958127-01EF-4CD6-A0D5-48DC7BD85458}"/>
+                <a16:creationId xmlns:a16="http://schemas.microsoft.com/office/drawing/2014/main" id="{B126FE4A-C9F5-43B0-A065-0C5A7003E28A}"/>
               </a:ext>
             </a:extLst>
           </p:cNvPr>
@@ -11865,7 +12010,7 @@
           <p:cNvPr id="23" name="对角圆角矩形 80">
             <a:extLst xmlns:a="http://schemas.openxmlformats.org/drawingml/2006/main">
               <a:ext uri="{FF2B5EF4-FFF2-40B4-BE49-F238E27FC236}">
-                <a16:creationId xmlns:a16="http://schemas.microsoft.com/office/drawing/2014/main" id="{DA184691-E7F4-435B-9979-BC8A9DC34DDE}"/>
+                <a16:creationId xmlns:a16="http://schemas.microsoft.com/office/drawing/2014/main" id="{B11E5D3E-90F7-41A7-8736-BF026FB194E7}"/>
               </a:ext>
             </a:extLst>
           </p:cNvPr>
@@ -11939,7 +12084,7 @@
           <p:cNvPr id="24" name="直角三角形 23">
             <a:extLst xmlns:a="http://schemas.openxmlformats.org/drawingml/2006/main">
               <a:ext uri="{FF2B5EF4-FFF2-40B4-BE49-F238E27FC236}">
-                <a16:creationId xmlns:a16="http://schemas.microsoft.com/office/drawing/2014/main" id="{0348DDAC-F469-406E-908C-242F4B0042F5}"/>
+                <a16:creationId xmlns:a16="http://schemas.microsoft.com/office/drawing/2014/main" id="{1B588B61-67BB-47F6-B4F8-8D345D2789EB}"/>
               </a:ext>
             </a:extLst>
           </p:cNvPr>
@@ -11997,7 +12142,7 @@
           <p:cNvPr id="25" name="圆角矩形 2">
             <a:extLst xmlns:a="http://schemas.openxmlformats.org/drawingml/2006/main">
               <a:ext uri="{FF2B5EF4-FFF2-40B4-BE49-F238E27FC236}">
-                <a16:creationId xmlns:a16="http://schemas.microsoft.com/office/drawing/2014/main" id="{4154454D-19A9-48C2-9C73-BC20753A40EB}"/>
+                <a16:creationId xmlns:a16="http://schemas.microsoft.com/office/drawing/2014/main" id="{C7932C18-B564-461D-8E0B-3D50F31456DD}"/>
               </a:ext>
             </a:extLst>
           </p:cNvPr>
@@ -12057,7 +12202,7 @@
           <p:cNvPr id="26" name="对角圆角矩形 80">
             <a:extLst xmlns:a="http://schemas.openxmlformats.org/drawingml/2006/main">
               <a:ext uri="{FF2B5EF4-FFF2-40B4-BE49-F238E27FC236}">
-                <a16:creationId xmlns:a16="http://schemas.microsoft.com/office/drawing/2014/main" id="{BB13481D-C289-45E9-B8EE-387537CA7916}"/>
+                <a16:creationId xmlns:a16="http://schemas.microsoft.com/office/drawing/2014/main" id="{C087EC68-F125-4290-ACFC-5840F27D7638}"/>
               </a:ext>
             </a:extLst>
           </p:cNvPr>
@@ -12131,7 +12276,7 @@
           <p:cNvPr id="28" name="">
             <a:extLst xmlns:a="http://schemas.openxmlformats.org/drawingml/2006/main">
               <a:ext uri="{FF2B5EF4-FFF2-40B4-BE49-F238E27FC236}">
-                <a16:creationId xmlns:a16="http://schemas.microsoft.com/office/drawing/2014/main" id="{DE277C09-985B-4E32-9E2C-FF2F9B86D1CD}"/>
+                <a16:creationId xmlns:a16="http://schemas.microsoft.com/office/drawing/2014/main" id="{467FF4AD-6D9E-4CAE-967B-7B7C50765ECE}"/>
               </a:ext>
             </a:extLst>
           </p:cNvPr>
@@ -12164,7 +12309,7 @@
           <p:cNvPr id="29" name="">
             <a:extLst xmlns:a="http://schemas.openxmlformats.org/drawingml/2006/main">
               <a:ext uri="{FF2B5EF4-FFF2-40B4-BE49-F238E27FC236}">
-                <a16:creationId xmlns:a16="http://schemas.microsoft.com/office/drawing/2014/main" id="{E947A102-4607-4F29-948F-58692B5D9C9B}"/>
+                <a16:creationId xmlns:a16="http://schemas.microsoft.com/office/drawing/2014/main" id="{BF47179D-87E8-4911-8E65-F6399AF825F9}"/>
               </a:ext>
             </a:extLst>
           </p:cNvPr>
@@ -12220,7 +12365,7 @@
           <p:cNvPr id="30" name="">
             <a:extLst xmlns:a="http://schemas.openxmlformats.org/drawingml/2006/main">
               <a:ext uri="{FF2B5EF4-FFF2-40B4-BE49-F238E27FC236}">
-                <a16:creationId xmlns:a16="http://schemas.microsoft.com/office/drawing/2014/main" id="{1C78B78E-E761-412D-AFB6-6308117EE382}"/>
+                <a16:creationId xmlns:a16="http://schemas.microsoft.com/office/drawing/2014/main" id="{F4E9B1F5-7C72-4819-B662-1A1DD0BDD86C}"/>
               </a:ext>
             </a:extLst>
           </p:cNvPr>
@@ -12253,7 +12398,7 @@
           <p:cNvPr id="31" name="">
             <a:extLst xmlns:a="http://schemas.openxmlformats.org/drawingml/2006/main">
               <a:ext uri="{FF2B5EF4-FFF2-40B4-BE49-F238E27FC236}">
-                <a16:creationId xmlns:a16="http://schemas.microsoft.com/office/drawing/2014/main" id="{E260AE56-7EA8-4438-8B55-54B41A177EFD}"/>
+                <a16:creationId xmlns:a16="http://schemas.microsoft.com/office/drawing/2014/main" id="{2193187D-7097-4A6A-AFCB-97C191CE1D61}"/>
               </a:ext>
             </a:extLst>
           </p:cNvPr>
@@ -12304,28 +12449,94 @@
           </a:p>
         </p:txBody>
       </p:sp>
-      <p:sp>
-        <p:nvSpPr>
-          <p:cNvPr id="32" name="">
-            <a:extLst xmlns:a="http://schemas.openxmlformats.org/drawingml/2006/main">
-              <a:ext uri="{FF2B5EF4-FFF2-40B4-BE49-F238E27FC236}">
-                <a16:creationId xmlns:a16="http://schemas.microsoft.com/office/drawing/2014/main" id="{6AA30660-3F66-4F7C-9ED2-22C049F338E1}"/>
-              </a:ext>
-            </a:extLst>
-          </p:cNvPr>
-          <p:cNvSpPr>
-            <a:spLocks xmlns:a="http://schemas.openxmlformats.org/drawingml/2006/main" noGrp="1"/>
-          </p:cNvSpPr>
-          <p:nvPr/>
-        </p:nvSpPr>
-        <p:spPr>
-          <a:xfrm xmlns:a="http://schemas.openxmlformats.org/drawingml/2006/main">
-            <a:off x="552450" y="1428750"/>
-            <a:ext cx="3429000" cy="3638550"/>
+      <p:pic>
+        <p:nvPicPr>
+          <p:cNvPr id="60" name=""/>
+          <p:cNvPicPr>
+            <a:picLocks xmlns:a="http://schemas.openxmlformats.org/drawingml/2006/main" noChangeAspect="1"/>
+          </p:cNvPicPr>
+          <p:nvPr/>
+        </p:nvPicPr>
+        <p:blipFill>
+          <a:blip xmlns:r="http://schemas.openxmlformats.org/officeDocument/2006/relationships" xmlns:a="http://schemas.openxmlformats.org/drawingml/2006/main" r:embed="R7c6e165da11b44b7"/>
+          <a:stretch xmlns:a="http://schemas.openxmlformats.org/drawingml/2006/main"/>
+        </p:blipFill>
+        <p:spPr>
+          <a:xfrm xmlns:a="http://schemas.openxmlformats.org/drawingml/2006/main">
+            <a:off x="721110" y="1257300"/>
+            <a:ext cx="5225279" cy="342900"/>
+          </a:xfrm>
+          <a:prstGeom xmlns:a="http://schemas.openxmlformats.org/drawingml/2006/main" prst="rect">
+            <a:avLst/>
+          </a:prstGeom>
+        </p:spPr>
+      </p:pic>
+      <p:pic>
+        <p:nvPicPr>
+          <p:cNvPr id="61" name=""/>
+          <p:cNvPicPr>
+            <a:picLocks xmlns:a="http://schemas.openxmlformats.org/drawingml/2006/main" noChangeAspect="1"/>
+          </p:cNvPicPr>
+          <p:nvPr/>
+        </p:nvPicPr>
+        <p:blipFill>
+          <a:blip xmlns:r="http://schemas.openxmlformats.org/officeDocument/2006/relationships" xmlns:a="http://schemas.openxmlformats.org/drawingml/2006/main" r:embed="Rf206c0163956431e"/>
+          <a:stretch xmlns:a="http://schemas.openxmlformats.org/drawingml/2006/main"/>
+        </p:blipFill>
+        <p:spPr>
+          <a:xfrm xmlns:a="http://schemas.openxmlformats.org/drawingml/2006/main">
+            <a:off x="6245610" y="1257300"/>
+            <a:ext cx="5225279" cy="342900"/>
+          </a:xfrm>
+          <a:prstGeom xmlns:a="http://schemas.openxmlformats.org/drawingml/2006/main" prst="rect">
+            <a:avLst/>
+          </a:prstGeom>
+        </p:spPr>
+      </p:pic>
+      <p:pic>
+        <p:nvPicPr>
+          <p:cNvPr id="62" name=""/>
+          <p:cNvPicPr>
+            <a:picLocks xmlns:a="http://schemas.openxmlformats.org/drawingml/2006/main" noChangeAspect="1"/>
+          </p:cNvPicPr>
+          <p:nvPr/>
+        </p:nvPicPr>
+        <p:blipFill>
+          <a:blip xmlns:r="http://schemas.openxmlformats.org/officeDocument/2006/relationships" xmlns:a="http://schemas.openxmlformats.org/drawingml/2006/main" r:embed="R9cbf69fbd12d4616"/>
+          <a:stretch xmlns:a="http://schemas.openxmlformats.org/drawingml/2006/main"/>
+        </p:blipFill>
+        <p:spPr>
+          <a:xfrm xmlns:a="http://schemas.openxmlformats.org/drawingml/2006/main">
+            <a:off x="3752078" y="1619250"/>
+            <a:ext cx="4687845" cy="285750"/>
+          </a:xfrm>
+          <a:prstGeom xmlns:a="http://schemas.openxmlformats.org/drawingml/2006/main" prst="rect">
+            <a:avLst/>
+          </a:prstGeom>
+        </p:spPr>
+      </p:pic>
+      <p:sp>
+        <p:nvSpPr>
+          <p:cNvPr id="35" name="">
+            <a:extLst xmlns:a="http://schemas.openxmlformats.org/drawingml/2006/main">
+              <a:ext uri="{FF2B5EF4-FFF2-40B4-BE49-F238E27FC236}">
+                <a16:creationId xmlns:a16="http://schemas.microsoft.com/office/drawing/2014/main" id="{BEA8C2AF-9AC5-4940-9D66-EBF19B98B85E}"/>
+              </a:ext>
+            </a:extLst>
+          </p:cNvPr>
+          <p:cNvSpPr>
+            <a:spLocks xmlns:a="http://schemas.openxmlformats.org/drawingml/2006/main" noGrp="1"/>
+          </p:cNvSpPr>
+          <p:nvPr/>
+        </p:nvSpPr>
+        <p:spPr>
+          <a:xfrm xmlns:a="http://schemas.openxmlformats.org/drawingml/2006/main">
+            <a:off x="552450" y="2000250"/>
+            <a:ext cx="3429000" cy="3067050"/>
           </a:xfrm>
           <a:prstGeom xmlns:a="http://schemas.openxmlformats.org/drawingml/2006/main" prst="roundRect">
             <a:avLst>
-              <a:gd name="adj" fmla="val 3333"/>
+              <a:gd name="adj" fmla="val 3727"/>
             </a:avLst>
           </a:prstGeom>
           <a:solidFill xmlns:a="http://schemas.openxmlformats.org/drawingml/2006/main">
@@ -12341,21 +12552,21 @@
       </p:sp>
       <p:sp>
         <p:nvSpPr>
-          <p:cNvPr id="33" name="">
-            <a:extLst xmlns:a="http://schemas.openxmlformats.org/drawingml/2006/main">
-              <a:ext uri="{FF2B5EF4-FFF2-40B4-BE49-F238E27FC236}">
-                <a16:creationId xmlns:a16="http://schemas.microsoft.com/office/drawing/2014/main" id="{3027104D-A0A3-429A-8A51-75453040223F}"/>
-              </a:ext>
-            </a:extLst>
-          </p:cNvPr>
-          <p:cNvSpPr>
-            <a:spLocks xmlns:a="http://schemas.openxmlformats.org/drawingml/2006/main" noGrp="1"/>
-          </p:cNvSpPr>
-          <p:nvPr/>
-        </p:nvSpPr>
-        <p:spPr>
-          <a:xfrm xmlns:a="http://schemas.openxmlformats.org/drawingml/2006/main">
-            <a:off x="685800" y="1562100"/>
+          <p:cNvPr id="36" name="">
+            <a:extLst xmlns:a="http://schemas.openxmlformats.org/drawingml/2006/main">
+              <a:ext uri="{FF2B5EF4-FFF2-40B4-BE49-F238E27FC236}">
+                <a16:creationId xmlns:a16="http://schemas.microsoft.com/office/drawing/2014/main" id="{F66D693B-049C-4033-8315-FFE22119B90E}"/>
+              </a:ext>
+            </a:extLst>
+          </p:cNvPr>
+          <p:cNvSpPr>
+            <a:spLocks xmlns:a="http://schemas.openxmlformats.org/drawingml/2006/main" noGrp="1"/>
+          </p:cNvSpPr>
+          <p:nvPr/>
+        </p:nvSpPr>
+        <p:spPr>
+          <a:xfrm xmlns:a="http://schemas.openxmlformats.org/drawingml/2006/main">
+            <a:off x="685800" y="2133600"/>
             <a:ext cx="1828800" cy="457200"/>
           </a:xfrm>
           <a:prstGeom xmlns:a="http://schemas.openxmlformats.org/drawingml/2006/main" prst="roundRect">
@@ -12403,22 +12614,22 @@
       </p:sp>
       <p:sp>
         <p:nvSpPr>
-          <p:cNvPr id="34" name="">
-            <a:extLst xmlns:a="http://schemas.openxmlformats.org/drawingml/2006/main">
-              <a:ext uri="{FF2B5EF4-FFF2-40B4-BE49-F238E27FC236}">
-                <a16:creationId xmlns:a16="http://schemas.microsoft.com/office/drawing/2014/main" id="{AB8A1DCC-407A-4C20-90D0-41A3F3EC3496}"/>
-              </a:ext>
-            </a:extLst>
-          </p:cNvPr>
-          <p:cNvSpPr>
-            <a:spLocks xmlns:a="http://schemas.openxmlformats.org/drawingml/2006/main" noGrp="1"/>
-          </p:cNvSpPr>
-          <p:nvPr/>
-        </p:nvSpPr>
-        <p:spPr>
-          <a:xfrm xmlns:a="http://schemas.openxmlformats.org/drawingml/2006/main">
-            <a:off x="781050" y="2171700"/>
-            <a:ext cx="2971800" cy="2781300"/>
+          <p:cNvPr id="37" name="">
+            <a:extLst xmlns:a="http://schemas.openxmlformats.org/drawingml/2006/main">
+              <a:ext uri="{FF2B5EF4-FFF2-40B4-BE49-F238E27FC236}">
+                <a16:creationId xmlns:a16="http://schemas.microsoft.com/office/drawing/2014/main" id="{1A005501-ED01-47FB-8813-73F07847819E}"/>
+              </a:ext>
+            </a:extLst>
+          </p:cNvPr>
+          <p:cNvSpPr>
+            <a:spLocks xmlns:a="http://schemas.openxmlformats.org/drawingml/2006/main" noGrp="1"/>
+          </p:cNvSpPr>
+          <p:nvPr/>
+        </p:nvSpPr>
+        <p:spPr>
+          <a:xfrm xmlns:a="http://schemas.openxmlformats.org/drawingml/2006/main">
+            <a:off x="781050" y="2743200"/>
+            <a:ext cx="2971800" cy="2209800"/>
           </a:xfrm>
           <a:prstGeom xmlns:a="http://schemas.openxmlformats.org/drawingml/2006/main" prst="rect">
             <a:avLst/>
@@ -12533,26 +12744,26 @@
       </p:sp>
       <p:sp>
         <p:nvSpPr>
-          <p:cNvPr id="35" name="">
-            <a:extLst xmlns:a="http://schemas.openxmlformats.org/drawingml/2006/main">
-              <a:ext uri="{FF2B5EF4-FFF2-40B4-BE49-F238E27FC236}">
-                <a16:creationId xmlns:a16="http://schemas.microsoft.com/office/drawing/2014/main" id="{DCE24C13-5464-4871-B81C-7AC497BF605E}"/>
-              </a:ext>
-            </a:extLst>
-          </p:cNvPr>
-          <p:cNvSpPr>
-            <a:spLocks xmlns:a="http://schemas.openxmlformats.org/drawingml/2006/main" noGrp="1"/>
-          </p:cNvSpPr>
-          <p:nvPr/>
-        </p:nvSpPr>
-        <p:spPr>
-          <a:xfrm xmlns:a="http://schemas.openxmlformats.org/drawingml/2006/main">
-            <a:off x="4381500" y="1428750"/>
-            <a:ext cx="3429000" cy="3638550"/>
+          <p:cNvPr id="38" name="">
+            <a:extLst xmlns:a="http://schemas.openxmlformats.org/drawingml/2006/main">
+              <a:ext uri="{FF2B5EF4-FFF2-40B4-BE49-F238E27FC236}">
+                <a16:creationId xmlns:a16="http://schemas.microsoft.com/office/drawing/2014/main" id="{F96A3F99-B155-42FC-A3CE-3FFAC0C8923E}"/>
+              </a:ext>
+            </a:extLst>
+          </p:cNvPr>
+          <p:cNvSpPr>
+            <a:spLocks xmlns:a="http://schemas.openxmlformats.org/drawingml/2006/main" noGrp="1"/>
+          </p:cNvSpPr>
+          <p:nvPr/>
+        </p:nvSpPr>
+        <p:spPr>
+          <a:xfrm xmlns:a="http://schemas.openxmlformats.org/drawingml/2006/main">
+            <a:off x="4381500" y="2000250"/>
+            <a:ext cx="3429000" cy="3067050"/>
           </a:xfrm>
           <a:prstGeom xmlns:a="http://schemas.openxmlformats.org/drawingml/2006/main" prst="roundRect">
             <a:avLst>
-              <a:gd name="adj" fmla="val 3333"/>
+              <a:gd name="adj" fmla="val 3727"/>
             </a:avLst>
           </a:prstGeom>
           <a:solidFill xmlns:a="http://schemas.openxmlformats.org/drawingml/2006/main">
@@ -12568,21 +12779,21 @@
       </p:sp>
       <p:sp>
         <p:nvSpPr>
-          <p:cNvPr id="36" name="">
-            <a:extLst xmlns:a="http://schemas.openxmlformats.org/drawingml/2006/main">
-              <a:ext uri="{FF2B5EF4-FFF2-40B4-BE49-F238E27FC236}">
-                <a16:creationId xmlns:a16="http://schemas.microsoft.com/office/drawing/2014/main" id="{6A2561DB-9F9E-42C1-B3FB-08473D31DD4F}"/>
-              </a:ext>
-            </a:extLst>
-          </p:cNvPr>
-          <p:cNvSpPr>
-            <a:spLocks xmlns:a="http://schemas.openxmlformats.org/drawingml/2006/main" noGrp="1"/>
-          </p:cNvSpPr>
-          <p:nvPr/>
-        </p:nvSpPr>
-        <p:spPr>
-          <a:xfrm xmlns:a="http://schemas.openxmlformats.org/drawingml/2006/main">
-            <a:off x="4514850" y="1562100"/>
+          <p:cNvPr id="39" name="">
+            <a:extLst xmlns:a="http://schemas.openxmlformats.org/drawingml/2006/main">
+              <a:ext uri="{FF2B5EF4-FFF2-40B4-BE49-F238E27FC236}">
+                <a16:creationId xmlns:a16="http://schemas.microsoft.com/office/drawing/2014/main" id="{845C50B5-17D4-408C-8CAD-451970B85B56}"/>
+              </a:ext>
+            </a:extLst>
+          </p:cNvPr>
+          <p:cNvSpPr>
+            <a:spLocks xmlns:a="http://schemas.openxmlformats.org/drawingml/2006/main" noGrp="1"/>
+          </p:cNvSpPr>
+          <p:nvPr/>
+        </p:nvSpPr>
+        <p:spPr>
+          <a:xfrm xmlns:a="http://schemas.openxmlformats.org/drawingml/2006/main">
+            <a:off x="4514850" y="2133600"/>
             <a:ext cx="1828800" cy="457200"/>
           </a:xfrm>
           <a:prstGeom xmlns:a="http://schemas.openxmlformats.org/drawingml/2006/main" prst="roundRect">
@@ -12630,22 +12841,22 @@
       </p:sp>
       <p:sp>
         <p:nvSpPr>
-          <p:cNvPr id="37" name="">
-            <a:extLst xmlns:a="http://schemas.openxmlformats.org/drawingml/2006/main">
-              <a:ext uri="{FF2B5EF4-FFF2-40B4-BE49-F238E27FC236}">
-                <a16:creationId xmlns:a16="http://schemas.microsoft.com/office/drawing/2014/main" id="{A6AAAF36-7608-4BFF-A7AC-0B08BF6F0D9B}"/>
-              </a:ext>
-            </a:extLst>
-          </p:cNvPr>
-          <p:cNvSpPr>
-            <a:spLocks xmlns:a="http://schemas.openxmlformats.org/drawingml/2006/main" noGrp="1"/>
-          </p:cNvSpPr>
-          <p:nvPr/>
-        </p:nvSpPr>
-        <p:spPr>
-          <a:xfrm xmlns:a="http://schemas.openxmlformats.org/drawingml/2006/main">
-            <a:off x="4610100" y="2171700"/>
-            <a:ext cx="2971800" cy="2781300"/>
+          <p:cNvPr id="40" name="">
+            <a:extLst xmlns:a="http://schemas.openxmlformats.org/drawingml/2006/main">
+              <a:ext uri="{FF2B5EF4-FFF2-40B4-BE49-F238E27FC236}">
+                <a16:creationId xmlns:a16="http://schemas.microsoft.com/office/drawing/2014/main" id="{2A01DC16-E873-487F-BD31-5C20F7825986}"/>
+              </a:ext>
+            </a:extLst>
+          </p:cNvPr>
+          <p:cNvSpPr>
+            <a:spLocks xmlns:a="http://schemas.openxmlformats.org/drawingml/2006/main" noGrp="1"/>
+          </p:cNvSpPr>
+          <p:nvPr/>
+        </p:nvSpPr>
+        <p:spPr>
+          <a:xfrm xmlns:a="http://schemas.openxmlformats.org/drawingml/2006/main">
+            <a:off x="4610100" y="2743200"/>
+            <a:ext cx="2971800" cy="2209800"/>
           </a:xfrm>
           <a:prstGeom xmlns:a="http://schemas.openxmlformats.org/drawingml/2006/main" prst="rect">
             <a:avLst/>
@@ -12760,26 +12971,26 @@
       </p:sp>
       <p:sp>
         <p:nvSpPr>
-          <p:cNvPr id="38" name="">
-            <a:extLst xmlns:a="http://schemas.openxmlformats.org/drawingml/2006/main">
-              <a:ext uri="{FF2B5EF4-FFF2-40B4-BE49-F238E27FC236}">
-                <a16:creationId xmlns:a16="http://schemas.microsoft.com/office/drawing/2014/main" id="{56976805-3772-4B77-B1DE-7C86BA8E2E87}"/>
-              </a:ext>
-            </a:extLst>
-          </p:cNvPr>
-          <p:cNvSpPr>
-            <a:spLocks xmlns:a="http://schemas.openxmlformats.org/drawingml/2006/main" noGrp="1"/>
-          </p:cNvSpPr>
-          <p:nvPr/>
-        </p:nvSpPr>
-        <p:spPr>
-          <a:xfrm xmlns:a="http://schemas.openxmlformats.org/drawingml/2006/main">
-            <a:off x="8210550" y="1428750"/>
-            <a:ext cx="3429000" cy="3638550"/>
+          <p:cNvPr id="41" name="">
+            <a:extLst xmlns:a="http://schemas.openxmlformats.org/drawingml/2006/main">
+              <a:ext uri="{FF2B5EF4-FFF2-40B4-BE49-F238E27FC236}">
+                <a16:creationId xmlns:a16="http://schemas.microsoft.com/office/drawing/2014/main" id="{7CC6B34D-25BB-4AFA-826A-2F47F10EFE65}"/>
+              </a:ext>
+            </a:extLst>
+          </p:cNvPr>
+          <p:cNvSpPr>
+            <a:spLocks xmlns:a="http://schemas.openxmlformats.org/drawingml/2006/main" noGrp="1"/>
+          </p:cNvSpPr>
+          <p:nvPr/>
+        </p:nvSpPr>
+        <p:spPr>
+          <a:xfrm xmlns:a="http://schemas.openxmlformats.org/drawingml/2006/main">
+            <a:off x="8210550" y="2000250"/>
+            <a:ext cx="3429000" cy="3067050"/>
           </a:xfrm>
           <a:prstGeom xmlns:a="http://schemas.openxmlformats.org/drawingml/2006/main" prst="roundRect">
             <a:avLst>
-              <a:gd name="adj" fmla="val 3333"/>
+              <a:gd name="adj" fmla="val 3727"/>
             </a:avLst>
           </a:prstGeom>
           <a:solidFill xmlns:a="http://schemas.openxmlformats.org/drawingml/2006/main">
@@ -12795,21 +13006,21 @@
       </p:sp>
       <p:sp>
         <p:nvSpPr>
-          <p:cNvPr id="39" name="">
-            <a:extLst xmlns:a="http://schemas.openxmlformats.org/drawingml/2006/main">
-              <a:ext uri="{FF2B5EF4-FFF2-40B4-BE49-F238E27FC236}">
-                <a16:creationId xmlns:a16="http://schemas.microsoft.com/office/drawing/2014/main" id="{6A55BD98-2F82-4F9E-932F-55F211993062}"/>
-              </a:ext>
-            </a:extLst>
-          </p:cNvPr>
-          <p:cNvSpPr>
-            <a:spLocks xmlns:a="http://schemas.openxmlformats.org/drawingml/2006/main" noGrp="1"/>
-          </p:cNvSpPr>
-          <p:nvPr/>
-        </p:nvSpPr>
-        <p:spPr>
-          <a:xfrm xmlns:a="http://schemas.openxmlformats.org/drawingml/2006/main">
-            <a:off x="8343900" y="1562100"/>
+          <p:cNvPr id="42" name="">
+            <a:extLst xmlns:a="http://schemas.openxmlformats.org/drawingml/2006/main">
+              <a:ext uri="{FF2B5EF4-FFF2-40B4-BE49-F238E27FC236}">
+                <a16:creationId xmlns:a16="http://schemas.microsoft.com/office/drawing/2014/main" id="{B344D18F-2FB0-49DE-8832-B2A951B4A2E6}"/>
+              </a:ext>
+            </a:extLst>
+          </p:cNvPr>
+          <p:cNvSpPr>
+            <a:spLocks xmlns:a="http://schemas.openxmlformats.org/drawingml/2006/main" noGrp="1"/>
+          </p:cNvSpPr>
+          <p:nvPr/>
+        </p:nvSpPr>
+        <p:spPr>
+          <a:xfrm xmlns:a="http://schemas.openxmlformats.org/drawingml/2006/main">
+            <a:off x="8343900" y="2133600"/>
             <a:ext cx="1828800" cy="457200"/>
           </a:xfrm>
           <a:prstGeom xmlns:a="http://schemas.openxmlformats.org/drawingml/2006/main" prst="roundRect">
@@ -12857,22 +13068,22 @@
       </p:sp>
       <p:sp>
         <p:nvSpPr>
-          <p:cNvPr id="40" name="">
-            <a:extLst xmlns:a="http://schemas.openxmlformats.org/drawingml/2006/main">
-              <a:ext uri="{FF2B5EF4-FFF2-40B4-BE49-F238E27FC236}">
-                <a16:creationId xmlns:a16="http://schemas.microsoft.com/office/drawing/2014/main" id="{82E706DF-4D56-4114-875B-8A9FBA9AC5F5}"/>
-              </a:ext>
-            </a:extLst>
-          </p:cNvPr>
-          <p:cNvSpPr>
-            <a:spLocks xmlns:a="http://schemas.openxmlformats.org/drawingml/2006/main" noGrp="1"/>
-          </p:cNvSpPr>
-          <p:nvPr/>
-        </p:nvSpPr>
-        <p:spPr>
-          <a:xfrm xmlns:a="http://schemas.openxmlformats.org/drawingml/2006/main">
-            <a:off x="8439150" y="2171700"/>
-            <a:ext cx="2971800" cy="2781300"/>
+          <p:cNvPr id="43" name="">
+            <a:extLst xmlns:a="http://schemas.openxmlformats.org/drawingml/2006/main">
+              <a:ext uri="{FF2B5EF4-FFF2-40B4-BE49-F238E27FC236}">
+                <a16:creationId xmlns:a16="http://schemas.microsoft.com/office/drawing/2014/main" id="{C536FDC0-B694-488C-AF5A-5357CA70F974}"/>
+              </a:ext>
+            </a:extLst>
+          </p:cNvPr>
+          <p:cNvSpPr>
+            <a:spLocks xmlns:a="http://schemas.openxmlformats.org/drawingml/2006/main" noGrp="1"/>
+          </p:cNvSpPr>
+          <p:nvPr/>
+        </p:nvSpPr>
+        <p:spPr>
+          <a:xfrm xmlns:a="http://schemas.openxmlformats.org/drawingml/2006/main">
+            <a:off x="8439150" y="2743200"/>
+            <a:ext cx="2971800" cy="2209800"/>
           </a:xfrm>
           <a:prstGeom xmlns:a="http://schemas.openxmlformats.org/drawingml/2006/main" prst="rect">
             <a:avLst/>
@@ -12987,10 +13198,10 @@
       </p:sp>
       <p:sp>
         <p:nvSpPr>
-          <p:cNvPr id="41" name="">
-            <a:extLst xmlns:a="http://schemas.openxmlformats.org/drawingml/2006/main">
-              <a:ext uri="{FF2B5EF4-FFF2-40B4-BE49-F238E27FC236}">
-                <a16:creationId xmlns:a16="http://schemas.microsoft.com/office/drawing/2014/main" id="{87771981-F6ED-4404-97B2-6E54E7EA8F7A}"/>
+          <p:cNvPr id="44" name="">
+            <a:extLst xmlns:a="http://schemas.openxmlformats.org/drawingml/2006/main">
+              <a:ext uri="{FF2B5EF4-FFF2-40B4-BE49-F238E27FC236}">
+                <a16:creationId xmlns:a16="http://schemas.microsoft.com/office/drawing/2014/main" id="{9CDCBA5A-CEDD-473A-9328-2F26A0EA83BD}"/>
               </a:ext>
             </a:extLst>
           </p:cNvPr>
@@ -13022,10 +13233,10 @@
       </p:sp>
       <p:sp>
         <p:nvSpPr>
-          <p:cNvPr id="42" name="">
-            <a:extLst xmlns:a="http://schemas.openxmlformats.org/drawingml/2006/main">
-              <a:ext uri="{FF2B5EF4-FFF2-40B4-BE49-F238E27FC236}">
-                <a16:creationId xmlns:a16="http://schemas.microsoft.com/office/drawing/2014/main" id="{6E1334EF-E52C-4D88-9241-37C3344C5EEC}"/>
+          <p:cNvPr id="45" name="">
+            <a:extLst xmlns:a="http://schemas.openxmlformats.org/drawingml/2006/main">
+              <a:ext uri="{FF2B5EF4-FFF2-40B4-BE49-F238E27FC236}">
+                <a16:creationId xmlns:a16="http://schemas.microsoft.com/office/drawing/2014/main" id="{73E1F86B-7EB1-4EA1-BFA8-AC3C60D35D5D}"/>
               </a:ext>
             </a:extLst>
           </p:cNvPr>
@@ -13078,10 +13289,10 @@
       </p:sp>
       <p:sp>
         <p:nvSpPr>
-          <p:cNvPr id="43" name="">
-            <a:extLst xmlns:a="http://schemas.openxmlformats.org/drawingml/2006/main">
-              <a:ext uri="{FF2B5EF4-FFF2-40B4-BE49-F238E27FC236}">
-                <a16:creationId xmlns:a16="http://schemas.microsoft.com/office/drawing/2014/main" id="{131E010A-48C7-4D83-B37B-8ED535085651}"/>
+          <p:cNvPr id="46" name="">
+            <a:extLst xmlns:a="http://schemas.openxmlformats.org/drawingml/2006/main">
+              <a:ext uri="{FF2B5EF4-FFF2-40B4-BE49-F238E27FC236}">
+                <a16:creationId xmlns:a16="http://schemas.microsoft.com/office/drawing/2014/main" id="{2345F15C-FAD4-42A7-886A-28FB4A5BA627}"/>
               </a:ext>
             </a:extLst>
           </p:cNvPr>
@@ -13135,7 +13346,7 @@
     </p:spTree>
     <p:extLst>
       <p:ext uri="{BB962C8B-B14F-4D97-AF65-F5344CB8AC3E}">
-        <p14:creationId xmlns:p14="http://schemas.microsoft.com/office/powerpoint/2010/main" val="123259388"/>
+        <p14:creationId xmlns:p14="http://schemas.microsoft.com/office/powerpoint/2010/main" val="1479963713"/>
       </p:ext>
     </p:extLst>
   </p:cSld>
@@ -13159,7 +13370,7 @@
           <p:cNvPr id="4" name="直角三角形 3">
             <a:extLst xmlns:a="http://schemas.openxmlformats.org/drawingml/2006/main">
               <a:ext uri="{FF2B5EF4-FFF2-40B4-BE49-F238E27FC236}">
-                <a16:creationId xmlns:a16="http://schemas.microsoft.com/office/drawing/2014/main" id="{9427A8CF-EFDA-4B0E-8F56-140020B29876}"/>
+                <a16:creationId xmlns:a16="http://schemas.microsoft.com/office/drawing/2014/main" id="{9EA06938-53FA-4421-BE8B-34298F16BE88}"/>
               </a:ext>
             </a:extLst>
           </p:cNvPr>
@@ -13217,7 +13428,7 @@
           <p:cNvPr id="5" name="直角三角形 4">
             <a:extLst xmlns:a="http://schemas.openxmlformats.org/drawingml/2006/main">
               <a:ext uri="{FF2B5EF4-FFF2-40B4-BE49-F238E27FC236}">
-                <a16:creationId xmlns:a16="http://schemas.microsoft.com/office/drawing/2014/main" id="{D7E677C2-9A75-466F-91CA-60795F86A71D}"/>
+                <a16:creationId xmlns:a16="http://schemas.microsoft.com/office/drawing/2014/main" id="{8D5107D4-100D-408C-8D85-45144A674D1E}"/>
               </a:ext>
             </a:extLst>
           </p:cNvPr>
@@ -13275,7 +13486,7 @@
           <p:cNvPr id="6" name="圆角矩形 2">
             <a:extLst xmlns:a="http://schemas.openxmlformats.org/drawingml/2006/main">
               <a:ext uri="{FF2B5EF4-FFF2-40B4-BE49-F238E27FC236}">
-                <a16:creationId xmlns:a16="http://schemas.microsoft.com/office/drawing/2014/main" id="{CB7BA873-D3DF-4F06-9C71-0DC5FBD0CE6E}"/>
+                <a16:creationId xmlns:a16="http://schemas.microsoft.com/office/drawing/2014/main" id="{C01388AE-F171-4723-AE05-0DCACBCDA787}"/>
               </a:ext>
             </a:extLst>
           </p:cNvPr>
@@ -13335,7 +13546,7 @@
           <p:cNvPr id="7" name="圆角矩形 2">
             <a:extLst xmlns:a="http://schemas.openxmlformats.org/drawingml/2006/main">
               <a:ext uri="{FF2B5EF4-FFF2-40B4-BE49-F238E27FC236}">
-                <a16:creationId xmlns:a16="http://schemas.microsoft.com/office/drawing/2014/main" id="{AA4A31BA-A971-44F6-AFF7-24A0D3D646B7}"/>
+                <a16:creationId xmlns:a16="http://schemas.microsoft.com/office/drawing/2014/main" id="{F97107F0-6BCB-4B87-ACAF-B77DD0175C7F}"/>
               </a:ext>
             </a:extLst>
           </p:cNvPr>
@@ -13395,7 +13606,7 @@
           <p:cNvPr id="8" name="对角圆角矩形 80">
             <a:extLst xmlns:a="http://schemas.openxmlformats.org/drawingml/2006/main">
               <a:ext uri="{FF2B5EF4-FFF2-40B4-BE49-F238E27FC236}">
-                <a16:creationId xmlns:a16="http://schemas.microsoft.com/office/drawing/2014/main" id="{73685B7C-AC09-48F2-8DDB-2FFFDD269F2B}"/>
+                <a16:creationId xmlns:a16="http://schemas.microsoft.com/office/drawing/2014/main" id="{2FAA29D1-A672-488B-A381-800641A45753}"/>
               </a:ext>
             </a:extLst>
           </p:cNvPr>
@@ -13469,7 +13680,7 @@
           <p:cNvPr id="9" name="对角圆角矩形 81">
             <a:extLst xmlns:a="http://schemas.openxmlformats.org/drawingml/2006/main">
               <a:ext uri="{FF2B5EF4-FFF2-40B4-BE49-F238E27FC236}">
-                <a16:creationId xmlns:a16="http://schemas.microsoft.com/office/drawing/2014/main" id="{3572CE6C-B482-4D32-A308-B3F910FC47A0}"/>
+                <a16:creationId xmlns:a16="http://schemas.microsoft.com/office/drawing/2014/main" id="{5F3FAE1F-FF27-43D5-A74C-C870FB1F9297}"/>
               </a:ext>
             </a:extLst>
           </p:cNvPr>
@@ -13543,7 +13754,7 @@
           <p:cNvPr id="11" name="">
             <a:extLst xmlns:a="http://schemas.openxmlformats.org/drawingml/2006/main">
               <a:ext uri="{FF2B5EF4-FFF2-40B4-BE49-F238E27FC236}">
-                <a16:creationId xmlns:a16="http://schemas.microsoft.com/office/drawing/2014/main" id="{367C3AFE-00F3-4190-8FDB-191BDF82F0A4}"/>
+                <a16:creationId xmlns:a16="http://schemas.microsoft.com/office/drawing/2014/main" id="{A259A3A4-0169-4BDB-B1A9-8FC55671942F}"/>
               </a:ext>
             </a:extLst>
           </p:cNvPr>
@@ -13576,7 +13787,7 @@
           <p:cNvPr id="12" name="">
             <a:extLst xmlns:a="http://schemas.openxmlformats.org/drawingml/2006/main">
               <a:ext uri="{FF2B5EF4-FFF2-40B4-BE49-F238E27FC236}">
-                <a16:creationId xmlns:a16="http://schemas.microsoft.com/office/drawing/2014/main" id="{A51061FC-9941-4C89-9DC3-4CB4B3FC9128}"/>
+                <a16:creationId xmlns:a16="http://schemas.microsoft.com/office/drawing/2014/main" id="{DBBD0DFA-F117-40B9-BF53-5BF1FA6F76AB}"/>
               </a:ext>
             </a:extLst>
           </p:cNvPr>
@@ -13632,7 +13843,7 @@
           <p:cNvPr id="13" name="">
             <a:extLst xmlns:a="http://schemas.openxmlformats.org/drawingml/2006/main">
               <a:ext uri="{FF2B5EF4-FFF2-40B4-BE49-F238E27FC236}">
-                <a16:creationId xmlns:a16="http://schemas.microsoft.com/office/drawing/2014/main" id="{8CFDDBF4-2936-4D5B-A0F1-B0D5FE6FC847}"/>
+                <a16:creationId xmlns:a16="http://schemas.microsoft.com/office/drawing/2014/main" id="{CD96FC5F-29A8-436F-B52C-A5814E19F0DD}"/>
               </a:ext>
             </a:extLst>
           </p:cNvPr>
@@ -13665,7 +13876,7 @@
           <p:cNvPr id="14" name="">
             <a:extLst xmlns:a="http://schemas.openxmlformats.org/drawingml/2006/main">
               <a:ext uri="{FF2B5EF4-FFF2-40B4-BE49-F238E27FC236}">
-                <a16:creationId xmlns:a16="http://schemas.microsoft.com/office/drawing/2014/main" id="{5D5391EB-6B17-4D4E-9DC5-50FAEAD24ADC}"/>
+                <a16:creationId xmlns:a16="http://schemas.microsoft.com/office/drawing/2014/main" id="{A5BDE9F8-5259-4A2D-91C3-93A404D9CD06}"/>
               </a:ext>
             </a:extLst>
           </p:cNvPr>
@@ -13716,28 +13927,72 @@
           </a:p>
         </p:txBody>
       </p:sp>
-      <p:sp>
-        <p:nvSpPr>
-          <p:cNvPr id="15" name="">
-            <a:extLst xmlns:a="http://schemas.openxmlformats.org/drawingml/2006/main">
-              <a:ext uri="{FF2B5EF4-FFF2-40B4-BE49-F238E27FC236}">
-                <a16:creationId xmlns:a16="http://schemas.microsoft.com/office/drawing/2014/main" id="{1DEF708F-7258-417A-A7DA-EDCB78ADBD39}"/>
-              </a:ext>
-            </a:extLst>
-          </p:cNvPr>
-          <p:cNvSpPr>
-            <a:spLocks xmlns:a="http://schemas.openxmlformats.org/drawingml/2006/main" noGrp="1"/>
-          </p:cNvSpPr>
-          <p:nvPr/>
-        </p:nvSpPr>
-        <p:spPr>
-          <a:xfrm xmlns:a="http://schemas.openxmlformats.org/drawingml/2006/main">
-            <a:off x="552450" y="1428750"/>
-            <a:ext cx="3429000" cy="3638550"/>
+      <p:pic>
+        <p:nvPicPr>
+          <p:cNvPr id="39" name=""/>
+          <p:cNvPicPr>
+            <a:picLocks xmlns:a="http://schemas.openxmlformats.org/drawingml/2006/main" noChangeAspect="1"/>
+          </p:cNvPicPr>
+          <p:nvPr/>
+        </p:nvPicPr>
+        <p:blipFill>
+          <a:blip xmlns:r="http://schemas.openxmlformats.org/officeDocument/2006/relationships" xmlns:a="http://schemas.openxmlformats.org/drawingml/2006/main" r:embed="R58db7dafc5b34989"/>
+          <a:stretch xmlns:a="http://schemas.openxmlformats.org/drawingml/2006/main"/>
+        </p:blipFill>
+        <p:spPr>
+          <a:xfrm xmlns:a="http://schemas.openxmlformats.org/drawingml/2006/main">
+            <a:off x="1232677" y="1257300"/>
+            <a:ext cx="5535646" cy="428625"/>
+          </a:xfrm>
+          <a:prstGeom xmlns:a="http://schemas.openxmlformats.org/drawingml/2006/main" prst="rect">
+            <a:avLst/>
+          </a:prstGeom>
+        </p:spPr>
+      </p:pic>
+      <p:pic>
+        <p:nvPicPr>
+          <p:cNvPr id="40" name=""/>
+          <p:cNvPicPr>
+            <a:picLocks xmlns:a="http://schemas.openxmlformats.org/drawingml/2006/main" noChangeAspect="1"/>
+          </p:cNvPicPr>
+          <p:nvPr/>
+        </p:nvPicPr>
+        <p:blipFill>
+          <a:blip xmlns:r="http://schemas.openxmlformats.org/officeDocument/2006/relationships" xmlns:a="http://schemas.openxmlformats.org/drawingml/2006/main" r:embed="Rc96ae77bf8764321"/>
+          <a:stretch xmlns:a="http://schemas.openxmlformats.org/drawingml/2006/main"/>
+        </p:blipFill>
+        <p:spPr>
+          <a:xfrm xmlns:a="http://schemas.openxmlformats.org/drawingml/2006/main">
+            <a:off x="7239000" y="1288590"/>
+            <a:ext cx="4286250" cy="261271"/>
+          </a:xfrm>
+          <a:prstGeom xmlns:a="http://schemas.openxmlformats.org/drawingml/2006/main" prst="rect">
+            <a:avLst/>
+          </a:prstGeom>
+        </p:spPr>
+      </p:pic>
+      <p:sp>
+        <p:nvSpPr>
+          <p:cNvPr id="17" name="">
+            <a:extLst xmlns:a="http://schemas.openxmlformats.org/drawingml/2006/main">
+              <a:ext uri="{FF2B5EF4-FFF2-40B4-BE49-F238E27FC236}">
+                <a16:creationId xmlns:a16="http://schemas.microsoft.com/office/drawing/2014/main" id="{FC45165F-3473-459D-9B99-4C4C55CBF58F}"/>
+              </a:ext>
+            </a:extLst>
+          </p:cNvPr>
+          <p:cNvSpPr>
+            <a:spLocks xmlns:a="http://schemas.openxmlformats.org/drawingml/2006/main" noGrp="1"/>
+          </p:cNvSpPr>
+          <p:nvPr/>
+        </p:nvSpPr>
+        <p:spPr>
+          <a:xfrm xmlns:a="http://schemas.openxmlformats.org/drawingml/2006/main">
+            <a:off x="552450" y="2000250"/>
+            <a:ext cx="3429000" cy="3067050"/>
           </a:xfrm>
           <a:prstGeom xmlns:a="http://schemas.openxmlformats.org/drawingml/2006/main" prst="roundRect">
             <a:avLst>
-              <a:gd name="adj" fmla="val 3333"/>
+              <a:gd name="adj" fmla="val 3727"/>
             </a:avLst>
           </a:prstGeom>
           <a:solidFill xmlns:a="http://schemas.openxmlformats.org/drawingml/2006/main">
@@ -13753,21 +14008,21 @@
       </p:sp>
       <p:sp>
         <p:nvSpPr>
-          <p:cNvPr id="16" name="">
-            <a:extLst xmlns:a="http://schemas.openxmlformats.org/drawingml/2006/main">
-              <a:ext uri="{FF2B5EF4-FFF2-40B4-BE49-F238E27FC236}">
-                <a16:creationId xmlns:a16="http://schemas.microsoft.com/office/drawing/2014/main" id="{868F2A90-8F44-4AE2-BBC4-7F8F1C760C60}"/>
-              </a:ext>
-            </a:extLst>
-          </p:cNvPr>
-          <p:cNvSpPr>
-            <a:spLocks xmlns:a="http://schemas.openxmlformats.org/drawingml/2006/main" noGrp="1"/>
-          </p:cNvSpPr>
-          <p:nvPr/>
-        </p:nvSpPr>
-        <p:spPr>
-          <a:xfrm xmlns:a="http://schemas.openxmlformats.org/drawingml/2006/main">
-            <a:off x="685800" y="1562100"/>
+          <p:cNvPr id="18" name="">
+            <a:extLst xmlns:a="http://schemas.openxmlformats.org/drawingml/2006/main">
+              <a:ext uri="{FF2B5EF4-FFF2-40B4-BE49-F238E27FC236}">
+                <a16:creationId xmlns:a16="http://schemas.microsoft.com/office/drawing/2014/main" id="{979DF1F7-8209-42A3-AC7D-01CCB440811E}"/>
+              </a:ext>
+            </a:extLst>
+          </p:cNvPr>
+          <p:cNvSpPr>
+            <a:spLocks xmlns:a="http://schemas.openxmlformats.org/drawingml/2006/main" noGrp="1"/>
+          </p:cNvSpPr>
+          <p:nvPr/>
+        </p:nvSpPr>
+        <p:spPr>
+          <a:xfrm xmlns:a="http://schemas.openxmlformats.org/drawingml/2006/main">
+            <a:off x="685800" y="2133600"/>
             <a:ext cx="1428750" cy="457200"/>
           </a:xfrm>
           <a:prstGeom xmlns:a="http://schemas.openxmlformats.org/drawingml/2006/main" prst="roundRect">
@@ -13815,22 +14070,22 @@
       </p:sp>
       <p:sp>
         <p:nvSpPr>
-          <p:cNvPr id="17" name="">
-            <a:extLst xmlns:a="http://schemas.openxmlformats.org/drawingml/2006/main">
-              <a:ext uri="{FF2B5EF4-FFF2-40B4-BE49-F238E27FC236}">
-                <a16:creationId xmlns:a16="http://schemas.microsoft.com/office/drawing/2014/main" id="{77BFB922-CC08-4266-A7FF-39B8703A3051}"/>
-              </a:ext>
-            </a:extLst>
-          </p:cNvPr>
-          <p:cNvSpPr>
-            <a:spLocks xmlns:a="http://schemas.openxmlformats.org/drawingml/2006/main" noGrp="1"/>
-          </p:cNvSpPr>
-          <p:nvPr/>
-        </p:nvSpPr>
-        <p:spPr>
-          <a:xfrm xmlns:a="http://schemas.openxmlformats.org/drawingml/2006/main">
-            <a:off x="781050" y="2171700"/>
-            <a:ext cx="2971800" cy="2781300"/>
+          <p:cNvPr id="19" name="">
+            <a:extLst xmlns:a="http://schemas.openxmlformats.org/drawingml/2006/main">
+              <a:ext uri="{FF2B5EF4-FFF2-40B4-BE49-F238E27FC236}">
+                <a16:creationId xmlns:a16="http://schemas.microsoft.com/office/drawing/2014/main" id="{7CE9445B-515F-412C-8C6C-26AAE882DF8A}"/>
+              </a:ext>
+            </a:extLst>
+          </p:cNvPr>
+          <p:cNvSpPr>
+            <a:spLocks xmlns:a="http://schemas.openxmlformats.org/drawingml/2006/main" noGrp="1"/>
+          </p:cNvSpPr>
+          <p:nvPr/>
+        </p:nvSpPr>
+        <p:spPr>
+          <a:xfrm xmlns:a="http://schemas.openxmlformats.org/drawingml/2006/main">
+            <a:off x="781050" y="2743200"/>
+            <a:ext cx="2971800" cy="2209800"/>
           </a:xfrm>
           <a:prstGeom xmlns:a="http://schemas.openxmlformats.org/drawingml/2006/main" prst="rect">
             <a:avLst/>
@@ -13945,26 +14200,26 @@
       </p:sp>
       <p:sp>
         <p:nvSpPr>
-          <p:cNvPr id="18" name="">
-            <a:extLst xmlns:a="http://schemas.openxmlformats.org/drawingml/2006/main">
-              <a:ext uri="{FF2B5EF4-FFF2-40B4-BE49-F238E27FC236}">
-                <a16:creationId xmlns:a16="http://schemas.microsoft.com/office/drawing/2014/main" id="{D573DB20-0FBF-4AB0-84C5-B6E14945162B}"/>
-              </a:ext>
-            </a:extLst>
-          </p:cNvPr>
-          <p:cNvSpPr>
-            <a:spLocks xmlns:a="http://schemas.openxmlformats.org/drawingml/2006/main" noGrp="1"/>
-          </p:cNvSpPr>
-          <p:nvPr/>
-        </p:nvSpPr>
-        <p:spPr>
-          <a:xfrm xmlns:a="http://schemas.openxmlformats.org/drawingml/2006/main">
-            <a:off x="4381500" y="1428750"/>
-            <a:ext cx="3429000" cy="3638550"/>
+          <p:cNvPr id="20" name="">
+            <a:extLst xmlns:a="http://schemas.openxmlformats.org/drawingml/2006/main">
+              <a:ext uri="{FF2B5EF4-FFF2-40B4-BE49-F238E27FC236}">
+                <a16:creationId xmlns:a16="http://schemas.microsoft.com/office/drawing/2014/main" id="{94BEFEDC-5070-4757-8BA2-E74F22A486CF}"/>
+              </a:ext>
+            </a:extLst>
+          </p:cNvPr>
+          <p:cNvSpPr>
+            <a:spLocks xmlns:a="http://schemas.openxmlformats.org/drawingml/2006/main" noGrp="1"/>
+          </p:cNvSpPr>
+          <p:nvPr/>
+        </p:nvSpPr>
+        <p:spPr>
+          <a:xfrm xmlns:a="http://schemas.openxmlformats.org/drawingml/2006/main">
+            <a:off x="4381500" y="2000250"/>
+            <a:ext cx="3429000" cy="3067050"/>
           </a:xfrm>
           <a:prstGeom xmlns:a="http://schemas.openxmlformats.org/drawingml/2006/main" prst="roundRect">
             <a:avLst>
-              <a:gd name="adj" fmla="val 3333"/>
+              <a:gd name="adj" fmla="val 3727"/>
             </a:avLst>
           </a:prstGeom>
           <a:solidFill xmlns:a="http://schemas.openxmlformats.org/drawingml/2006/main">
@@ -13980,21 +14235,21 @@
       </p:sp>
       <p:sp>
         <p:nvSpPr>
-          <p:cNvPr id="19" name="">
-            <a:extLst xmlns:a="http://schemas.openxmlformats.org/drawingml/2006/main">
-              <a:ext uri="{FF2B5EF4-FFF2-40B4-BE49-F238E27FC236}">
-                <a16:creationId xmlns:a16="http://schemas.microsoft.com/office/drawing/2014/main" id="{3D7CD1C1-1286-4999-BBCF-5D0969770872}"/>
-              </a:ext>
-            </a:extLst>
-          </p:cNvPr>
-          <p:cNvSpPr>
-            <a:spLocks xmlns:a="http://schemas.openxmlformats.org/drawingml/2006/main" noGrp="1"/>
-          </p:cNvSpPr>
-          <p:nvPr/>
-        </p:nvSpPr>
-        <p:spPr>
-          <a:xfrm xmlns:a="http://schemas.openxmlformats.org/drawingml/2006/main">
-            <a:off x="4514850" y="1562100"/>
+          <p:cNvPr id="21" name="">
+            <a:extLst xmlns:a="http://schemas.openxmlformats.org/drawingml/2006/main">
+              <a:ext uri="{FF2B5EF4-FFF2-40B4-BE49-F238E27FC236}">
+                <a16:creationId xmlns:a16="http://schemas.microsoft.com/office/drawing/2014/main" id="{5DE889B7-9352-45D7-8DED-22007A69DEF6}"/>
+              </a:ext>
+            </a:extLst>
+          </p:cNvPr>
+          <p:cNvSpPr>
+            <a:spLocks xmlns:a="http://schemas.openxmlformats.org/drawingml/2006/main" noGrp="1"/>
+          </p:cNvSpPr>
+          <p:nvPr/>
+        </p:nvSpPr>
+        <p:spPr>
+          <a:xfrm xmlns:a="http://schemas.openxmlformats.org/drawingml/2006/main">
+            <a:off x="4514850" y="2133600"/>
             <a:ext cx="1428750" cy="457200"/>
           </a:xfrm>
           <a:prstGeom xmlns:a="http://schemas.openxmlformats.org/drawingml/2006/main" prst="roundRect">
@@ -14042,22 +14297,22 @@
       </p:sp>
       <p:sp>
         <p:nvSpPr>
-          <p:cNvPr id="20" name="">
-            <a:extLst xmlns:a="http://schemas.openxmlformats.org/drawingml/2006/main">
-              <a:ext uri="{FF2B5EF4-FFF2-40B4-BE49-F238E27FC236}">
-                <a16:creationId xmlns:a16="http://schemas.microsoft.com/office/drawing/2014/main" id="{C7E2E22C-551D-4431-8F73-B4299FEA192E}"/>
-              </a:ext>
-            </a:extLst>
-          </p:cNvPr>
-          <p:cNvSpPr>
-            <a:spLocks xmlns:a="http://schemas.openxmlformats.org/drawingml/2006/main" noGrp="1"/>
-          </p:cNvSpPr>
-          <p:nvPr/>
-        </p:nvSpPr>
-        <p:spPr>
-          <a:xfrm xmlns:a="http://schemas.openxmlformats.org/drawingml/2006/main">
-            <a:off x="4610100" y="2171700"/>
-            <a:ext cx="2971800" cy="2781300"/>
+          <p:cNvPr id="22" name="">
+            <a:extLst xmlns:a="http://schemas.openxmlformats.org/drawingml/2006/main">
+              <a:ext uri="{FF2B5EF4-FFF2-40B4-BE49-F238E27FC236}">
+                <a16:creationId xmlns:a16="http://schemas.microsoft.com/office/drawing/2014/main" id="{B8B6820C-4E01-4633-AAAB-85276AE21AC3}"/>
+              </a:ext>
+            </a:extLst>
+          </p:cNvPr>
+          <p:cNvSpPr>
+            <a:spLocks xmlns:a="http://schemas.openxmlformats.org/drawingml/2006/main" noGrp="1"/>
+          </p:cNvSpPr>
+          <p:nvPr/>
+        </p:nvSpPr>
+        <p:spPr>
+          <a:xfrm xmlns:a="http://schemas.openxmlformats.org/drawingml/2006/main">
+            <a:off x="4610100" y="2743200"/>
+            <a:ext cx="2971800" cy="2209800"/>
           </a:xfrm>
           <a:prstGeom xmlns:a="http://schemas.openxmlformats.org/drawingml/2006/main" prst="rect">
             <a:avLst/>
@@ -14172,26 +14427,26 @@
       </p:sp>
       <p:sp>
         <p:nvSpPr>
-          <p:cNvPr id="21" name="">
-            <a:extLst xmlns:a="http://schemas.openxmlformats.org/drawingml/2006/main">
-              <a:ext uri="{FF2B5EF4-FFF2-40B4-BE49-F238E27FC236}">
-                <a16:creationId xmlns:a16="http://schemas.microsoft.com/office/drawing/2014/main" id="{E93F3F3B-444C-4FE7-8522-26E81BABDD23}"/>
-              </a:ext>
-            </a:extLst>
-          </p:cNvPr>
-          <p:cNvSpPr>
-            <a:spLocks xmlns:a="http://schemas.openxmlformats.org/drawingml/2006/main" noGrp="1"/>
-          </p:cNvSpPr>
-          <p:nvPr/>
-        </p:nvSpPr>
-        <p:spPr>
-          <a:xfrm xmlns:a="http://schemas.openxmlformats.org/drawingml/2006/main">
-            <a:off x="8210550" y="1428750"/>
-            <a:ext cx="3429000" cy="3638550"/>
+          <p:cNvPr id="23" name="">
+            <a:extLst xmlns:a="http://schemas.openxmlformats.org/drawingml/2006/main">
+              <a:ext uri="{FF2B5EF4-FFF2-40B4-BE49-F238E27FC236}">
+                <a16:creationId xmlns:a16="http://schemas.microsoft.com/office/drawing/2014/main" id="{FE50A75C-12EB-410B-9461-64B4E3DA8AB5}"/>
+              </a:ext>
+            </a:extLst>
+          </p:cNvPr>
+          <p:cNvSpPr>
+            <a:spLocks xmlns:a="http://schemas.openxmlformats.org/drawingml/2006/main" noGrp="1"/>
+          </p:cNvSpPr>
+          <p:nvPr/>
+        </p:nvSpPr>
+        <p:spPr>
+          <a:xfrm xmlns:a="http://schemas.openxmlformats.org/drawingml/2006/main">
+            <a:off x="8210550" y="2000250"/>
+            <a:ext cx="3429000" cy="3067050"/>
           </a:xfrm>
           <a:prstGeom xmlns:a="http://schemas.openxmlformats.org/drawingml/2006/main" prst="roundRect">
             <a:avLst>
-              <a:gd name="adj" fmla="val 3333"/>
+              <a:gd name="adj" fmla="val 3727"/>
             </a:avLst>
           </a:prstGeom>
           <a:solidFill xmlns:a="http://schemas.openxmlformats.org/drawingml/2006/main">
@@ -14207,21 +14462,21 @@
       </p:sp>
       <p:sp>
         <p:nvSpPr>
-          <p:cNvPr id="22" name="">
-            <a:extLst xmlns:a="http://schemas.openxmlformats.org/drawingml/2006/main">
-              <a:ext uri="{FF2B5EF4-FFF2-40B4-BE49-F238E27FC236}">
-                <a16:creationId xmlns:a16="http://schemas.microsoft.com/office/drawing/2014/main" id="{C84DA585-E660-4214-8806-DA99D8AACA06}"/>
-              </a:ext>
-            </a:extLst>
-          </p:cNvPr>
-          <p:cNvSpPr>
-            <a:spLocks xmlns:a="http://schemas.openxmlformats.org/drawingml/2006/main" noGrp="1"/>
-          </p:cNvSpPr>
-          <p:nvPr/>
-        </p:nvSpPr>
-        <p:spPr>
-          <a:xfrm xmlns:a="http://schemas.openxmlformats.org/drawingml/2006/main">
-            <a:off x="8343900" y="1562100"/>
+          <p:cNvPr id="24" name="">
+            <a:extLst xmlns:a="http://schemas.openxmlformats.org/drawingml/2006/main">
+              <a:ext uri="{FF2B5EF4-FFF2-40B4-BE49-F238E27FC236}">
+                <a16:creationId xmlns:a16="http://schemas.microsoft.com/office/drawing/2014/main" id="{E412E4B2-7F01-4BBD-A421-390A9642B72D}"/>
+              </a:ext>
+            </a:extLst>
+          </p:cNvPr>
+          <p:cNvSpPr>
+            <a:spLocks xmlns:a="http://schemas.openxmlformats.org/drawingml/2006/main" noGrp="1"/>
+          </p:cNvSpPr>
+          <p:nvPr/>
+        </p:nvSpPr>
+        <p:spPr>
+          <a:xfrm xmlns:a="http://schemas.openxmlformats.org/drawingml/2006/main">
+            <a:off x="8343900" y="2133600"/>
             <a:ext cx="1828800" cy="457200"/>
           </a:xfrm>
           <a:prstGeom xmlns:a="http://schemas.openxmlformats.org/drawingml/2006/main" prst="roundRect">
@@ -14269,22 +14524,22 @@
       </p:sp>
       <p:sp>
         <p:nvSpPr>
-          <p:cNvPr id="23" name="">
-            <a:extLst xmlns:a="http://schemas.openxmlformats.org/drawingml/2006/main">
-              <a:ext uri="{FF2B5EF4-FFF2-40B4-BE49-F238E27FC236}">
-                <a16:creationId xmlns:a16="http://schemas.microsoft.com/office/drawing/2014/main" id="{A96CD283-2B53-4026-A502-B030DFE16E9F}"/>
-              </a:ext>
-            </a:extLst>
-          </p:cNvPr>
-          <p:cNvSpPr>
-            <a:spLocks xmlns:a="http://schemas.openxmlformats.org/drawingml/2006/main" noGrp="1"/>
-          </p:cNvSpPr>
-          <p:nvPr/>
-        </p:nvSpPr>
-        <p:spPr>
-          <a:xfrm xmlns:a="http://schemas.openxmlformats.org/drawingml/2006/main">
-            <a:off x="8439150" y="2171700"/>
-            <a:ext cx="2971800" cy="2781300"/>
+          <p:cNvPr id="25" name="">
+            <a:extLst xmlns:a="http://schemas.openxmlformats.org/drawingml/2006/main">
+              <a:ext uri="{FF2B5EF4-FFF2-40B4-BE49-F238E27FC236}">
+                <a16:creationId xmlns:a16="http://schemas.microsoft.com/office/drawing/2014/main" id="{F628A397-2B5B-4C25-AE3A-35B5A89BF496}"/>
+              </a:ext>
+            </a:extLst>
+          </p:cNvPr>
+          <p:cNvSpPr>
+            <a:spLocks xmlns:a="http://schemas.openxmlformats.org/drawingml/2006/main" noGrp="1"/>
+          </p:cNvSpPr>
+          <p:nvPr/>
+        </p:nvSpPr>
+        <p:spPr>
+          <a:xfrm xmlns:a="http://schemas.openxmlformats.org/drawingml/2006/main">
+            <a:off x="8439150" y="2743200"/>
+            <a:ext cx="2971800" cy="2209800"/>
           </a:xfrm>
           <a:prstGeom xmlns:a="http://schemas.openxmlformats.org/drawingml/2006/main" prst="rect">
             <a:avLst/>
@@ -14399,10 +14654,10 @@
       </p:sp>
       <p:sp>
         <p:nvSpPr>
-          <p:cNvPr id="24" name="">
-            <a:extLst xmlns:a="http://schemas.openxmlformats.org/drawingml/2006/main">
-              <a:ext uri="{FF2B5EF4-FFF2-40B4-BE49-F238E27FC236}">
-                <a16:creationId xmlns:a16="http://schemas.microsoft.com/office/drawing/2014/main" id="{B48DEDEE-D8A5-4F92-98A5-6D18926E4509}"/>
+          <p:cNvPr id="26" name="">
+            <a:extLst xmlns:a="http://schemas.openxmlformats.org/drawingml/2006/main">
+              <a:ext uri="{FF2B5EF4-FFF2-40B4-BE49-F238E27FC236}">
+                <a16:creationId xmlns:a16="http://schemas.microsoft.com/office/drawing/2014/main" id="{9E75FA60-E6D7-4388-9F76-101A5FD6D955}"/>
               </a:ext>
             </a:extLst>
           </p:cNvPr>
@@ -14434,10 +14689,10 @@
       </p:sp>
       <p:sp>
         <p:nvSpPr>
-          <p:cNvPr id="25" name="">
-            <a:extLst xmlns:a="http://schemas.openxmlformats.org/drawingml/2006/main">
-              <a:ext uri="{FF2B5EF4-FFF2-40B4-BE49-F238E27FC236}">
-                <a16:creationId xmlns:a16="http://schemas.microsoft.com/office/drawing/2014/main" id="{F10A13B0-DD99-4640-9FBB-D2BF7C124BA0}"/>
+          <p:cNvPr id="27" name="">
+            <a:extLst xmlns:a="http://schemas.openxmlformats.org/drawingml/2006/main">
+              <a:ext uri="{FF2B5EF4-FFF2-40B4-BE49-F238E27FC236}">
+                <a16:creationId xmlns:a16="http://schemas.microsoft.com/office/drawing/2014/main" id="{572D501A-375F-4FA8-A0A1-897252FCD45A}"/>
               </a:ext>
             </a:extLst>
           </p:cNvPr>
@@ -14490,10 +14745,10 @@
       </p:sp>
       <p:sp>
         <p:nvSpPr>
-          <p:cNvPr id="26" name="">
-            <a:extLst xmlns:a="http://schemas.openxmlformats.org/drawingml/2006/main">
-              <a:ext uri="{FF2B5EF4-FFF2-40B4-BE49-F238E27FC236}">
-                <a16:creationId xmlns:a16="http://schemas.microsoft.com/office/drawing/2014/main" id="{52EF03FF-82C8-442B-95B0-C4ECC10BD0CB}"/>
+          <p:cNvPr id="28" name="">
+            <a:extLst xmlns:a="http://schemas.openxmlformats.org/drawingml/2006/main">
+              <a:ext uri="{FF2B5EF4-FFF2-40B4-BE49-F238E27FC236}">
+                <a16:creationId xmlns:a16="http://schemas.microsoft.com/office/drawing/2014/main" id="{C6E4A567-9B5B-47EF-BEEE-4B481D9F1152}"/>
               </a:ext>
             </a:extLst>
           </p:cNvPr>
@@ -14547,7 +14802,7 @@
     </p:spTree>
     <p:extLst>
       <p:ext uri="{BB962C8B-B14F-4D97-AF65-F5344CB8AC3E}">
-        <p14:creationId xmlns:p14="http://schemas.microsoft.com/office/powerpoint/2010/main" val="1615703694"/>
+        <p14:creationId xmlns:p14="http://schemas.microsoft.com/office/powerpoint/2010/main" val="1138225371"/>
       </p:ext>
     </p:extLst>
   </p:cSld>
@@ -14571,7 +14826,7 @@
           <p:cNvPr id="4" name="直角三角形 3">
             <a:extLst xmlns:a="http://schemas.openxmlformats.org/drawingml/2006/main">
               <a:ext uri="{FF2B5EF4-FFF2-40B4-BE49-F238E27FC236}">
-                <a16:creationId xmlns:a16="http://schemas.microsoft.com/office/drawing/2014/main" id="{3B19CB5B-F494-4FE9-97B8-C50A353E69A9}"/>
+                <a16:creationId xmlns:a16="http://schemas.microsoft.com/office/drawing/2014/main" id="{267101EB-CD90-4152-A909-E59567D092FA}"/>
               </a:ext>
             </a:extLst>
           </p:cNvPr>
@@ -14629,7 +14884,7 @@
           <p:cNvPr id="5" name="圆角矩形 2">
             <a:extLst xmlns:a="http://schemas.openxmlformats.org/drawingml/2006/main">
               <a:ext uri="{FF2B5EF4-FFF2-40B4-BE49-F238E27FC236}">
-                <a16:creationId xmlns:a16="http://schemas.microsoft.com/office/drawing/2014/main" id="{F78026ED-34D7-48FF-9D74-486DE66636AD}"/>
+                <a16:creationId xmlns:a16="http://schemas.microsoft.com/office/drawing/2014/main" id="{3C66C3DA-A7BC-4C4E-B1B1-910C6FCCCC1F}"/>
               </a:ext>
             </a:extLst>
           </p:cNvPr>
@@ -14689,7 +14944,7 @@
           <p:cNvPr id="6" name="对角圆角矩形 80">
             <a:extLst xmlns:a="http://schemas.openxmlformats.org/drawingml/2006/main">
               <a:ext uri="{FF2B5EF4-FFF2-40B4-BE49-F238E27FC236}">
-                <a16:creationId xmlns:a16="http://schemas.microsoft.com/office/drawing/2014/main" id="{39C36C26-EC52-4FA8-935A-C80E1EB3D336}"/>
+                <a16:creationId xmlns:a16="http://schemas.microsoft.com/office/drawing/2014/main" id="{0C6B71E6-58D0-4576-B64E-54298ABF0633}"/>
               </a:ext>
             </a:extLst>
           </p:cNvPr>
@@ -14763,7 +15018,7 @@
           <p:cNvPr id="7" name="直角三角形 6">
             <a:extLst xmlns:a="http://schemas.openxmlformats.org/drawingml/2006/main">
               <a:ext uri="{FF2B5EF4-FFF2-40B4-BE49-F238E27FC236}">
-                <a16:creationId xmlns:a16="http://schemas.microsoft.com/office/drawing/2014/main" id="{AB2674C8-01F0-4BC0-BA36-8066FCAE77AD}"/>
+                <a16:creationId xmlns:a16="http://schemas.microsoft.com/office/drawing/2014/main" id="{CC1B78A6-9FB8-4976-B97A-0EAEE4C2B21E}"/>
               </a:ext>
             </a:extLst>
           </p:cNvPr>
@@ -14821,7 +15076,7 @@
           <p:cNvPr id="8" name="圆角矩形 2">
             <a:extLst xmlns:a="http://schemas.openxmlformats.org/drawingml/2006/main">
               <a:ext uri="{FF2B5EF4-FFF2-40B4-BE49-F238E27FC236}">
-                <a16:creationId xmlns:a16="http://schemas.microsoft.com/office/drawing/2014/main" id="{28936605-FC7B-48C8-9138-F4A36866A74B}"/>
+                <a16:creationId xmlns:a16="http://schemas.microsoft.com/office/drawing/2014/main" id="{C81D0DB0-2CD9-4B95-A1D2-051488E332F5}"/>
               </a:ext>
             </a:extLst>
           </p:cNvPr>
@@ -14881,7 +15136,7 @@
           <p:cNvPr id="9" name="对角圆角矩形 80">
             <a:extLst xmlns:a="http://schemas.openxmlformats.org/drawingml/2006/main">
               <a:ext uri="{FF2B5EF4-FFF2-40B4-BE49-F238E27FC236}">
-                <a16:creationId xmlns:a16="http://schemas.microsoft.com/office/drawing/2014/main" id="{3B63DF55-BC82-4CB8-8A3A-21F7E3374F1B}"/>
+                <a16:creationId xmlns:a16="http://schemas.microsoft.com/office/drawing/2014/main" id="{926A3AD9-1AE6-4020-AE6F-29BBBA858592}"/>
               </a:ext>
             </a:extLst>
           </p:cNvPr>
@@ -14955,7 +15210,7 @@
           <p:cNvPr id="10" name="直角三角形 9">
             <a:extLst xmlns:a="http://schemas.openxmlformats.org/drawingml/2006/main">
               <a:ext uri="{FF2B5EF4-FFF2-40B4-BE49-F238E27FC236}">
-                <a16:creationId xmlns:a16="http://schemas.microsoft.com/office/drawing/2014/main" id="{F266D5D9-09A8-43F8-ABCB-AE6CF4A5587A}"/>
+                <a16:creationId xmlns:a16="http://schemas.microsoft.com/office/drawing/2014/main" id="{4542651A-10A2-44BF-8F98-9D7375EC441C}"/>
               </a:ext>
             </a:extLst>
           </p:cNvPr>
@@ -15013,7 +15268,7 @@
           <p:cNvPr id="11" name="圆角矩形 2">
             <a:extLst xmlns:a="http://schemas.openxmlformats.org/drawingml/2006/main">
               <a:ext uri="{FF2B5EF4-FFF2-40B4-BE49-F238E27FC236}">
-                <a16:creationId xmlns:a16="http://schemas.microsoft.com/office/drawing/2014/main" id="{F9E46E32-6878-4BD7-9B13-3B22C1BE80AC}"/>
+                <a16:creationId xmlns:a16="http://schemas.microsoft.com/office/drawing/2014/main" id="{6AD2D4C3-25A8-43DE-87E3-A3C842872C11}"/>
               </a:ext>
             </a:extLst>
           </p:cNvPr>
@@ -15073,7 +15328,7 @@
           <p:cNvPr id="12" name="对角圆角矩形 80">
             <a:extLst xmlns:a="http://schemas.openxmlformats.org/drawingml/2006/main">
               <a:ext uri="{FF2B5EF4-FFF2-40B4-BE49-F238E27FC236}">
-                <a16:creationId xmlns:a16="http://schemas.microsoft.com/office/drawing/2014/main" id="{F3358290-DA19-4844-A7E8-50216051FB2C}"/>
+                <a16:creationId xmlns:a16="http://schemas.microsoft.com/office/drawing/2014/main" id="{EBC60284-A384-451D-BFE9-2A2F50F8C5CF}"/>
               </a:ext>
             </a:extLst>
           </p:cNvPr>
@@ -15147,7 +15402,7 @@
           <p:cNvPr id="14" name="">
             <a:extLst xmlns:a="http://schemas.openxmlformats.org/drawingml/2006/main">
               <a:ext uri="{FF2B5EF4-FFF2-40B4-BE49-F238E27FC236}">
-                <a16:creationId xmlns:a16="http://schemas.microsoft.com/office/drawing/2014/main" id="{5BCD2419-B3B4-4AA4-8611-BB9BD6ED7AE7}"/>
+                <a16:creationId xmlns:a16="http://schemas.microsoft.com/office/drawing/2014/main" id="{94B76AE3-4384-447B-A8C8-6C742F251C03}"/>
               </a:ext>
             </a:extLst>
           </p:cNvPr>
@@ -15180,7 +15435,7 @@
           <p:cNvPr id="15" name="">
             <a:extLst xmlns:a="http://schemas.openxmlformats.org/drawingml/2006/main">
               <a:ext uri="{FF2B5EF4-FFF2-40B4-BE49-F238E27FC236}">
-                <a16:creationId xmlns:a16="http://schemas.microsoft.com/office/drawing/2014/main" id="{901916D3-07FE-4CAE-9FF5-6CF6684D55EB}"/>
+                <a16:creationId xmlns:a16="http://schemas.microsoft.com/office/drawing/2014/main" id="{A2802D2E-95D8-4C75-8788-E458F9410FBD}"/>
               </a:ext>
             </a:extLst>
           </p:cNvPr>
@@ -15236,7 +15491,7 @@
           <p:cNvPr id="16" name="">
             <a:extLst xmlns:a="http://schemas.openxmlformats.org/drawingml/2006/main">
               <a:ext uri="{FF2B5EF4-FFF2-40B4-BE49-F238E27FC236}">
-                <a16:creationId xmlns:a16="http://schemas.microsoft.com/office/drawing/2014/main" id="{86490812-2184-4008-BC46-68F921346F21}"/>
+                <a16:creationId xmlns:a16="http://schemas.microsoft.com/office/drawing/2014/main" id="{B9B350EE-4940-4A5F-9B94-76B4124152E6}"/>
               </a:ext>
             </a:extLst>
           </p:cNvPr>
@@ -15269,7 +15524,7 @@
           <p:cNvPr id="17" name="">
             <a:extLst xmlns:a="http://schemas.openxmlformats.org/drawingml/2006/main">
               <a:ext uri="{FF2B5EF4-FFF2-40B4-BE49-F238E27FC236}">
-                <a16:creationId xmlns:a16="http://schemas.microsoft.com/office/drawing/2014/main" id="{182DD10E-DCD6-4971-A0BD-C8A0FDF4AA97}"/>
+                <a16:creationId xmlns:a16="http://schemas.microsoft.com/office/drawing/2014/main" id="{173ACA91-A669-43F0-8205-23488D858848}"/>
               </a:ext>
             </a:extLst>
           </p:cNvPr>
@@ -15325,7 +15580,7 @@
           <p:cNvPr id="18" name="">
             <a:extLst xmlns:a="http://schemas.openxmlformats.org/drawingml/2006/main">
               <a:ext uri="{FF2B5EF4-FFF2-40B4-BE49-F238E27FC236}">
-                <a16:creationId xmlns:a16="http://schemas.microsoft.com/office/drawing/2014/main" id="{E594EA64-936B-4ACE-812F-4F9F919EFF51}"/>
+                <a16:creationId xmlns:a16="http://schemas.microsoft.com/office/drawing/2014/main" id="{766B1B94-88D5-4E85-AB01-08D61655D1D3}"/>
               </a:ext>
             </a:extLst>
           </p:cNvPr>
@@ -15360,7 +15615,7 @@
           <p:cNvPr id="19" name="">
             <a:extLst xmlns:a="http://schemas.openxmlformats.org/drawingml/2006/main">
               <a:ext uri="{FF2B5EF4-FFF2-40B4-BE49-F238E27FC236}">
-                <a16:creationId xmlns:a16="http://schemas.microsoft.com/office/drawing/2014/main" id="{3C82F6BA-CD30-4345-A018-0896CAD968F8}"/>
+                <a16:creationId xmlns:a16="http://schemas.microsoft.com/office/drawing/2014/main" id="{B63E845B-65CE-4B16-AA0F-BA8972AF9000}"/>
               </a:ext>
             </a:extLst>
           </p:cNvPr>
@@ -15422,7 +15677,7 @@
           <p:cNvPr id="20" name="">
             <a:extLst xmlns:a="http://schemas.openxmlformats.org/drawingml/2006/main">
               <a:ext uri="{FF2B5EF4-FFF2-40B4-BE49-F238E27FC236}">
-                <a16:creationId xmlns:a16="http://schemas.microsoft.com/office/drawing/2014/main" id="{2B197C96-5A02-45C4-8C07-98BD93D285D4}"/>
+                <a16:creationId xmlns:a16="http://schemas.microsoft.com/office/drawing/2014/main" id="{7087A9C5-BF83-4797-81BE-3D8E168F1447}"/>
               </a:ext>
             </a:extLst>
           </p:cNvPr>
@@ -15570,7 +15825,7 @@
           <p:cNvPr id="21" name="">
             <a:extLst xmlns:a="http://schemas.openxmlformats.org/drawingml/2006/main">
               <a:ext uri="{FF2B5EF4-FFF2-40B4-BE49-F238E27FC236}">
-                <a16:creationId xmlns:a16="http://schemas.microsoft.com/office/drawing/2014/main" id="{9744E2A0-6EB1-4A6E-9B0C-04D33F5F7FDB}"/>
+                <a16:creationId xmlns:a16="http://schemas.microsoft.com/office/drawing/2014/main" id="{DE0E7A19-FAAD-4FA2-8AE6-9D08F43918E2}"/>
               </a:ext>
             </a:extLst>
           </p:cNvPr>
@@ -15605,7 +15860,7 @@
           <p:cNvPr id="22" name="">
             <a:extLst xmlns:a="http://schemas.openxmlformats.org/drawingml/2006/main">
               <a:ext uri="{FF2B5EF4-FFF2-40B4-BE49-F238E27FC236}">
-                <a16:creationId xmlns:a16="http://schemas.microsoft.com/office/drawing/2014/main" id="{89986CF2-7498-4E81-BC99-EE647CAF97C6}"/>
+                <a16:creationId xmlns:a16="http://schemas.microsoft.com/office/drawing/2014/main" id="{D55DC763-C6BF-447A-A66A-1F6D2790E526}"/>
               </a:ext>
             </a:extLst>
           </p:cNvPr>
@@ -15667,7 +15922,7 @@
           <p:cNvPr id="23" name="">
             <a:extLst xmlns:a="http://schemas.openxmlformats.org/drawingml/2006/main">
               <a:ext uri="{FF2B5EF4-FFF2-40B4-BE49-F238E27FC236}">
-                <a16:creationId xmlns:a16="http://schemas.microsoft.com/office/drawing/2014/main" id="{4806EB55-5100-49A0-AB17-99BECD970170}"/>
+                <a16:creationId xmlns:a16="http://schemas.microsoft.com/office/drawing/2014/main" id="{D6B5191A-E967-4489-B97E-6559CE242DF1}"/>
               </a:ext>
             </a:extLst>
           </p:cNvPr>
@@ -15815,7 +16070,7 @@
           <p:cNvPr id="24" name="">
             <a:extLst xmlns:a="http://schemas.openxmlformats.org/drawingml/2006/main">
               <a:ext uri="{FF2B5EF4-FFF2-40B4-BE49-F238E27FC236}">
-                <a16:creationId xmlns:a16="http://schemas.microsoft.com/office/drawing/2014/main" id="{54632157-E958-4DC4-AE14-EFC794C4248B}"/>
+                <a16:creationId xmlns:a16="http://schemas.microsoft.com/office/drawing/2014/main" id="{16A58269-826E-459D-B798-1E64F6EDB4A8}"/>
               </a:ext>
             </a:extLst>
           </p:cNvPr>
@@ -15871,7 +16126,7 @@
           <p:cNvPr id="25" name="">
             <a:extLst xmlns:a="http://schemas.openxmlformats.org/drawingml/2006/main">
               <a:ext uri="{FF2B5EF4-FFF2-40B4-BE49-F238E27FC236}">
-                <a16:creationId xmlns:a16="http://schemas.microsoft.com/office/drawing/2014/main" id="{31A68D49-3BD4-40B3-97E9-64006404C886}"/>
+                <a16:creationId xmlns:a16="http://schemas.microsoft.com/office/drawing/2014/main" id="{99775019-BABC-456F-A421-DBEA9DD1107C}"/>
               </a:ext>
             </a:extLst>
           </p:cNvPr>
@@ -15925,7 +16180,7 @@
     </p:spTree>
     <p:extLst>
       <p:ext uri="{BB962C8B-B14F-4D97-AF65-F5344CB8AC3E}">
-        <p14:creationId xmlns:p14="http://schemas.microsoft.com/office/powerpoint/2010/main" val="48134091"/>
+        <p14:creationId xmlns:p14="http://schemas.microsoft.com/office/powerpoint/2010/main" val="874589279"/>
       </p:ext>
     </p:extLst>
   </p:cSld>
@@ -15938,7 +16193,7 @@
     <p:bg>
       <p:bgPr>
         <a:blipFill xmlns:a="http://schemas.openxmlformats.org/drawingml/2006/main" rotWithShape="1">
-          <a:blip xmlns:r="http://schemas.openxmlformats.org/officeDocument/2006/relationships" r:embed="R99595a0854c640f9">
+          <a:blip xmlns:r="http://schemas.openxmlformats.org/officeDocument/2006/relationships" r:embed="R5b3d50b184344600">
             <a:lum/>
           </a:blip>
           <a:srcRect l="0" t="0" r="0" b="0"/>
@@ -15966,7 +16221,7 @@
           <p:nvPr/>
         </p:nvPicPr>
         <p:blipFill>
-          <a:blip xmlns:r="http://schemas.openxmlformats.org/officeDocument/2006/relationships" xmlns:a="http://schemas.openxmlformats.org/drawingml/2006/main" r:embed="R2940e33741eb4155"/>
+          <a:blip xmlns:r="http://schemas.openxmlformats.org/officeDocument/2006/relationships" xmlns:a="http://schemas.openxmlformats.org/drawingml/2006/main" r:embed="Re3e4200ee20a4df8"/>
           <a:stretch xmlns:a="http://schemas.openxmlformats.org/drawingml/2006/main">
             <a:fillRect l="0" t="0" r="0" b="0"/>
           </a:stretch>
@@ -15986,7 +16241,7 @@
           <p:cNvPr id="2" name="矩形 1">
             <a:extLst xmlns:a="http://schemas.openxmlformats.org/drawingml/2006/main">
               <a:ext uri="{FF2B5EF4-FFF2-40B4-BE49-F238E27FC236}">
-                <a16:creationId xmlns:a16="http://schemas.microsoft.com/office/drawing/2014/main" id="{281F14AA-0664-4310-9BE3-735E9EC8FE33}"/>
+                <a16:creationId xmlns:a16="http://schemas.microsoft.com/office/drawing/2014/main" id="{D9B2EBBF-68B7-48B7-8BE6-E621AF326B8C}"/>
               </a:ext>
             </a:extLst>
           </p:cNvPr>
@@ -16042,7 +16297,7 @@
           <p:cNvPr id="3" name="矩形 2">
             <a:extLst xmlns:a="http://schemas.openxmlformats.org/drawingml/2006/main">
               <a:ext uri="{FF2B5EF4-FFF2-40B4-BE49-F238E27FC236}">
-                <a16:creationId xmlns:a16="http://schemas.microsoft.com/office/drawing/2014/main" id="{561AFED2-BD2C-412E-9178-9F0EA77A6517}"/>
+                <a16:creationId xmlns:a16="http://schemas.microsoft.com/office/drawing/2014/main" id="{E8A9E0CD-D767-4B74-86A7-A8A7D9337557}"/>
               </a:ext>
             </a:extLst>
           </p:cNvPr>
@@ -16102,7 +16357,7 @@
           <p:cNvPr id="4" name="直接连接符 3">
             <a:extLst xmlns:a="http://schemas.openxmlformats.org/drawingml/2006/main">
               <a:ext uri="{FF2B5EF4-FFF2-40B4-BE49-F238E27FC236}">
-                <a16:creationId xmlns:a16="http://schemas.microsoft.com/office/drawing/2014/main" id="{E667425E-0DF7-4608-B119-42BE64DBCE5D}"/>
+                <a16:creationId xmlns:a16="http://schemas.microsoft.com/office/drawing/2014/main" id="{4AFF3E7F-8FB0-4628-9EBC-E809C97272C7}"/>
               </a:ext>
             </a:extLst>
           </p:cNvPr>
@@ -16145,7 +16400,7 @@
           <p:cNvPr id="5" name="标题 1">
             <a:extLst xmlns:a="http://schemas.openxmlformats.org/drawingml/2006/main">
               <a:ext uri="{FF2B5EF4-FFF2-40B4-BE49-F238E27FC236}">
-                <a16:creationId xmlns:a16="http://schemas.microsoft.com/office/drawing/2014/main" id="{FAA59BB3-0E2D-4DFE-AD1D-C850077D83CA}"/>
+                <a16:creationId xmlns:a16="http://schemas.microsoft.com/office/drawing/2014/main" id="{AD745C27-B6F3-45FE-AFC2-141883CC9FD4}"/>
               </a:ext>
             </a:extLst>
           </p:cNvPr>
@@ -16209,7 +16464,7 @@
           <p:cNvPr id="8" name="直接连接符 7">
             <a:extLst xmlns:a="http://schemas.openxmlformats.org/drawingml/2006/main">
               <a:ext uri="{FF2B5EF4-FFF2-40B4-BE49-F238E27FC236}">
-                <a16:creationId xmlns:a16="http://schemas.microsoft.com/office/drawing/2014/main" id="{3B88E8C6-B8F2-4E15-A56F-79338DC16CF0}"/>
+                <a16:creationId xmlns:a16="http://schemas.microsoft.com/office/drawing/2014/main" id="{34DAABE9-81BD-47AC-BE3F-7366399DBEAC}"/>
               </a:ext>
             </a:extLst>
           </p:cNvPr>
@@ -16256,7 +16511,7 @@
           <p:nvPr/>
         </p:nvPicPr>
         <p:blipFill>
-          <a:blip xmlns:r="http://schemas.openxmlformats.org/officeDocument/2006/relationships" xmlns:a="http://schemas.openxmlformats.org/drawingml/2006/main" r:embed="R7e6db7aa34194680"/>
+          <a:blip xmlns:r="http://schemas.openxmlformats.org/officeDocument/2006/relationships" xmlns:a="http://schemas.openxmlformats.org/drawingml/2006/main" r:embed="R94b584f4a3194b12"/>
           <a:stretch xmlns:a="http://schemas.openxmlformats.org/drawingml/2006/main">
             <a:fillRect l="0" t="0" r="0" b="0"/>
           </a:stretch>
@@ -16276,7 +16531,7 @@
           <p:cNvPr id="12" name="副标题 2">
             <a:extLst xmlns:a="http://schemas.openxmlformats.org/drawingml/2006/main">
               <a:ext uri="{FF2B5EF4-FFF2-40B4-BE49-F238E27FC236}">
-                <a16:creationId xmlns:a16="http://schemas.microsoft.com/office/drawing/2014/main" id="{2800F83A-61B1-47DD-808F-264D672FA511}"/>
+                <a16:creationId xmlns:a16="http://schemas.microsoft.com/office/drawing/2014/main" id="{1694A54C-F118-4EB2-8033-600E96D4D4A5}"/>
               </a:ext>
             </a:extLst>
           </p:cNvPr>
@@ -16486,7 +16741,7 @@
           <p:nvPr/>
         </p:nvPicPr>
         <p:blipFill>
-          <a:blip xmlns:r="http://schemas.openxmlformats.org/officeDocument/2006/relationships" xmlns:a="http://schemas.openxmlformats.org/drawingml/2006/main" r:embed="R88aef989da0e4305"/>
+          <a:blip xmlns:r="http://schemas.openxmlformats.org/officeDocument/2006/relationships" xmlns:a="http://schemas.openxmlformats.org/drawingml/2006/main" r:embed="R92845b7633ae49b6"/>
           <a:stretch xmlns:a="http://schemas.openxmlformats.org/drawingml/2006/main">
             <a:fillRect l="0" t="0" r="0" b="0"/>
           </a:stretch>
@@ -16720,7 +16975,7 @@
           <p:cNvPr id="20" name="">
             <a:extLst xmlns:a="http://schemas.openxmlformats.org/drawingml/2006/main">
               <a:ext uri="{FF2B5EF4-FFF2-40B4-BE49-F238E27FC236}">
-                <a16:creationId xmlns:a16="http://schemas.microsoft.com/office/drawing/2014/main" id="{E6C30B27-321E-40A9-99E1-0E887CAD09FA}"/>
+                <a16:creationId xmlns:a16="http://schemas.microsoft.com/office/drawing/2014/main" id="{59673030-A47D-44A4-9DCE-205F116E23E3}"/>
               </a:ext>
             </a:extLst>
           </p:cNvPr>
@@ -16753,7 +17008,7 @@
           <p:cNvPr id="21" name="">
             <a:extLst xmlns:a="http://schemas.openxmlformats.org/drawingml/2006/main">
               <a:ext uri="{FF2B5EF4-FFF2-40B4-BE49-F238E27FC236}">
-                <a16:creationId xmlns:a16="http://schemas.microsoft.com/office/drawing/2014/main" id="{27F452A7-DFA1-4791-8268-6A0A185FB947}"/>
+                <a16:creationId xmlns:a16="http://schemas.microsoft.com/office/drawing/2014/main" id="{B6B48270-9D0E-4FD1-93C6-9946C356350D}"/>
               </a:ext>
             </a:extLst>
           </p:cNvPr>
@@ -16809,7 +17064,7 @@
           <p:cNvPr id="22" name="">
             <a:extLst xmlns:a="http://schemas.openxmlformats.org/drawingml/2006/main">
               <a:ext uri="{FF2B5EF4-FFF2-40B4-BE49-F238E27FC236}">
-                <a16:creationId xmlns:a16="http://schemas.microsoft.com/office/drawing/2014/main" id="{03A7CCA7-E189-4A04-83BE-6BC42D670570}"/>
+                <a16:creationId xmlns:a16="http://schemas.microsoft.com/office/drawing/2014/main" id="{59D59FF1-9012-4986-AAD5-06069C924DA0}"/>
               </a:ext>
             </a:extLst>
           </p:cNvPr>
@@ -16846,7 +17101,7 @@
           <p:nvPr/>
         </p:nvPicPr>
         <p:blipFill>
-          <a:blip xmlns:r="http://schemas.openxmlformats.org/officeDocument/2006/relationships" xmlns:a="http://schemas.openxmlformats.org/drawingml/2006/main" r:embed="R82f137125da14a00"/>
+          <a:blip xmlns:r="http://schemas.openxmlformats.org/officeDocument/2006/relationships" xmlns:a="http://schemas.openxmlformats.org/drawingml/2006/main" r:embed="R2003e9363d874892"/>
           <a:stretch xmlns:a="http://schemas.openxmlformats.org/drawingml/2006/main"/>
         </p:blipFill>
         <p:spPr>
@@ -16862,7 +17117,7 @@
     </p:spTree>
     <p:extLst>
       <p:ext uri="{BB962C8B-B14F-4D97-AF65-F5344CB8AC3E}">
-        <p14:creationId xmlns:p14="http://schemas.microsoft.com/office/powerpoint/2010/main" val="1973566765"/>
+        <p14:creationId xmlns:p14="http://schemas.microsoft.com/office/powerpoint/2010/main" val="1073358223"/>
       </p:ext>
     </p:extLst>
   </p:cSld>
